--- a/materials/week6/w6-slides.pptx
+++ b/materials/week6/w6-slides.pptx
@@ -579,7 +579,7 @@
           <a:lstStyle/>
           <a:p>
             <a:r>
-              <a:t>ทักทายด้วยชื่อคนที่เห็นในห้องอย่างน้อย 3 คน แล้วพูดว่า "วันนี้เป็นวันแรกของ Module 2 ครับ Module 1 กลุ่มของทุกคนได้เว็บ prototype ที่กดดูได้มาแล้ว วันนี้เราจะทำให้มันเริ่มจำข้อมูลได้จริง ขอให้เปิดกล้อง 1 นาทีตอนเริ่ม ให้ผมเห็นว่ากลุ่มไหนมาครบ"</a:t>
+              <a:t>ทักทายด้วยชื่อคนที่เห็นในห้องอย่างน้อย 3 คน แล้วพูดว่า "วันนี้เป็นวันแรกของ Module 2 ครับ Module 1 ทุกคนได้เว็บ prototype ที่กดดูได้มาแล้ว วันนี้เราจะทำให้มันเริ่มจำข้อมูลได้จริง ขอให้เปิดกล้อง 1 นาทีตอนเริ่ม ให้ผมเห็นว่าใครมาครบ"</a:t>
             </a:r>
           </a:p>
         </p:txBody>
@@ -649,7 +649,7 @@
           <a:lstStyle/>
           <a:p>
             <a:r>
-              <a:t>ให้ผู้เรียนเปิดลิงก์ตามใน 2 นาที แล้วถามว่า "กรอกแล้วรีเฟรช เกิดอะไรขึ้นครับ" รอคำตอบในแชท · ย้ำว่าต้นแบบของกลุ่มเองจาก Module 1 ก็เป็นแบบเดียวกัน · repo สองตัวนี้ให้ดูเทียบ ห้ามคัดลอกมาส่งเป็นงานกลุ่ม</a:t>
+              <a:t>ให้ผู้เรียนเปิดลิงก์ตามใน 2 นาที แล้วถามว่า "กรอกแล้วรีเฟรช เกิดอะไรขึ้นครับ" รอคำตอบในแชท · ย้ำว่าต้นแบบของตัวเองจาก Module 1 ก็เป็นแบบเดียวกัน · repo สองตัวนี้ให้ดูเทียบ ห้ามคัดลอกมาส่งเป็นงานของตัวเอง</a:t>
             </a:r>
           </a:p>
         </p:txBody>
@@ -789,7 +789,7 @@
           <a:lstStyle/>
           <a:p>
             <a:r>
-              <a:t>ถามห้องว่า "กลุ่มไหน prototype ยังรันไม่ได้ หรือหาไฟล์ DB Schema ไม่เจอ พิมพ์ชื่อกลุ่มในแชทครับ" รอ 20 วินาที แล้วบอกว่า TA จะตามไปช่วยก่อนบ่าย · ย้ำว่าแบบฟอร์มความพร้อมปิดไปแล้วเมื่อวันพฤหัส กลุ่มที่ติดธงแดงมีคิว Consult อยู่แล้ว</a:t>
+              <a:t>ถามห้องว่า "ใคร prototype ยังรันไม่ได้ หรือหาไฟล์ DB Schema ไม่เจอ พิมพ์ชื่อตัวเองในแชทครับ" รอ 20 วินาที แล้วบอกว่า TA จะตามไปช่วยก่อนบ่าย · ย้ำว่าแบบฟอร์มความพร้อมปิดไปแล้วเมื่อวันพฤหัส คนที่ติดธงแดงมีคิว Consult อยู่แล้ว</a:t>
             </a:r>
           </a:p>
         </p:txBody>
@@ -859,7 +859,7 @@
           <a:lstStyle/>
           <a:p>
             <a:r>
-              <a:t>เปรียบว่า "Node เหมือนเครื่องเล่นแผ่น ถ้าไม่มีเครื่องเล่น แผ่นก็เปิดไม่ได้ · npm เหมือนร้านขายน้ำพริกแกงสำเร็จ ไม่ต้องตำเอง" แล้วบอกว่ากลุ่มไหนพิมพ์ node -v แล้วไม่ขึ้นเลขเวอร์ชัน ให้พิมพ์ 🔴 ในแชทตอนบ่ายทันที</a:t>
+              <a:t>เปรียบว่า "Node เหมือนเครื่องเล่นแผ่น ถ้าไม่มีเครื่องเล่น แผ่นก็เปิดไม่ได้ · npm เหมือนร้านขายน้ำพริกแกงสำเร็จ ไม่ต้องตำเอง" แล้วบอกว่าใครพิมพ์ node -v แล้วไม่ขึ้นเลขเวอร์ชัน ให้พิมพ์ 🔴 ในแชทตอนบ่ายทันที</a:t>
             </a:r>
           </a:p>
         </p:txBody>
@@ -929,7 +929,7 @@
           <a:lstStyle/>
           <a:p>
             <a:r>
-              <a:t>อ่านออกเสียงทีละบรรทัดพร้อมบอกผลที่จะเห็น แล้วพูดว่า "มีสามคำสั่งนี้จริง ๆ ครับ ที่เหลือ Claude Code พิมพ์ให้เอง" บอกให้ทุกกลุ่มแคปสไลด์นี้เก็บไว้</a:t>
+              <a:t>อ่านออกเสียงทีละบรรทัดพร้อมบอกผลที่จะเห็น แล้วพูดว่า "มีสามคำสั่งนี้จริง ๆ ครับ ที่เหลือ Claude Code พิมพ์ให้เอง" บอกให้ทุกคนแคปสไลด์นี้เก็บไว้</a:t>
             </a:r>
           </a:p>
         </p:txBody>
@@ -1279,7 +1279,7 @@
           <a:lstStyle/>
           <a:p>
             <a:r>
-              <a:t>สลับไปหน้าจอสาธิตตามสคริปต์ w6-demo-fixit.md บล็อก A · ก่อนสลับพูดว่า "ทุกคนดูอย่างเดียวนะครับ ยังไม่ต้องทำตาม ตอนบ่ายมีใบงานที่มีทุกขั้นตอนให้กลุ่มทำเอง"</a:t>
+              <a:t>สลับไปหน้าจอสาธิตตามสคริปต์ w6-demo-fixit.md บล็อก A · ก่อนสลับพูดว่า "ทุกคนดูอย่างเดียวนะครับ ยังไม่ต้องทำตาม ตอนบ่ายมีใบงานที่มีทุกขั้นตอนให้ทำเอง"</a:t>
             </a:r>
           </a:p>
         </p:txBody>
@@ -1349,7 +1349,7 @@
           <a:lstStyle/>
           <a:p>
             <a:r>
-              <a:t>ถามห้องก่อนว่า "ใครเคยกรอกฟอร์มใน prototype ของตัวเองแล้วรีเฟรช ข้อมูลหายไหมครับ" รอคำตอบในแชท แล้วพูดว่า "หายทุกกลุ่มครับ เพราะมันยังไม่มีที่เก็บ วันนี้เราจะแก้เรื่องนี้"</a:t>
+              <a:t>ถามห้องก่อนว่า "ใครเคยกรอกฟอร์มใน prototype ของตัวเองแล้วรีเฟรช ข้อมูลหายไหมครับ" รอคำตอบในแชท แล้วพูดว่า "หายทุกคนครับ เพราะมันยังไม่มีที่เก็บ วันนี้เราจะแก้เรื่องนี้"</a:t>
             </a:r>
           </a:p>
         </p:txBody>
@@ -1629,7 +1629,7 @@
           <a:lstStyle/>
           <a:p>
             <a:r>
-              <a:t>อ่านออกเสียงทั้ง 4 จังหวะช้า ๆ แล้วพูดว่า "นี่คือวงจรที่กลุ่มคุณจะหมุนอีกหลายร้อยรอบใน Module นี้ ท่องไว้ 4 จังหวะ"</a:t>
+              <a:t>อ่านออกเสียงทั้ง 4 จังหวะช้า ๆ แล้วพูดว่า "นี่คือวงจรที่คุณจะหมุนอีกหลายร้อยรอบใน Module นี้ ท่องไว้ 4 จังหวะ"</a:t>
             </a:r>
           </a:p>
         </p:txBody>
@@ -1769,7 +1769,7 @@
           <a:lstStyle/>
           <a:p>
             <a:r>
-              <a:t>อ่านสองข้อบนออกเสียงช้า ๆ แล้วพูดว่า "ผมไม่ได้ขอให้คุณเขียนคำสั่งเก่ง ผมขอให้คุณอ่านแล้วบอกว่าข้อไหนไม่ใช่ ซึ่งคุณทำเป็นอยู่แล้วในงานประจำ" · ข้อสุดท้ายเสริมว่า "อ่านแผนไปเรื่อย ๆ คุณจะตอบได้เองตอน Sprint 1 Review ว่าระบบกลุ่มคุณทำงานยังไง ซึ่งวัดเป็นรายบุคคล"</a:t>
+              <a:t>อ่านสองข้อบนออกเสียงช้า ๆ แล้วพูดว่า "ผมไม่ได้ขอให้คุณเขียนคำสั่งเก่ง ผมขอให้คุณอ่านแล้วบอกว่าข้อไหนไม่ใช่ ซึ่งคุณทำเป็นอยู่แล้วในงานประจำ" · ข้อสุดท้ายเสริมว่า "อ่านแผนไปเรื่อย ๆ คุณจะตอบได้เองตอน Sprint 1 Review ว่าระบบของคุณทำงานยังไง ซึ่งวัดเป็นรายบุคคล"</a:t>
             </a:r>
           </a:p>
         </p:txBody>
@@ -2119,7 +2119,7 @@
           <a:lstStyle/>
           <a:p>
             <a:r>
-              <a:t>หยุด 3 วินาทีให้อ่าน แล้วพูดว่า "ประโยคนี้คือความคิดเดียวของวันนี้ครับ เย็นนี้ระบบของกลุ่มคุณจะจำข้อมูลได้ ปิดเบราว์เซอร์แล้วเปิดใหม่ ข้อมูลยังอยู่"</a:t>
+              <a:t>หยุด 3 วินาทีให้อ่าน แล้วพูดว่า "ประโยคนี้คือความคิดเดียวของวันนี้ครับ เย็นนี้ระบบของคุณจะจำข้อมูลได้ ปิดเบราว์เซอร์แล้วเปิดใหม่ ข้อมูลยังอยู่"</a:t>
             </a:r>
           </a:p>
         </p:txBody>
@@ -2189,7 +2189,7 @@
           <a:lstStyle/>
           <a:p>
             <a:r>
-              <a:t>อ่านทีละแถว แล้วพูดว่า "คนที่พิมพ์กับคนที่ตรวจแผนเป็นคนละคน ตั้งใจให้เป็นแบบนั้น เพราะคนที่พิมพ์จะรีบกดโอเค" · ย้ำว่าบทบาทหมุนทุก Checkpoint ใบงานบ่ายนี้มีช่องให้จดชื่อ</a:t>
+              <a:t>อ่านทีละข้อ แล้วพูดว่า "กติกามีข้อเดียวคือมีคนนำจอ ที่เหลือทุกคนทำเองบนเครื่องตัวเอง ไม่มีการแบ่งหน้าที่" · ย้ำว่าคนนำจอต้องเล่าไปทำไป ไม่ใช่เงียบแล้วพิมพ์</a:t>
             </a:r>
           </a:p>
         </p:txBody>
@@ -2259,7 +2259,7 @@
           <a:lstStyle/>
           <a:p>
             <a:r>
-              <a:t>สลับไปสาธิตตามสคริปต์บล็อก B · ผู้เรียนต้องเห็นตอนที่แผนมาผิดแล้วผู้สอนแก้ด้วยประโยคเดียว ห้ามตัด · ก่อนเริ่มพูดว่า "ดูให้ดีนะครับ ตอนบ่ายกลุ่มคุณจะทำซ้ำแบบนี้หลายรอบ"</a:t>
+              <a:t>สลับไปสาธิตตามสคริปต์บล็อก B · ผู้เรียนต้องเห็นตอนที่แผนมาผิดแล้วผู้สอนแก้ด้วยประโยคเดียว ห้ามตัด · ก่อนเริ่มพูดว่า "ดูให้ดีนะครับ ตอนบ่ายคุณจะทำซ้ำแบบนี้หลายรอบ"</a:t>
             </a:r>
           </a:p>
         </p:txBody>
@@ -2469,7 +2469,7 @@
           <a:lstStyle/>
           <a:p>
             <a:r>
-              <a:t>พูดว่า "ช่วงนี้ 35 นาที ขอให้พักมือจากคีย์บอร์ด ฟังและคิดตามอย่างเดียว เพราะช่วงนี้คือวิธีคิดที่กลุ่มคุณต้องใช้วาดแบบบนกระดาษตอนบ่าย"</a:t>
+              <a:t>พูดว่า "ช่วงนี้ 35 นาที ขอให้พักมือจากคีย์บอร์ด ฟังและคิดตามอย่างเดียว เพราะช่วงนี้คือวิธีคิดที่คุณต้องใช้วาดแบบบนกระดาษตอนบ่าย"</a:t>
             </a:r>
           </a:p>
         </p:txBody>
@@ -2889,7 +2889,7 @@
           <a:lstStyle/>
           <a:p>
             <a:r>
-              <a:t>พูดว่า "สี่ข้อนี้คือของจับต้องได้ ไม่ใช่ความรู้สึกว่าเข้าใจ ตอนบ่ายกลุ่มคุณจะทำครบทั้งสี่ข้อกับโครงงานของกลุ่มเอง" ย้ำว่าข้อสุดท้ายคือครั้งแรกที่หน้าจอกับฐานข้อมูลได้เจอกัน</a:t>
+              <a:t>พูดว่า "สี่ข้อนี้คือของจับต้องได้ ไม่ใช่ความรู้สึกว่าเข้าใจ ตอนบ่ายคุณจะทำครบทั้งสี่ข้อกับ LeaveEasy แล้วการบ้านทำซ้ำกับหัวข้อของตัวเอง" ย้ำว่าข้อสุดท้ายคือครั้งแรกที่หน้าจอกับฐานข้อมูลได้เจอกัน</a:t>
             </a:r>
           </a:p>
         </p:txBody>
@@ -3099,7 +3099,7 @@
           <a:lstStyle/>
           <a:p>
             <a:r>
-              <a:t>พูดว่า "ถ้าไฟล์หนึ่งสะกดตัวเล็ก อีกไฟล์สะกดตัวใหญ่ ระบบจะพังแบบเงียบ ๆ ไม่มี error ให้เห็น หน้าจอจะว่างเฉย ๆ" · บอกว่า "นี่คือเหตุผลที่ตอนบ่ายกลุ่มคุณต้องเขียนชื่อช่องข้อมูลทุกตัวลงกระดาษก่อน แล้วใช้ชุดเดียวกันทั้งระบบ และเป็นเหตุผลเดียวที่วันนี้จะมี prompt ยาวอยู่หนึ่งอัน"</a:t>
+              <a:t>พูดว่า "ถ้าไฟล์หนึ่งสะกดตัวเล็ก อีกไฟล์สะกดตัวใหญ่ ระบบจะพังแบบเงียบ ๆ ไม่มี error ให้เห็น หน้าจอจะว่างเฉย ๆ" · บอกว่า "นี่คือเหตุผลที่ตอนบ่ายคุณต้องเขียนชื่อช่องข้อมูลทุกตัวลงกระดาษก่อน แล้วใช้ชุดเดียวกันทั้งระบบ และเป็นเหตุผลเดียวที่วันนี้จะมี prompt ยาวอยู่หนึ่งอัน"</a:t>
             </a:r>
           </a:p>
         </p:txBody>
@@ -3449,7 +3449,7 @@
           <a:lstStyle/>
           <a:p>
             <a:r>
-              <a:t>บอกว่า "สี่บรรทัดนี้คือทั้งหมดของการแปลง ถ่ายรูปสไลด์นี้เก็บไว้ ตอนบ่ายกลุ่มคุณใช้มันวาดแบบของโครงงานตัวเองบนกระดาษ" · อธิบายข้อสาม "ช่องที่ชี้ไปตารางอื่น ศัพท์ทางการคือ Foreign Key เช่นช่องผู้แจ้งที่ชี้ไปตาราง users"</a:t>
+              <a:t>บอกว่า "สี่บรรทัดนี้คือทั้งหมดของการแปลง ถ่ายรูปสไลด์นี้เก็บไว้ ตอนบ่ายคุณใช้มันวาดแบบของโครงงานตัวเองบนกระดาษ" · อธิบายข้อสาม "ช่องที่ชี้ไปตารางอื่น ศัพท์ทางการคือ Foreign Key เช่นช่องผู้แจ้งที่ชี้ไปตาราง users"</a:t>
             </a:r>
           </a:p>
         </p:txBody>
@@ -3519,7 +3519,7 @@
           <a:lstStyle/>
           <a:p>
             <a:r>
-              <a:t>สลับไปสาธิตตามสคริปต์บล็อก C · ช่วงนี้ผู้เรียนต้องตอบเองอย่างน้อย 3 ครั้ง อย่าเฉลยเอง · นี่คือแบบฝึกเดียวกับที่กลุ่มทำบนกระดาษตอนบ่ายส่วน B</a:t>
+              <a:t>สลับไปสาธิตตามสคริปต์บล็อก C · ช่วงนี้ผู้เรียนต้องตอบเองอย่างน้อย 3 ครั้ง อย่าเฉลยเอง · นี่คือแบบฝึกเดียวกับที่ทำบนกระดาษตอนบ่ายส่วน B</a:t>
             </a:r>
           </a:p>
         </p:txBody>
@@ -3869,7 +3869,7 @@
           <a:lstStyle/>
           <a:p>
             <a:r>
-              <a:t>พูดว่า "ข้อสามคือของขวัญของ Firebase ครับ หลักสูตรทั่วไปต้องเขียนตัวกลางเองอีกชั้น เราข้ามไปได้ทั้งชั้น" · ถามว่า "กลุ่มไหนเข้า Firebase console ไม่ได้ หรือลืมรหัส พิมพ์ 1 ในแชท" ให้ TA ตามช่วยก่อนบ่าย</a:t>
+              <a:t>พูดว่า "ข้อสามคือของขวัญของ Firebase ครับ หลักสูตรทั่วไปต้องเขียนตัวกลางเองอีกชั้น เราข้ามไปได้ทั้งชั้น" · ถามว่า "ใครเข้า Firebase console ไม่ได้ หรือลืมรหัส พิมพ์ 1 ในแชท" ให้ TA ตามช่วยก่อนบ่าย</a:t>
             </a:r>
           </a:p>
         </p:txBody>
@@ -4009,7 +4009,7 @@
           <a:lstStyle/>
           <a:p>
             <a:r>
-              <a:t>แปลศัพท์ CRUD = เพิ่ม ดู แก้ ลบ ข้อมูล · ย้ำหนัก ๆ ว่า "วันนี้ห้ามทำเกินตัว R นะครับ กลุ่มที่รีบไปทำปุ่มบันทึกวันนี้ จะไปพังตอนสัปดาห์ที่ 7 ซึ่งมีที่ทางของมันอยู่แล้ว" · ส่วนข้อมูลที่ใส่วันนี้ใช้ตัวช่วยที่เรียกว่า seed ซึ่งอยู่สไลด์ถัดไป</a:t>
+              <a:t>แปลศัพท์ CRUD = เพิ่ม ดู แก้ ลบ ข้อมูล · ย้ำหนัก ๆ ว่า "วันนี้ห้ามทำเกินตัว R นะครับ คนที่รีบไปทำปุ่มบันทึกวันนี้ จะไปพังตอนสัปดาห์ที่ 7 ซึ่งมีที่ทางของมันอยู่แล้ว" · ส่วนข้อมูลที่ใส่วันนี้ใช้ตัวช่วยที่เรียกว่า seed ซึ่งอยู่สไลด์ถัดไป</a:t>
             </a:r>
           </a:p>
         </p:txBody>
@@ -4149,7 +4149,7 @@
           <a:lstStyle/>
           <a:p>
             <a:r>
-              <a:t>พูดว่า "โหมดทดสอบเหมาะกับวันนี้เพราะเรายังไม่มีล็อกอิน แต่มันคือตู้ที่ไม่ล็อกกุญแจ ห้ามใส่ข้อมูลจริงของใครเด็ดขาด" · จำนวนวันหมดอายุขึ้นกับ Firebase ตรวจสอบล่าสุดก่อนสอน ตอนสาธิตให้ซูมที่วันหมดอายุแล้วให้ทุกกลุ่มจดของตัวเองตอนบ่าย</a:t>
+              <a:t>พูดว่า "โหมดทดสอบเหมาะกับวันนี้เพราะเรายังไม่มีล็อกอิน แต่มันคือตู้ที่ไม่ล็อกกุญแจ ห้ามใส่ข้อมูลจริงของใครเด็ดขาด" · จำนวนวันหมดอายุขึ้นกับ Firebase ตรวจสอบล่าสุดก่อนสอน ตอนสาธิตให้ซูมที่วันหมดอายุแล้วให้ทุกคนจดของตัวเองตอนบ่าย</a:t>
             </a:r>
           </a:p>
         </p:txBody>
@@ -4499,7 +4499,7 @@
           <a:lstStyle/>
           <a:p>
             <a:r>
-              <a:t>หลังปิดเบราว์เซอร์แล้วเปิดใหม่ให้เห็นข้อมูลเดิม ให้ห้องพิมพ์ 🎉 ในแชท · พูดว่า "นาทีนี้คือนาทีที่ระบบเปลี่ยนจากภาพนิ่งเป็นระบบที่มีความจำ บ่ายนี้กลุ่มคุณจะได้ความรู้สึกนี้กับโครงงานของตัวเอง"</a:t>
+              <a:t>หลังปิดเบราว์เซอร์แล้วเปิดใหม่ให้เห็นข้อมูลเดิม ให้ห้องพิมพ์ 🎉 ในแชท · พูดว่า "นาทีนี้คือนาทีที่ระบบเปลี่ยนจากภาพนิ่งเป็นระบบที่มีความจำ บ่ายนี้คุณจะได้ความรู้สึกนี้กับโครงงานของตัวเอง"</a:t>
             </a:r>
           </a:p>
         </p:txBody>
@@ -4779,7 +4779,7 @@
           <a:lstStyle/>
           <a:p>
             <a:r>
-              <a:t>พูดว่า "จำสามข้อนี้ให้ได้ครับ บ่ายนี้กลุ่มคุณจะเจอเองแน่นอน และผมอยากให้คนที่ไม่ได้พิมพ์เป็นคนจับอาการนี้ให้กลุ่ม เพราะคนที่พิมพ์จะไม่ทันสังเกต"</a:t>
+              <a:t>พูดว่า "จำสามข้อนี้ให้ได้ครับ บ่ายนี้คุณจะเจอเองแน่นอน และผมอยากให้คนที่ไม่ได้พิมพ์เป็นคนจับอาการนี้ให้ห้อง เพราะคนที่พิมพ์จะไม่ทันสังเกต"</a:t>
             </a:r>
           </a:p>
         </p:txBody>
@@ -5129,7 +5129,7 @@
           <a:lstStyle/>
           <a:p>
             <a:r>
-              <a:t>อ่านทีละแถว แล้วพูดว่า "สามทางนี้ไม่มีทางไหนผิด ต่างกันที่สถานการณ์" · ย้ำแถวกลาง "/compact คือทางตรงกลางที่หลายคนไม่รู้ว่ามี" · ปิดท้ายว่า "บ่ายนี้ขอให้ทุกกลุ่มได้ใช้จริงอย่างน้อยหนึ่งครั้ง ใบงานมีจุดให้ใช้"</a:t>
+              <a:t>อ่านทีละแถว แล้วพูดว่า "สามทางนี้ไม่มีทางไหนผิด ต่างกันที่สถานการณ์" · ย้ำแถวกลาง "/compact คือทางตรงกลางที่หลายคนไม่รู้ว่ามี" · ปิดท้ายว่า "บ่ายนี้ขอให้ทุกคนได้ใช้จริงอย่างน้อยหนึ่งครั้ง ใบงานมีจุดให้ใช้"</a:t>
             </a:r>
           </a:p>
         </p:txBody>
@@ -5199,7 +5199,7 @@
           <a:lstStyle/>
           <a:p>
             <a:r>
-              <a:t>ชี้บรรทัดแรกแล้วพูดว่า "วันนี้เราไม่สร้างหน้าจอจากศูนย์นะครับ กลุ่มคุณมี prototype อยู่แล้ว เรานำมันเข้า repo แล้วต่อฐานข้อมูลเลย" · ชี้คำว่า "อ่านจริง" แล้วบอกว่า "วันนี้เราทำเฉพาะการอ่านข้อมูลจากฐาน ปุ่มเพิ่ม แก้ ลบ เป็นเรื่องของสัปดาห์หน้า อย่าเพิ่งไปทำ"</a:t>
+              <a:t>ชี้บรรทัดแรกแล้วพูดว่า "วันนี้เราไม่สร้างหน้าจอจากศูนย์นะครับ คุณมี prototype อยู่แล้ว เรานำมันเข้า repo แล้วต่อฐานข้อมูลเลย" · ชี้คำว่า "อ่านจริง" แล้วบอกว่า "วันนี้เราทำเฉพาะการอ่านข้อมูลจากฐาน ปุ่มเพิ่ม แก้ ลบ เป็นเรื่องของสัปดาห์หน้า อย่าเพิ่งไปทำ"</a:t>
             </a:r>
           </a:p>
         </p:txBody>
@@ -5269,7 +5269,7 @@
           <a:lstStyle/>
           <a:p>
             <a:r>
-              <a:t>พูดว่า "โควตาไม่ได้ไม่จำกัดนะครับ กลุ่มที่คุยยาวโดยไม่จัดการความจำ จะหมดโควตากลางคาบ ผมเห็นมาทุกรุ่น" · ห้ามบอกว่าทุกคนจะเห็นหน้าตาเดียวกัน เพราะบัญชีต่างประเภทแสดงต่างกัน ให้เปิดดูเองแล้วจด</a:t>
+              <a:t>พูดว่า "โควตาไม่ได้ไม่จำกัดนะครับ คนที่คุยยาวโดยไม่จัดการความจำ จะหมดโควตากลางคาบ ผมเห็นมาทุกรุ่น" · ห้ามบอกว่าทุกคนจะเห็นหน้าตาเดียวกัน เพราะบัญชีต่างประเภทแสดงต่างกัน ให้เปิดดูเองแล้วจด</a:t>
             </a:r>
           </a:p>
         </p:txBody>
@@ -5549,7 +5549,7 @@
           <a:lstStyle/>
           <a:p>
             <a:r>
-              <a:t>ชี้ทีละแถวแล้วปิดด้วยคำถามประจำหลักสูตร "FixIt มี tickets · LeaveEasy มี leaveRequests · แล้วโครงงานของกลุ่มคุณ โฟลเดอร์หลักคืออะไร" ให้ทุกกลุ่มพิมพ์คำตอบในแชทก่อนพักเที่ยง · ย้ำว่าช่องขวาสุดกลุ่มต้องเติมเองบนกระดาษตอนบ่าย ห้ามลอกช่องกลาง</a:t>
+              <a:t>ชี้ทีละแถวแล้วปิดด้วยคำถามประจำหลักสูตร "FixIt มี tickets · LeaveEasy มี leaveRequests · แล้วหัวข้อของคุณ โฟลเดอร์หลักคืออะไร" ให้ทุกคนพิมพ์คำตอบในแชทก่อนพักเที่ยง · ย้ำว่าช่องขวาสุดต้องเติมเองบนกระดาษตอนบ่าย ห้ามลอกช่องกลาง</a:t>
             </a:r>
           </a:p>
         </p:txBody>
@@ -5619,7 +5619,7 @@
           <a:lstStyle/>
           <a:p>
             <a:r>
-              <a:t>ชี้แถว B แล้วพูดว่า "ส่วน B ปิดคอมนะครับ ทั้งกลุ่มช่วยกันวาดบนกระดาษ เพราะแบบที่คิดไม่เสร็จ สร้างยังไงก็พัง" · ย้ำว่าบ่ายนี้ทำโครงงานของกลุ่มเอง มีเฉลย LeaveEasy กำกับทุกขั้นในใบงาน</a:t>
+              <a:t>ชี้แถว B แล้วพูดว่า "ส่วน B ปิดคอมนะครับ เขียนลงกระดาษ เพราะแบบที่คิดไม่เสร็จ สร้างยังไงก็พัง" · ย้ำว่าบ่ายนี้ทุกคนทำ LeaveEasy เหมือนกันหมด แล้วการบ้านทำซ้ำกับหัวข้อของตัวเอง</a:t>
             </a:r>
           </a:p>
         </p:txBody>
@@ -5689,7 +5689,7 @@
           <a:lstStyle/>
           <a:p>
             <a:r>
-              <a:t>ย้ำข้อสองว่า "คนที่ไม่มี commit เลยตลอด Module ถือว่าไม่ผ่านรายบุคคล แม้ระบบกลุ่มจะทำงานได้" · อธิบายข้อสาม "ถ้าคนที่ไม่ได้พิมพ์อธิบายปัญหาไม่ได้ แปลว่ากลุ่มเดินเร็วเกินไป" · บอกว่าคิวถามกลางและธนาคารคำตอบสด ลิงก์อยู่ในแชทแล้ว</a:t>
+              <a:t>ย้ำข้อสองว่า "คนที่ไม่มี commit เลยตลอด Module ถือว่าไม่ผ่าน แม้ระบบจะทำงานได้" · อธิบายข้อสาม "screenshot ต้องมาจากเครื่องคุณ ไม่ใช่จอของคนนำ" · บอกว่าคิวถามกลางและธนาคารคำตอบสด ลิงก์อยู่ในแชทแล้ว</a:t>
             </a:r>
           </a:p>
         </p:txBody>
@@ -5759,7 +5759,7 @@
           <a:lstStyle/>
           <a:p>
             <a:r>
-              <a:t>ปิดด้วย "พักกินข้าวให้อิ่มครับ บ่ายนี้ระบบของกลุ่มคุณจะเริ่มมีความจำจริง ๆ กลุ่มไหนกลับมาเร็ว เปิดใบงานอ่านล่วงหน้าได้เลย ลิงก์อยู่ในแชทแล้ว อย่าลืมเตรียมกระดาษกับปากกาไว้คนละแผ่นสำหรับส่วน B"</a:t>
+              <a:t>ปิดด้วย "พักกินข้าวให้อิ่มครับ บ่ายนี้ระบบของคุณจะเริ่มมีความจำจริง ๆ ใครกลับมาเร็ว เปิดใบงานอ่านล่วงหน้าได้เลย ลิงก์อยู่ในแชทแล้ว อย่าลืมเตรียมกระดาษกับปากกาไว้คนละแผ่นสำหรับส่วน B"</a:t>
             </a:r>
           </a:p>
         </p:txBody>
@@ -5899,7 +5899,7 @@
           <a:lstStyle/>
           <a:p>
             <a:r>
-              <a:t>ชี้ทีละแถวแล้วย้ำหนัก ๆ ว่า "บ่ายนี้กลุ่มคุณทำโครงงานของกลุ่มเอง ไม่ใช่ FixIt และไม่ใช่ LeaveEasy · LeaveEasy อยู่ในใบงานเป็นเฉลยตัวอย่างข้างทุกขั้น ให้ดูว่าผลลัพธ์ควรหน้าตาแบบไหน แล้วแปลมาใช้กับโจทย์ของกลุ่ม"</a:t>
+              <a:t>ชี้ทีละแถวแล้วย้ำหนัก ๆ ว่า "บ่ายนี้ทุกคนทำ LeaveEasy พร้อมกันทีละขั้น เพราะเป็นระบบเดียวกัน ติดตรงไหนช่วยกันได้ทันที · แล้วการบ้านคือทำสิ่งเดียวกันนี้ซ้ำกับหัวข้อของตัวเอง"</a:t>
             </a:r>
           </a:p>
         </p:txBody>
@@ -9318,7 +9318,7 @@
                           <a:ea typeface="Leelawadee UI"/>
                           <a:cs typeface="Leelawadee UI"/>
                         </a:rPr>
-                        <a:t>ไม่มีใครสร้าง — เฉลยตัวอย่างในใบงาน</a:t>
+                        <a:t>ทุกคน — ในใบงานบ่ายนี้</a:t>
                       </a:r>
                     </a:p>
                   </a:txBody>
@@ -9345,7 +9345,7 @@
                           <a:ea typeface="Leelawadee UI"/>
                           <a:cs typeface="Leelawadee UI"/>
                         </a:rPr>
-                        <a:t>👥 โครงงานกลุ่มคุณ</a:t>
+                        <a:t>👤 หัวข้อของคุณ</a:t>
                       </a:r>
                     </a:p>
                   </a:txBody>
@@ -9395,7 +9395,7 @@
                           <a:ea typeface="Leelawadee UI"/>
                           <a:cs typeface="Leelawadee UI"/>
                         </a:rPr>
-                        <a:t>กลุ่มคุณ ตอนบ่าย</a:t>
+                        <a:t>คุณ — ในการบ้าน</a:t>
                       </a:r>
                     </a:p>
                   </a:txBody>
@@ -9570,7 +9570,7 @@
                 <a:ea typeface="Leelawadee UI"/>
                 <a:cs typeface="Leelawadee UI"/>
               </a:rPr>
-              <a:t>• 🔧 LeaveEasy ระบบขอลา (เฉลยตัวอย่างในใบงาน) · https://cnacha-mfu.github.io/raise2-module2/materials/shared/prototypes/leaveeasy/</a:t>
+              <a:t>• 🔧 LeaveEasy ระบบขอลา (ทุกคนทำในใบงานบ่ายนี้) · https://cnacha-mfu.github.io/raise2-module2/materials/shared/prototypes/leaveeasy/</a:t>
             </a:r>
           </a:p>
         </p:txBody>
@@ -9883,7 +9883,7 @@
         <p:spPr>
           <a:xfrm>
             <a:off x="822960" y="502920"/>
-            <a:ext cx="10545775" cy="1408176"/>
+            <a:ext cx="10545775" cy="804672"/>
           </a:xfrm>
           <a:prstGeom prst="rect">
             <a:avLst/>
@@ -9906,7 +9906,7 @@
                 <a:ea typeface="Leelawadee UI"/>
                 <a:cs typeface="Leelawadee UI"/>
               </a:rPr>
-              <a:t>ของที่กลุ่มถือมาจาก Module 1 — วันนี้ใช้ครบ</a:t>
+              <a:t>ของที่ถือมาจาก Module 1 — วันนี้ใช้ครบ</a:t>
             </a:r>
           </a:p>
         </p:txBody>
@@ -9919,7 +9919,7 @@
         </p:nvSpPr>
         <p:spPr>
           <a:xfrm>
-            <a:off x="822960" y="2075688"/>
+            <a:off x="822960" y="1472184"/>
             <a:ext cx="10545775" cy="1029208"/>
           </a:xfrm>
           <a:prstGeom prst="rect">
@@ -9956,7 +9956,7 @@
         </p:nvSpPr>
         <p:spPr>
           <a:xfrm>
-            <a:off x="822960" y="3159760"/>
+            <a:off x="822960" y="2556256"/>
             <a:ext cx="10545775" cy="560324"/>
           </a:xfrm>
           <a:prstGeom prst="rect">
@@ -9993,7 +9993,7 @@
         </p:nvSpPr>
         <p:spPr>
           <a:xfrm>
-            <a:off x="822960" y="3774948"/>
+            <a:off x="822960" y="3171444"/>
             <a:ext cx="10545775" cy="560324"/>
           </a:xfrm>
           <a:prstGeom prst="rect">
@@ -10030,7 +10030,7 @@
         </p:nvSpPr>
         <p:spPr>
           <a:xfrm>
-            <a:off x="822960" y="4390136"/>
+            <a:off x="822960" y="3786632"/>
             <a:ext cx="10545775" cy="560324"/>
           </a:xfrm>
           <a:prstGeom prst="rect">
@@ -10054,7 +10054,7 @@
                 <a:ea typeface="Leelawadee UI"/>
                 <a:cs typeface="Leelawadee UI"/>
               </a:rPr>
-              <a:t>• 👥 ทีมเดิมจาก Hackathon กลุ่มละ 3–4 คน</a:t>
+              <a:t>• 👥 หัวข้อเดิมจาก Hackathon คนละ 3–4 คน</a:t>
             </a:r>
           </a:p>
         </p:txBody>
@@ -11615,7 +11615,7 @@
                 <a:ea typeface="Leelawadee UI"/>
                 <a:cs typeface="Leelawadee UI"/>
               </a:rPr>
-              <a:t>• FixIt ก็มี prototype จาก Module 1 เหมือนกลุ่มคุณ</a:t>
+              <a:t>• FixIt ก็มี prototype จาก Module 1 เหมือนคุณ</a:t>
             </a:r>
           </a:p>
         </p:txBody>
@@ -14848,7 +14848,7 @@
                 <a:ea typeface="Leelawadee UI"/>
                 <a:cs typeface="Leelawadee UI"/>
               </a:rPr>
-              <a:t>ปัญหาของ prototype ที่กลุ่มคุณถืออยู่</a:t>
+              <a:t>ปัญหาของ prototype ที่คุณถืออยู่</a:t>
             </a:r>
           </a:p>
         </p:txBody>
@@ -14996,7 +14996,7 @@
                 <a:ea typeface="Leelawadee UI"/>
                 <a:cs typeface="Leelawadee UI"/>
               </a:rPr>
-              <a:t>• 🎯 วันนี้เราต่อตู้เก็บข้อมูลให้ระบบของกลุ่มคุณ</a:t>
+              <a:t>• 🎯 วันนี้เราต่อตู้เก็บข้อมูลให้ระบบของคุณ</a:t>
             </a:r>
           </a:p>
         </p:txBody>
@@ -15546,300 +15546,162 @@
                 <a:ea typeface="Leelawadee UI"/>
                 <a:cs typeface="Leelawadee UI"/>
               </a:rPr>
-              <a:t>👥 ในกลุ่ม ใครทำจังหวะไหน</a:t>
-            </a:r>
-          </a:p>
-        </p:txBody>
-      </p:sp>
-      <p:graphicFrame>
-        <p:nvGraphicFramePr>
-          <p:cNvPr id="3" name="Table 2"/>
-          <p:cNvGraphicFramePr>
-            <a:graphicFrameLocks noGrp="1"/>
-          </p:cNvGraphicFramePr>
-          <p:nvPr/>
-        </p:nvGraphicFramePr>
-        <p:xfrm>
-          <a:off x="822960" y="1472184"/>
-          <a:ext cx="10545775" cy="2514600"/>
-        </p:xfrm>
-        <a:graphic>
-          <a:graphicData uri="http://schemas.openxmlformats.org/drawingml/2006/table">
-            <a:tbl>
-              <a:tblPr firstRow="1" bandRow="1">
-                <a:tableStyleId>{5C22544A-7EE6-4342-B048-85BDC9FD1C3A}</a:tableStyleId>
-              </a:tblPr>
-              <a:tblGrid>
-                <a:gridCol w="5272887"/>
-                <a:gridCol w="5272888"/>
-              </a:tblGrid>
-              <a:tr h="502920">
-                <a:tc>
-                  <a:txBody>
-                    <a:bodyPr/>
-                    <a:lstStyle/>
-                    <a:p>
-                      <a:pPr algn="l"/>
-                      <a:r>
-                        <a:rPr sz="1800" b="1">
-                          <a:solidFill>
-                            <a:srgbClr val="FFFFFF"/>
-                          </a:solidFill>
-                          <a:latin typeface="Leelawadee UI"/>
-                          <a:ea typeface="Leelawadee UI"/>
-                          <a:cs typeface="Leelawadee UI"/>
-                        </a:rPr>
-                        <a:t>บทบาท</a:t>
-                      </a:r>
-                    </a:p>
-                  </a:txBody>
-                  <a:tcPr marL="91440" marR="91440" marT="27432" marB="27432" anchor="ctr">
-                    <a:solidFill>
-                      <a:srgbClr val="1F5FA8"/>
-                    </a:solidFill>
-                  </a:tcPr>
-                </a:tc>
-                <a:tc>
-                  <a:txBody>
-                    <a:bodyPr/>
-                    <a:lstStyle/>
-                    <a:p>
-                      <a:pPr algn="l"/>
-                      <a:r>
-                        <a:rPr sz="1800" b="1">
-                          <a:solidFill>
-                            <a:srgbClr val="FFFFFF"/>
-                          </a:solidFill>
-                          <a:latin typeface="Leelawadee UI"/>
-                          <a:ea typeface="Leelawadee UI"/>
-                          <a:cs typeface="Leelawadee UI"/>
-                        </a:rPr>
-                        <a:t>ทำอะไรในวงจร 4 จังหวะ</a:t>
-                      </a:r>
-                    </a:p>
-                  </a:txBody>
-                  <a:tcPr marL="91440" marR="91440" marT="27432" marB="27432" anchor="ctr">
-                    <a:solidFill>
-                      <a:srgbClr val="1F5FA8"/>
-                    </a:solidFill>
-                  </a:tcPr>
-                </a:tc>
-              </a:tr>
-              <a:tr h="502920">
-                <a:tc>
-                  <a:txBody>
-                    <a:bodyPr/>
-                    <a:lstStyle/>
-                    <a:p>
-                      <a:pPr algn="l"/>
-                      <a:r>
-                        <a:rPr sz="1800" b="0">
-                          <a:solidFill>
-                            <a:srgbClr val="1A1A1A"/>
-                          </a:solidFill>
-                          <a:latin typeface="Leelawadee UI"/>
-                          <a:ea typeface="Leelawadee UI"/>
-                          <a:cs typeface="Leelawadee UI"/>
-                        </a:rPr>
-                        <a:t>⌨️ คนคุมคีย์บอร์ด</a:t>
-                      </a:r>
-                    </a:p>
-                  </a:txBody>
-                  <a:tcPr marL="91440" marR="91440" marT="27432" marB="27432" anchor="ctr">
-                    <a:solidFill>
-                      <a:srgbClr val="FFFFFF"/>
-                    </a:solidFill>
-                  </a:tcPr>
-                </a:tc>
-                <a:tc>
-                  <a:txBody>
-                    <a:bodyPr/>
-                    <a:lstStyle/>
-                    <a:p>
-                      <a:pPr algn="l"/>
-                      <a:r>
-                        <a:rPr sz="1800" b="0">
-                          <a:solidFill>
-                            <a:srgbClr val="1A1A1A"/>
-                          </a:solidFill>
-                          <a:latin typeface="Leelawadee UI"/>
-                          <a:ea typeface="Leelawadee UI"/>
-                          <a:cs typeface="Leelawadee UI"/>
-                        </a:rPr>
-                        <a:t>พิมพ์จังหวะที่ 1 และ 4</a:t>
-                      </a:r>
-                    </a:p>
-                  </a:txBody>
-                  <a:tcPr marL="91440" marR="91440" marT="27432" marB="27432" anchor="ctr">
-                    <a:solidFill>
-                      <a:srgbClr val="FFFFFF"/>
-                    </a:solidFill>
-                  </a:tcPr>
-                </a:tc>
-              </a:tr>
-              <a:tr h="502920">
-                <a:tc>
-                  <a:txBody>
-                    <a:bodyPr/>
-                    <a:lstStyle/>
-                    <a:p>
-                      <a:pPr algn="l"/>
-                      <a:r>
-                        <a:rPr sz="1800" b="0">
-                          <a:solidFill>
-                            <a:srgbClr val="1A1A1A"/>
-                          </a:solidFill>
-                          <a:latin typeface="Leelawadee UI"/>
-                          <a:ea typeface="Leelawadee UI"/>
-                          <a:cs typeface="Leelawadee UI"/>
-                        </a:rPr>
-                        <a:t>🔍 คนตรวจ</a:t>
-                      </a:r>
-                    </a:p>
-                  </a:txBody>
-                  <a:tcPr marL="91440" marR="91440" marT="27432" marB="27432" anchor="ctr">
-                    <a:solidFill>
-                      <a:srgbClr val="F2F4F7"/>
-                    </a:solidFill>
-                  </a:tcPr>
-                </a:tc>
-                <a:tc>
-                  <a:txBody>
-                    <a:bodyPr/>
-                    <a:lstStyle/>
-                    <a:p>
-                      <a:pPr algn="l"/>
-                      <a:r>
-                        <a:rPr sz="1800" b="0">
-                          <a:solidFill>
-                            <a:srgbClr val="1A1A1A"/>
-                          </a:solidFill>
-                          <a:latin typeface="Leelawadee UI"/>
-                          <a:ea typeface="Leelawadee UI"/>
-                          <a:cs typeface="Leelawadee UI"/>
-                        </a:rPr>
-                        <a:t>อ่านแผน แล้วบอกว่าข้อไหนไม่ใช่</a:t>
-                      </a:r>
-                    </a:p>
-                  </a:txBody>
-                  <a:tcPr marL="91440" marR="91440" marT="27432" marB="27432" anchor="ctr">
-                    <a:solidFill>
-                      <a:srgbClr val="F2F4F7"/>
-                    </a:solidFill>
-                  </a:tcPr>
-                </a:tc>
-              </a:tr>
-              <a:tr h="502920">
-                <a:tc>
-                  <a:txBody>
-                    <a:bodyPr/>
-                    <a:lstStyle/>
-                    <a:p>
-                      <a:pPr algn="l"/>
-                      <a:r>
-                        <a:rPr sz="1800" b="0">
-                          <a:solidFill>
-                            <a:srgbClr val="1A1A1A"/>
-                          </a:solidFill>
-                          <a:latin typeface="Leelawadee UI"/>
-                          <a:ea typeface="Leelawadee UI"/>
-                          <a:cs typeface="Leelawadee UI"/>
-                        </a:rPr>
-                        <a:t>📖 คนอ่านใบงาน</a:t>
-                      </a:r>
-                    </a:p>
-                  </a:txBody>
-                  <a:tcPr marL="91440" marR="91440" marT="27432" marB="27432" anchor="ctr">
-                    <a:solidFill>
-                      <a:srgbClr val="FFFFFF"/>
-                    </a:solidFill>
-                  </a:tcPr>
-                </a:tc>
-                <a:tc>
-                  <a:txBody>
-                    <a:bodyPr/>
-                    <a:lstStyle/>
-                    <a:p>
-                      <a:pPr algn="l"/>
-                      <a:r>
-                        <a:rPr sz="1800" b="0">
-                          <a:solidFill>
-                            <a:srgbClr val="1A1A1A"/>
-                          </a:solidFill>
-                          <a:latin typeface="Leelawadee UI"/>
-                          <a:ea typeface="Leelawadee UI"/>
-                          <a:cs typeface="Leelawadee UI"/>
-                        </a:rPr>
-                        <a:t>คอยเบรกเมื่อกลุ่มข้ามจังหวะที่ 3</a:t>
-                      </a:r>
-                    </a:p>
-                  </a:txBody>
-                  <a:tcPr marL="91440" marR="91440" marT="27432" marB="27432" anchor="ctr">
-                    <a:solidFill>
-                      <a:srgbClr val="FFFFFF"/>
-                    </a:solidFill>
-                  </a:tcPr>
-                </a:tc>
-              </a:tr>
-              <a:tr h="502920">
-                <a:tc>
-                  <a:txBody>
-                    <a:bodyPr/>
-                    <a:lstStyle/>
-                    <a:p>
-                      <a:pPr algn="l"/>
-                      <a:r>
-                        <a:rPr sz="1800" b="0">
-                          <a:solidFill>
-                            <a:srgbClr val="1A1A1A"/>
-                          </a:solidFill>
-                          <a:latin typeface="Leelawadee UI"/>
-                          <a:ea typeface="Leelawadee UI"/>
-                          <a:cs typeface="Leelawadee UI"/>
-                        </a:rPr>
-                        <a:t>📝 คนจดและถาม</a:t>
-                      </a:r>
-                    </a:p>
-                  </a:txBody>
-                  <a:tcPr marL="91440" marR="91440" marT="27432" marB="27432" anchor="ctr">
-                    <a:solidFill>
-                      <a:srgbClr val="F2F4F7"/>
-                    </a:solidFill>
-                  </a:tcPr>
-                </a:tc>
-                <a:tc>
-                  <a:txBody>
-                    <a:bodyPr/>
-                    <a:lstStyle/>
-                    <a:p>
-                      <a:pPr algn="l"/>
-                      <a:r>
-                        <a:rPr sz="1800" b="0">
-                          <a:solidFill>
-                            <a:srgbClr val="1A1A1A"/>
-                          </a:solidFill>
-                          <a:latin typeface="Leelawadee UI"/>
-                          <a:ea typeface="Leelawadee UI"/>
-                          <a:cs typeface="Leelawadee UI"/>
-                        </a:rPr>
-                        <a:t>จดข้อตกลง · โพสต์ screenshot</a:t>
-                      </a:r>
-                    </a:p>
-                  </a:txBody>
-                  <a:tcPr marL="91440" marR="91440" marT="27432" marB="27432" anchor="ctr">
-                    <a:solidFill>
-                      <a:srgbClr val="F2F4F7"/>
-                    </a:solidFill>
-                  </a:tcPr>
-                </a:tc>
-              </a:tr>
-            </a:tbl>
-          </a:graphicData>
-        </a:graphic>
-      </p:graphicFrame>
+              <a:t>👥 ในห้องย่อยทำงานกันอย่างไร</a:t>
+            </a:r>
+          </a:p>
+        </p:txBody>
+      </p:sp>
+      <p:sp>
+        <p:nvSpPr>
+          <p:cNvPr id="3" name="TextBox 2"/>
+          <p:cNvSpPr txBox="1"/>
+          <p:nvPr/>
+        </p:nvSpPr>
+        <p:spPr>
+          <a:xfrm>
+            <a:off x="822960" y="1472184"/>
+            <a:ext cx="10545775" cy="1029208"/>
+          </a:xfrm>
+          <a:prstGeom prst="rect">
+            <a:avLst/>
+          </a:prstGeom>
+          <a:noFill/>
+        </p:spPr>
+        <p:txBody>
+          <a:bodyPr wrap="square">
+            <a:spAutoFit/>
+          </a:bodyPr>
+          <a:lstStyle/>
+          <a:p>
+            <a:pPr algn="l"/>
+            <a:r>
+              <a:rPr sz="2600" b="0">
+                <a:solidFill>
+                  <a:srgbClr val="1A1A1A"/>
+                </a:solidFill>
+                <a:latin typeface="Leelawadee UI"/>
+                <a:ea typeface="Leelawadee UI"/>
+                <a:cs typeface="Leelawadee UI"/>
+              </a:rPr>
+              <a:t>• 🖥️ ตกลงกันว่า รอบนี้ใครนำจอ — คนนำจอแชร์จอแล้วเล่าไปทำไป</a:t>
+            </a:r>
+          </a:p>
+        </p:txBody>
+      </p:sp>
       <p:sp>
         <p:nvSpPr>
           <p:cNvPr id="4" name="TextBox 3"/>
+          <p:cNvSpPr txBox="1"/>
+          <p:nvPr/>
+        </p:nvSpPr>
+        <p:spPr>
+          <a:xfrm>
+            <a:off x="822960" y="2556256"/>
+            <a:ext cx="10545775" cy="560324"/>
+          </a:xfrm>
+          <a:prstGeom prst="rect">
+            <a:avLst/>
+          </a:prstGeom>
+          <a:noFill/>
+        </p:spPr>
+        <p:txBody>
+          <a:bodyPr wrap="square">
+            <a:spAutoFit/>
+          </a:bodyPr>
+          <a:lstStyle/>
+          <a:p>
+            <a:pPr algn="l"/>
+            <a:r>
+              <a:rPr sz="2600" b="0">
+                <a:solidFill>
+                  <a:srgbClr val="1A1A1A"/>
+                </a:solidFill>
+                <a:latin typeface="Leelawadee UI"/>
+                <a:ea typeface="Leelawadee UI"/>
+                <a:cs typeface="Leelawadee UI"/>
+              </a:rPr>
+              <a:t>• ⌨️ ทุกคนพิมพ์เองบนเครื่องตัวเอง ไปพร้อมกัน</a:t>
+            </a:r>
+          </a:p>
+        </p:txBody>
+      </p:sp>
+      <p:sp>
+        <p:nvSpPr>
+          <p:cNvPr id="5" name="TextBox 4"/>
+          <p:cNvSpPr txBox="1"/>
+          <p:nvPr/>
+        </p:nvSpPr>
+        <p:spPr>
+          <a:xfrm>
+            <a:off x="822960" y="3171444"/>
+            <a:ext cx="10545775" cy="560324"/>
+          </a:xfrm>
+          <a:prstGeom prst="rect">
+            <a:avLst/>
+          </a:prstGeom>
+          <a:noFill/>
+        </p:spPr>
+        <p:txBody>
+          <a:bodyPr wrap="square">
+            <a:spAutoFit/>
+          </a:bodyPr>
+          <a:lstStyle/>
+          <a:p>
+            <a:pPr algn="l"/>
+            <a:r>
+              <a:rPr sz="2600" b="0">
+                <a:solidFill>
+                  <a:srgbClr val="1A1A1A"/>
+                </a:solidFill>
+                <a:latin typeface="Leelawadee UI"/>
+                <a:ea typeface="Leelawadee UI"/>
+                <a:cs typeface="Leelawadee UI"/>
+              </a:rPr>
+              <a:t>• 🔍 ใครเห็นว่าแผนของ AI ข้อไหนไม่ใช่ ให้พูดขึ้นมาทันที</a:t>
+            </a:r>
+          </a:p>
+        </p:txBody>
+      </p:sp>
+      <p:sp>
+        <p:nvSpPr>
+          <p:cNvPr id="6" name="TextBox 5"/>
+          <p:cNvSpPr txBox="1"/>
+          <p:nvPr/>
+        </p:nvSpPr>
+        <p:spPr>
+          <a:xfrm>
+            <a:off x="822960" y="3786632"/>
+            <a:ext cx="10545775" cy="560324"/>
+          </a:xfrm>
+          <a:prstGeom prst="rect">
+            <a:avLst/>
+          </a:prstGeom>
+          <a:noFill/>
+        </p:spPr>
+        <p:txBody>
+          <a:bodyPr wrap="square">
+            <a:spAutoFit/>
+          </a:bodyPr>
+          <a:lstStyle/>
+          <a:p>
+            <a:pPr algn="l"/>
+            <a:r>
+              <a:rPr sz="2600" b="0">
+                <a:solidFill>
+                  <a:srgbClr val="1A1A1A"/>
+                </a:solidFill>
+                <a:latin typeface="Leelawadee UI"/>
+                <a:ea typeface="Leelawadee UI"/>
+                <a:cs typeface="Leelawadee UI"/>
+              </a:rPr>
+              <a:t>• 🔁 ถึง Checkpoint แล้วสลับคนนำจอ</a:t>
+            </a:r>
+          </a:p>
+        </p:txBody>
+      </p:sp>
+      <p:sp>
+        <p:nvSpPr>
+          <p:cNvPr id="7" name="TextBox 6"/>
           <p:cNvSpPr txBox="1"/>
           <p:nvPr/>
         </p:nvSpPr>
@@ -16396,7 +16258,7 @@
                 <a:ea typeface="Leelawadee UI"/>
                 <a:cs typeface="Leelawadee UI"/>
               </a:rPr>
-              <a:t>• รู้ว่าในกลุ่ม ใครรับผิดชอบจังหวะไหน</a:t>
+              <a:t>• รู้ว่าในห้องย่อย ใครรับผิดชอบจังหวะไหน</a:t>
             </a:r>
           </a:p>
         </p:txBody>
@@ -21077,7 +20939,7 @@
                 <a:ea typeface="Leelawadee UI"/>
                 <a:cs typeface="Leelawadee UI"/>
               </a:rPr>
-              <a:t>วันนี้กลุ่มของคุณจะได้ 4 อย่างกลับไป</a:t>
+              <a:t>วันนี้คุณจะได้ 4 อย่างกลับไป</a:t>
             </a:r>
           </a:p>
         </p:txBody>
@@ -21114,7 +20976,7 @@
                 <a:ea typeface="Leelawadee UI"/>
                 <a:cs typeface="Leelawadee UI"/>
               </a:rPr>
-              <a:t>• 📁 Repo (โฟลเดอร์โครงงานที่มีปุ่มเซฟย้อนได้) ที่รันเว็บของกลุ่มได้</a:t>
+              <a:t>• 📁 Repo (โฟลเดอร์โครงงานที่มีปุ่มเซฟย้อนได้) ที่รันเว็บของคุณได้</a:t>
             </a:r>
           </a:p>
         </p:txBody>
@@ -21693,7 +21555,7 @@
                 <a:ea typeface="Leelawadee UI"/>
                 <a:cs typeface="Leelawadee UI"/>
               </a:rPr>
-              <a:t>• พร้อมวาดแบบของโครงงานกลุ่มบนกระดาษ</a:t>
+              <a:t>• พร้อมวาดแบบของหัวข้อของคุณบนกระดาษ</a:t>
             </a:r>
           </a:p>
         </p:txBody>
@@ -22043,7 +21905,7 @@
         <p:spPr>
           <a:xfrm>
             <a:off x="822960" y="3317748"/>
-            <a:ext cx="10545775" cy="1029208"/>
+            <a:ext cx="10545775" cy="560324"/>
           </a:xfrm>
           <a:prstGeom prst="rect">
             <a:avLst/>
@@ -22066,7 +21928,7 @@
                 <a:ea typeface="Leelawadee UI"/>
                 <a:cs typeface="Leelawadee UI"/>
               </a:rPr>
-              <a:t>• ใช้ Firebase project ที่กลุ่มสมัครไว้แล้วจาก Module 1</a:t>
+              <a:t>• ใช้ Firebase project ที่สมัครไว้แล้วจาก Module 1</a:t>
             </a:r>
           </a:p>
         </p:txBody>
@@ -27943,7 +27805,7 @@
                 <a:ea typeface="Leelawadee UI"/>
                 <a:cs typeface="Leelawadee UI"/>
               </a:rPr>
-              <a:t>📦 สิ่งที่กลุ่มต้องส่งมอบสัปดาห์นี้</a:t>
+              <a:t>📦 สิ่งที่ต้องส่งมอบสัปดาห์นี้</a:t>
             </a:r>
           </a:p>
         </p:txBody>
@@ -27980,7 +27842,7 @@
                 <a:ea typeface="Leelawadee UI"/>
                 <a:cs typeface="Leelawadee UI"/>
               </a:rPr>
-              <a:t>• [ ] Repo ของกลุ่ม ที่รันเว็บ prototype ได้</a:t>
+              <a:t>• [ ] Repo ของคุณ ที่รันเว็บ prototype ได้</a:t>
             </a:r>
           </a:p>
         </p:txBody>
@@ -28182,7 +28044,7 @@
                 <a:ea typeface="Leelawadee UI"/>
                 <a:cs typeface="Leelawadee UI"/>
               </a:rPr>
-              <a:t>ตารางเทียบ — แล้วของกลุ่มคุณล่ะ?</a:t>
+              <a:t>ตารางเทียบ — แล้วของคุณล่ะ?</a:t>
             </a:r>
           </a:p>
         </p:txBody>
@@ -28302,7 +28164,7 @@
                           <a:ea typeface="Leelawadee UI"/>
                           <a:cs typeface="Leelawadee UI"/>
                         </a:rPr>
-                        <a:t>👥 กลุ่มคุณ</a:t>
+                        <a:t>👥 คุณ</a:t>
                       </a:r>
                     </a:p>
                   </a:txBody>
@@ -28788,7 +28650,7 @@
         <p:spPr>
           <a:xfrm>
             <a:off x="822960" y="502920"/>
-            <a:ext cx="10545775" cy="804672"/>
+            <a:ext cx="10545775" cy="1408176"/>
           </a:xfrm>
           <a:prstGeom prst="rect">
             <a:avLst/>
@@ -28811,7 +28673,7 @@
                 <a:ea typeface="Leelawadee UI"/>
                 <a:cs typeface="Leelawadee UI"/>
               </a:rPr>
-              <a:t>Workshop บ่ายนี้ — 3 ส่วน 3 Checkpoint</a:t>
+              <a:t>Workshop บ่ายนี้ — LeaveEasy 4 ส่วน 4 Checkpoint</a:t>
             </a:r>
           </a:p>
         </p:txBody>
@@ -28825,8 +28687,8 @@
           <p:nvPr/>
         </p:nvGraphicFramePr>
         <p:xfrm>
-          <a:off x="822960" y="1472184"/>
-          <a:ext cx="10545775" cy="2011680"/>
+          <a:off x="822960" y="2075688"/>
+          <a:ext cx="10545775" cy="2514600"/>
         </p:xfrm>
         <a:graphic>
           <a:graphicData uri="http://schemas.openxmlformats.org/drawingml/2006/table">
@@ -28880,7 +28742,7 @@
                           <a:ea typeface="Leelawadee UI"/>
                           <a:cs typeface="Leelawadee UI"/>
                         </a:rPr>
-                        <a:t>ทำอะไร</a:t>
+                        <a:t>ทำอะไรกับ LeaveEasy</a:t>
                       </a:r>
                     </a:p>
                   </a:txBody>
@@ -28957,7 +28819,7 @@
                           <a:ea typeface="Leelawadee UI"/>
                           <a:cs typeface="Leelawadee UI"/>
                         </a:rPr>
-                        <a:t>prototype ของกลุ่มเข้า repo + รัน</a:t>
+                        <a:t>LeaveEasy เข้า repo ของคุณ + รัน</a:t>
                       </a:r>
                     </a:p>
                   </a:txBody>
@@ -29009,7 +28871,7 @@
                           <a:ea typeface="Leelawadee UI"/>
                           <a:cs typeface="Leelawadee UI"/>
                         </a:rPr>
-                        <a:t>B · 30 น.</a:t>
+                        <a:t>B · 25 น.</a:t>
                       </a:r>
                     </a:p>
                   </a:txBody>
@@ -29034,7 +28896,7 @@
                           <a:ea typeface="Leelawadee UI"/>
                           <a:cs typeface="Leelawadee UI"/>
                         </a:rPr>
-                        <a:t>วาดแบบโฟลเดอร์ บนกระดาษ ไม่ใช้คอม</a:t>
+                        <a:t>เขียนโครงสร้าง ลงกระดาษ ไม่ใช้คอม</a:t>
                       </a:r>
                     </a:p>
                   </a:txBody>
@@ -29059,7 +28921,7 @@
                           <a:ea typeface="Leelawadee UI"/>
                           <a:cs typeface="Leelawadee UI"/>
                         </a:rPr>
-                        <a:t>รูปแบบแผนโพสต์ในแชท</a:t>
+                        <a:t>กระดาษครบชื่อช่อง</a:t>
                       </a:r>
                     </a:p>
                   </a:txBody>
@@ -29086,7 +28948,7 @@
                           <a:ea typeface="Leelawadee UI"/>
                           <a:cs typeface="Leelawadee UI"/>
                         </a:rPr>
-                        <a:t>C · 75 น.</a:t>
+                        <a:t>C · 40 น.</a:t>
                       </a:r>
                     </a:p>
                   </a:txBody>
@@ -29111,7 +28973,7 @@
                           <a:ea typeface="Leelawadee UI"/>
                           <a:cs typeface="Leelawadee UI"/>
                         </a:rPr>
-                        <a:t>สร้าง Firestore + seed + หน้ารายการอ่านจริง</a:t>
+                        <a:t>สร้าง Firestore + seed ใบลา 5 ใบ</a:t>
                       </a:r>
                     </a:p>
                   </a:txBody>
@@ -29147,6 +29009,83 @@
                   </a:tcPr>
                 </a:tc>
               </a:tr>
+              <a:tr h="502920">
+                <a:tc>
+                  <a:txBody>
+                    <a:bodyPr/>
+                    <a:lstStyle/>
+                    <a:p>
+                      <a:pPr algn="l"/>
+                      <a:r>
+                        <a:rPr sz="1800" b="0">
+                          <a:solidFill>
+                            <a:srgbClr val="1A1A1A"/>
+                          </a:solidFill>
+                          <a:latin typeface="Leelawadee UI"/>
+                          <a:ea typeface="Leelawadee UI"/>
+                          <a:cs typeface="Leelawadee UI"/>
+                        </a:rPr>
+                        <a:t>D · 30 น.</a:t>
+                      </a:r>
+                    </a:p>
+                  </a:txBody>
+                  <a:tcPr marL="91440" marR="91440" marT="27432" marB="27432" anchor="ctr">
+                    <a:solidFill>
+                      <a:srgbClr val="F2F4F7"/>
+                    </a:solidFill>
+                  </a:tcPr>
+                </a:tc>
+                <a:tc>
+                  <a:txBody>
+                    <a:bodyPr/>
+                    <a:lstStyle/>
+                    <a:p>
+                      <a:pPr algn="l"/>
+                      <a:r>
+                        <a:rPr sz="1800" b="0">
+                          <a:solidFill>
+                            <a:srgbClr val="1A1A1A"/>
+                          </a:solidFill>
+                          <a:latin typeface="Leelawadee UI"/>
+                          <a:ea typeface="Leelawadee UI"/>
+                          <a:cs typeface="Leelawadee UI"/>
+                        </a:rPr>
+                        <a:t>หน้ารายการอ่านจากฐานจริง</a:t>
+                      </a:r>
+                    </a:p>
+                  </a:txBody>
+                  <a:tcPr marL="91440" marR="91440" marT="27432" marB="27432" anchor="ctr">
+                    <a:solidFill>
+                      <a:srgbClr val="F2F4F7"/>
+                    </a:solidFill>
+                  </a:tcPr>
+                </a:tc>
+                <a:tc>
+                  <a:txBody>
+                    <a:bodyPr/>
+                    <a:lstStyle/>
+                    <a:p>
+                      <a:pPr algn="l"/>
+                      <a:r>
+                        <a:rPr sz="1800" b="0">
+                          <a:solidFill>
+                            <a:srgbClr val="1A1A1A"/>
+                          </a:solidFill>
+                          <a:latin typeface="Leelawadee UI"/>
+                          <a:ea typeface="Leelawadee UI"/>
+                          <a:cs typeface="Leelawadee UI"/>
+                        </a:rPr>
+                        <a:t>แก้ Console แล้วเว็บเปลี่ยน</a:t>
+                      </a:r>
+                    </a:p>
+                  </a:txBody>
+                  <a:tcPr marL="91440" marR="91440" marT="27432" marB="27432" anchor="ctr">
+                    <a:solidFill>
+                      <a:srgbClr val="F2F4F7"/>
+                    </a:solidFill>
+                  </a:tcPr>
+                </a:tc>
+              </a:tr>
             </a:tbl>
           </a:graphicData>
         </a:graphic>
@@ -29237,7 +29176,7 @@
                 <a:ea typeface="Leelawadee UI"/>
                 <a:cs typeface="Leelawadee UI"/>
               </a:rPr>
-              <a:t>👥 กติกางานกลุ่มบ่ายนี้</a:t>
+              <a:t>👥 กติกาบ่ายนี้</a:t>
             </a:r>
           </a:p>
         </p:txBody>
@@ -29274,7 +29213,7 @@
                 <a:ea typeface="Leelawadee UI"/>
                 <a:cs typeface="Leelawadee UI"/>
               </a:rPr>
-              <a:t>• 🔄 หมุนคนคุมคีย์บอร์ดทุก Checkpoint — จดชื่อในใบงาน</a:t>
+              <a:t>• 🖥️ สลับคนนำจอทุก Checkpoint — คนใหม่พิมพ์ชื่อในแชท</a:t>
             </a:r>
           </a:p>
         </p:txBody>
@@ -29288,7 +29227,7 @@
         <p:spPr>
           <a:xfrm>
             <a:off x="822960" y="2087372"/>
-            <a:ext cx="10545775" cy="1029208"/>
+            <a:ext cx="10545775" cy="560324"/>
           </a:xfrm>
           <a:prstGeom prst="rect">
             <a:avLst/>
@@ -29311,7 +29250,7 @@
                 <a:ea typeface="Leelawadee UI"/>
                 <a:cs typeface="Leelawadee UI"/>
               </a:rPr>
-              <a:t>• 👤 commit ในชื่อคนที่คุมคีย์บอร์ดรอบนั้น — วันนี้อย่างน้อย 2 คน</a:t>
+              <a:t>• 👤 ทุกคน commit ในชื่อตัวเอง บนเครื่องตัวเอง</a:t>
             </a:r>
           </a:p>
         </p:txBody>
@@ -29324,7 +29263,7 @@
         </p:nvSpPr>
         <p:spPr>
           <a:xfrm>
-            <a:off x="822960" y="3171444"/>
+            <a:off x="822960" y="2702560"/>
             <a:ext cx="10545775" cy="560324"/>
           </a:xfrm>
           <a:prstGeom prst="rect">
@@ -29348,7 +29287,7 @@
                 <a:ea typeface="Leelawadee UI"/>
                 <a:cs typeface="Leelawadee UI"/>
               </a:rPr>
-              <a:t>• ❓ เรียก TA → ให้ คนที่ไม่ได้พิมพ์ เป็นคนอธิบายปัญหา</a:t>
+              <a:t>• 📸 โพสต์ screenshot ทุก Checkpoint จากเครื่องคุณ</a:t>
             </a:r>
           </a:p>
         </p:txBody>
@@ -29361,7 +29300,7 @@
         </p:nvSpPr>
         <p:spPr>
           <a:xfrm>
-            <a:off x="822960" y="3786632"/>
+            <a:off x="822960" y="3317748"/>
             <a:ext cx="10545775" cy="560324"/>
           </a:xfrm>
           <a:prstGeom prst="rect">
@@ -29385,7 +29324,7 @@
                 <a:ea typeface="Leelawadee UI"/>
                 <a:cs typeface="Leelawadee UI"/>
               </a:rPr>
-              <a:t>• 🚦 พิมพ์ 🟢 🟡 🔴 บอกสถานะกลุ่มในแชทเสมอ</a:t>
+              <a:t>• 🚦 พิมพ์ 🟢 🟡 🔴 บอกสถานะตัวเองในแชทเสมอ</a:t>
             </a:r>
           </a:p>
         </p:txBody>

--- a/materials/week6/w6-slides.pptx
+++ b/materials/week6/w6-slides.pptx
@@ -16258,7 +16258,7 @@
                 <a:ea typeface="Leelawadee UI"/>
                 <a:cs typeface="Leelawadee UI"/>
               </a:rPr>
-              <a:t>• รู้ว่าในห้องย่อย ใครรับผิดชอบจังหวะไหน</a:t>
+              <a:t>• บอกได้ว่าจังหวะไหนเป็นหน้าที่ของเรา ไม่ใช่ของ AI</a:t>
             </a:r>
           </a:p>
         </p:txBody>
@@ -27916,7 +27916,7 @@
                 <a:ea typeface="Leelawadee UI"/>
                 <a:cs typeface="Leelawadee UI"/>
               </a:rPr>
-              <a:t>• [ ] หน้ารายการอ่านจากฐานจริง + commit จากอย่างน้อย 2 คน</a:t>
+              <a:t>• [ ] หน้ารายการอ่านจากฐานจริง + commit อย่างน้อย 2 ครั้ง</a:t>
             </a:r>
           </a:p>
         </p:txBody>

--- a/materials/week6/w6-slides.pptx
+++ b/materials/week6/w6-slides.pptx
@@ -5831,7 +5831,7 @@
           <a:lstStyle/>
           <a:p>
             <a:r>
-              <a:t>ย้ำข้อสองว่า "คนที่ไม่มี commit เลยตลอด Module ถือว่าไม่ผ่าน แม้ระบบจะทำงานได้" · อธิบายข้อสาม "screenshot ต้องมาจากเครื่องคุณ ไม่ใช่จอของคนนำ" · บอกว่าคิวถามกลางและธนาคารคำตอบสด ลิงก์อยู่ในแชทแล้ว</a:t>
+              <a:t>ย้ำข้อสองให้หนักที่สุด "ขั้น A2 บ่ายนี้จะมีหน้าต่างของ GitHub เด้งขึ้นมาให้ล็อกอิน กด Sign in with your browser แล้ว Authorize ครับ ทำครั้งเดียวใช้ได้ทั้งสี่สัปดาห์ · ห้ามพิมพ์รหัสผ่านหรือโทเคนลงในช่องแชทของ Claude เด็ดขาด ถ้า terminal ขอ username กับ password ให้กด Ctrl C ยกเลิกแล้วเรียก TA" · ให้ทุกคนเปิด github.com ล็อกอินค้างไว้ตั้งแต่ตอนพักเที่ยง จะได้ไม่ติดพร้อมกันทั้งห้อง · ย้ำข้อสามว่า "คนที่ไม่มี commit เลยตลอด Module ถือว่าไม่ผ่าน แม้ระบบจะทำงานได้" · อธิบายข้อสาม "screenshot ต้องมาจากเครื่องคุณ ไม่ใช่จอของคนนำ" · บอกว่าคิวถามกลางและธนาคารคำตอบสด ลิงก์อยู่ในแชทแล้ว</a:t>
             </a:r>
           </a:p>
         </p:txBody>
@@ -30081,6 +30081,43 @@
                 <a:ea typeface="Leelawadee UI"/>
                 <a:cs typeface="Leelawadee UI"/>
               </a:rPr>
+              <a:t>• 🔑 ขั้น A2 ล็อกอิน GitHub ครั้งเดียว — เตรียมอีเมลกับรหัสผ่าน GitHub ไว้</a:t>
+            </a:r>
+          </a:p>
+        </p:txBody>
+      </p:sp>
+      <p:sp>
+        <p:nvSpPr>
+          <p:cNvPr id="5" name="TextBox 4"/>
+          <p:cNvSpPr txBox="1"/>
+          <p:nvPr/>
+        </p:nvSpPr>
+        <p:spPr>
+          <a:xfrm>
+            <a:off x="822960" y="3171444"/>
+            <a:ext cx="10545775" cy="1029208"/>
+          </a:xfrm>
+          <a:prstGeom prst="rect">
+            <a:avLst/>
+          </a:prstGeom>
+          <a:noFill/>
+        </p:spPr>
+        <p:txBody>
+          <a:bodyPr wrap="square">
+            <a:spAutoFit/>
+          </a:bodyPr>
+          <a:lstStyle/>
+          <a:p>
+            <a:pPr algn="l"/>
+            <a:r>
+              <a:rPr sz="2600" b="0">
+                <a:solidFill>
+                  <a:srgbClr val="1A1A1A"/>
+                </a:solidFill>
+                <a:latin typeface="Leelawadee UI"/>
+                <a:ea typeface="Leelawadee UI"/>
+                <a:cs typeface="Leelawadee UI"/>
+              </a:rPr>
               <a:t>• 👤 ทุกคน commit ในชื่อตัวเอง แล้วส่งขึ้น repo ของตัวเอง</a:t>
             </a:r>
           </a:p>
@@ -30088,14 +30125,14 @@
       </p:sp>
       <p:sp>
         <p:nvSpPr>
-          <p:cNvPr id="5" name="TextBox 4"/>
-          <p:cNvSpPr txBox="1"/>
-          <p:nvPr/>
-        </p:nvSpPr>
-        <p:spPr>
-          <a:xfrm>
-            <a:off x="822960" y="3171444"/>
-            <a:ext cx="10545775" cy="560324"/>
+          <p:cNvPr id="6" name="TextBox 5"/>
+          <p:cNvSpPr txBox="1"/>
+          <p:nvPr/>
+        </p:nvSpPr>
+        <p:spPr>
+          <a:xfrm>
+            <a:off x="822960" y="4255516"/>
+            <a:ext cx="10545775" cy="1029208"/>
           </a:xfrm>
           <a:prstGeom prst="rect">
             <a:avLst/>
@@ -30118,44 +30155,7 @@
                 <a:ea typeface="Leelawadee UI"/>
                 <a:cs typeface="Leelawadee UI"/>
               </a:rPr>
-              <a:t>• 📸 โพสต์ screenshot ทุก Checkpoint จากเครื่องคุณ</a:t>
-            </a:r>
-          </a:p>
-        </p:txBody>
-      </p:sp>
-      <p:sp>
-        <p:nvSpPr>
-          <p:cNvPr id="6" name="TextBox 5"/>
-          <p:cNvSpPr txBox="1"/>
-          <p:nvPr/>
-        </p:nvSpPr>
-        <p:spPr>
-          <a:xfrm>
-            <a:off x="822960" y="3786632"/>
-            <a:ext cx="10545775" cy="560324"/>
-          </a:xfrm>
-          <a:prstGeom prst="rect">
-            <a:avLst/>
-          </a:prstGeom>
-          <a:noFill/>
-        </p:spPr>
-        <p:txBody>
-          <a:bodyPr wrap="square">
-            <a:spAutoFit/>
-          </a:bodyPr>
-          <a:lstStyle/>
-          <a:p>
-            <a:pPr algn="l"/>
-            <a:r>
-              <a:rPr sz="2600" b="0">
-                <a:solidFill>
-                  <a:srgbClr val="1A1A1A"/>
-                </a:solidFill>
-                <a:latin typeface="Leelawadee UI"/>
-                <a:ea typeface="Leelawadee UI"/>
-                <a:cs typeface="Leelawadee UI"/>
-              </a:rPr>
-              <a:t>• 🚦 พิมพ์ 🟢 🟡 🔴 บอกสถานะตัวเองในแชทเสมอ</a:t>
+              <a:t>• 🚦 พิมพ์ 🟢 🟡 🔴 บอกสถานะตัวเองในแชทเสมอ · 📸 โพสต์ screenshot ทุก Checkpoint</a:t>
             </a:r>
           </a:p>
         </p:txBody>

--- a/materials/week6/w6-slides.pptx
+++ b/materials/week6/w6-slides.pptx
@@ -5831,7 +5831,7 @@
           <a:lstStyle/>
           <a:p>
             <a:r>
-              <a:t>ย้ำข้อสองให้หนักที่สุด "ขั้น A2 บ่ายนี้จะมีหน้าต่างของ GitHub เด้งขึ้นมาให้ล็อกอิน กด Sign in with your browser แล้ว Authorize ครับ ทำครั้งเดียวใช้ได้ทั้งสี่สัปดาห์ · ห้ามพิมพ์รหัสผ่านหรือโทเคนลงในช่องแชทของ Claude เด็ดขาด ถ้า terminal ขอ username กับ password ให้กด Ctrl C ยกเลิกแล้วเรียก TA" · ให้ทุกคนเปิด github.com ล็อกอินค้างไว้ตั้งแต่ตอนพักเที่ยง จะได้ไม่ติดพร้อมกันทั้งห้อง · ย้ำข้อสามว่า "คนที่ไม่มี commit เลยตลอด Module ถือว่าไม่ผ่าน แม้ระบบจะทำงานได้" · อธิบายข้อสาม "screenshot ต้องมาจากเครื่องคุณ ไม่ใช่จอของคนนำ" · บอกว่าคิวถามกลางและธนาคารคำตอบสด ลิงก์อยู่ในแชทแล้ว</a:t>
+              <a:t>ย้ำข้อสองให้หนักที่สุด "ขั้น A2 บ่ายนี้จะมีหน้าต่างของ GitHub เด้งขึ้นมาให้ล็อกอิน กด Sign in with your browser แล้ว Authorize ครับ ทำครั้งเดียวใช้ได้ทั้งสี่สัปดาห์ · ห้ามพิมพ์รหัสผ่านหรือโทเคนลงในช่องแชทของ Claude เด็ดขาด ถ้า terminal ขอ username กับ password ให้กด Ctrl C ยกเลิกแล้วเรียก TA" · บอกล่วงหน้าเลยว่า "ตอนนั้นจอ Claude จะนิ่งเหมือนค้างนะครับ มันรอคุณกดอยู่ · ถ้าไม่เห็นหน้าต่าง กด Alt Tab มันไปซ่อนหลังจออื่น · กดเสร็จแล้วครั้งต่อ ๆ ไป Claude ส่งขึ้น GitHub ให้เองเงียบ ๆ คุณยังสั่ง git เป็นภาษาไทยได้เหมือนเดิมทุกอย่าง" · ให้ทุกคนเปิด github.com ล็อกอินค้างไว้ตั้งแต่ตอนพักเที่ยง จะได้ไม่ติดพร้อมกันทั้งห้อง · ย้ำข้อสามว่า "คนที่ไม่มี commit เลยตลอด Module ถือว่าไม่ผ่าน แม้ระบบจะทำงานได้" · อธิบายข้อสาม "screenshot ต้องมาจากเครื่องคุณ ไม่ใช่จอของคนนำ" · บอกว่าคิวถามกลางและธนาคารคำตอบสด ลิงก์อยู่ในแชทแล้ว</a:t>
             </a:r>
           </a:p>
         </p:txBody>

--- a/materials/week6/w6-slides.pptx
+++ b/materials/week6/w6-slides.pptx
@@ -1352,7 +1352,7 @@
           <a:lstStyle/>
           <a:p>
             <a:r>
-              <a:t>⚠️ ก่อนสอน: เปลี่ยนชื่อบนสไลด์เป็นภาษาไทยตามที่คุณสะกดเอง · ใช้เวลาไม่เกิน 2 นาที อย่าไล่อ่าน CV · จุดที่ต้องพูดให้ถึงมีสองข้อ — หนึ่ง "ผมเคยเป็นคนเขียนโปรแกรมในบริษัทจริงมา 12 ปี เจอปัญหาแบบเดียวกับที่พวกคุณกำลังจะเจอ" · สอง ชี้บรรทัดที่สี่แล้วพูดว่า "ทุกวันนี้ผมทำวิจัยเรื่องให้ AI เขียนโค้ดแทนคน สิ่งที่จะสอนสี่สัปดาห์นี้คือวิธีที่ผมใช้เองจริง ๆ ไม่ใช่ทฤษฎีในตำรา" · ปิดด้วยบรรทัดสุดท้าย "ติดอะไรทักมาได้เลยครับ ไม่ต้องรอถึงวันเสาร์"</a:t>
+              <a:t>ใช้เวลาไม่เกิน 2 นาที อย่าไล่อ่าน CV · ชี้บรรทัดที่สองแล้วเล่าสั้น ๆ ว่า "ผมเคยทำระบบมาหลายวงการมาก ตั้งแต่ระบบสายการบินที่ต้องจัดน้ำหนักสินค้าขึ้นเครื่อง ไปจนถึงระบบเอกสารของธนาคาร แต่ละวงการคิดไม่เหมือนกันเลยครับ สิ่งที่ได้คือการมองให้ออกก่อนว่าธุรกิจแบบนั้นต้องการอะไรจริง ๆ แล้วค่อยลงมือสร้าง — ซึ่งเป็นสิ่งเดียวกับที่ผมอยากให้พวกคุณฝึกในสี่สัปดาห์นี้" · ชี้บรรทัดที่สี่ "ผมสนใจเรื่อง startup เป็นพิเศษ เคยร่วมก่อตั้งบริษัทมาเอง และทุกวันนี้ทำวิจัยเรื่องให้ AI ช่วยเขียนโค้ด ซึ่งเป็นเรื่องเดียวกับที่เราจะใช้กันทั้งหลักสูตร" · ปิดด้วยบรรทัดสุดท้าย "ติดอะไรทักมาได้เลยครับ ไม่ต้องรอถึงวันเสาร์"</a:t>
             </a:r>
           </a:p>
         </p:txBody>
@@ -14167,7 +14167,7 @@
                 <a:ea typeface="Leelawadee UI"/>
                 <a:cs typeface="Leelawadee UI"/>
               </a:rPr>
-              <a:t>• รศ. ดร. Nacha Chondamrongkul — คณบดีสำนักวิชาเทคโนโลยีดิจิทัลประยุกต์ มฟล.</a:t>
+              <a:t>• รศ. ดร. นชา ชลดำรงค์กุล — คณบดีสำนักวิชาเทคโนโลยีดิจิทัลประยุกต์ มฟล.</a:t>
             </a:r>
           </a:p>
         </p:txBody>
@@ -14204,7 +14204,7 @@
                 <a:ea typeface="Leelawadee UI"/>
                 <a:cs typeface="Leelawadee UI"/>
               </a:rPr>
-              <a:t>• 12 ปีในบริษัทซอฟต์แวร์ ทั้งไทยและเยอรมนี · เคยร่วมก่อตั้งบริษัทด้านสุขภาพ</a:t>
+              <a:t>• ✈️💊📡🏦 เคยทำระบบให้หลายวงการ — สายการบิน · ยา · โทรคมนาคม · ธนาคาร · สุขภาพ</a:t>
             </a:r>
           </a:p>
         </p:txBody>
@@ -14218,7 +14218,7 @@
         <p:spPr>
           <a:xfrm>
             <a:off x="822960" y="3351784"/>
-            <a:ext cx="10545775" cy="488188"/>
+            <a:ext cx="10545775" cy="884936"/>
           </a:xfrm>
           <a:prstGeom prst="rect">
             <a:avLst/>
@@ -14241,7 +14241,7 @@
                 <a:ea typeface="Leelawadee UI"/>
                 <a:cs typeface="Leelawadee UI"/>
               </a:rPr>
-              <a:t>• ปริญญาเอกด้านคอมพิวเตอร์ University of Auckland นิวซีแลนด์</a:t>
+              <a:t>• 🎓 ปริญญาเอกด้านคอมพิวเตอร์ University of Auckland ประเทศนิวซีแลนด์</a:t>
             </a:r>
           </a:p>
         </p:txBody>
@@ -14254,7 +14254,7 @@
         </p:nvSpPr>
         <p:spPr>
           <a:xfrm>
-            <a:off x="822960" y="3894836"/>
+            <a:off x="822960" y="4291584"/>
             <a:ext cx="10545775" cy="884936"/>
           </a:xfrm>
           <a:prstGeom prst="rect">
@@ -14278,7 +14278,7 @@
                 <a:ea typeface="Leelawadee UI"/>
                 <a:cs typeface="Leelawadee UI"/>
               </a:rPr>
-              <a:t>• 🤖 งานวิจัยตอนนี้คือ ให้ AI ช่วยเขียนและปรับปรุงโค้ด — เรื่องเดียวกับที่จะสอน</a:t>
+              <a:t>• 🚀 สนใจ startup และการสร้างของใหม่ · 🤖 วิจัยเรื่องให้ AI ช่วยเขียนโค้ด</a:t>
             </a:r>
           </a:p>
         </p:txBody>
@@ -14291,7 +14291,7 @@
         </p:nvSpPr>
         <p:spPr>
           <a:xfrm>
-            <a:off x="822960" y="4834636"/>
+            <a:off x="822960" y="5231384"/>
             <a:ext cx="10545775" cy="884936"/>
           </a:xfrm>
           <a:prstGeom prst="rect">
@@ -14315,7 +14315,7 @@
                 <a:ea typeface="Leelawadee UI"/>
                 <a:cs typeface="Leelawadee UI"/>
               </a:rPr>
-              <a:t>• 📮 ถามนอกเวลาได้ที่ nacha.cho@mfu.ac.th · ประวัติเต็มอยู่ที่หน้า ผู้สอน ในเว็บคลังสื่อ</a:t>
+              <a:t>• 📮 nacha.cho@mfu.ac.th · ประวัติเต็มที่หน้า ผู้สอน ในเว็บคลังสื่อ</a:t>
             </a:r>
           </a:p>
         </p:txBody>

--- a/materials/week6/w6-slides.pptx
+++ b/materials/week6/w6-slides.pptx
@@ -4012,7 +4012,7 @@
           <a:lstStyle/>
           <a:p>
             <a:r>
-              <a:t>ชี้ทีละกล่องจากซ้าย "ผู้ใช้เปิดหน้ารายการ หน้าเว็บไปถามตู้ Firestore ส่งข้อมูลกลับมา แล้วแสดงบนจอ" · หยุดที่กล่องเข้ม "กล่องนี้กล่องเดียวอยู่บนคลาวด์ ที่เหลืออยู่ในเครื่องคุณ ข้อมูลจึงไม่หายตอนปิดเบราว์เซอร์" · ปิดท้าย "สังเกตว่าลูกศรวิ่งทางเดียว วันนี้เราอ่านอย่างเดียว ยังไม่เขียนจากหน้าเว็บ"</a:t>
+              <a:t>ชี้ทีละกล่องจากซ้าย "ผู้ใช้เปิดหน้ารายการ หน้าเว็บไปถามคลัง Firestore ส่งข้อมูลกลับมา แล้วแสดงบนจอ" · หยุดที่กล่องเข้ม "กล่องนี้กล่องเดียวอยู่บนคลาวด์ ที่เหลืออยู่ในเครื่องคุณ ข้อมูลจึงไม่หายตอนปิดเบราว์เซอร์" · ปิดท้าย "สังเกตว่าลูกศรวิ่งทางเดียว วันนี้เราอ่านอย่างเดียว ยังไม่เขียนจากหน้าเว็บ"</a:t>
             </a:r>
           </a:p>
         </p:txBody>
@@ -4152,7 +4152,7 @@
           <a:lstStyle/>
           <a:p>
             <a:r>
-              <a:t>ไล่ทีละกล่อง "หนึ่ง เปิด Firestore ในโหมดทดสอบ · สอง เชื่อมเว็บกับตู้ แล้วใส่ข้อมูลตัวอย่างที่เรียกว่า seed · สาม เปิด Console ส่องด้วยตาว่าข้อมูลเข้าจริง · สี่ ต่อหน้ารายการให้อ่านจากตู้จริง" · หยุดที่กล่องเข้ม "ขั้นที่สามคือขั้นที่คนข้ามแล้วเจ็บที่สุด สร้างเสร็จต้องส่องด้วยตาเสมอ"</a:t>
+              <a:t>ไล่ทีละกล่อง "หนึ่ง เปิด Firestore ในโหมดทดสอบ · สอง เชื่อมเว็บกับคลัง แล้วใส่ข้อมูลตัวอย่างที่เรียกว่า seed · สาม เปิด Console ส่องด้วยตาว่าข้อมูลเข้าจริง · สี่ ต่อหน้ารายการให้อ่านจากคลังจริง" · หยุดที่กล่องเข้ม "ขั้นที่สามคือขั้นที่คนข้ามแล้วเจ็บที่สุด สร้างเสร็จต้องส่องด้วยตาเสมอ"</a:t>
             </a:r>
           </a:p>
         </p:txBody>
@@ -4222,7 +4222,7 @@
           <a:lstStyle/>
           <a:p>
             <a:r>
-              <a:t>พูดว่า "โหมดทดสอบเหมาะกับวันนี้เพราะเรายังไม่มีล็อกอิน แต่มันคือตู้ที่ไม่ล็อกกุญแจ ห้ามใส่ข้อมูลจริงของใครเด็ดขาด" · จำนวนวันหมดอายุขึ้นกับ Firebase ตรวจสอบล่าสุดก่อนสอน ตอนสาธิตให้ซูมที่วันหมดอายุแล้วให้ทุกคนจดของตัวเองตอนบ่าย</a:t>
+              <a:t>พูดว่า "โหมดทดสอบเหมาะกับวันนี้เพราะเรายังไม่มีล็อกอิน แต่มันคือคลังที่ไม่ล็อกกุญแจ ห้ามใส่ข้อมูลจริงของใครเด็ดขาด" · จำนวนวันหมดอายุขึ้นกับ Firebase ตรวจสอบล่าสุดก่อนสอน ตอนสาธิตให้ซูมที่วันหมดอายุแล้วให้ทุกคนจดของตัวเองตอนบ่าย</a:t>
             </a:r>
           </a:p>
         </p:txBody>
@@ -4362,7 +4362,7 @@
           <a:lstStyle/>
           <a:p>
             <a:r>
-              <a:t>พูดช้า ๆ "คำถามที่ทำให้คนจมทั้งบ่ายคือ ไม่รู้ว่าพังตรงไหน · Firebase Console คือหน้าเว็บที่เปิดดูข้อมูลในตู้ด้วยตา มันตอบคำถามนี้ใน 10 วินาที ข้อมูลอยู่ในตู้ไหม ถ้าอยู่ แปลว่าพังตอนอ่าน ถ้าไม่อยู่ แปลว่าพังตอนใส่"</a:t>
+              <a:t>พูดช้า ๆ "คำถามที่ทำให้คนจมทั้งบ่ายคือ ไม่รู้ว่าพังตรงไหน · Firebase Console คือหน้าเว็บที่เปิดดูข้อมูลในคลังด้วยตา มันตอบคำถามนี้ใน 10 วินาที ข้อมูลอยู่ในคลังไหม ถ้าอยู่ แปลว่าพังตอนอ่าน ถ้าไม่อยู่ แปลว่าพังตอนใส่"</a:t>
             </a:r>
           </a:p>
         </p:txBody>
@@ -4642,7 +4642,7 @@
           <a:lstStyle/>
           <a:p>
             <a:r>
-              <a:t>ถามห้องว่า "ถ้าหน้ารายการว่างเปล่า ขั้นแรกทำอะไร" คำตอบที่ต้องการคือ เปิด Console ดูว่าข้อมูลอยู่ในตู้ไหม · ให้ตอบในแชทก่อนไปช่วงสุดท้าย</a:t>
+              <a:t>ถามห้องว่า "ถ้าหน้ารายการว่างเปล่า ขั้นแรกทำอะไร" คำตอบที่ต้องการคือ เปิด Console ดูว่าข้อมูลอยู่ในคลังไหม · ให้ตอบในแชทก่อนไปช่วงสุดท้าย</a:t>
             </a:r>
           </a:p>
         </p:txBody>
@@ -17552,7 +17552,7 @@
                 <a:ea typeface="Leelawadee UI"/>
                 <a:cs typeface="Leelawadee UI"/>
               </a:rPr>
-              <a:t>• เพราะยังไม่มี ฐานข้อมูล (ตู้เก็บข้อมูลที่อยู่ต่อแม้ปิดเบราว์เซอร์)</a:t>
+              <a:t>• เพราะยังไม่มี ฐานข้อมูล (คลังเก็บข้อมูลที่อยู่ต่อแม้ปิดเบราว์เซอร์)</a:t>
             </a:r>
           </a:p>
         </p:txBody>
@@ -17589,7 +17589,7 @@
                 <a:ea typeface="Leelawadee UI"/>
                 <a:cs typeface="Leelawadee UI"/>
               </a:rPr>
-              <a:t>• 🎯 วันนี้เราต่อตู้เก็บข้อมูลให้ระบบของคุณ</a:t>
+              <a:t>• 🎯 วันนี้เราต่อคลังเก็บข้อมูลให้ระบบของคุณ</a:t>
             </a:r>
           </a:p>
         </p:txBody>
@@ -22072,7 +22072,7 @@
                 <a:ea typeface="Leelawadee UI"/>
                 <a:cs typeface="Leelawadee UI"/>
               </a:rPr>
-              <a:t>Firestore — ตู้เก็บข้อมูลบนคลาวด์</a:t>
+              <a:t>Firestore — คลังเก็บข้อมูลบนคลาวด์</a:t>
             </a:r>
           </a:p>
         </p:txBody>
@@ -22469,7 +22469,7 @@
                 <a:ea typeface="Leelawadee UI"/>
                 <a:cs typeface="Leelawadee UI"/>
               </a:rPr>
-              <a:t>หน้าเว็บถามตู้</a:t>
+              <a:t>หน้าเว็บถามคลัง</a:t>
             </a:r>
           </a:p>
         </p:txBody>
@@ -23245,7 +23245,7 @@
                 <a:ea typeface="Leelawadee UI"/>
                 <a:cs typeface="Leelawadee UI"/>
               </a:rPr>
-              <a:t>เปิดตู้โหมดทดสอบ</a:t>
+              <a:t>เปิดคลังโหมดทดสอบ</a:t>
             </a:r>
           </a:p>
         </p:txBody>
@@ -23639,7 +23639,7 @@
                 <a:ea typeface="Leelawadee UI"/>
                 <a:cs typeface="Leelawadee UI"/>
               </a:rPr>
-              <a:t>โหมดทดสอบ — ประตูตู้ยังเปิดอยู่</a:t>
+              <a:t>โหมดทดสอบ — ประตูคลังยังเปิดอยู่</a:t>
             </a:r>
           </a:p>
         </p:txBody>
@@ -23676,7 +23676,7 @@
                 <a:ea typeface="Leelawadee UI"/>
                 <a:cs typeface="Leelawadee UI"/>
               </a:rPr>
-              <a:t>• โหมดทดสอบ (test mode) = ตู้ที่ใครมีที่อยู่ก็เปิดอ่านเขียนได้</a:t>
+              <a:t>• โหมดทดสอบ (test mode) = คลังที่ใครมีที่อยู่ก็เปิดอ่านเขียนได้</a:t>
             </a:r>
           </a:p>
         </p:txBody>
@@ -24228,7 +24228,7 @@
                 <a:ea typeface="Leelawadee UI"/>
                 <a:cs typeface="Leelawadee UI"/>
               </a:rPr>
-              <a:t>• 🗄️ Firestore (ตู้เก็บข้อมูลบนคลาวด์) ที่มีข้อมูลจริงอยู่ข้างใน</a:t>
+              <a:t>• 🗄️ Firestore (คลังเก็บข้อมูลบนคลาวด์) ที่มีข้อมูลจริงอยู่ข้างใน</a:t>
             </a:r>
           </a:p>
         </p:txBody>
@@ -24265,7 +24265,7 @@
                 <a:ea typeface="Leelawadee UI"/>
                 <a:cs typeface="Leelawadee UI"/>
               </a:rPr>
-              <a:t>• 🖥️ หน้ารายการที่อ่านข้อมูลจากตู้จริง ไม่ใช่ของปลอมในโค้ด</a:t>
+              <a:t>• 🖥️ หน้ารายการที่อ่านข้อมูลจากคลังจริง ไม่ใช่ของปลอมในโค้ด</a:t>
             </a:r>
           </a:p>
         </p:txBody>
@@ -24570,7 +24570,7 @@
                 <a:ea typeface="Leelawadee UI"/>
                 <a:cs typeface="Leelawadee UI"/>
               </a:rPr>
-              <a:t>🎬 ดูของจริง — สร้างตู้ · seed · ส่อง · ต่อหน้ารายการ ⏱ 22 นาที</a:t>
+              <a:t>🎬 ดูของจริง — สร้างคลัง · seed · ส่อง · ต่อหน้ารายการ ⏱ 22 นาที</a:t>
             </a:r>
           </a:p>
         </p:txBody>
@@ -24644,7 +24644,7 @@
                 <a:ea typeface="Leelawadee UI"/>
                 <a:cs typeface="Leelawadee UI"/>
               </a:rPr>
-              <a:t>• เชื่อมเว็บกับตู้ แล้ว seed ด้วยวงจร 4 จังหวะ</a:t>
+              <a:t>• เชื่อมเว็บกับคลัง แล้ว seed ด้วยวงจร 4 จังหวะ</a:t>
             </a:r>
           </a:p>
         </p:txBody>
@@ -24718,7 +24718,7 @@
                 <a:ea typeface="Leelawadee UI"/>
                 <a:cs typeface="Leelawadee UI"/>
               </a:rPr>
-              <a:t>• ต่อหน้ารายการอ่านจากตู้จริง → ปิดเบราว์เซอร์ → เปิดใหม่</a:t>
+              <a:t>• ต่อหน้ารายการอ่านจากคลังจริง → ปิดเบราว์เซอร์ → เปิดใหม่</a:t>
             </a:r>
           </a:p>
         </p:txBody>

--- a/materials/week6/w6-slides.pptx
+++ b/materials/week6/w6-slides.pptx
@@ -2055,7 +2055,7 @@
           <a:lstStyle/>
           <a:p>
             <a:r>
-              <a:t>พูดว่า "ช่วงนี้ 32 นาที และเป็นหัวใจของทั้ง Module ครับ เราจะได้วิธีทำงานกับ AI ที่ทำแล้วไม่พัง ทุกเดโมหลังจากนี้ผมจะใช้วิธีนี้ให้เห็นซ้ำ ๆ ทั้งวัน" · เชื่อมกลับไปที่ต้นคาบว่า "จำที่เล่าตอนเช้าได้ไหมครับว่ามันเดา ไม่ใช่รู้ — วิธีที่จะสอนต่อไปนี้คือวิธีรับมือกับข้อนั้นโดยตรง"</a:t>
+              <a:t>พูดว่า "ช่วงนี้ 34 นาที และเป็นหัวใจของทั้ง Module ครับ เราจะได้วิธีทำงานกับ AI ที่ทำแล้วไม่พัง ทุกเดโมหลังจากนี้ผมจะใช้วิธีนี้ให้เห็นซ้ำ ๆ ทั้งวัน" · เชื่อมกลับไปที่ต้นคาบว่า "จำที่เล่าตอนเช้าได้ไหมครับว่ามันเดา ไม่ใช่รู้ — วิธีที่จะสอนต่อไปนี้คือวิธีรับมือกับข้อนั้นโดยตรง"</a:t>
             </a:r>
           </a:p>
         </p:txBody>
@@ -5135,7 +5135,7 @@
           <a:lstStyle/>
           <a:p>
             <a:r>
-              <a:t>พูดว่า "ช่วงสุดท้าย 23 นาทีครับ เรากลับมาที่โต๊ะทำงานของ AI ที่เล่าไว้ตอนเช้า — แต่รอบนี้คุณเห็นของจริงมาทั้งเช้าแล้ว" · ถามห้องว่า "ใครสังเกตว่าช่วงท้ายเดโม AI เริ่มตอบช้าลงหรือเริ่มลืมบ้างครับ" รอคำตอบ 2–3 อันก่อนไปต่อ</a:t>
+              <a:t>พูดว่า "ช่วงสุดท้าย 15 นาทีครับ เรากลับมาที่โต๊ะทำงานของ AI ที่เล่าไว้ตอนเช้า — แต่รอบนี้คุณเห็นของจริงมาทั้งเช้าแล้ว" · ถามห้องว่า "ใครสังเกตว่าช่วงท้ายเดโม AI เริ่มตอบช้าลงหรือเริ่มลืมบ้างครับ" รอคำตอบ 2–3 อันก่อนไปต่อ</a:t>
             </a:r>
           </a:p>
         </p:txBody>
@@ -5345,7 +5345,7 @@
           <a:lstStyle/>
           <a:p>
             <a:r>
-              <a:t>📍 สคริปต์สาธิต: w6-demo-fixit.md → บล็อก E · จบแล้วกลับเข้าสไลด์หน้า 73 · ก่อนเริ่มพูดว่า "ผมจะทำสิ่งที่ห้ามทำให้ดูนะครับ เพื่อให้เห็นอาการจริงว่าหน้าตาเป็นยังไง จะได้จับได้ตอนเจอเอง" · นี่คือจุดที่ตั้งใจให้พังของสัปดาห์นี้ ห้ามตัด</a:t>
+              <a:t>ประโยคที่ต้องพูดให้ได้ "ที่ผมบอกว่าคุยยาวแล้วมันเริ่มเพี้ยน ไม่ใช่ความรู้สึกผมคนเดียวนะครับ มีคนวัดไว้แล้ว" · ชี้แถวแรก "เขาทดสอบ AI สิบแปดตัว ทั้ง Claude ทั้ง GPT ทั้ง Gemini ผลออกมาเหมือนกันหมด — พอข้อความยาวขึ้น ความแม่นลดลง แม้จะยังไม่เต็มโต๊ะด้วยซ้ำ" · ชี้แถวสอง "ของ Stanford ชัดกว่านั้น พอเอกสารเยอะขึ้น ความแม่นตกจากเจ็ดสิบกว่าเหลือห้าสิบกว่า และข้อมูลที่อยู่ตรงกลางคือส่วนที่หลุดง่ายที่สุด ต้นกับท้ายจำได้ดี" · ปิดด้วยบรรทัดล่าง "เพราะฉะนั้นอย่ารอให้เต็มแล้วค่อยจัดการครับ" · 🔗 ลิงก์ไว้เปิดถ้ามีคนถาม: trychroma.com/research/context-rot และ arxiv.org/abs/2307.03172</a:t>
             </a:r>
           </a:p>
         </p:txBody>
@@ -9578,7 +9578,7 @@
                 <a:ea typeface="Consolas"/>
                 <a:cs typeface="Consolas"/>
               </a:rPr>
-              <a:t>09:45  วงจร 4 จังหวะ ⭐ วิธีสั่งงาน AI ทั้ง Module</a:t>
+              <a:t>09:49  วงจร 4 จังหวะ ⭐ วิธีสั่งงาน AI ทั้ง Module</a:t>
             </a:r>
           </a:p>
           <a:p>
@@ -9592,7 +9592,7 @@
                 <a:ea typeface="Consolas"/>
                 <a:cs typeface="Consolas"/>
               </a:rPr>
-              <a:t>10:15  ☕ พัก 10 นาที</a:t>
+              <a:t>10:23  ☕ พัก 10 นาที</a:t>
             </a:r>
           </a:p>
           <a:p>
@@ -9606,7 +9606,7 @@
                 <a:ea typeface="Consolas"/>
                 <a:cs typeface="Consolas"/>
               </a:rPr>
-              <a:t>10:25  NoSQL — ฐานข้อมูลแบบโฟลเดอร์และไฟล์</a:t>
+              <a:t>10:33  NoSQL — ฐานข้อมูลแบบโฟลเดอร์และไฟล์</a:t>
             </a:r>
           </a:p>
           <a:p>
@@ -9620,7 +9620,7 @@
                 <a:ea typeface="Consolas"/>
                 <a:cs typeface="Consolas"/>
               </a:rPr>
-              <a:t>10:57  สร้าง Firestore จริง ⭐</a:t>
+              <a:t>11:05  สร้าง Firestore จริง ⭐</a:t>
             </a:r>
           </a:p>
           <a:p>
@@ -9634,7 +9634,7 @@
                 <a:ea typeface="Consolas"/>
                 <a:cs typeface="Consolas"/>
               </a:rPr>
-              <a:t>11:27  จัดการความจำของ AI</a:t>
+              <a:t>11:35  จัดการความจำของ AI</a:t>
             </a:r>
           </a:p>
           <a:p>
@@ -13023,7 +13023,7 @@
                 <a:ea typeface="Leelawadee UI"/>
                 <a:cs typeface="Leelawadee UI"/>
               </a:rPr>
-              <a:t>ช่วงที่ 1 — เครื่องมือพื้นฐาน ⏱ 09:23–09:45</a:t>
+              <a:t>ช่วงที่ 1 — เครื่องมือพื้นฐาน ⏱ 09:23–09:49</a:t>
             </a:r>
           </a:p>
         </p:txBody>
@@ -15449,7 +15449,7 @@
                 <a:ea typeface="Leelawadee UI"/>
                 <a:cs typeface="Leelawadee UI"/>
               </a:rPr>
-              <a:t>ช่วงที่ 2 — 🔁 วงจร 4 จังหวะ ⭐ ⏱ 09:45–10:15</a:t>
+              <a:t>ช่วงที่ 2 — 🔁 วงจร 4 จังหวะ ⭐ ⏱ 09:49–10:23</a:t>
             </a:r>
           </a:p>
         </p:txBody>
@@ -19742,7 +19742,7 @@
                 <a:ea typeface="Leelawadee UI"/>
                 <a:cs typeface="Leelawadee UI"/>
               </a:rPr>
-              <a:t>☕ พัก 10 นาที — กลับมา 10:25</a:t>
+              <a:t>☕ พัก 10 นาที — กลับมา 10:33</a:t>
             </a:r>
           </a:p>
         </p:txBody>
@@ -19876,7 +19876,7 @@
                 <a:ea typeface="Leelawadee UI"/>
                 <a:cs typeface="Leelawadee UI"/>
               </a:rPr>
-              <a:t>ช่วงที่ 3 — 🗂️ NoSQL แบบโฟลเดอร์และไฟล์ ⏱ 10:25–10:57</a:t>
+              <a:t>ช่วงที่ 3 — 🗂️ NoSQL แบบโฟลเดอร์และไฟล์ ⏱ 10:33–11:05</a:t>
             </a:r>
           </a:p>
         </p:txBody>
@@ -24561,7 +24561,7 @@
                 <a:ea typeface="Leelawadee UI"/>
                 <a:cs typeface="Leelawadee UI"/>
               </a:rPr>
-              <a:t>ช่วงที่ 4 — 🗄️ สร้าง Firestore จริง ⭐ ⏱ 10:57–11:27</a:t>
+              <a:t>ช่วงที่ 4 — 🗄️ สร้าง Firestore จริง ⭐ ⏱ 11:05–11:35</a:t>
             </a:r>
           </a:p>
         </p:txBody>
@@ -27853,7 +27853,7 @@
                 <a:ea typeface="Leelawadee UI"/>
                 <a:cs typeface="Leelawadee UI"/>
               </a:rPr>
-              <a:t>ช่วงที่ 5 — จัดการความจำของ AI ⏱ 11:27–11:50</a:t>
+              <a:t>ช่วงที่ 5 — จัดการความจำของ AI ⏱ 11:35–11:50</a:t>
             </a:r>
           </a:p>
         </p:txBody>
@@ -28153,130 +28153,7 @@
       <p:grpSpPr/>
       <p:sp>
         <p:nvSpPr>
-          <p:cNvPr id="2" name="Rectangle 1"/>
-          <p:cNvSpPr/>
-          <p:nvPr/>
-        </p:nvSpPr>
-        <p:spPr>
-          <a:xfrm>
-            <a:off x="0" y="0"/>
-            <a:ext cx="12191695" cy="6858000"/>
-          </a:xfrm>
-          <a:prstGeom prst="rect">
-            <a:avLst/>
-          </a:prstGeom>
-          <a:solidFill>
-            <a:srgbClr val="FFF3DF"/>
-          </a:solidFill>
-          <a:ln>
-            <a:noFill/>
-          </a:ln>
-        </p:spPr>
-        <p:style>
-          <a:lnRef idx="1">
-            <a:schemeClr val="accent1"/>
-          </a:lnRef>
-          <a:fillRef idx="3">
-            <a:schemeClr val="accent1"/>
-          </a:fillRef>
-          <a:effectRef idx="2">
-            <a:schemeClr val="accent1"/>
-          </a:effectRef>
-          <a:fontRef idx="minor">
-            <a:schemeClr val="lt1"/>
-          </a:fontRef>
-        </p:style>
-        <p:txBody>
-          <a:bodyPr rtlCol="0" anchor="ctr"/>
-          <a:lstStyle/>
-          <a:p>
-            <a:pPr algn="ctr"/>
-          </a:p>
-        </p:txBody>
-      </p:sp>
-      <p:sp>
-        <p:nvSpPr>
-          <p:cNvPr id="3" name="Rectangle 2"/>
-          <p:cNvSpPr/>
-          <p:nvPr/>
-        </p:nvSpPr>
-        <p:spPr>
-          <a:xfrm>
-            <a:off x="0" y="0"/>
-            <a:ext cx="146304" cy="6858000"/>
-          </a:xfrm>
-          <a:prstGeom prst="rect">
-            <a:avLst/>
-          </a:prstGeom>
-          <a:solidFill>
-            <a:srgbClr val="E0A02C"/>
-          </a:solidFill>
-          <a:ln>
-            <a:noFill/>
-          </a:ln>
-        </p:spPr>
-        <p:style>
-          <a:lnRef idx="1">
-            <a:schemeClr val="accent1"/>
-          </a:lnRef>
-          <a:fillRef idx="3">
-            <a:schemeClr val="accent1"/>
-          </a:fillRef>
-          <a:effectRef idx="2">
-            <a:schemeClr val="accent1"/>
-          </a:effectRef>
-          <a:fontRef idx="minor">
-            <a:schemeClr val="lt1"/>
-          </a:fontRef>
-        </p:style>
-        <p:txBody>
-          <a:bodyPr rtlCol="0" anchor="ctr"/>
-          <a:lstStyle/>
-          <a:p>
-            <a:pPr algn="ctr"/>
-          </a:p>
-        </p:txBody>
-      </p:sp>
-      <p:sp>
-        <p:nvSpPr>
-          <p:cNvPr id="4" name="TextBox 3"/>
-          <p:cNvSpPr txBox="1"/>
-          <p:nvPr/>
-        </p:nvSpPr>
-        <p:spPr>
-          <a:xfrm>
-            <a:off x="9082735" y="109728"/>
-            <a:ext cx="2834640" cy="384048"/>
-          </a:xfrm>
-          <a:prstGeom prst="rect">
-            <a:avLst/>
-          </a:prstGeom>
-          <a:noFill/>
-        </p:spPr>
-        <p:txBody>
-          <a:bodyPr wrap="square">
-            <a:spAutoFit/>
-          </a:bodyPr>
-          <a:lstStyle/>
-          <a:p>
-            <a:pPr algn="r"/>
-            <a:r>
-              <a:rPr sz="1400" b="1">
-                <a:solidFill>
-                  <a:srgbClr val="8A5400"/>
-                </a:solidFill>
-                <a:latin typeface="Leelawadee UI"/>
-                <a:ea typeface="Leelawadee UI"/>
-                <a:cs typeface="Leelawadee UI"/>
-              </a:rPr>
-              <a:t>🎬 สลับไปหน้าจอสาธิตสด</a:t>
-            </a:r>
-          </a:p>
-        </p:txBody>
-      </p:sp>
-      <p:sp>
-        <p:nvSpPr>
-          <p:cNvPr id="5" name="TextBox 4"/>
+          <p:cNvPr id="2" name="TextBox 1"/>
           <p:cNvSpPr txBox="1"/>
           <p:nvPr/>
         </p:nvSpPr>
@@ -28300,27 +28177,285 @@
             <a:r>
               <a:rPr sz="3600" b="1">
                 <a:solidFill>
-                  <a:srgbClr val="8A5400"/>
-                </a:solidFill>
-                <a:latin typeface="Leelawadee UI"/>
-                <a:ea typeface="Leelawadee UI"/>
-                <a:cs typeface="Leelawadee UI"/>
-              </a:rPr>
-              <a:t>🎬💥 ดูของจริง — ปล่อยให้ความจำบวมจนลืมข้อตกลง ⏱ 12 นาที</a:t>
-            </a:r>
-          </a:p>
-        </p:txBody>
-      </p:sp>
-      <p:sp>
-        <p:nvSpPr>
-          <p:cNvPr id="6" name="TextBox 5"/>
-          <p:cNvSpPr txBox="1"/>
-          <p:nvPr/>
-        </p:nvSpPr>
-        <p:spPr>
-          <a:xfrm>
-            <a:off x="822960" y="2075688"/>
-            <a:ext cx="10545775" cy="560324"/>
+                  <a:srgbClr val="1F5FA8"/>
+                </a:solidFill>
+                <a:latin typeface="Leelawadee UI"/>
+                <a:ea typeface="Leelawadee UI"/>
+                <a:cs typeface="Leelawadee UI"/>
+              </a:rPr>
+              <a:t>ไม่ใช่ความรู้สึกเรา — มีงานวิจัยวัดไว้แล้ว</a:t>
+            </a:r>
+          </a:p>
+        </p:txBody>
+      </p:sp>
+      <p:graphicFrame>
+        <p:nvGraphicFramePr>
+          <p:cNvPr id="3" name="Table 2"/>
+          <p:cNvGraphicFramePr>
+            <a:graphicFrameLocks noGrp="1"/>
+          </p:cNvGraphicFramePr>
+          <p:nvPr/>
+        </p:nvGraphicFramePr>
+        <p:xfrm>
+          <a:off x="822960" y="2075688"/>
+          <a:ext cx="10545775" cy="1508760"/>
+        </p:xfrm>
+        <a:graphic>
+          <a:graphicData uri="http://schemas.openxmlformats.org/drawingml/2006/table">
+            <a:tbl>
+              <a:tblPr firstRow="1" bandRow="1">
+                <a:tableStyleId>{5C22544A-7EE6-4342-B048-85BDC9FD1C3A}</a:tableStyleId>
+              </a:tblPr>
+              <a:tblGrid>
+                <a:gridCol w="3515258"/>
+                <a:gridCol w="3515258"/>
+                <a:gridCol w="3515259"/>
+              </a:tblGrid>
+              <a:tr h="502920">
+                <a:tc>
+                  <a:txBody>
+                    <a:bodyPr/>
+                    <a:lstStyle/>
+                    <a:p>
+                      <a:pPr algn="l"/>
+                      <a:r>
+                        <a:rPr sz="1800" b="1">
+                          <a:solidFill>
+                            <a:srgbClr val="FFFFFF"/>
+                          </a:solidFill>
+                          <a:latin typeface="Leelawadee UI"/>
+                          <a:ea typeface="Leelawadee UI"/>
+                          <a:cs typeface="Leelawadee UI"/>
+                        </a:rPr>
+                        <a:t>ใครวัด</a:t>
+                      </a:r>
+                    </a:p>
+                  </a:txBody>
+                  <a:tcPr marL="91440" marR="91440" marT="27432" marB="27432" anchor="ctr">
+                    <a:solidFill>
+                      <a:srgbClr val="1F5FA8"/>
+                    </a:solidFill>
+                  </a:tcPr>
+                </a:tc>
+                <a:tc>
+                  <a:txBody>
+                    <a:bodyPr/>
+                    <a:lstStyle/>
+                    <a:p>
+                      <a:pPr algn="l"/>
+                      <a:r>
+                        <a:rPr sz="1800" b="1">
+                          <a:solidFill>
+                            <a:srgbClr val="FFFFFF"/>
+                          </a:solidFill>
+                          <a:latin typeface="Leelawadee UI"/>
+                          <a:ea typeface="Leelawadee UI"/>
+                          <a:cs typeface="Leelawadee UI"/>
+                        </a:rPr>
+                        <a:t>วัดอะไร</a:t>
+                      </a:r>
+                    </a:p>
+                  </a:txBody>
+                  <a:tcPr marL="91440" marR="91440" marT="27432" marB="27432" anchor="ctr">
+                    <a:solidFill>
+                      <a:srgbClr val="1F5FA8"/>
+                    </a:solidFill>
+                  </a:tcPr>
+                </a:tc>
+                <a:tc>
+                  <a:txBody>
+                    <a:bodyPr/>
+                    <a:lstStyle/>
+                    <a:p>
+                      <a:pPr algn="l"/>
+                      <a:r>
+                        <a:rPr sz="1800" b="1">
+                          <a:solidFill>
+                            <a:srgbClr val="FFFFFF"/>
+                          </a:solidFill>
+                          <a:latin typeface="Leelawadee UI"/>
+                          <a:ea typeface="Leelawadee UI"/>
+                          <a:cs typeface="Leelawadee UI"/>
+                        </a:rPr>
+                        <a:t>ผลที่ได้</a:t>
+                      </a:r>
+                    </a:p>
+                  </a:txBody>
+                  <a:tcPr marL="91440" marR="91440" marT="27432" marB="27432" anchor="ctr">
+                    <a:solidFill>
+                      <a:srgbClr val="1F5FA8"/>
+                    </a:solidFill>
+                  </a:tcPr>
+                </a:tc>
+              </a:tr>
+              <a:tr h="502920">
+                <a:tc>
+                  <a:txBody>
+                    <a:bodyPr/>
+                    <a:lstStyle/>
+                    <a:p>
+                      <a:pPr algn="l"/>
+                      <a:r>
+                        <a:rPr sz="1800" b="0">
+                          <a:solidFill>
+                            <a:srgbClr val="1A1A1A"/>
+                          </a:solidFill>
+                          <a:latin typeface="Leelawadee UI"/>
+                          <a:ea typeface="Leelawadee UI"/>
+                          <a:cs typeface="Leelawadee UI"/>
+                        </a:rPr>
+                        <a:t>Chroma 2568</a:t>
+                      </a:r>
+                    </a:p>
+                  </a:txBody>
+                  <a:tcPr marL="91440" marR="91440" marT="27432" marB="27432" anchor="ctr">
+                    <a:solidFill>
+                      <a:srgbClr val="FFFFFF"/>
+                    </a:solidFill>
+                  </a:tcPr>
+                </a:tc>
+                <a:tc>
+                  <a:txBody>
+                    <a:bodyPr/>
+                    <a:lstStyle/>
+                    <a:p>
+                      <a:pPr algn="l"/>
+                      <a:r>
+                        <a:rPr sz="1800" b="0">
+                          <a:solidFill>
+                            <a:srgbClr val="1A1A1A"/>
+                          </a:solidFill>
+                          <a:latin typeface="Leelawadee UI"/>
+                          <a:ea typeface="Leelawadee UI"/>
+                          <a:cs typeface="Leelawadee UI"/>
+                        </a:rPr>
+                        <a:t>AI 18 ตัว — Claude · GPT · Gemini · Qwen</a:t>
+                      </a:r>
+                    </a:p>
+                  </a:txBody>
+                  <a:tcPr marL="91440" marR="91440" marT="27432" marB="27432" anchor="ctr">
+                    <a:solidFill>
+                      <a:srgbClr val="FFFFFF"/>
+                    </a:solidFill>
+                  </a:tcPr>
+                </a:tc>
+                <a:tc>
+                  <a:txBody>
+                    <a:bodyPr/>
+                    <a:lstStyle/>
+                    <a:p>
+                      <a:pPr algn="l"/>
+                      <a:r>
+                        <a:rPr sz="1800" b="0">
+                          <a:solidFill>
+                            <a:srgbClr val="1A1A1A"/>
+                          </a:solidFill>
+                          <a:latin typeface="Leelawadee UI"/>
+                          <a:ea typeface="Leelawadee UI"/>
+                          <a:cs typeface="Leelawadee UI"/>
+                        </a:rPr>
+                        <a:t>ยาวขึ้น แม่นลดลงทุกตัว แม้โต๊ะยังไม่เต็ม</a:t>
+                      </a:r>
+                    </a:p>
+                  </a:txBody>
+                  <a:tcPr marL="91440" marR="91440" marT="27432" marB="27432" anchor="ctr">
+                    <a:solidFill>
+                      <a:srgbClr val="FFFFFF"/>
+                    </a:solidFill>
+                  </a:tcPr>
+                </a:tc>
+              </a:tr>
+              <a:tr h="502920">
+                <a:tc>
+                  <a:txBody>
+                    <a:bodyPr/>
+                    <a:lstStyle/>
+                    <a:p>
+                      <a:pPr algn="l"/>
+                      <a:r>
+                        <a:rPr sz="1800" b="0">
+                          <a:solidFill>
+                            <a:srgbClr val="1A1A1A"/>
+                          </a:solidFill>
+                          <a:latin typeface="Leelawadee UI"/>
+                          <a:ea typeface="Leelawadee UI"/>
+                          <a:cs typeface="Leelawadee UI"/>
+                        </a:rPr>
+                        <a:t>Stanford 2566</a:t>
+                      </a:r>
+                    </a:p>
+                  </a:txBody>
+                  <a:tcPr marL="91440" marR="91440" marT="27432" marB="27432" anchor="ctr">
+                    <a:solidFill>
+                      <a:srgbClr val="F2F4F7"/>
+                    </a:solidFill>
+                  </a:tcPr>
+                </a:tc>
+                <a:tc>
+                  <a:txBody>
+                    <a:bodyPr/>
+                    <a:lstStyle/>
+                    <a:p>
+                      <a:pPr algn="l"/>
+                      <a:r>
+                        <a:rPr sz="1800" b="0">
+                          <a:solidFill>
+                            <a:srgbClr val="1A1A1A"/>
+                          </a:solidFill>
+                          <a:latin typeface="Leelawadee UI"/>
+                          <a:ea typeface="Leelawadee UI"/>
+                          <a:cs typeface="Leelawadee UI"/>
+                        </a:rPr>
+                        <a:t>หาคำตอบจากเอกสาร 20 ชิ้น</a:t>
+                      </a:r>
+                    </a:p>
+                  </a:txBody>
+                  <a:tcPr marL="91440" marR="91440" marT="27432" marB="27432" anchor="ctr">
+                    <a:solidFill>
+                      <a:srgbClr val="F2F4F7"/>
+                    </a:solidFill>
+                  </a:tcPr>
+                </a:tc>
+                <a:tc>
+                  <a:txBody>
+                    <a:bodyPr/>
+                    <a:lstStyle/>
+                    <a:p>
+                      <a:pPr algn="l"/>
+                      <a:r>
+                        <a:rPr sz="1800" b="0">
+                          <a:solidFill>
+                            <a:srgbClr val="1A1A1A"/>
+                          </a:solidFill>
+                          <a:latin typeface="Leelawadee UI"/>
+                          <a:ea typeface="Leelawadee UI"/>
+                          <a:cs typeface="Leelawadee UI"/>
+                        </a:rPr>
+                        <a:t>ความแม่นตกจาก 70–75% เหลือ 55–60%</a:t>
+                      </a:r>
+                    </a:p>
+                  </a:txBody>
+                  <a:tcPr marL="91440" marR="91440" marT="27432" marB="27432" anchor="ctr">
+                    <a:solidFill>
+                      <a:srgbClr val="F2F4F7"/>
+                    </a:solidFill>
+                  </a:tcPr>
+                </a:tc>
+              </a:tr>
+            </a:tbl>
+          </a:graphicData>
+        </a:graphic>
+      </p:graphicFrame>
+      <p:sp>
+        <p:nvSpPr>
+          <p:cNvPr id="4" name="TextBox 3"/>
+          <p:cNvSpPr txBox="1"/>
+          <p:nvPr/>
+        </p:nvSpPr>
+        <p:spPr>
+          <a:xfrm>
+            <a:off x="822960" y="3767328"/>
+            <a:ext cx="10545775" cy="1029208"/>
           </a:xfrm>
           <a:prstGeom prst="rect">
             <a:avLst/>
@@ -28343,88 +28478,14 @@
                 <a:ea typeface="Leelawadee UI"/>
                 <a:cs typeface="Leelawadee UI"/>
               </a:rPr>
-              <a:t>• ผมจะสั่งงานมั่ว ๆ ต่อจากบทสนทนายาวทั้งเช้า</a:t>
-            </a:r>
-          </a:p>
-        </p:txBody>
-      </p:sp>
-      <p:sp>
-        <p:nvSpPr>
-          <p:cNvPr id="7" name="TextBox 6"/>
-          <p:cNvSpPr txBox="1"/>
-          <p:nvPr/>
-        </p:nvSpPr>
-        <p:spPr>
-          <a:xfrm>
-            <a:off x="822960" y="2690876"/>
-            <a:ext cx="10545775" cy="560324"/>
-          </a:xfrm>
-          <a:prstGeom prst="rect">
-            <a:avLst/>
-          </a:prstGeom>
-          <a:noFill/>
-        </p:spPr>
-        <p:txBody>
-          <a:bodyPr wrap="square">
-            <a:spAutoFit/>
-          </a:bodyPr>
-          <a:lstStyle/>
-          <a:p>
-            <a:pPr algn="l"/>
-            <a:r>
-              <a:rPr sz="2600" b="0">
-                <a:solidFill>
-                  <a:srgbClr val="1A1A1A"/>
-                </a:solidFill>
-                <a:latin typeface="Leelawadee UI"/>
-                <a:ea typeface="Leelawadee UI"/>
-                <a:cs typeface="Leelawadee UI"/>
-              </a:rPr>
-              <a:t>• ดูอาการจริง: ลืมสถานะภาษาไทยที่ตกลงกันไว้</a:t>
-            </a:r>
-          </a:p>
-        </p:txBody>
-      </p:sp>
-      <p:sp>
-        <p:nvSpPr>
-          <p:cNvPr id="8" name="TextBox 7"/>
-          <p:cNvSpPr txBox="1"/>
-          <p:nvPr/>
-        </p:nvSpPr>
-        <p:spPr>
-          <a:xfrm>
-            <a:off x="822960" y="3306064"/>
-            <a:ext cx="10545775" cy="560324"/>
-          </a:xfrm>
-          <a:prstGeom prst="rect">
-            <a:avLst/>
-          </a:prstGeom>
-          <a:noFill/>
-        </p:spPr>
-        <p:txBody>
-          <a:bodyPr wrap="square">
-            <a:spAutoFit/>
-          </a:bodyPr>
-          <a:lstStyle/>
-          <a:p>
-            <a:pPr algn="l"/>
-            <a:r>
-              <a:rPr sz="2600" b="0">
-                <a:solidFill>
-                  <a:srgbClr val="1A1A1A"/>
-                </a:solidFill>
-                <a:latin typeface="Leelawadee UI"/>
-                <a:ea typeface="Leelawadee UI"/>
-                <a:cs typeface="Leelawadee UI"/>
-              </a:rPr>
-              <a:t>• แล้วกู้ให้ดูทีละขั้น จนกลับมาทำงานได้ดีกว่าเดิม</a:t>
-            </a:r>
-          </a:p>
-        </p:txBody>
-      </p:sp>
-      <p:sp>
-        <p:nvSpPr>
-          <p:cNvPr id="9" name="TextBox 8"/>
+              <a:t>• 📌 ไม่ใช่ว่าเต็มแล้วค่อยแย่ — ยาวขึ้นเมื่อไรก็เริ่มแย่ลงทันที</a:t>
+            </a:r>
+          </a:p>
+        </p:txBody>
+      </p:sp>
+      <p:sp>
+        <p:nvSpPr>
+          <p:cNvPr id="5" name="TextBox 4"/>
           <p:cNvSpPr txBox="1"/>
           <p:nvPr/>
         </p:nvSpPr>

--- a/materials/week6/w6-slides.pptx
+++ b/materials/week6/w6-slides.pptx
@@ -1988,7 +1988,7 @@
           <a:lstStyle/>
           <a:p>
             <a:r>
-              <a:t>เปิดด้วยคำถามที่ทุกคนกลัวที่สุด "ถ้า AI แก้แล้วพังจะทำยังไงครับ" รอ 5 วินาที แล้วชี้ทีละบรรทัดว่า "มีตาข่ายรับสองชั้น ไม่ได้มีชั้นเดียว" · ย้ำว่าเมนู Esc Esc ย้อนได้ทั้งไฟล์และบทสนทนา · ปิดท้ายว่า "ถ้าเมนูหน้าตาไม่เหมือนของผม พิมพ์ /help ดูรายการของเวอร์ชันคุณ"</a:t>
+              <a:t>เปิดด้วยคำถามที่ทุกคนกลัวที่สุด "ถ้า AI แก้แล้วพังจะทำยังไงครับ" รอ 5 วินาที แล้วชี้ทีละบรรทัดว่า "มีตาข่ายรับสองชั้น ไม่ได้มีชั้นเดียว" · ย้ำว่าเมนู Esc Esc ย้อนได้ทั้งไฟล์และบทสนทนา · ปิดท้ายว่า "ถ้าเมนูหน้าตาไม่เหมือนของผม พิมพ์ /help ดูรายการของเวอร์ชันคุณ" · ย้ำกล่องเหลือง "ชั้นที่สองไม่ต้องจำคำสั่งนะครับ พิมพ์ภาษาไทยบอกมันแบบนี้เลย"</a:t>
             </a:r>
           </a:p>
         </p:txBody>
@@ -15642,7 +15642,7 @@
         <p:spPr>
           <a:xfrm>
             <a:off x="822960" y="1472184"/>
-            <a:ext cx="10545775" cy="1298448"/>
+            <a:ext cx="10545775" cy="987552"/>
           </a:xfrm>
           <a:prstGeom prst="rect">
             <a:avLst/>
@@ -15699,32 +15699,106 @@
               <a:t>Esc Esc      เปิดเมนูย้อนกลับ เลือกจุดที่จะย้อน (/rewind ได้ผลเดียวกัน)</a:t>
             </a:r>
           </a:p>
-          <a:p>
-            <a:pPr algn="l"/>
-            <a:r>
-              <a:rPr sz="1800" b="0">
-                <a:solidFill>
-                  <a:srgbClr val="1A1A1A"/>
-                </a:solidFill>
-                <a:latin typeface="Consolas"/>
-                <a:ea typeface="Consolas"/>
-                <a:cs typeface="Consolas"/>
-              </a:rPr>
-              <a:t>git checkout .   ย้อนไฟล์กลับไปจุดที่ commit ไว้ล่าสุด</a:t>
-            </a:r>
-          </a:p>
-        </p:txBody>
-      </p:sp>
-      <p:sp>
-        <p:nvSpPr>
-          <p:cNvPr id="4" name="TextBox 3"/>
+        </p:txBody>
+      </p:sp>
+      <p:sp>
+        <p:nvSpPr>
+          <p:cNvPr id="4" name="Rounded Rectangle 3"/>
+          <p:cNvSpPr/>
+          <p:nvPr/>
+        </p:nvSpPr>
+        <p:spPr>
+          <a:xfrm>
+            <a:off x="822960" y="2642616"/>
+            <a:ext cx="10545775" cy="1078992"/>
+          </a:xfrm>
+          <a:prstGeom prst="roundRect">
+            <a:avLst/>
+          </a:prstGeom>
+          <a:solidFill>
+            <a:srgbClr val="FFF7E6"/>
+          </a:solidFill>
+          <a:ln w="22225">
+            <a:solidFill>
+              <a:srgbClr val="E0A02C"/>
+            </a:solidFill>
+          </a:ln>
+          <a:effectLst/>
+        </p:spPr>
+        <p:style>
+          <a:lnRef idx="1">
+            <a:schemeClr val="accent1"/>
+          </a:lnRef>
+          <a:fillRef idx="3">
+            <a:schemeClr val="accent1"/>
+          </a:fillRef>
+          <a:effectRef idx="2">
+            <a:schemeClr val="accent1"/>
+          </a:effectRef>
+          <a:fontRef idx="minor">
+            <a:schemeClr val="lt1"/>
+          </a:fontRef>
+        </p:style>
+        <p:txBody>
+          <a:bodyPr rtlCol="0" anchor="ctr"/>
+          <a:lstStyle/>
+          <a:p/>
+        </p:txBody>
+      </p:sp>
+      <p:sp>
+        <p:nvSpPr>
+          <p:cNvPr id="5" name="Rounded Rectangle 4"/>
+          <p:cNvSpPr/>
+          <p:nvPr/>
+        </p:nvSpPr>
+        <p:spPr>
+          <a:xfrm>
+            <a:off x="822960" y="2642616"/>
+            <a:ext cx="100584" cy="1078992"/>
+          </a:xfrm>
+          <a:prstGeom prst="roundRect">
+            <a:avLst/>
+          </a:prstGeom>
+          <a:solidFill>
+            <a:srgbClr val="E0A02C"/>
+          </a:solidFill>
+          <a:ln>
+            <a:noFill/>
+          </a:ln>
+          <a:effectLst/>
+        </p:spPr>
+        <p:style>
+          <a:lnRef idx="1">
+            <a:schemeClr val="accent1"/>
+          </a:lnRef>
+          <a:fillRef idx="3">
+            <a:schemeClr val="accent1"/>
+          </a:fillRef>
+          <a:effectRef idx="2">
+            <a:schemeClr val="accent1"/>
+          </a:effectRef>
+          <a:fontRef idx="minor">
+            <a:schemeClr val="lt1"/>
+          </a:fontRef>
+        </p:style>
+        <p:txBody>
+          <a:bodyPr rtlCol="0" anchor="ctr"/>
+          <a:lstStyle/>
+          <a:p>
+            <a:pPr algn="ctr"/>
+          </a:p>
+        </p:txBody>
+      </p:sp>
+      <p:sp>
+        <p:nvSpPr>
+          <p:cNvPr id="6" name="TextBox 5"/>
           <p:cNvSpPr txBox="1"/>
           <p:nvPr/>
         </p:nvSpPr>
         <p:spPr>
           <a:xfrm>
-            <a:off x="822960" y="2953512"/>
-            <a:ext cx="10545775" cy="1029208"/>
+            <a:off x="1097280" y="2697480"/>
+            <a:ext cx="10088575" cy="310896"/>
           </a:xfrm>
           <a:prstGeom prst="rect">
             <a:avLst/>
@@ -15739,29 +15813,29 @@
           <a:p>
             <a:pPr algn="l"/>
             <a:r>
-              <a:rPr sz="2600" b="0">
-                <a:solidFill>
-                  <a:srgbClr val="1A1A1A"/>
-                </a:solidFill>
-                <a:latin typeface="Leelawadee UI"/>
-                <a:ea typeface="Leelawadee UI"/>
-                <a:cs typeface="Leelawadee UI"/>
-              </a:rPr>
-              <a:t>• 🥅 ชั้นที่ 1 — Esc Esc ใช้ตอนรู้ตัวทันทีว่าคำสั่งเมื่อกี้ไม่ใช่</a:t>
-            </a:r>
-          </a:p>
-        </p:txBody>
-      </p:sp>
-      <p:sp>
-        <p:nvSpPr>
-          <p:cNvPr id="5" name="TextBox 4"/>
+              <a:rPr sz="1400" b="1">
+                <a:solidFill>
+                  <a:srgbClr val="A86C0A"/>
+                </a:solidFill>
+                <a:latin typeface="Leelawadee UI"/>
+                <a:ea typeface="Leelawadee UI"/>
+                <a:cs typeface="Leelawadee UI"/>
+              </a:rPr>
+              <a:t>💬 ชั้นที่ 2 — พิมพ์บอก Claude</a:t>
+            </a:r>
+          </a:p>
+        </p:txBody>
+      </p:sp>
+      <p:sp>
+        <p:nvSpPr>
+          <p:cNvPr id="7" name="TextBox 6"/>
           <p:cNvSpPr txBox="1"/>
           <p:nvPr/>
         </p:nvSpPr>
         <p:spPr>
           <a:xfrm>
-            <a:off x="822960" y="4037584"/>
-            <a:ext cx="10545775" cy="1029208"/>
+            <a:off x="1097280" y="3026664"/>
+            <a:ext cx="10088575" cy="384048"/>
           </a:xfrm>
           <a:prstGeom prst="rect">
             <a:avLst/>
@@ -15774,6 +15848,47 @@
           </a:bodyPr>
           <a:lstStyle/>
           <a:p>
+            <a:pPr algn="l">
+              <a:spcAft>
+                <a:spcPts val="0"/>
+              </a:spcAft>
+            </a:pPr>
+            <a:r>
+              <a:rPr sz="2000" b="0">
+                <a:solidFill>
+                  <a:srgbClr val="1A1A1A"/>
+                </a:solidFill>
+                <a:latin typeface="Leelawadee UI"/>
+                <a:ea typeface="Leelawadee UI"/>
+                <a:cs typeface="Leelawadee UI"/>
+              </a:rPr>
+              <a:t>ช่วยย้อนไฟล์ทั้งหมดกลับไปหมุดล่าสุดให้ผม</a:t>
+            </a:r>
+          </a:p>
+        </p:txBody>
+      </p:sp>
+      <p:sp>
+        <p:nvSpPr>
+          <p:cNvPr id="8" name="TextBox 7"/>
+          <p:cNvSpPr txBox="1"/>
+          <p:nvPr/>
+        </p:nvSpPr>
+        <p:spPr>
+          <a:xfrm>
+            <a:off x="822960" y="3922776"/>
+            <a:ext cx="10545775" cy="1029208"/>
+          </a:xfrm>
+          <a:prstGeom prst="rect">
+            <a:avLst/>
+          </a:prstGeom>
+          <a:noFill/>
+        </p:spPr>
+        <p:txBody>
+          <a:bodyPr wrap="square">
+            <a:spAutoFit/>
+          </a:bodyPr>
+          <a:lstStyle/>
+          <a:p>
             <a:pPr algn="l"/>
             <a:r>
               <a:rPr sz="2600" b="0">
@@ -15784,14 +15899,51 @@
                 <a:ea typeface="Leelawadee UI"/>
                 <a:cs typeface="Leelawadee UI"/>
               </a:rPr>
-              <a:t>• 🥅 ชั้นที่ 2 — git ใช้ได้เสมอ แม้ปิดหน้าต่างหรือพังข้ามวัน</a:t>
-            </a:r>
-          </a:p>
-        </p:txBody>
-      </p:sp>
-      <p:sp>
-        <p:nvSpPr>
-          <p:cNvPr id="6" name="TextBox 5"/>
+              <a:t>• 🥅 ชั้นที่ 1 — Esc Esc ใช้ตอนรู้ตัวทันทีว่าคำสั่งเมื่อกี้ไม่ใช่</a:t>
+            </a:r>
+          </a:p>
+        </p:txBody>
+      </p:sp>
+      <p:sp>
+        <p:nvSpPr>
+          <p:cNvPr id="9" name="TextBox 8"/>
+          <p:cNvSpPr txBox="1"/>
+          <p:nvPr/>
+        </p:nvSpPr>
+        <p:spPr>
+          <a:xfrm>
+            <a:off x="822960" y="5006848"/>
+            <a:ext cx="10545775" cy="1029208"/>
+          </a:xfrm>
+          <a:prstGeom prst="rect">
+            <a:avLst/>
+          </a:prstGeom>
+          <a:noFill/>
+        </p:spPr>
+        <p:txBody>
+          <a:bodyPr wrap="square">
+            <a:spAutoFit/>
+          </a:bodyPr>
+          <a:lstStyle/>
+          <a:p>
+            <a:pPr algn="l"/>
+            <a:r>
+              <a:rPr sz="2600" b="0">
+                <a:solidFill>
+                  <a:srgbClr val="1A1A1A"/>
+                </a:solidFill>
+                <a:latin typeface="Leelawadee UI"/>
+                <a:ea typeface="Leelawadee UI"/>
+                <a:cs typeface="Leelawadee UI"/>
+              </a:rPr>
+              <a:t>• 🥅 ชั้นที่ 2 — บอก Claude ให้ย้อน ใช้ได้เสมอ แม้ปิดหน้าต่างหรือพังข้ามวัน</a:t>
+            </a:r>
+          </a:p>
+        </p:txBody>
+      </p:sp>
+      <p:sp>
+        <p:nvSpPr>
+          <p:cNvPr id="10" name="TextBox 9"/>
           <p:cNvSpPr txBox="1"/>
           <p:nvPr/>
         </p:nvSpPr>
@@ -16512,7 +16664,7 @@
         <p:spPr>
           <a:xfrm>
             <a:off x="822960" y="2690876"/>
-            <a:ext cx="10545775" cy="560324"/>
+            <a:ext cx="10545775" cy="1029208"/>
           </a:xfrm>
           <a:prstGeom prst="rect">
             <a:avLst/>
@@ -16535,7 +16687,7 @@
                 <a:ea typeface="Leelawadee UI"/>
                 <a:cs typeface="Leelawadee UI"/>
               </a:rPr>
-              <a:t>• คัดลอกเข้าโฟลเดอร์ใหม่ → git init → commit แรก</a:t>
+              <a:t>• คัดลอกเข้าโฟลเดอร์ใหม่ → บอก Claude ให้เริ่มเก็บประวัติ + ปักหมุดแรก</a:t>
             </a:r>
           </a:p>
         </p:txBody>
@@ -16548,7 +16700,7 @@
         </p:nvSpPr>
         <p:spPr>
           <a:xfrm>
-            <a:off x="822960" y="3306064"/>
+            <a:off x="822960" y="3774948"/>
             <a:ext cx="10545775" cy="560324"/>
           </a:xfrm>
           <a:prstGeom prst="rect">
@@ -16585,7 +16737,7 @@
         </p:nvSpPr>
         <p:spPr>
           <a:xfrm>
-            <a:off x="822960" y="3921252"/>
+            <a:off x="822960" y="4390136"/>
             <a:ext cx="10545775" cy="1029208"/>
           </a:xfrm>
           <a:prstGeom prst="rect">

--- a/materials/week6/w6-slides.pptx
+++ b/materials/week6/w6-slides.pptx
@@ -4858,7 +4858,7 @@
           <a:lstStyle/>
           <a:p>
             <a:r>
-              <a:t>ไล่ทีละกล่อง "หนึ่ง เปิด Firestore ในโหมดทดสอบ · สอง เชื่อมเว็บกับคลัง แล้วใส่ข้อมูลตัวอย่างที่เรียกว่า seed · สาม เปิด Console ส่องด้วยตาว่าข้อมูลเข้าจริง · สี่ ต่อหน้ารายการให้อ่านจากคลังจริง" · หยุดที่กล่องเข้ม "ขั้นที่สามคือขั้นที่คนข้ามแล้วเจ็บที่สุด สร้างเสร็จต้องส่องด้วยตาเสมอ"</a:t>
+              <a:t>ยังไม่ต้องพูดศัพท์ seed ตรงนี้ เก็บไว้สไลด์ถัดไปที่มีที่อธิบาย · ไล่ทีละกล่อง "หนึ่ง เปิด Firestore ในโหมดทดสอบ · สอง เชื่อมเว็บกับคลัง แล้วใส่ข้อมูลตัวอย่างที่เรียกว่า seed · สาม เปิด Console ส่องด้วยตาว่าข้อมูลเข้าจริง · สี่ ต่อหน้ารายการให้อ่านจากคลังจริง" · หยุดที่กล่องเข้ม "ขั้นที่สามคือขั้นที่คนข้ามแล้วเจ็บที่สุด สร้างเสร็จต้องส่องด้วยตาเสมอ"</a:t>
             </a:r>
           </a:p>
         </p:txBody>
@@ -5138,7 +5138,7 @@
           <a:lstStyle/>
           <a:p>
             <a:r>
-              <a:t>📍 สคริปต์สาธิต: w6-demo-fixit.md → บล็อก D · จบแล้วกลับเข้าสไลด์หน้า 71 · แปลศัพท์ seed = ใส่ข้อมูลตัวอย่างชุดแรกเข้าฐานข้อมูล · ทุกงานในบล็อกนี้เดินด้วยวงจร 4 จังหวะ ให้ผู้เรียนเห็นซ้ำ · ห้ามตัดตอนแก้ข้อมูลใน Console แล้วหน้าเว็บเปลี่ยนตาม เพราะเป็นภาพที่ทำให้เข้าใจคำว่า "อ่านจากฐานจริง"</a:t>
+              <a:t>📍 สคริปต์สาธิต: w6-demo-fixit.md → บล็อก D · จบแล้วกลับเข้าสไลด์หน้า 71 · หยุดที่บรรทัดสองแล้วให้ศัพท์ตรงนี้ครั้งเดียว "คำว่า seed ที่เห็นในเอกสารทุกที่ แปลว่าใส่ข้อมูลตัวอย่างชุดแรกเข้าฐานข้อมูล · ทุกงานในบล็อกนี้เดินด้วยวงจร 4 จังหวะ ให้ผู้เรียนเห็นซ้ำ · ห้ามตัดตอนแก้ข้อมูลใน Console แล้วหน้าเว็บเปลี่ยนตาม เพราะเป็นภาพที่ทำให้เข้าใจคำว่า "อ่านจากฐานจริง"</a:t>
             </a:r>
           </a:p>
         </p:txBody>
@@ -27850,7 +27850,7 @@
                 <a:ea typeface="Leelawadee UI"/>
                 <a:cs typeface="Leelawadee UI"/>
               </a:rPr>
-              <a:t>เชื่อมเว็บ แล้ว seed</a:t>
+              <a:t>เชื่อมเว็บ ใส่ข้อมูล</a:t>
             </a:r>
           </a:p>
         </p:txBody>
@@ -28926,7 +28926,7 @@
                 <a:ea typeface="Leelawadee UI"/>
                 <a:cs typeface="Leelawadee UI"/>
               </a:rPr>
-              <a:t>🎬 ดูของจริง — สร้างคลัง · seed · ส่อง · ต่อหน้ารายการ ⏱ 22 นาที</a:t>
+              <a:t>🎬 ดูของจริง — สร้างคลัง · ใส่ข้อมูล · ส่อง · ต่อหน้ารายการ ⏱ 22 นาที</a:t>
             </a:r>
           </a:p>
         </p:txBody>
@@ -28977,7 +28977,7 @@
         <p:spPr>
           <a:xfrm>
             <a:off x="822960" y="2690876"/>
-            <a:ext cx="10545775" cy="560324"/>
+            <a:ext cx="10545775" cy="1029208"/>
           </a:xfrm>
           <a:prstGeom prst="rect">
             <a:avLst/>
@@ -29000,7 +29000,7 @@
                 <a:ea typeface="Leelawadee UI"/>
                 <a:cs typeface="Leelawadee UI"/>
               </a:rPr>
-              <a:t>• เชื่อมเว็บกับคลัง แล้ว seed ด้วยวงจร 4 จังหวะ</a:t>
+              <a:t>• เชื่อมเว็บกับคลัง แล้ว ใส่ข้อมูลตัวอย่างชุดแรก — ศัพท์เรียกว่า seed</a:t>
             </a:r>
           </a:p>
         </p:txBody>
@@ -29013,7 +29013,7 @@
         </p:nvSpPr>
         <p:spPr>
           <a:xfrm>
-            <a:off x="822960" y="3306064"/>
+            <a:off x="822960" y="3774948"/>
             <a:ext cx="10545775" cy="560324"/>
           </a:xfrm>
           <a:prstGeom prst="rect">
@@ -29050,7 +29050,7 @@
         </p:nvSpPr>
         <p:spPr>
           <a:xfrm>
-            <a:off x="822960" y="3921252"/>
+            <a:off x="822960" y="4390136"/>
             <a:ext cx="10545775" cy="1029208"/>
           </a:xfrm>
           <a:prstGeom prst="rect">
@@ -33777,7 +33777,7 @@
                           <a:ea typeface="Leelawadee UI"/>
                           <a:cs typeface="Leelawadee UI"/>
                         </a:rPr>
-                        <a:t>สร้าง Firestore + seed ใบลา 5 ใบ</a:t>
+                        <a:t>สร้าง Firestore + ใส่ใบลาตัวอย่าง 5 ใบ</a:t>
                       </a:r>
                     </a:p>
                   </a:txBody>

--- a/materials/week6/w6-slides.pptx
+++ b/materials/week6/w6-slides.pptx
@@ -4,96 +4,99 @@
   <p:sldMasterIdLst>
     <p:sldMasterId id="2147483648" r:id="rId1"/>
   </p:sldMasterIdLst>
+  <p:notesMasterIdLst>
+    <p:notesMasterId r:id="rId89"/>
+  </p:notesMasterIdLst>
   <p:sldIdLst>
-    <p:sldId id="256" r:id="rId7"/>
-    <p:sldId id="257" r:id="rId8"/>
-    <p:sldId id="258" r:id="rId10"/>
-    <p:sldId id="259" r:id="rId11"/>
-    <p:sldId id="260" r:id="rId12"/>
-    <p:sldId id="261" r:id="rId13"/>
-    <p:sldId id="262" r:id="rId14"/>
-    <p:sldId id="263" r:id="rId15"/>
-    <p:sldId id="264" r:id="rId16"/>
-    <p:sldId id="265" r:id="rId17"/>
-    <p:sldId id="266" r:id="rId18"/>
-    <p:sldId id="267" r:id="rId19"/>
-    <p:sldId id="268" r:id="rId20"/>
-    <p:sldId id="269" r:id="rId21"/>
-    <p:sldId id="270" r:id="rId22"/>
-    <p:sldId id="271" r:id="rId23"/>
-    <p:sldId id="272" r:id="rId24"/>
-    <p:sldId id="273" r:id="rId25"/>
-    <p:sldId id="274" r:id="rId26"/>
-    <p:sldId id="275" r:id="rId27"/>
-    <p:sldId id="276" r:id="rId28"/>
-    <p:sldId id="277" r:id="rId29"/>
-    <p:sldId id="278" r:id="rId30"/>
-    <p:sldId id="279" r:id="rId31"/>
-    <p:sldId id="280" r:id="rId32"/>
-    <p:sldId id="281" r:id="rId33"/>
-    <p:sldId id="282" r:id="rId34"/>
-    <p:sldId id="283" r:id="rId35"/>
-    <p:sldId id="284" r:id="rId36"/>
-    <p:sldId id="285" r:id="rId37"/>
-    <p:sldId id="286" r:id="rId38"/>
-    <p:sldId id="287" r:id="rId39"/>
-    <p:sldId id="288" r:id="rId40"/>
-    <p:sldId id="289" r:id="rId41"/>
-    <p:sldId id="290" r:id="rId42"/>
-    <p:sldId id="291" r:id="rId43"/>
-    <p:sldId id="292" r:id="rId44"/>
-    <p:sldId id="293" r:id="rId45"/>
-    <p:sldId id="294" r:id="rId46"/>
-    <p:sldId id="295" r:id="rId47"/>
-    <p:sldId id="296" r:id="rId48"/>
-    <p:sldId id="297" r:id="rId49"/>
-    <p:sldId id="298" r:id="rId50"/>
-    <p:sldId id="299" r:id="rId51"/>
-    <p:sldId id="300" r:id="rId52"/>
-    <p:sldId id="301" r:id="rId53"/>
-    <p:sldId id="302" r:id="rId54"/>
-    <p:sldId id="303" r:id="rId55"/>
-    <p:sldId id="304" r:id="rId56"/>
-    <p:sldId id="305" r:id="rId57"/>
-    <p:sldId id="306" r:id="rId58"/>
-    <p:sldId id="307" r:id="rId59"/>
-    <p:sldId id="308" r:id="rId60"/>
-    <p:sldId id="309" r:id="rId61"/>
-    <p:sldId id="310" r:id="rId62"/>
-    <p:sldId id="311" r:id="rId63"/>
-    <p:sldId id="312" r:id="rId64"/>
-    <p:sldId id="313" r:id="rId65"/>
-    <p:sldId id="314" r:id="rId66"/>
-    <p:sldId id="315" r:id="rId67"/>
-    <p:sldId id="316" r:id="rId68"/>
-    <p:sldId id="317" r:id="rId69"/>
-    <p:sldId id="318" r:id="rId70"/>
-    <p:sldId id="319" r:id="rId71"/>
-    <p:sldId id="320" r:id="rId72"/>
-    <p:sldId id="321" r:id="rId73"/>
-    <p:sldId id="322" r:id="rId74"/>
-    <p:sldId id="323" r:id="rId75"/>
-    <p:sldId id="324" r:id="rId76"/>
-    <p:sldId id="325" r:id="rId77"/>
-    <p:sldId id="326" r:id="rId78"/>
-    <p:sldId id="327" r:id="rId79"/>
-    <p:sldId id="328" r:id="rId80"/>
-    <p:sldId id="329" r:id="rId81"/>
-    <p:sldId id="330" r:id="rId82"/>
-    <p:sldId id="331" r:id="rId83"/>
-    <p:sldId id="332" r:id="rId84"/>
-    <p:sldId id="333" r:id="rId85"/>
-    <p:sldId id="334" r:id="rId86"/>
-    <p:sldId id="335" r:id="rId87"/>
-    <p:sldId id="336" r:id="rId88"/>
-    <p:sldId id="337" r:id="rId89"/>
-    <p:sldId id="338" r:id="rId90"/>
-    <p:sldId id="339" r:id="rId91"/>
-    <p:sldId id="340" r:id="rId92"/>
-    <p:sldId id="341" r:id="rId93"/>
-    <p:sldId id="342" r:id="rId94"/>
+    <p:sldId id="256" r:id="rId2"/>
+    <p:sldId id="257" r:id="rId3"/>
+    <p:sldId id="258" r:id="rId4"/>
+    <p:sldId id="259" r:id="rId5"/>
+    <p:sldId id="260" r:id="rId6"/>
+    <p:sldId id="261" r:id="rId7"/>
+    <p:sldId id="262" r:id="rId8"/>
+    <p:sldId id="263" r:id="rId9"/>
+    <p:sldId id="264" r:id="rId10"/>
+    <p:sldId id="265" r:id="rId11"/>
+    <p:sldId id="266" r:id="rId12"/>
+    <p:sldId id="267" r:id="rId13"/>
+    <p:sldId id="268" r:id="rId14"/>
+    <p:sldId id="269" r:id="rId15"/>
+    <p:sldId id="270" r:id="rId16"/>
+    <p:sldId id="271" r:id="rId17"/>
+    <p:sldId id="272" r:id="rId18"/>
+    <p:sldId id="273" r:id="rId19"/>
+    <p:sldId id="274" r:id="rId20"/>
+    <p:sldId id="275" r:id="rId21"/>
+    <p:sldId id="276" r:id="rId22"/>
+    <p:sldId id="277" r:id="rId23"/>
+    <p:sldId id="278" r:id="rId24"/>
+    <p:sldId id="279" r:id="rId25"/>
+    <p:sldId id="280" r:id="rId26"/>
+    <p:sldId id="281" r:id="rId27"/>
+    <p:sldId id="282" r:id="rId28"/>
+    <p:sldId id="283" r:id="rId29"/>
+    <p:sldId id="284" r:id="rId30"/>
+    <p:sldId id="285" r:id="rId31"/>
+    <p:sldId id="286" r:id="rId32"/>
+    <p:sldId id="287" r:id="rId33"/>
+    <p:sldId id="288" r:id="rId34"/>
+    <p:sldId id="289" r:id="rId35"/>
+    <p:sldId id="290" r:id="rId36"/>
+    <p:sldId id="291" r:id="rId37"/>
+    <p:sldId id="292" r:id="rId38"/>
+    <p:sldId id="293" r:id="rId39"/>
+    <p:sldId id="294" r:id="rId40"/>
+    <p:sldId id="295" r:id="rId41"/>
+    <p:sldId id="296" r:id="rId42"/>
+    <p:sldId id="297" r:id="rId43"/>
+    <p:sldId id="298" r:id="rId44"/>
+    <p:sldId id="299" r:id="rId45"/>
+    <p:sldId id="300" r:id="rId46"/>
+    <p:sldId id="301" r:id="rId47"/>
+    <p:sldId id="302" r:id="rId48"/>
+    <p:sldId id="303" r:id="rId49"/>
+    <p:sldId id="304" r:id="rId50"/>
+    <p:sldId id="305" r:id="rId51"/>
+    <p:sldId id="306" r:id="rId52"/>
+    <p:sldId id="307" r:id="rId53"/>
+    <p:sldId id="308" r:id="rId54"/>
+    <p:sldId id="309" r:id="rId55"/>
+    <p:sldId id="310" r:id="rId56"/>
+    <p:sldId id="311" r:id="rId57"/>
+    <p:sldId id="312" r:id="rId58"/>
+    <p:sldId id="313" r:id="rId59"/>
+    <p:sldId id="314" r:id="rId60"/>
+    <p:sldId id="315" r:id="rId61"/>
+    <p:sldId id="316" r:id="rId62"/>
+    <p:sldId id="317" r:id="rId63"/>
+    <p:sldId id="318" r:id="rId64"/>
+    <p:sldId id="319" r:id="rId65"/>
+    <p:sldId id="320" r:id="rId66"/>
+    <p:sldId id="321" r:id="rId67"/>
+    <p:sldId id="322" r:id="rId68"/>
+    <p:sldId id="323" r:id="rId69"/>
+    <p:sldId id="324" r:id="rId70"/>
+    <p:sldId id="325" r:id="rId71"/>
+    <p:sldId id="326" r:id="rId72"/>
+    <p:sldId id="327" r:id="rId73"/>
+    <p:sldId id="328" r:id="rId74"/>
+    <p:sldId id="329" r:id="rId75"/>
+    <p:sldId id="330" r:id="rId76"/>
+    <p:sldId id="331" r:id="rId77"/>
+    <p:sldId id="332" r:id="rId78"/>
+    <p:sldId id="333" r:id="rId79"/>
+    <p:sldId id="334" r:id="rId80"/>
+    <p:sldId id="335" r:id="rId81"/>
+    <p:sldId id="336" r:id="rId82"/>
+    <p:sldId id="337" r:id="rId83"/>
+    <p:sldId id="338" r:id="rId84"/>
+    <p:sldId id="339" r:id="rId85"/>
+    <p:sldId id="340" r:id="rId86"/>
+    <p:sldId id="341" r:id="rId87"/>
+    <p:sldId id="342" r:id="rId88"/>
   </p:sldIdLst>
-  <p:sldSz cx="12191695" cy="6858000" type="screen4x3"/>
+  <p:sldSz cx="12192000" cy="6858000"/>
   <p:notesSz cx="6858000" cy="9144000"/>
   <p:defaultTextStyle>
     <a:defPPr>
@@ -190,11 +193,27 @@
       </a:defRPr>
     </a:lvl9pPr>
   </p:defaultTextStyle>
+  <p:extLst>
+    <p:ext uri="{EFAFB233-063F-42B5-8137-9DF3F51BA10A}">
+      <p15:sldGuideLst xmlns:p15="http://schemas.microsoft.com/office/powerpoint/2012/main">
+        <p15:guide id="1" orient="horz" pos="2160">
+          <p15:clr>
+            <a:srgbClr val="A4A3A4"/>
+          </p15:clr>
+        </p15:guide>
+        <p15:guide id="2" pos="2880">
+          <p15:clr>
+            <a:srgbClr val="A4A3A4"/>
+          </p15:clr>
+        </p15:guide>
+      </p15:sldGuideLst>
+    </p:ext>
+  </p:extLst>
 </p:presentation>
 </file>
 
 <file path=ppt/notesMasters/notesMaster1.xml><?xml version="1.0" encoding="utf-8"?>
-<p:notesMaster xmlns:a="http://schemas.openxmlformats.org/drawingml/2006/main" xmlns:p="http://schemas.openxmlformats.org/presentationml/2006/main" xmlns:r="http://schemas.openxmlformats.org/officeDocument/2006/relationships">
+<p:notesMaster xmlns:a="http://schemas.openxmlformats.org/drawingml/2006/main" xmlns:r="http://schemas.openxmlformats.org/officeDocument/2006/relationships" xmlns:p="http://schemas.openxmlformats.org/presentationml/2006/main">
   <p:cSld>
     <p:bg>
       <p:bgRef idx="1001">
@@ -228,7 +247,7 @@
         <p:spPr>
           <a:xfrm>
             <a:off x="0" y="0"/>
-            <a:ext cx="2971800" cy="457200"/>
+            <a:ext cx="2971800" cy="458788"/>
           </a:xfrm>
           <a:prstGeom prst="rect">
             <a:avLst/>
@@ -242,7 +261,7 @@
             </a:lvl1pPr>
           </a:lstStyle>
           <a:p>
-            <a:endParaRPr lang="en-US"/>
+            <a:endParaRPr lang="th-TH"/>
           </a:p>
         </p:txBody>
       </p:sp>
@@ -259,7 +278,7 @@
         <p:spPr>
           <a:xfrm>
             <a:off x="3884613" y="0"/>
-            <a:ext cx="2971800" cy="457200"/>
+            <a:ext cx="2971800" cy="458788"/>
           </a:xfrm>
           <a:prstGeom prst="rect">
             <a:avLst/>
@@ -273,11 +292,11 @@
             </a:lvl1pPr>
           </a:lstStyle>
           <a:p>
-            <a:fld id="{0F89C1C7-3DCD-1040-A9CF-14679D8B5DDD}" type="datetimeFigureOut">
-              <a:rPr lang="en-US" smtClean="0"/>
-              <a:t>10/17/16</a:t>
+            <a:fld id="{3246BF47-F8A7-4C8B-9AE3-0551191754E0}" type="datetimeFigureOut">
+              <a:rPr lang="th-TH" smtClean="0"/>
+              <a:t>27/08/69</a:t>
             </a:fld>
-            <a:endParaRPr lang="en-US"/>
+            <a:endParaRPr lang="th-TH"/>
           </a:p>
         </p:txBody>
       </p:sp>
@@ -293,8 +312,8 @@
         </p:nvSpPr>
         <p:spPr>
           <a:xfrm>
-            <a:off x="1143000" y="685800"/>
-            <a:ext cx="4572000" cy="3429000"/>
+            <a:off x="685800" y="1143000"/>
+            <a:ext cx="5486400" cy="3086100"/>
           </a:xfrm>
           <a:prstGeom prst="rect">
             <a:avLst/>
@@ -310,7 +329,7 @@
           <a:bodyPr vert="horz" lIns="91440" tIns="45720" rIns="91440" bIns="45720" rtlCol="0" anchor="ctr"/>
           <a:lstStyle/>
           <a:p>
-            <a:endParaRPr lang="en-US"/>
+            <a:endParaRPr lang="th-TH"/>
           </a:p>
         </p:txBody>
       </p:sp>
@@ -326,8 +345,8 @@
         </p:nvSpPr>
         <p:spPr>
           <a:xfrm>
-            <a:off x="685800" y="4343400"/>
-            <a:ext cx="5486400" cy="4114800"/>
+            <a:off x="685800" y="4400550"/>
+            <a:ext cx="5486400" cy="3600450"/>
           </a:xfrm>
           <a:prstGeom prst="rect">
             <a:avLst/>
@@ -339,38 +358,38 @@
           <a:p>
             <a:pPr lvl="0"/>
             <a:r>
-              <a:rPr lang="en-US" smtClean="0"/>
+              <a:rPr lang="en-US"/>
               <a:t>Click to edit Master text styles</a:t>
             </a:r>
           </a:p>
           <a:p>
             <a:pPr lvl="1"/>
             <a:r>
-              <a:rPr lang="en-US" smtClean="0"/>
+              <a:rPr lang="en-US"/>
               <a:t>Second level</a:t>
             </a:r>
           </a:p>
           <a:p>
             <a:pPr lvl="2"/>
             <a:r>
-              <a:rPr lang="en-US" smtClean="0"/>
+              <a:rPr lang="en-US"/>
               <a:t>Third level</a:t>
             </a:r>
           </a:p>
           <a:p>
             <a:pPr lvl="3"/>
             <a:r>
-              <a:rPr lang="en-US" smtClean="0"/>
+              <a:rPr lang="en-US"/>
               <a:t>Fourth level</a:t>
             </a:r>
           </a:p>
           <a:p>
             <a:pPr lvl="4"/>
             <a:r>
-              <a:rPr lang="en-US" smtClean="0"/>
+              <a:rPr lang="en-US"/>
               <a:t>Fifth level</a:t>
             </a:r>
-            <a:endParaRPr lang="en-US"/>
+            <a:endParaRPr lang="th-TH"/>
           </a:p>
         </p:txBody>
       </p:sp>
@@ -387,7 +406,7 @@
         <p:spPr>
           <a:xfrm>
             <a:off x="0" y="8685213"/>
-            <a:ext cx="2971800" cy="457200"/>
+            <a:ext cx="2971800" cy="458787"/>
           </a:xfrm>
           <a:prstGeom prst="rect">
             <a:avLst/>
@@ -401,7 +420,7 @@
             </a:lvl1pPr>
           </a:lstStyle>
           <a:p>
-            <a:endParaRPr lang="en-US"/>
+            <a:endParaRPr lang="th-TH"/>
           </a:p>
         </p:txBody>
       </p:sp>
@@ -418,7 +437,7 @@
         <p:spPr>
           <a:xfrm>
             <a:off x="3884613" y="8685213"/>
-            <a:ext cx="2971800" cy="457200"/>
+            <a:ext cx="2971800" cy="458787"/>
           </a:xfrm>
           <a:prstGeom prst="rect">
             <a:avLst/>
@@ -432,25 +451,25 @@
             </a:lvl1pPr>
           </a:lstStyle>
           <a:p>
-            <a:fld id="{BB5E49A5-4136-284D-997B-48E1D791AD67}" type="slidenum">
-              <a:rPr lang="en-US" smtClean="0"/>
+            <a:fld id="{031A7D6E-238E-4C3B-8DEC-52D3214297CB}" type="slidenum">
+              <a:rPr lang="th-TH" smtClean="0"/>
               <a:t>‹#›</a:t>
             </a:fld>
-            <a:endParaRPr lang="en-US"/>
+            <a:endParaRPr lang="th-TH"/>
           </a:p>
         </p:txBody>
       </p:sp>
     </p:spTree>
     <p:extLst>
       <p:ext uri="{BB962C8B-B14F-4D97-AF65-F5344CB8AC3E}">
-        <p14:creationId xmlns:p14="http://schemas.microsoft.com/office/powerpoint/2010/main" val="2623252185"/>
+        <p14:creationId xmlns:p14="http://schemas.microsoft.com/office/powerpoint/2010/main" val="2234154437"/>
       </p:ext>
     </p:extLst>
   </p:cSld>
   <p:clrMap bg1="lt1" tx1="dk1" bg2="lt2" tx2="dk2" accent1="accent1" accent2="accent2" accent3="accent3" accent4="accent4" accent5="accent5" accent6="accent6" hlink="hlink" folHlink="folHlink"/>
   <p:notesStyle>
-    <a:lvl1pPr marL="0" algn="l" defTabSz="457200" rtl="0" eaLnBrk="1" latinLnBrk="0" hangingPunct="1">
-      <a:defRPr sz="1200" kern="1200">
+    <a:lvl1pPr marL="0" algn="l" defTabSz="914400" rtl="0" eaLnBrk="1" latinLnBrk="0" hangingPunct="1">
+      <a:defRPr sz="1800" kern="1200">
         <a:solidFill>
           <a:schemeClr val="tx1"/>
         </a:solidFill>
@@ -459,8 +478,8 @@
         <a:cs typeface="+mn-cs"/>
       </a:defRPr>
     </a:lvl1pPr>
-    <a:lvl2pPr marL="457200" algn="l" defTabSz="457200" rtl="0" eaLnBrk="1" latinLnBrk="0" hangingPunct="1">
-      <a:defRPr sz="1200" kern="1200">
+    <a:lvl2pPr marL="457200" algn="l" defTabSz="914400" rtl="0" eaLnBrk="1" latinLnBrk="0" hangingPunct="1">
+      <a:defRPr sz="1800" kern="1200">
         <a:solidFill>
           <a:schemeClr val="tx1"/>
         </a:solidFill>
@@ -469,8 +488,8 @@
         <a:cs typeface="+mn-cs"/>
       </a:defRPr>
     </a:lvl2pPr>
-    <a:lvl3pPr marL="914400" algn="l" defTabSz="457200" rtl="0" eaLnBrk="1" latinLnBrk="0" hangingPunct="1">
-      <a:defRPr sz="1200" kern="1200">
+    <a:lvl3pPr marL="914400" algn="l" defTabSz="914400" rtl="0" eaLnBrk="1" latinLnBrk="0" hangingPunct="1">
+      <a:defRPr sz="1800" kern="1200">
         <a:solidFill>
           <a:schemeClr val="tx1"/>
         </a:solidFill>
@@ -479,8 +498,8 @@
         <a:cs typeface="+mn-cs"/>
       </a:defRPr>
     </a:lvl3pPr>
-    <a:lvl4pPr marL="1371600" algn="l" defTabSz="457200" rtl="0" eaLnBrk="1" latinLnBrk="0" hangingPunct="1">
-      <a:defRPr sz="1200" kern="1200">
+    <a:lvl4pPr marL="1371600" algn="l" defTabSz="914400" rtl="0" eaLnBrk="1" latinLnBrk="0" hangingPunct="1">
+      <a:defRPr sz="1800" kern="1200">
         <a:solidFill>
           <a:schemeClr val="tx1"/>
         </a:solidFill>
@@ -489,8 +508,8 @@
         <a:cs typeface="+mn-cs"/>
       </a:defRPr>
     </a:lvl4pPr>
-    <a:lvl5pPr marL="1828800" algn="l" defTabSz="457200" rtl="0" eaLnBrk="1" latinLnBrk="0" hangingPunct="1">
-      <a:defRPr sz="1200" kern="1200">
+    <a:lvl5pPr marL="1828800" algn="l" defTabSz="914400" rtl="0" eaLnBrk="1" latinLnBrk="0" hangingPunct="1">
+      <a:defRPr sz="1800" kern="1200">
         <a:solidFill>
           <a:schemeClr val="tx1"/>
         </a:solidFill>
@@ -499,8 +518,8 @@
         <a:cs typeface="+mn-cs"/>
       </a:defRPr>
     </a:lvl5pPr>
-    <a:lvl6pPr marL="2286000" algn="l" defTabSz="457200" rtl="0" eaLnBrk="1" latinLnBrk="0" hangingPunct="1">
-      <a:defRPr sz="1200" kern="1200">
+    <a:lvl6pPr marL="2286000" algn="l" defTabSz="914400" rtl="0" eaLnBrk="1" latinLnBrk="0" hangingPunct="1">
+      <a:defRPr sz="1800" kern="1200">
         <a:solidFill>
           <a:schemeClr val="tx1"/>
         </a:solidFill>
@@ -509,8 +528,8 @@
         <a:cs typeface="+mn-cs"/>
       </a:defRPr>
     </a:lvl6pPr>
-    <a:lvl7pPr marL="2743200" algn="l" defTabSz="457200" rtl="0" eaLnBrk="1" latinLnBrk="0" hangingPunct="1">
-      <a:defRPr sz="1200" kern="1200">
+    <a:lvl7pPr marL="2743200" algn="l" defTabSz="914400" rtl="0" eaLnBrk="1" latinLnBrk="0" hangingPunct="1">
+      <a:defRPr sz="1800" kern="1200">
         <a:solidFill>
           <a:schemeClr val="tx1"/>
         </a:solidFill>
@@ -519,8 +538,8 @@
         <a:cs typeface="+mn-cs"/>
       </a:defRPr>
     </a:lvl7pPr>
-    <a:lvl8pPr marL="3200400" algn="l" defTabSz="457200" rtl="0" eaLnBrk="1" latinLnBrk="0" hangingPunct="1">
-      <a:defRPr sz="1200" kern="1200">
+    <a:lvl8pPr marL="3200400" algn="l" defTabSz="914400" rtl="0" eaLnBrk="1" latinLnBrk="0" hangingPunct="1">
+      <a:defRPr sz="1800" kern="1200">
         <a:solidFill>
           <a:schemeClr val="tx1"/>
         </a:solidFill>
@@ -529,8 +548,8 @@
         <a:cs typeface="+mn-cs"/>
       </a:defRPr>
     </a:lvl8pPr>
-    <a:lvl9pPr marL="3657600" algn="l" defTabSz="457200" rtl="0" eaLnBrk="1" latinLnBrk="0" hangingPunct="1">
-      <a:defRPr sz="1200" kern="1200">
+    <a:lvl9pPr marL="3657600" algn="l" defTabSz="914400" rtl="0" eaLnBrk="1" latinLnBrk="0" hangingPunct="1">
+      <a:defRPr sz="1800" kern="1200">
         <a:solidFill>
           <a:schemeClr val="tx1"/>
         </a:solidFill>
@@ -544,7 +563,7 @@
 </file>
 
 <file path=ppt/notesSlides/notesSlide1.xml><?xml version="1.0" encoding="utf-8"?>
-<p:notes xmlns:a="http://schemas.openxmlformats.org/drawingml/2006/main" xmlns:p="http://schemas.openxmlformats.org/presentationml/2006/main" xmlns:r="http://schemas.openxmlformats.org/officeDocument/2006/relationships">
+<p:notes xmlns:a="http://schemas.openxmlformats.org/drawingml/2006/main" xmlns:r="http://schemas.openxmlformats.org/officeDocument/2006/relationships" xmlns:p="http://schemas.openxmlformats.org/presentationml/2006/main">
   <p:cSld>
     <p:spTree>
       <p:nvGrpSpPr>
@@ -564,7 +583,7 @@
         <p:nvSpPr>
           <p:cNvPr id="2" name="Slide Image Placeholder 1"/>
           <p:cNvSpPr>
-            <a:spLocks noGrp="1"/>
+            <a:spLocks noGrp="1" noRot="1" noChangeAspect="1"/>
           </p:cNvSpPr>
           <p:nvPr>
             <p:ph type="sldImg" idx="2"/>
@@ -579,7 +598,7 @@
             <a:spLocks noGrp="1"/>
           </p:cNvSpPr>
           <p:nvPr>
-            <p:ph type="body" idx="3" sz="quarter"/>
+            <p:ph type="body" sz="quarter" idx="3"/>
           </p:nvPr>
         </p:nvSpPr>
         <p:spPr/>
@@ -600,7 +619,7 @@
             <a:spLocks noGrp="1"/>
           </p:cNvSpPr>
           <p:nvPr>
-            <p:ph type="sldNum" idx="5" sz="quarter"/>
+            <p:ph type="sldNum" sz="quarter" idx="5"/>
           </p:nvPr>
         </p:nvSpPr>
         <p:spPr/>
@@ -614,7 +633,7 @@
 </file>
 
 <file path=ppt/notesSlides/notesSlide10.xml><?xml version="1.0" encoding="utf-8"?>
-<p:notes xmlns:a="http://schemas.openxmlformats.org/drawingml/2006/main" xmlns:p="http://schemas.openxmlformats.org/presentationml/2006/main" xmlns:r="http://schemas.openxmlformats.org/officeDocument/2006/relationships">
+<p:notes xmlns:a="http://schemas.openxmlformats.org/drawingml/2006/main" xmlns:r="http://schemas.openxmlformats.org/officeDocument/2006/relationships" xmlns:p="http://schemas.openxmlformats.org/presentationml/2006/main">
   <p:cSld>
     <p:spTree>
       <p:nvGrpSpPr>
@@ -634,7 +653,7 @@
         <p:nvSpPr>
           <p:cNvPr id="2" name="Slide Image Placeholder 1"/>
           <p:cNvSpPr>
-            <a:spLocks noGrp="1"/>
+            <a:spLocks noGrp="1" noRot="1" noChangeAspect="1"/>
           </p:cNvSpPr>
           <p:nvPr>
             <p:ph type="sldImg" idx="2"/>
@@ -649,7 +668,7 @@
             <a:spLocks noGrp="1"/>
           </p:cNvSpPr>
           <p:nvPr>
-            <p:ph type="body" idx="3" sz="quarter"/>
+            <p:ph type="body" sz="quarter" idx="3"/>
           </p:nvPr>
         </p:nvSpPr>
         <p:spPr/>
@@ -670,7 +689,7 @@
             <a:spLocks noGrp="1"/>
           </p:cNvSpPr>
           <p:nvPr>
-            <p:ph type="sldNum" idx="5" sz="quarter"/>
+            <p:ph type="sldNum" sz="quarter" idx="5"/>
           </p:nvPr>
         </p:nvSpPr>
         <p:spPr/>
@@ -684,7 +703,7 @@
 </file>
 
 <file path=ppt/notesSlides/notesSlide11.xml><?xml version="1.0" encoding="utf-8"?>
-<p:notes xmlns:a="http://schemas.openxmlformats.org/drawingml/2006/main" xmlns:p="http://schemas.openxmlformats.org/presentationml/2006/main" xmlns:r="http://schemas.openxmlformats.org/officeDocument/2006/relationships">
+<p:notes xmlns:a="http://schemas.openxmlformats.org/drawingml/2006/main" xmlns:r="http://schemas.openxmlformats.org/officeDocument/2006/relationships" xmlns:p="http://schemas.openxmlformats.org/presentationml/2006/main">
   <p:cSld>
     <p:spTree>
       <p:nvGrpSpPr>
@@ -704,7 +723,7 @@
         <p:nvSpPr>
           <p:cNvPr id="2" name="Slide Image Placeholder 1"/>
           <p:cNvSpPr>
-            <a:spLocks noGrp="1"/>
+            <a:spLocks noGrp="1" noRot="1" noChangeAspect="1"/>
           </p:cNvSpPr>
           <p:nvPr>
             <p:ph type="sldImg" idx="2"/>
@@ -719,7 +738,7 @@
             <a:spLocks noGrp="1"/>
           </p:cNvSpPr>
           <p:nvPr>
-            <p:ph type="body" idx="3" sz="quarter"/>
+            <p:ph type="body" sz="quarter" idx="3"/>
           </p:nvPr>
         </p:nvSpPr>
         <p:spPr/>
@@ -740,7 +759,7 @@
             <a:spLocks noGrp="1"/>
           </p:cNvSpPr>
           <p:nvPr>
-            <p:ph type="sldNum" idx="5" sz="quarter"/>
+            <p:ph type="sldNum" sz="quarter" idx="5"/>
           </p:nvPr>
         </p:nvSpPr>
         <p:spPr/>
@@ -754,7 +773,7 @@
 </file>
 
 <file path=ppt/notesSlides/notesSlide12.xml><?xml version="1.0" encoding="utf-8"?>
-<p:notes xmlns:a="http://schemas.openxmlformats.org/drawingml/2006/main" xmlns:p="http://schemas.openxmlformats.org/presentationml/2006/main" xmlns:r="http://schemas.openxmlformats.org/officeDocument/2006/relationships">
+<p:notes xmlns:a="http://schemas.openxmlformats.org/drawingml/2006/main" xmlns:r="http://schemas.openxmlformats.org/officeDocument/2006/relationships" xmlns:p="http://schemas.openxmlformats.org/presentationml/2006/main">
   <p:cSld>
     <p:spTree>
       <p:nvGrpSpPr>
@@ -774,7 +793,7 @@
         <p:nvSpPr>
           <p:cNvPr id="2" name="Slide Image Placeholder 1"/>
           <p:cNvSpPr>
-            <a:spLocks noGrp="1"/>
+            <a:spLocks noGrp="1" noRot="1" noChangeAspect="1"/>
           </p:cNvSpPr>
           <p:nvPr>
             <p:ph type="sldImg" idx="2"/>
@@ -789,7 +808,7 @@
             <a:spLocks noGrp="1"/>
           </p:cNvSpPr>
           <p:nvPr>
-            <p:ph type="body" idx="3" sz="quarter"/>
+            <p:ph type="body" sz="quarter" idx="3"/>
           </p:nvPr>
         </p:nvSpPr>
         <p:spPr/>
@@ -810,7 +829,7 @@
             <a:spLocks noGrp="1"/>
           </p:cNvSpPr>
           <p:nvPr>
-            <p:ph type="sldNum" idx="5" sz="quarter"/>
+            <p:ph type="sldNum" sz="quarter" idx="5"/>
           </p:nvPr>
         </p:nvSpPr>
         <p:spPr/>
@@ -824,7 +843,7 @@
 </file>
 
 <file path=ppt/notesSlides/notesSlide13.xml><?xml version="1.0" encoding="utf-8"?>
-<p:notes xmlns:a="http://schemas.openxmlformats.org/drawingml/2006/main" xmlns:p="http://schemas.openxmlformats.org/presentationml/2006/main" xmlns:r="http://schemas.openxmlformats.org/officeDocument/2006/relationships">
+<p:notes xmlns:a="http://schemas.openxmlformats.org/drawingml/2006/main" xmlns:r="http://schemas.openxmlformats.org/officeDocument/2006/relationships" xmlns:p="http://schemas.openxmlformats.org/presentationml/2006/main">
   <p:cSld>
     <p:spTree>
       <p:nvGrpSpPr>
@@ -844,7 +863,7 @@
         <p:nvSpPr>
           <p:cNvPr id="2" name="Slide Image Placeholder 1"/>
           <p:cNvSpPr>
-            <a:spLocks noGrp="1"/>
+            <a:spLocks noGrp="1" noRot="1" noChangeAspect="1"/>
           </p:cNvSpPr>
           <p:nvPr>
             <p:ph type="sldImg" idx="2"/>
@@ -859,7 +878,7 @@
             <a:spLocks noGrp="1"/>
           </p:cNvSpPr>
           <p:nvPr>
-            <p:ph type="body" idx="3" sz="quarter"/>
+            <p:ph type="body" sz="quarter" idx="3"/>
           </p:nvPr>
         </p:nvSpPr>
         <p:spPr/>
@@ -880,7 +899,7 @@
             <a:spLocks noGrp="1"/>
           </p:cNvSpPr>
           <p:nvPr>
-            <p:ph type="sldNum" idx="5" sz="quarter"/>
+            <p:ph type="sldNum" sz="quarter" idx="5"/>
           </p:nvPr>
         </p:nvSpPr>
         <p:spPr/>
@@ -894,7 +913,7 @@
 </file>
 
 <file path=ppt/notesSlides/notesSlide14.xml><?xml version="1.0" encoding="utf-8"?>
-<p:notes xmlns:a="http://schemas.openxmlformats.org/drawingml/2006/main" xmlns:p="http://schemas.openxmlformats.org/presentationml/2006/main" xmlns:r="http://schemas.openxmlformats.org/officeDocument/2006/relationships">
+<p:notes xmlns:a="http://schemas.openxmlformats.org/drawingml/2006/main" xmlns:r="http://schemas.openxmlformats.org/officeDocument/2006/relationships" xmlns:p="http://schemas.openxmlformats.org/presentationml/2006/main">
   <p:cSld>
     <p:spTree>
       <p:nvGrpSpPr>
@@ -914,7 +933,7 @@
         <p:nvSpPr>
           <p:cNvPr id="2" name="Slide Image Placeholder 1"/>
           <p:cNvSpPr>
-            <a:spLocks noGrp="1"/>
+            <a:spLocks noGrp="1" noRot="1" noChangeAspect="1"/>
           </p:cNvSpPr>
           <p:nvPr>
             <p:ph type="sldImg" idx="2"/>
@@ -929,7 +948,7 @@
             <a:spLocks noGrp="1"/>
           </p:cNvSpPr>
           <p:nvPr>
-            <p:ph type="body" idx="3" sz="quarter"/>
+            <p:ph type="body" sz="quarter" idx="3"/>
           </p:nvPr>
         </p:nvSpPr>
         <p:spPr/>
@@ -950,7 +969,7 @@
             <a:spLocks noGrp="1"/>
           </p:cNvSpPr>
           <p:nvPr>
-            <p:ph type="sldNum" idx="5" sz="quarter"/>
+            <p:ph type="sldNum" sz="quarter" idx="5"/>
           </p:nvPr>
         </p:nvSpPr>
         <p:spPr/>
@@ -964,7 +983,7 @@
 </file>
 
 <file path=ppt/notesSlides/notesSlide15.xml><?xml version="1.0" encoding="utf-8"?>
-<p:notes xmlns:a="http://schemas.openxmlformats.org/drawingml/2006/main" xmlns:p="http://schemas.openxmlformats.org/presentationml/2006/main" xmlns:r="http://schemas.openxmlformats.org/officeDocument/2006/relationships">
+<p:notes xmlns:a="http://schemas.openxmlformats.org/drawingml/2006/main" xmlns:r="http://schemas.openxmlformats.org/officeDocument/2006/relationships" xmlns:p="http://schemas.openxmlformats.org/presentationml/2006/main">
   <p:cSld>
     <p:spTree>
       <p:nvGrpSpPr>
@@ -984,7 +1003,7 @@
         <p:nvSpPr>
           <p:cNvPr id="2" name="Slide Image Placeholder 1"/>
           <p:cNvSpPr>
-            <a:spLocks noGrp="1"/>
+            <a:spLocks noGrp="1" noRot="1" noChangeAspect="1"/>
           </p:cNvSpPr>
           <p:nvPr>
             <p:ph type="sldImg" idx="2"/>
@@ -999,7 +1018,7 @@
             <a:spLocks noGrp="1"/>
           </p:cNvSpPr>
           <p:nvPr>
-            <p:ph type="body" idx="3" sz="quarter"/>
+            <p:ph type="body" sz="quarter" idx="3"/>
           </p:nvPr>
         </p:nvSpPr>
         <p:spPr/>
@@ -1020,7 +1039,7 @@
             <a:spLocks noGrp="1"/>
           </p:cNvSpPr>
           <p:nvPr>
-            <p:ph type="sldNum" idx="5" sz="quarter"/>
+            <p:ph type="sldNum" sz="quarter" idx="5"/>
           </p:nvPr>
         </p:nvSpPr>
         <p:spPr/>
@@ -1034,7 +1053,7 @@
 </file>
 
 <file path=ppt/notesSlides/notesSlide16.xml><?xml version="1.0" encoding="utf-8"?>
-<p:notes xmlns:a="http://schemas.openxmlformats.org/drawingml/2006/main" xmlns:p="http://schemas.openxmlformats.org/presentationml/2006/main" xmlns:r="http://schemas.openxmlformats.org/officeDocument/2006/relationships">
+<p:notes xmlns:a="http://schemas.openxmlformats.org/drawingml/2006/main" xmlns:r="http://schemas.openxmlformats.org/officeDocument/2006/relationships" xmlns:p="http://schemas.openxmlformats.org/presentationml/2006/main">
   <p:cSld>
     <p:spTree>
       <p:nvGrpSpPr>
@@ -1054,7 +1073,7 @@
         <p:nvSpPr>
           <p:cNvPr id="2" name="Slide Image Placeholder 1"/>
           <p:cNvSpPr>
-            <a:spLocks noGrp="1"/>
+            <a:spLocks noGrp="1" noRot="1" noChangeAspect="1"/>
           </p:cNvSpPr>
           <p:nvPr>
             <p:ph type="sldImg" idx="2"/>
@@ -1069,7 +1088,7 @@
             <a:spLocks noGrp="1"/>
           </p:cNvSpPr>
           <p:nvPr>
-            <p:ph type="body" idx="3" sz="quarter"/>
+            <p:ph type="body" sz="quarter" idx="3"/>
           </p:nvPr>
         </p:nvSpPr>
         <p:spPr/>
@@ -1090,7 +1109,7 @@
             <a:spLocks noGrp="1"/>
           </p:cNvSpPr>
           <p:nvPr>
-            <p:ph type="sldNum" idx="5" sz="quarter"/>
+            <p:ph type="sldNum" sz="quarter" idx="5"/>
           </p:nvPr>
         </p:nvSpPr>
         <p:spPr/>
@@ -1104,7 +1123,7 @@
 </file>
 
 <file path=ppt/notesSlides/notesSlide17.xml><?xml version="1.0" encoding="utf-8"?>
-<p:notes xmlns:a="http://schemas.openxmlformats.org/drawingml/2006/main" xmlns:p="http://schemas.openxmlformats.org/presentationml/2006/main" xmlns:r="http://schemas.openxmlformats.org/officeDocument/2006/relationships">
+<p:notes xmlns:a="http://schemas.openxmlformats.org/drawingml/2006/main" xmlns:r="http://schemas.openxmlformats.org/officeDocument/2006/relationships" xmlns:p="http://schemas.openxmlformats.org/presentationml/2006/main">
   <p:cSld>
     <p:spTree>
       <p:nvGrpSpPr>
@@ -1124,7 +1143,7 @@
         <p:nvSpPr>
           <p:cNvPr id="2" name="Slide Image Placeholder 1"/>
           <p:cNvSpPr>
-            <a:spLocks noGrp="1"/>
+            <a:spLocks noGrp="1" noRot="1" noChangeAspect="1"/>
           </p:cNvSpPr>
           <p:nvPr>
             <p:ph type="sldImg" idx="2"/>
@@ -1139,7 +1158,7 @@
             <a:spLocks noGrp="1"/>
           </p:cNvSpPr>
           <p:nvPr>
-            <p:ph type="body" idx="3" sz="quarter"/>
+            <p:ph type="body" sz="quarter" idx="3"/>
           </p:nvPr>
         </p:nvSpPr>
         <p:spPr/>
@@ -1160,7 +1179,7 @@
             <a:spLocks noGrp="1"/>
           </p:cNvSpPr>
           <p:nvPr>
-            <p:ph type="sldNum" idx="5" sz="quarter"/>
+            <p:ph type="sldNum" sz="quarter" idx="5"/>
           </p:nvPr>
         </p:nvSpPr>
         <p:spPr/>
@@ -1174,7 +1193,7 @@
 </file>
 
 <file path=ppt/notesSlides/notesSlide18.xml><?xml version="1.0" encoding="utf-8"?>
-<p:notes xmlns:a="http://schemas.openxmlformats.org/drawingml/2006/main" xmlns:p="http://schemas.openxmlformats.org/presentationml/2006/main" xmlns:r="http://schemas.openxmlformats.org/officeDocument/2006/relationships">
+<p:notes xmlns:a="http://schemas.openxmlformats.org/drawingml/2006/main" xmlns:r="http://schemas.openxmlformats.org/officeDocument/2006/relationships" xmlns:p="http://schemas.openxmlformats.org/presentationml/2006/main">
   <p:cSld>
     <p:spTree>
       <p:nvGrpSpPr>
@@ -1194,7 +1213,7 @@
         <p:nvSpPr>
           <p:cNvPr id="2" name="Slide Image Placeholder 1"/>
           <p:cNvSpPr>
-            <a:spLocks noGrp="1"/>
+            <a:spLocks noGrp="1" noRot="1" noChangeAspect="1"/>
           </p:cNvSpPr>
           <p:nvPr>
             <p:ph type="sldImg" idx="2"/>
@@ -1209,7 +1228,7 @@
             <a:spLocks noGrp="1"/>
           </p:cNvSpPr>
           <p:nvPr>
-            <p:ph type="body" idx="3" sz="quarter"/>
+            <p:ph type="body" sz="quarter" idx="3"/>
           </p:nvPr>
         </p:nvSpPr>
         <p:spPr/>
@@ -1230,7 +1249,7 @@
             <a:spLocks noGrp="1"/>
           </p:cNvSpPr>
           <p:nvPr>
-            <p:ph type="sldNum" idx="5" sz="quarter"/>
+            <p:ph type="sldNum" sz="quarter" idx="5"/>
           </p:nvPr>
         </p:nvSpPr>
         <p:spPr/>
@@ -1244,7 +1263,7 @@
 </file>
 
 <file path=ppt/notesSlides/notesSlide19.xml><?xml version="1.0" encoding="utf-8"?>
-<p:notes xmlns:a="http://schemas.openxmlformats.org/drawingml/2006/main" xmlns:p="http://schemas.openxmlformats.org/presentationml/2006/main" xmlns:r="http://schemas.openxmlformats.org/officeDocument/2006/relationships">
+<p:notes xmlns:a="http://schemas.openxmlformats.org/drawingml/2006/main" xmlns:r="http://schemas.openxmlformats.org/officeDocument/2006/relationships" xmlns:p="http://schemas.openxmlformats.org/presentationml/2006/main">
   <p:cSld>
     <p:spTree>
       <p:nvGrpSpPr>
@@ -1264,7 +1283,7 @@
         <p:nvSpPr>
           <p:cNvPr id="2" name="Slide Image Placeholder 1"/>
           <p:cNvSpPr>
-            <a:spLocks noGrp="1"/>
+            <a:spLocks noGrp="1" noRot="1" noChangeAspect="1"/>
           </p:cNvSpPr>
           <p:nvPr>
             <p:ph type="sldImg" idx="2"/>
@@ -1279,7 +1298,7 @@
             <a:spLocks noGrp="1"/>
           </p:cNvSpPr>
           <p:nvPr>
-            <p:ph type="body" idx="3" sz="quarter"/>
+            <p:ph type="body" sz="quarter" idx="3"/>
           </p:nvPr>
         </p:nvSpPr>
         <p:spPr/>
@@ -1300,7 +1319,7 @@
             <a:spLocks noGrp="1"/>
           </p:cNvSpPr>
           <p:nvPr>
-            <p:ph type="sldNum" idx="5" sz="quarter"/>
+            <p:ph type="sldNum" sz="quarter" idx="5"/>
           </p:nvPr>
         </p:nvSpPr>
         <p:spPr/>
@@ -1314,7 +1333,7 @@
 </file>
 
 <file path=ppt/notesSlides/notesSlide2.xml><?xml version="1.0" encoding="utf-8"?>
-<p:notes xmlns:a="http://schemas.openxmlformats.org/drawingml/2006/main" xmlns:p="http://schemas.openxmlformats.org/presentationml/2006/main" xmlns:r="http://schemas.openxmlformats.org/officeDocument/2006/relationships">
+<p:notes xmlns:a="http://schemas.openxmlformats.org/drawingml/2006/main" xmlns:r="http://schemas.openxmlformats.org/officeDocument/2006/relationships" xmlns:p="http://schemas.openxmlformats.org/presentationml/2006/main">
   <p:cSld>
     <p:spTree>
       <p:nvGrpSpPr>
@@ -1334,7 +1353,7 @@
         <p:nvSpPr>
           <p:cNvPr id="2" name="Slide Image Placeholder 1"/>
           <p:cNvSpPr>
-            <a:spLocks noGrp="1"/>
+            <a:spLocks noGrp="1" noRot="1" noChangeAspect="1"/>
           </p:cNvSpPr>
           <p:nvPr>
             <p:ph type="sldImg" idx="2"/>
@@ -1349,7 +1368,7 @@
             <a:spLocks noGrp="1"/>
           </p:cNvSpPr>
           <p:nvPr>
-            <p:ph type="body" idx="3" sz="quarter"/>
+            <p:ph type="body" sz="quarter" idx="3"/>
           </p:nvPr>
         </p:nvSpPr>
         <p:spPr/>
@@ -1370,7 +1389,7 @@
             <a:spLocks noGrp="1"/>
           </p:cNvSpPr>
           <p:nvPr>
-            <p:ph type="sldNum" idx="5" sz="quarter"/>
+            <p:ph type="sldNum" sz="quarter" idx="5"/>
           </p:nvPr>
         </p:nvSpPr>
         <p:spPr/>
@@ -1384,7 +1403,7 @@
 </file>
 
 <file path=ppt/notesSlides/notesSlide20.xml><?xml version="1.0" encoding="utf-8"?>
-<p:notes xmlns:a="http://schemas.openxmlformats.org/drawingml/2006/main" xmlns:p="http://schemas.openxmlformats.org/presentationml/2006/main" xmlns:r="http://schemas.openxmlformats.org/officeDocument/2006/relationships">
+<p:notes xmlns:a="http://schemas.openxmlformats.org/drawingml/2006/main" xmlns:r="http://schemas.openxmlformats.org/officeDocument/2006/relationships" xmlns:p="http://schemas.openxmlformats.org/presentationml/2006/main">
   <p:cSld>
     <p:spTree>
       <p:nvGrpSpPr>
@@ -1404,7 +1423,7 @@
         <p:nvSpPr>
           <p:cNvPr id="2" name="Slide Image Placeholder 1"/>
           <p:cNvSpPr>
-            <a:spLocks noGrp="1"/>
+            <a:spLocks noGrp="1" noRot="1" noChangeAspect="1"/>
           </p:cNvSpPr>
           <p:nvPr>
             <p:ph type="sldImg" idx="2"/>
@@ -1419,7 +1438,7 @@
             <a:spLocks noGrp="1"/>
           </p:cNvSpPr>
           <p:nvPr>
-            <p:ph type="body" idx="3" sz="quarter"/>
+            <p:ph type="body" sz="quarter" idx="3"/>
           </p:nvPr>
         </p:nvSpPr>
         <p:spPr/>
@@ -1440,7 +1459,7 @@
             <a:spLocks noGrp="1"/>
           </p:cNvSpPr>
           <p:nvPr>
-            <p:ph type="sldNum" idx="5" sz="quarter"/>
+            <p:ph type="sldNum" sz="quarter" idx="5"/>
           </p:nvPr>
         </p:nvSpPr>
         <p:spPr/>
@@ -1454,7 +1473,7 @@
 </file>
 
 <file path=ppt/notesSlides/notesSlide21.xml><?xml version="1.0" encoding="utf-8"?>
-<p:notes xmlns:a="http://schemas.openxmlformats.org/drawingml/2006/main" xmlns:p="http://schemas.openxmlformats.org/presentationml/2006/main" xmlns:r="http://schemas.openxmlformats.org/officeDocument/2006/relationships">
+<p:notes xmlns:a="http://schemas.openxmlformats.org/drawingml/2006/main" xmlns:r="http://schemas.openxmlformats.org/officeDocument/2006/relationships" xmlns:p="http://schemas.openxmlformats.org/presentationml/2006/main">
   <p:cSld>
     <p:spTree>
       <p:nvGrpSpPr>
@@ -1474,7 +1493,7 @@
         <p:nvSpPr>
           <p:cNvPr id="2" name="Slide Image Placeholder 1"/>
           <p:cNvSpPr>
-            <a:spLocks noGrp="1"/>
+            <a:spLocks noGrp="1" noRot="1" noChangeAspect="1"/>
           </p:cNvSpPr>
           <p:nvPr>
             <p:ph type="sldImg" idx="2"/>
@@ -1489,7 +1508,7 @@
             <a:spLocks noGrp="1"/>
           </p:cNvSpPr>
           <p:nvPr>
-            <p:ph type="body" idx="3" sz="quarter"/>
+            <p:ph type="body" sz="quarter" idx="3"/>
           </p:nvPr>
         </p:nvSpPr>
         <p:spPr/>
@@ -1510,7 +1529,7 @@
             <a:spLocks noGrp="1"/>
           </p:cNvSpPr>
           <p:nvPr>
-            <p:ph type="sldNum" idx="5" sz="quarter"/>
+            <p:ph type="sldNum" sz="quarter" idx="5"/>
           </p:nvPr>
         </p:nvSpPr>
         <p:spPr/>
@@ -1524,7 +1543,7 @@
 </file>
 
 <file path=ppt/notesSlides/notesSlide22.xml><?xml version="1.0" encoding="utf-8"?>
-<p:notes xmlns:a="http://schemas.openxmlformats.org/drawingml/2006/main" xmlns:p="http://schemas.openxmlformats.org/presentationml/2006/main" xmlns:r="http://schemas.openxmlformats.org/officeDocument/2006/relationships">
+<p:notes xmlns:a="http://schemas.openxmlformats.org/drawingml/2006/main" xmlns:r="http://schemas.openxmlformats.org/officeDocument/2006/relationships" xmlns:p="http://schemas.openxmlformats.org/presentationml/2006/main">
   <p:cSld>
     <p:spTree>
       <p:nvGrpSpPr>
@@ -1544,7 +1563,7 @@
         <p:nvSpPr>
           <p:cNvPr id="2" name="Slide Image Placeholder 1"/>
           <p:cNvSpPr>
-            <a:spLocks noGrp="1"/>
+            <a:spLocks noGrp="1" noRot="1" noChangeAspect="1"/>
           </p:cNvSpPr>
           <p:nvPr>
             <p:ph type="sldImg" idx="2"/>
@@ -1559,7 +1578,7 @@
             <a:spLocks noGrp="1"/>
           </p:cNvSpPr>
           <p:nvPr>
-            <p:ph type="body" idx="3" sz="quarter"/>
+            <p:ph type="body" sz="quarter" idx="3"/>
           </p:nvPr>
         </p:nvSpPr>
         <p:spPr/>
@@ -1580,7 +1599,7 @@
             <a:spLocks noGrp="1"/>
           </p:cNvSpPr>
           <p:nvPr>
-            <p:ph type="sldNum" idx="5" sz="quarter"/>
+            <p:ph type="sldNum" sz="quarter" idx="5"/>
           </p:nvPr>
         </p:nvSpPr>
         <p:spPr/>
@@ -1594,7 +1613,7 @@
 </file>
 
 <file path=ppt/notesSlides/notesSlide23.xml><?xml version="1.0" encoding="utf-8"?>
-<p:notes xmlns:a="http://schemas.openxmlformats.org/drawingml/2006/main" xmlns:p="http://schemas.openxmlformats.org/presentationml/2006/main" xmlns:r="http://schemas.openxmlformats.org/officeDocument/2006/relationships">
+<p:notes xmlns:a="http://schemas.openxmlformats.org/drawingml/2006/main" xmlns:r="http://schemas.openxmlformats.org/officeDocument/2006/relationships" xmlns:p="http://schemas.openxmlformats.org/presentationml/2006/main">
   <p:cSld>
     <p:spTree>
       <p:nvGrpSpPr>
@@ -1614,7 +1633,7 @@
         <p:nvSpPr>
           <p:cNvPr id="2" name="Slide Image Placeholder 1"/>
           <p:cNvSpPr>
-            <a:spLocks noGrp="1"/>
+            <a:spLocks noGrp="1" noRot="1" noChangeAspect="1"/>
           </p:cNvSpPr>
           <p:nvPr>
             <p:ph type="sldImg" idx="2"/>
@@ -1629,7 +1648,7 @@
             <a:spLocks noGrp="1"/>
           </p:cNvSpPr>
           <p:nvPr>
-            <p:ph type="body" idx="3" sz="quarter"/>
+            <p:ph type="body" sz="quarter" idx="3"/>
           </p:nvPr>
         </p:nvSpPr>
         <p:spPr/>
@@ -1650,7 +1669,7 @@
             <a:spLocks noGrp="1"/>
           </p:cNvSpPr>
           <p:nvPr>
-            <p:ph type="sldNum" idx="5" sz="quarter"/>
+            <p:ph type="sldNum" sz="quarter" idx="5"/>
           </p:nvPr>
         </p:nvSpPr>
         <p:spPr/>
@@ -1664,7 +1683,7 @@
 </file>
 
 <file path=ppt/notesSlides/notesSlide24.xml><?xml version="1.0" encoding="utf-8"?>
-<p:notes xmlns:a="http://schemas.openxmlformats.org/drawingml/2006/main" xmlns:p="http://schemas.openxmlformats.org/presentationml/2006/main" xmlns:r="http://schemas.openxmlformats.org/officeDocument/2006/relationships">
+<p:notes xmlns:a="http://schemas.openxmlformats.org/drawingml/2006/main" xmlns:r="http://schemas.openxmlformats.org/officeDocument/2006/relationships" xmlns:p="http://schemas.openxmlformats.org/presentationml/2006/main">
   <p:cSld>
     <p:spTree>
       <p:nvGrpSpPr>
@@ -1684,7 +1703,7 @@
         <p:nvSpPr>
           <p:cNvPr id="2" name="Slide Image Placeholder 1"/>
           <p:cNvSpPr>
-            <a:spLocks noGrp="1"/>
+            <a:spLocks noGrp="1" noRot="1" noChangeAspect="1"/>
           </p:cNvSpPr>
           <p:nvPr>
             <p:ph type="sldImg" idx="2"/>
@@ -1699,7 +1718,7 @@
             <a:spLocks noGrp="1"/>
           </p:cNvSpPr>
           <p:nvPr>
-            <p:ph type="body" idx="3" sz="quarter"/>
+            <p:ph type="body" sz="quarter" idx="3"/>
           </p:nvPr>
         </p:nvSpPr>
         <p:spPr/>
@@ -1720,7 +1739,7 @@
             <a:spLocks noGrp="1"/>
           </p:cNvSpPr>
           <p:nvPr>
-            <p:ph type="sldNum" idx="5" sz="quarter"/>
+            <p:ph type="sldNum" sz="quarter" idx="5"/>
           </p:nvPr>
         </p:nvSpPr>
         <p:spPr/>
@@ -1734,7 +1753,7 @@
 </file>
 
 <file path=ppt/notesSlides/notesSlide25.xml><?xml version="1.0" encoding="utf-8"?>
-<p:notes xmlns:a="http://schemas.openxmlformats.org/drawingml/2006/main" xmlns:p="http://schemas.openxmlformats.org/presentationml/2006/main" xmlns:r="http://schemas.openxmlformats.org/officeDocument/2006/relationships">
+<p:notes xmlns:a="http://schemas.openxmlformats.org/drawingml/2006/main" xmlns:r="http://schemas.openxmlformats.org/officeDocument/2006/relationships" xmlns:p="http://schemas.openxmlformats.org/presentationml/2006/main">
   <p:cSld>
     <p:spTree>
       <p:nvGrpSpPr>
@@ -1754,7 +1773,7 @@
         <p:nvSpPr>
           <p:cNvPr id="2" name="Slide Image Placeholder 1"/>
           <p:cNvSpPr>
-            <a:spLocks noGrp="1"/>
+            <a:spLocks noGrp="1" noRot="1" noChangeAspect="1"/>
           </p:cNvSpPr>
           <p:nvPr>
             <p:ph type="sldImg" idx="2"/>
@@ -1769,7 +1788,7 @@
             <a:spLocks noGrp="1"/>
           </p:cNvSpPr>
           <p:nvPr>
-            <p:ph type="body" idx="3" sz="quarter"/>
+            <p:ph type="body" sz="quarter" idx="3"/>
           </p:nvPr>
         </p:nvSpPr>
         <p:spPr/>
@@ -1790,7 +1809,7 @@
             <a:spLocks noGrp="1"/>
           </p:cNvSpPr>
           <p:nvPr>
-            <p:ph type="sldNum" idx="5" sz="quarter"/>
+            <p:ph type="sldNum" sz="quarter" idx="5"/>
           </p:nvPr>
         </p:nvSpPr>
         <p:spPr/>
@@ -1804,7 +1823,7 @@
 </file>
 
 <file path=ppt/notesSlides/notesSlide26.xml><?xml version="1.0" encoding="utf-8"?>
-<p:notes xmlns:a="http://schemas.openxmlformats.org/drawingml/2006/main" xmlns:p="http://schemas.openxmlformats.org/presentationml/2006/main" xmlns:r="http://schemas.openxmlformats.org/officeDocument/2006/relationships">
+<p:notes xmlns:a="http://schemas.openxmlformats.org/drawingml/2006/main" xmlns:r="http://schemas.openxmlformats.org/officeDocument/2006/relationships" xmlns:p="http://schemas.openxmlformats.org/presentationml/2006/main">
   <p:cSld>
     <p:spTree>
       <p:nvGrpSpPr>
@@ -1824,7 +1843,7 @@
         <p:nvSpPr>
           <p:cNvPr id="2" name="Slide Image Placeholder 1"/>
           <p:cNvSpPr>
-            <a:spLocks noGrp="1"/>
+            <a:spLocks noGrp="1" noRot="1" noChangeAspect="1"/>
           </p:cNvSpPr>
           <p:nvPr>
             <p:ph type="sldImg" idx="2"/>
@@ -1839,7 +1858,7 @@
             <a:spLocks noGrp="1"/>
           </p:cNvSpPr>
           <p:nvPr>
-            <p:ph type="body" idx="3" sz="quarter"/>
+            <p:ph type="body" sz="quarter" idx="3"/>
           </p:nvPr>
         </p:nvSpPr>
         <p:spPr/>
@@ -1860,7 +1879,7 @@
             <a:spLocks noGrp="1"/>
           </p:cNvSpPr>
           <p:nvPr>
-            <p:ph type="sldNum" idx="5" sz="quarter"/>
+            <p:ph type="sldNum" sz="quarter" idx="5"/>
           </p:nvPr>
         </p:nvSpPr>
         <p:spPr/>
@@ -1874,7 +1893,7 @@
 </file>
 
 <file path=ppt/notesSlides/notesSlide27.xml><?xml version="1.0" encoding="utf-8"?>
-<p:notes xmlns:a="http://schemas.openxmlformats.org/drawingml/2006/main" xmlns:p="http://schemas.openxmlformats.org/presentationml/2006/main" xmlns:r="http://schemas.openxmlformats.org/officeDocument/2006/relationships">
+<p:notes xmlns:a="http://schemas.openxmlformats.org/drawingml/2006/main" xmlns:r="http://schemas.openxmlformats.org/officeDocument/2006/relationships" xmlns:p="http://schemas.openxmlformats.org/presentationml/2006/main">
   <p:cSld>
     <p:spTree>
       <p:nvGrpSpPr>
@@ -1894,7 +1913,7 @@
         <p:nvSpPr>
           <p:cNvPr id="2" name="Slide Image Placeholder 1"/>
           <p:cNvSpPr>
-            <a:spLocks noGrp="1"/>
+            <a:spLocks noGrp="1" noRot="1" noChangeAspect="1"/>
           </p:cNvSpPr>
           <p:nvPr>
             <p:ph type="sldImg" idx="2"/>
@@ -1909,7 +1928,7 @@
             <a:spLocks noGrp="1"/>
           </p:cNvSpPr>
           <p:nvPr>
-            <p:ph type="body" idx="3" sz="quarter"/>
+            <p:ph type="body" sz="quarter" idx="3"/>
           </p:nvPr>
         </p:nvSpPr>
         <p:spPr/>
@@ -1930,7 +1949,7 @@
             <a:spLocks noGrp="1"/>
           </p:cNvSpPr>
           <p:nvPr>
-            <p:ph type="sldNum" idx="5" sz="quarter"/>
+            <p:ph type="sldNum" sz="quarter" idx="5"/>
           </p:nvPr>
         </p:nvSpPr>
         <p:spPr/>
@@ -1944,7 +1963,7 @@
 </file>
 
 <file path=ppt/notesSlides/notesSlide28.xml><?xml version="1.0" encoding="utf-8"?>
-<p:notes xmlns:a="http://schemas.openxmlformats.org/drawingml/2006/main" xmlns:p="http://schemas.openxmlformats.org/presentationml/2006/main" xmlns:r="http://schemas.openxmlformats.org/officeDocument/2006/relationships">
+<p:notes xmlns:a="http://schemas.openxmlformats.org/drawingml/2006/main" xmlns:r="http://schemas.openxmlformats.org/officeDocument/2006/relationships" xmlns:p="http://schemas.openxmlformats.org/presentationml/2006/main">
   <p:cSld>
     <p:spTree>
       <p:nvGrpSpPr>
@@ -1964,7 +1983,7 @@
         <p:nvSpPr>
           <p:cNvPr id="2" name="Slide Image Placeholder 1"/>
           <p:cNvSpPr>
-            <a:spLocks noGrp="1"/>
+            <a:spLocks noGrp="1" noRot="1" noChangeAspect="1"/>
           </p:cNvSpPr>
           <p:nvPr>
             <p:ph type="sldImg" idx="2"/>
@@ -1979,7 +1998,7 @@
             <a:spLocks noGrp="1"/>
           </p:cNvSpPr>
           <p:nvPr>
-            <p:ph type="body" idx="3" sz="quarter"/>
+            <p:ph type="body" sz="quarter" idx="3"/>
           </p:nvPr>
         </p:nvSpPr>
         <p:spPr/>
@@ -2000,7 +2019,7 @@
             <a:spLocks noGrp="1"/>
           </p:cNvSpPr>
           <p:nvPr>
-            <p:ph type="sldNum" idx="5" sz="quarter"/>
+            <p:ph type="sldNum" sz="quarter" idx="5"/>
           </p:nvPr>
         </p:nvSpPr>
         <p:spPr/>
@@ -2014,7 +2033,7 @@
 </file>
 
 <file path=ppt/notesSlides/notesSlide29.xml><?xml version="1.0" encoding="utf-8"?>
-<p:notes xmlns:a="http://schemas.openxmlformats.org/drawingml/2006/main" xmlns:p="http://schemas.openxmlformats.org/presentationml/2006/main" xmlns:r="http://schemas.openxmlformats.org/officeDocument/2006/relationships">
+<p:notes xmlns:a="http://schemas.openxmlformats.org/drawingml/2006/main" xmlns:r="http://schemas.openxmlformats.org/officeDocument/2006/relationships" xmlns:p="http://schemas.openxmlformats.org/presentationml/2006/main">
   <p:cSld>
     <p:spTree>
       <p:nvGrpSpPr>
@@ -2034,7 +2053,7 @@
         <p:nvSpPr>
           <p:cNvPr id="2" name="Slide Image Placeholder 1"/>
           <p:cNvSpPr>
-            <a:spLocks noGrp="1"/>
+            <a:spLocks noGrp="1" noRot="1" noChangeAspect="1"/>
           </p:cNvSpPr>
           <p:nvPr>
             <p:ph type="sldImg" idx="2"/>
@@ -2049,7 +2068,7 @@
             <a:spLocks noGrp="1"/>
           </p:cNvSpPr>
           <p:nvPr>
-            <p:ph type="body" idx="3" sz="quarter"/>
+            <p:ph type="body" sz="quarter" idx="3"/>
           </p:nvPr>
         </p:nvSpPr>
         <p:spPr/>
@@ -2070,7 +2089,7 @@
             <a:spLocks noGrp="1"/>
           </p:cNvSpPr>
           <p:nvPr>
-            <p:ph type="sldNum" idx="5" sz="quarter"/>
+            <p:ph type="sldNum" sz="quarter" idx="5"/>
           </p:nvPr>
         </p:nvSpPr>
         <p:spPr/>
@@ -2084,7 +2103,7 @@
 </file>
 
 <file path=ppt/notesSlides/notesSlide3.xml><?xml version="1.0" encoding="utf-8"?>
-<p:notes xmlns:a="http://schemas.openxmlformats.org/drawingml/2006/main" xmlns:p="http://schemas.openxmlformats.org/presentationml/2006/main" xmlns:r="http://schemas.openxmlformats.org/officeDocument/2006/relationships">
+<p:notes xmlns:a="http://schemas.openxmlformats.org/drawingml/2006/main" xmlns:r="http://schemas.openxmlformats.org/officeDocument/2006/relationships" xmlns:p="http://schemas.openxmlformats.org/presentationml/2006/main">
   <p:cSld>
     <p:spTree>
       <p:nvGrpSpPr>
@@ -2104,7 +2123,7 @@
         <p:nvSpPr>
           <p:cNvPr id="2" name="Slide Image Placeholder 1"/>
           <p:cNvSpPr>
-            <a:spLocks noGrp="1"/>
+            <a:spLocks noGrp="1" noRot="1" noChangeAspect="1"/>
           </p:cNvSpPr>
           <p:nvPr>
             <p:ph type="sldImg" idx="2"/>
@@ -2119,7 +2138,7 @@
             <a:spLocks noGrp="1"/>
           </p:cNvSpPr>
           <p:nvPr>
-            <p:ph type="body" idx="3" sz="quarter"/>
+            <p:ph type="body" sz="quarter" idx="3"/>
           </p:nvPr>
         </p:nvSpPr>
         <p:spPr/>
@@ -2140,7 +2159,7 @@
             <a:spLocks noGrp="1"/>
           </p:cNvSpPr>
           <p:nvPr>
-            <p:ph type="sldNum" idx="5" sz="quarter"/>
+            <p:ph type="sldNum" sz="quarter" idx="5"/>
           </p:nvPr>
         </p:nvSpPr>
         <p:spPr/>
@@ -2154,7 +2173,7 @@
 </file>
 
 <file path=ppt/notesSlides/notesSlide30.xml><?xml version="1.0" encoding="utf-8"?>
-<p:notes xmlns:a="http://schemas.openxmlformats.org/drawingml/2006/main" xmlns:p="http://schemas.openxmlformats.org/presentationml/2006/main" xmlns:r="http://schemas.openxmlformats.org/officeDocument/2006/relationships">
+<p:notes xmlns:a="http://schemas.openxmlformats.org/drawingml/2006/main" xmlns:r="http://schemas.openxmlformats.org/officeDocument/2006/relationships" xmlns:p="http://schemas.openxmlformats.org/presentationml/2006/main">
   <p:cSld>
     <p:spTree>
       <p:nvGrpSpPr>
@@ -2174,7 +2193,7 @@
         <p:nvSpPr>
           <p:cNvPr id="2" name="Slide Image Placeholder 1"/>
           <p:cNvSpPr>
-            <a:spLocks noGrp="1"/>
+            <a:spLocks noGrp="1" noRot="1" noChangeAspect="1"/>
           </p:cNvSpPr>
           <p:nvPr>
             <p:ph type="sldImg" idx="2"/>
@@ -2189,7 +2208,7 @@
             <a:spLocks noGrp="1"/>
           </p:cNvSpPr>
           <p:nvPr>
-            <p:ph type="body" idx="3" sz="quarter"/>
+            <p:ph type="body" sz="quarter" idx="3"/>
           </p:nvPr>
         </p:nvSpPr>
         <p:spPr/>
@@ -2210,7 +2229,7 @@
             <a:spLocks noGrp="1"/>
           </p:cNvSpPr>
           <p:nvPr>
-            <p:ph type="sldNum" idx="5" sz="quarter"/>
+            <p:ph type="sldNum" sz="quarter" idx="5"/>
           </p:nvPr>
         </p:nvSpPr>
         <p:spPr/>
@@ -2224,7 +2243,7 @@
 </file>
 
 <file path=ppt/notesSlides/notesSlide31.xml><?xml version="1.0" encoding="utf-8"?>
-<p:notes xmlns:a="http://schemas.openxmlformats.org/drawingml/2006/main" xmlns:p="http://schemas.openxmlformats.org/presentationml/2006/main" xmlns:r="http://schemas.openxmlformats.org/officeDocument/2006/relationships">
+<p:notes xmlns:a="http://schemas.openxmlformats.org/drawingml/2006/main" xmlns:r="http://schemas.openxmlformats.org/officeDocument/2006/relationships" xmlns:p="http://schemas.openxmlformats.org/presentationml/2006/main">
   <p:cSld>
     <p:spTree>
       <p:nvGrpSpPr>
@@ -2244,7 +2263,7 @@
         <p:nvSpPr>
           <p:cNvPr id="2" name="Slide Image Placeholder 1"/>
           <p:cNvSpPr>
-            <a:spLocks noGrp="1"/>
+            <a:spLocks noGrp="1" noRot="1" noChangeAspect="1"/>
           </p:cNvSpPr>
           <p:nvPr>
             <p:ph type="sldImg" idx="2"/>
@@ -2259,7 +2278,7 @@
             <a:spLocks noGrp="1"/>
           </p:cNvSpPr>
           <p:nvPr>
-            <p:ph type="body" idx="3" sz="quarter"/>
+            <p:ph type="body" sz="quarter" idx="3"/>
           </p:nvPr>
         </p:nvSpPr>
         <p:spPr/>
@@ -2280,7 +2299,7 @@
             <a:spLocks noGrp="1"/>
           </p:cNvSpPr>
           <p:nvPr>
-            <p:ph type="sldNum" idx="5" sz="quarter"/>
+            <p:ph type="sldNum" sz="quarter" idx="5"/>
           </p:nvPr>
         </p:nvSpPr>
         <p:spPr/>
@@ -2294,7 +2313,7 @@
 </file>
 
 <file path=ppt/notesSlides/notesSlide32.xml><?xml version="1.0" encoding="utf-8"?>
-<p:notes xmlns:a="http://schemas.openxmlformats.org/drawingml/2006/main" xmlns:p="http://schemas.openxmlformats.org/presentationml/2006/main" xmlns:r="http://schemas.openxmlformats.org/officeDocument/2006/relationships">
+<p:notes xmlns:a="http://schemas.openxmlformats.org/drawingml/2006/main" xmlns:r="http://schemas.openxmlformats.org/officeDocument/2006/relationships" xmlns:p="http://schemas.openxmlformats.org/presentationml/2006/main">
   <p:cSld>
     <p:spTree>
       <p:nvGrpSpPr>
@@ -2314,7 +2333,7 @@
         <p:nvSpPr>
           <p:cNvPr id="2" name="Slide Image Placeholder 1"/>
           <p:cNvSpPr>
-            <a:spLocks noGrp="1"/>
+            <a:spLocks noGrp="1" noRot="1" noChangeAspect="1"/>
           </p:cNvSpPr>
           <p:nvPr>
             <p:ph type="sldImg" idx="2"/>
@@ -2329,7 +2348,7 @@
             <a:spLocks noGrp="1"/>
           </p:cNvSpPr>
           <p:nvPr>
-            <p:ph type="body" idx="3" sz="quarter"/>
+            <p:ph type="body" sz="quarter" idx="3"/>
           </p:nvPr>
         </p:nvSpPr>
         <p:spPr/>
@@ -2350,7 +2369,7 @@
             <a:spLocks noGrp="1"/>
           </p:cNvSpPr>
           <p:nvPr>
-            <p:ph type="sldNum" idx="5" sz="quarter"/>
+            <p:ph type="sldNum" sz="quarter" idx="5"/>
           </p:nvPr>
         </p:nvSpPr>
         <p:spPr/>
@@ -2364,7 +2383,7 @@
 </file>
 
 <file path=ppt/notesSlides/notesSlide33.xml><?xml version="1.0" encoding="utf-8"?>
-<p:notes xmlns:a="http://schemas.openxmlformats.org/drawingml/2006/main" xmlns:p="http://schemas.openxmlformats.org/presentationml/2006/main" xmlns:r="http://schemas.openxmlformats.org/officeDocument/2006/relationships">
+<p:notes xmlns:a="http://schemas.openxmlformats.org/drawingml/2006/main" xmlns:r="http://schemas.openxmlformats.org/officeDocument/2006/relationships" xmlns:p="http://schemas.openxmlformats.org/presentationml/2006/main">
   <p:cSld>
     <p:spTree>
       <p:nvGrpSpPr>
@@ -2384,7 +2403,7 @@
         <p:nvSpPr>
           <p:cNvPr id="2" name="Slide Image Placeholder 1"/>
           <p:cNvSpPr>
-            <a:spLocks noGrp="1"/>
+            <a:spLocks noGrp="1" noRot="1" noChangeAspect="1"/>
           </p:cNvSpPr>
           <p:nvPr>
             <p:ph type="sldImg" idx="2"/>
@@ -2399,7 +2418,7 @@
             <a:spLocks noGrp="1"/>
           </p:cNvSpPr>
           <p:nvPr>
-            <p:ph type="body" idx="3" sz="quarter"/>
+            <p:ph type="body" sz="quarter" idx="3"/>
           </p:nvPr>
         </p:nvSpPr>
         <p:spPr/>
@@ -2420,7 +2439,7 @@
             <a:spLocks noGrp="1"/>
           </p:cNvSpPr>
           <p:nvPr>
-            <p:ph type="sldNum" idx="5" sz="quarter"/>
+            <p:ph type="sldNum" sz="quarter" idx="5"/>
           </p:nvPr>
         </p:nvSpPr>
         <p:spPr/>
@@ -2434,7 +2453,7 @@
 </file>
 
 <file path=ppt/notesSlides/notesSlide34.xml><?xml version="1.0" encoding="utf-8"?>
-<p:notes xmlns:a="http://schemas.openxmlformats.org/drawingml/2006/main" xmlns:p="http://schemas.openxmlformats.org/presentationml/2006/main" xmlns:r="http://schemas.openxmlformats.org/officeDocument/2006/relationships">
+<p:notes xmlns:a="http://schemas.openxmlformats.org/drawingml/2006/main" xmlns:r="http://schemas.openxmlformats.org/officeDocument/2006/relationships" xmlns:p="http://schemas.openxmlformats.org/presentationml/2006/main">
   <p:cSld>
     <p:spTree>
       <p:nvGrpSpPr>
@@ -2454,7 +2473,7 @@
         <p:nvSpPr>
           <p:cNvPr id="2" name="Slide Image Placeholder 1"/>
           <p:cNvSpPr>
-            <a:spLocks noGrp="1"/>
+            <a:spLocks noGrp="1" noRot="1" noChangeAspect="1"/>
           </p:cNvSpPr>
           <p:nvPr>
             <p:ph type="sldImg" idx="2"/>
@@ -2469,7 +2488,7 @@
             <a:spLocks noGrp="1"/>
           </p:cNvSpPr>
           <p:nvPr>
-            <p:ph type="body" idx="3" sz="quarter"/>
+            <p:ph type="body" sz="quarter" idx="3"/>
           </p:nvPr>
         </p:nvSpPr>
         <p:spPr/>
@@ -2490,7 +2509,7 @@
             <a:spLocks noGrp="1"/>
           </p:cNvSpPr>
           <p:nvPr>
-            <p:ph type="sldNum" idx="5" sz="quarter"/>
+            <p:ph type="sldNum" sz="quarter" idx="5"/>
           </p:nvPr>
         </p:nvSpPr>
         <p:spPr/>
@@ -2504,7 +2523,7 @@
 </file>
 
 <file path=ppt/notesSlides/notesSlide35.xml><?xml version="1.0" encoding="utf-8"?>
-<p:notes xmlns:a="http://schemas.openxmlformats.org/drawingml/2006/main" xmlns:p="http://schemas.openxmlformats.org/presentationml/2006/main" xmlns:r="http://schemas.openxmlformats.org/officeDocument/2006/relationships">
+<p:notes xmlns:a="http://schemas.openxmlformats.org/drawingml/2006/main" xmlns:r="http://schemas.openxmlformats.org/officeDocument/2006/relationships" xmlns:p="http://schemas.openxmlformats.org/presentationml/2006/main">
   <p:cSld>
     <p:spTree>
       <p:nvGrpSpPr>
@@ -2524,7 +2543,7 @@
         <p:nvSpPr>
           <p:cNvPr id="2" name="Slide Image Placeholder 1"/>
           <p:cNvSpPr>
-            <a:spLocks noGrp="1"/>
+            <a:spLocks noGrp="1" noRot="1" noChangeAspect="1"/>
           </p:cNvSpPr>
           <p:nvPr>
             <p:ph type="sldImg" idx="2"/>
@@ -2539,7 +2558,7 @@
             <a:spLocks noGrp="1"/>
           </p:cNvSpPr>
           <p:nvPr>
-            <p:ph type="body" idx="3" sz="quarter"/>
+            <p:ph type="body" sz="quarter" idx="3"/>
           </p:nvPr>
         </p:nvSpPr>
         <p:spPr/>
@@ -2560,7 +2579,7 @@
             <a:spLocks noGrp="1"/>
           </p:cNvSpPr>
           <p:nvPr>
-            <p:ph type="sldNum" idx="5" sz="quarter"/>
+            <p:ph type="sldNum" sz="quarter" idx="5"/>
           </p:nvPr>
         </p:nvSpPr>
         <p:spPr/>
@@ -2574,7 +2593,7 @@
 </file>
 
 <file path=ppt/notesSlides/notesSlide36.xml><?xml version="1.0" encoding="utf-8"?>
-<p:notes xmlns:a="http://schemas.openxmlformats.org/drawingml/2006/main" xmlns:p="http://schemas.openxmlformats.org/presentationml/2006/main" xmlns:r="http://schemas.openxmlformats.org/officeDocument/2006/relationships">
+<p:notes xmlns:a="http://schemas.openxmlformats.org/drawingml/2006/main" xmlns:r="http://schemas.openxmlformats.org/officeDocument/2006/relationships" xmlns:p="http://schemas.openxmlformats.org/presentationml/2006/main">
   <p:cSld>
     <p:spTree>
       <p:nvGrpSpPr>
@@ -2594,7 +2613,7 @@
         <p:nvSpPr>
           <p:cNvPr id="2" name="Slide Image Placeholder 1"/>
           <p:cNvSpPr>
-            <a:spLocks noGrp="1"/>
+            <a:spLocks noGrp="1" noRot="1" noChangeAspect="1"/>
           </p:cNvSpPr>
           <p:nvPr>
             <p:ph type="sldImg" idx="2"/>
@@ -2609,7 +2628,7 @@
             <a:spLocks noGrp="1"/>
           </p:cNvSpPr>
           <p:nvPr>
-            <p:ph type="body" idx="3" sz="quarter"/>
+            <p:ph type="body" sz="quarter" idx="3"/>
           </p:nvPr>
         </p:nvSpPr>
         <p:spPr/>
@@ -2630,7 +2649,7 @@
             <a:spLocks noGrp="1"/>
           </p:cNvSpPr>
           <p:nvPr>
-            <p:ph type="sldNum" idx="5" sz="quarter"/>
+            <p:ph type="sldNum" sz="quarter" idx="5"/>
           </p:nvPr>
         </p:nvSpPr>
         <p:spPr/>
@@ -2644,7 +2663,7 @@
 </file>
 
 <file path=ppt/notesSlides/notesSlide37.xml><?xml version="1.0" encoding="utf-8"?>
-<p:notes xmlns:a="http://schemas.openxmlformats.org/drawingml/2006/main" xmlns:p="http://schemas.openxmlformats.org/presentationml/2006/main" xmlns:r="http://schemas.openxmlformats.org/officeDocument/2006/relationships">
+<p:notes xmlns:a="http://schemas.openxmlformats.org/drawingml/2006/main" xmlns:r="http://schemas.openxmlformats.org/officeDocument/2006/relationships" xmlns:p="http://schemas.openxmlformats.org/presentationml/2006/main">
   <p:cSld>
     <p:spTree>
       <p:nvGrpSpPr>
@@ -2664,7 +2683,7 @@
         <p:nvSpPr>
           <p:cNvPr id="2" name="Slide Image Placeholder 1"/>
           <p:cNvSpPr>
-            <a:spLocks noGrp="1"/>
+            <a:spLocks noGrp="1" noRot="1" noChangeAspect="1"/>
           </p:cNvSpPr>
           <p:nvPr>
             <p:ph type="sldImg" idx="2"/>
@@ -2679,7 +2698,7 @@
             <a:spLocks noGrp="1"/>
           </p:cNvSpPr>
           <p:nvPr>
-            <p:ph type="body" idx="3" sz="quarter"/>
+            <p:ph type="body" sz="quarter" idx="3"/>
           </p:nvPr>
         </p:nvSpPr>
         <p:spPr/>
@@ -2700,7 +2719,7 @@
             <a:spLocks noGrp="1"/>
           </p:cNvSpPr>
           <p:nvPr>
-            <p:ph type="sldNum" idx="5" sz="quarter"/>
+            <p:ph type="sldNum" sz="quarter" idx="5"/>
           </p:nvPr>
         </p:nvSpPr>
         <p:spPr/>
@@ -2714,7 +2733,7 @@
 </file>
 
 <file path=ppt/notesSlides/notesSlide38.xml><?xml version="1.0" encoding="utf-8"?>
-<p:notes xmlns:a="http://schemas.openxmlformats.org/drawingml/2006/main" xmlns:p="http://schemas.openxmlformats.org/presentationml/2006/main" xmlns:r="http://schemas.openxmlformats.org/officeDocument/2006/relationships">
+<p:notes xmlns:a="http://schemas.openxmlformats.org/drawingml/2006/main" xmlns:r="http://schemas.openxmlformats.org/officeDocument/2006/relationships" xmlns:p="http://schemas.openxmlformats.org/presentationml/2006/main">
   <p:cSld>
     <p:spTree>
       <p:nvGrpSpPr>
@@ -2734,7 +2753,7 @@
         <p:nvSpPr>
           <p:cNvPr id="2" name="Slide Image Placeholder 1"/>
           <p:cNvSpPr>
-            <a:spLocks noGrp="1"/>
+            <a:spLocks noGrp="1" noRot="1" noChangeAspect="1"/>
           </p:cNvSpPr>
           <p:nvPr>
             <p:ph type="sldImg" idx="2"/>
@@ -2749,7 +2768,7 @@
             <a:spLocks noGrp="1"/>
           </p:cNvSpPr>
           <p:nvPr>
-            <p:ph type="body" idx="3" sz="quarter"/>
+            <p:ph type="body" sz="quarter" idx="3"/>
           </p:nvPr>
         </p:nvSpPr>
         <p:spPr/>
@@ -2770,7 +2789,7 @@
             <a:spLocks noGrp="1"/>
           </p:cNvSpPr>
           <p:nvPr>
-            <p:ph type="sldNum" idx="5" sz="quarter"/>
+            <p:ph type="sldNum" sz="quarter" idx="5"/>
           </p:nvPr>
         </p:nvSpPr>
         <p:spPr/>
@@ -2784,7 +2803,7 @@
 </file>
 
 <file path=ppt/notesSlides/notesSlide39.xml><?xml version="1.0" encoding="utf-8"?>
-<p:notes xmlns:a="http://schemas.openxmlformats.org/drawingml/2006/main" xmlns:p="http://schemas.openxmlformats.org/presentationml/2006/main" xmlns:r="http://schemas.openxmlformats.org/officeDocument/2006/relationships">
+<p:notes xmlns:a="http://schemas.openxmlformats.org/drawingml/2006/main" xmlns:r="http://schemas.openxmlformats.org/officeDocument/2006/relationships" xmlns:p="http://schemas.openxmlformats.org/presentationml/2006/main">
   <p:cSld>
     <p:spTree>
       <p:nvGrpSpPr>
@@ -2804,7 +2823,7 @@
         <p:nvSpPr>
           <p:cNvPr id="2" name="Slide Image Placeholder 1"/>
           <p:cNvSpPr>
-            <a:spLocks noGrp="1"/>
+            <a:spLocks noGrp="1" noRot="1" noChangeAspect="1"/>
           </p:cNvSpPr>
           <p:nvPr>
             <p:ph type="sldImg" idx="2"/>
@@ -2819,7 +2838,7 @@
             <a:spLocks noGrp="1"/>
           </p:cNvSpPr>
           <p:nvPr>
-            <p:ph type="body" idx="3" sz="quarter"/>
+            <p:ph type="body" sz="quarter" idx="3"/>
           </p:nvPr>
         </p:nvSpPr>
         <p:spPr/>
@@ -2840,7 +2859,7 @@
             <a:spLocks noGrp="1"/>
           </p:cNvSpPr>
           <p:nvPr>
-            <p:ph type="sldNum" idx="5" sz="quarter"/>
+            <p:ph type="sldNum" sz="quarter" idx="5"/>
           </p:nvPr>
         </p:nvSpPr>
         <p:spPr/>
@@ -2854,7 +2873,7 @@
 </file>
 
 <file path=ppt/notesSlides/notesSlide4.xml><?xml version="1.0" encoding="utf-8"?>
-<p:notes xmlns:a="http://schemas.openxmlformats.org/drawingml/2006/main" xmlns:p="http://schemas.openxmlformats.org/presentationml/2006/main" xmlns:r="http://schemas.openxmlformats.org/officeDocument/2006/relationships">
+<p:notes xmlns:a="http://schemas.openxmlformats.org/drawingml/2006/main" xmlns:r="http://schemas.openxmlformats.org/officeDocument/2006/relationships" xmlns:p="http://schemas.openxmlformats.org/presentationml/2006/main">
   <p:cSld>
     <p:spTree>
       <p:nvGrpSpPr>
@@ -2874,7 +2893,7 @@
         <p:nvSpPr>
           <p:cNvPr id="2" name="Slide Image Placeholder 1"/>
           <p:cNvSpPr>
-            <a:spLocks noGrp="1"/>
+            <a:spLocks noGrp="1" noRot="1" noChangeAspect="1"/>
           </p:cNvSpPr>
           <p:nvPr>
             <p:ph type="sldImg" idx="2"/>
@@ -2889,7 +2908,7 @@
             <a:spLocks noGrp="1"/>
           </p:cNvSpPr>
           <p:nvPr>
-            <p:ph type="body" idx="3" sz="quarter"/>
+            <p:ph type="body" sz="quarter" idx="3"/>
           </p:nvPr>
         </p:nvSpPr>
         <p:spPr/>
@@ -2910,7 +2929,7 @@
             <a:spLocks noGrp="1"/>
           </p:cNvSpPr>
           <p:nvPr>
-            <p:ph type="sldNum" idx="5" sz="quarter"/>
+            <p:ph type="sldNum" sz="quarter" idx="5"/>
           </p:nvPr>
         </p:nvSpPr>
         <p:spPr/>
@@ -2924,7 +2943,7 @@
 </file>
 
 <file path=ppt/notesSlides/notesSlide40.xml><?xml version="1.0" encoding="utf-8"?>
-<p:notes xmlns:a="http://schemas.openxmlformats.org/drawingml/2006/main" xmlns:p="http://schemas.openxmlformats.org/presentationml/2006/main" xmlns:r="http://schemas.openxmlformats.org/officeDocument/2006/relationships">
+<p:notes xmlns:a="http://schemas.openxmlformats.org/drawingml/2006/main" xmlns:r="http://schemas.openxmlformats.org/officeDocument/2006/relationships" xmlns:p="http://schemas.openxmlformats.org/presentationml/2006/main">
   <p:cSld>
     <p:spTree>
       <p:nvGrpSpPr>
@@ -2944,7 +2963,7 @@
         <p:nvSpPr>
           <p:cNvPr id="2" name="Slide Image Placeholder 1"/>
           <p:cNvSpPr>
-            <a:spLocks noGrp="1"/>
+            <a:spLocks noGrp="1" noRot="1" noChangeAspect="1"/>
           </p:cNvSpPr>
           <p:nvPr>
             <p:ph type="sldImg" idx="2"/>
@@ -2959,7 +2978,7 @@
             <a:spLocks noGrp="1"/>
           </p:cNvSpPr>
           <p:nvPr>
-            <p:ph type="body" idx="3" sz="quarter"/>
+            <p:ph type="body" sz="quarter" idx="3"/>
           </p:nvPr>
         </p:nvSpPr>
         <p:spPr/>
@@ -2980,7 +2999,7 @@
             <a:spLocks noGrp="1"/>
           </p:cNvSpPr>
           <p:nvPr>
-            <p:ph type="sldNum" idx="5" sz="quarter"/>
+            <p:ph type="sldNum" sz="quarter" idx="5"/>
           </p:nvPr>
         </p:nvSpPr>
         <p:spPr/>
@@ -2994,7 +3013,7 @@
 </file>
 
 <file path=ppt/notesSlides/notesSlide41.xml><?xml version="1.0" encoding="utf-8"?>
-<p:notes xmlns:a="http://schemas.openxmlformats.org/drawingml/2006/main" xmlns:p="http://schemas.openxmlformats.org/presentationml/2006/main" xmlns:r="http://schemas.openxmlformats.org/officeDocument/2006/relationships">
+<p:notes xmlns:a="http://schemas.openxmlformats.org/drawingml/2006/main" xmlns:r="http://schemas.openxmlformats.org/officeDocument/2006/relationships" xmlns:p="http://schemas.openxmlformats.org/presentationml/2006/main">
   <p:cSld>
     <p:spTree>
       <p:nvGrpSpPr>
@@ -3014,7 +3033,7 @@
         <p:nvSpPr>
           <p:cNvPr id="2" name="Slide Image Placeholder 1"/>
           <p:cNvSpPr>
-            <a:spLocks noGrp="1"/>
+            <a:spLocks noGrp="1" noRot="1" noChangeAspect="1"/>
           </p:cNvSpPr>
           <p:nvPr>
             <p:ph type="sldImg" idx="2"/>
@@ -3029,7 +3048,7 @@
             <a:spLocks noGrp="1"/>
           </p:cNvSpPr>
           <p:nvPr>
-            <p:ph type="body" idx="3" sz="quarter"/>
+            <p:ph type="body" sz="quarter" idx="3"/>
           </p:nvPr>
         </p:nvSpPr>
         <p:spPr/>
@@ -3050,7 +3069,7 @@
             <a:spLocks noGrp="1"/>
           </p:cNvSpPr>
           <p:nvPr>
-            <p:ph type="sldNum" idx="5" sz="quarter"/>
+            <p:ph type="sldNum" sz="quarter" idx="5"/>
           </p:nvPr>
         </p:nvSpPr>
         <p:spPr/>
@@ -3064,7 +3083,7 @@
 </file>
 
 <file path=ppt/notesSlides/notesSlide42.xml><?xml version="1.0" encoding="utf-8"?>
-<p:notes xmlns:a="http://schemas.openxmlformats.org/drawingml/2006/main" xmlns:p="http://schemas.openxmlformats.org/presentationml/2006/main" xmlns:r="http://schemas.openxmlformats.org/officeDocument/2006/relationships">
+<p:notes xmlns:a="http://schemas.openxmlformats.org/drawingml/2006/main" xmlns:r="http://schemas.openxmlformats.org/officeDocument/2006/relationships" xmlns:p="http://schemas.openxmlformats.org/presentationml/2006/main">
   <p:cSld>
     <p:spTree>
       <p:nvGrpSpPr>
@@ -3084,7 +3103,7 @@
         <p:nvSpPr>
           <p:cNvPr id="2" name="Slide Image Placeholder 1"/>
           <p:cNvSpPr>
-            <a:spLocks noGrp="1"/>
+            <a:spLocks noGrp="1" noRot="1" noChangeAspect="1"/>
           </p:cNvSpPr>
           <p:nvPr>
             <p:ph type="sldImg" idx="2"/>
@@ -3099,7 +3118,7 @@
             <a:spLocks noGrp="1"/>
           </p:cNvSpPr>
           <p:nvPr>
-            <p:ph type="body" idx="3" sz="quarter"/>
+            <p:ph type="body" sz="quarter" idx="3"/>
           </p:nvPr>
         </p:nvSpPr>
         <p:spPr/>
@@ -3120,7 +3139,7 @@
             <a:spLocks noGrp="1"/>
           </p:cNvSpPr>
           <p:nvPr>
-            <p:ph type="sldNum" idx="5" sz="quarter"/>
+            <p:ph type="sldNum" sz="quarter" idx="5"/>
           </p:nvPr>
         </p:nvSpPr>
         <p:spPr/>
@@ -3134,7 +3153,7 @@
 </file>
 
 <file path=ppt/notesSlides/notesSlide43.xml><?xml version="1.0" encoding="utf-8"?>
-<p:notes xmlns:a="http://schemas.openxmlformats.org/drawingml/2006/main" xmlns:p="http://schemas.openxmlformats.org/presentationml/2006/main" xmlns:r="http://schemas.openxmlformats.org/officeDocument/2006/relationships">
+<p:notes xmlns:a="http://schemas.openxmlformats.org/drawingml/2006/main" xmlns:r="http://schemas.openxmlformats.org/officeDocument/2006/relationships" xmlns:p="http://schemas.openxmlformats.org/presentationml/2006/main">
   <p:cSld>
     <p:spTree>
       <p:nvGrpSpPr>
@@ -3154,7 +3173,7 @@
         <p:nvSpPr>
           <p:cNvPr id="2" name="Slide Image Placeholder 1"/>
           <p:cNvSpPr>
-            <a:spLocks noGrp="1"/>
+            <a:spLocks noGrp="1" noRot="1" noChangeAspect="1"/>
           </p:cNvSpPr>
           <p:nvPr>
             <p:ph type="sldImg" idx="2"/>
@@ -3169,7 +3188,7 @@
             <a:spLocks noGrp="1"/>
           </p:cNvSpPr>
           <p:nvPr>
-            <p:ph type="body" idx="3" sz="quarter"/>
+            <p:ph type="body" sz="quarter" idx="3"/>
           </p:nvPr>
         </p:nvSpPr>
         <p:spPr/>
@@ -3190,7 +3209,7 @@
             <a:spLocks noGrp="1"/>
           </p:cNvSpPr>
           <p:nvPr>
-            <p:ph type="sldNum" idx="5" sz="quarter"/>
+            <p:ph type="sldNum" sz="quarter" idx="5"/>
           </p:nvPr>
         </p:nvSpPr>
         <p:spPr/>
@@ -3204,7 +3223,7 @@
 </file>
 
 <file path=ppt/notesSlides/notesSlide44.xml><?xml version="1.0" encoding="utf-8"?>
-<p:notes xmlns:a="http://schemas.openxmlformats.org/drawingml/2006/main" xmlns:p="http://schemas.openxmlformats.org/presentationml/2006/main" xmlns:r="http://schemas.openxmlformats.org/officeDocument/2006/relationships">
+<p:notes xmlns:a="http://schemas.openxmlformats.org/drawingml/2006/main" xmlns:r="http://schemas.openxmlformats.org/officeDocument/2006/relationships" xmlns:p="http://schemas.openxmlformats.org/presentationml/2006/main">
   <p:cSld>
     <p:spTree>
       <p:nvGrpSpPr>
@@ -3224,7 +3243,7 @@
         <p:nvSpPr>
           <p:cNvPr id="2" name="Slide Image Placeholder 1"/>
           <p:cNvSpPr>
-            <a:spLocks noGrp="1"/>
+            <a:spLocks noGrp="1" noRot="1" noChangeAspect="1"/>
           </p:cNvSpPr>
           <p:nvPr>
             <p:ph type="sldImg" idx="2"/>
@@ -3239,7 +3258,7 @@
             <a:spLocks noGrp="1"/>
           </p:cNvSpPr>
           <p:nvPr>
-            <p:ph type="body" idx="3" sz="quarter"/>
+            <p:ph type="body" sz="quarter" idx="3"/>
           </p:nvPr>
         </p:nvSpPr>
         <p:spPr/>
@@ -3260,7 +3279,7 @@
             <a:spLocks noGrp="1"/>
           </p:cNvSpPr>
           <p:nvPr>
-            <p:ph type="sldNum" idx="5" sz="quarter"/>
+            <p:ph type="sldNum" sz="quarter" idx="5"/>
           </p:nvPr>
         </p:nvSpPr>
         <p:spPr/>
@@ -3274,7 +3293,7 @@
 </file>
 
 <file path=ppt/notesSlides/notesSlide45.xml><?xml version="1.0" encoding="utf-8"?>
-<p:notes xmlns:a="http://schemas.openxmlformats.org/drawingml/2006/main" xmlns:p="http://schemas.openxmlformats.org/presentationml/2006/main" xmlns:r="http://schemas.openxmlformats.org/officeDocument/2006/relationships">
+<p:notes xmlns:a="http://schemas.openxmlformats.org/drawingml/2006/main" xmlns:r="http://schemas.openxmlformats.org/officeDocument/2006/relationships" xmlns:p="http://schemas.openxmlformats.org/presentationml/2006/main">
   <p:cSld>
     <p:spTree>
       <p:nvGrpSpPr>
@@ -3294,7 +3313,7 @@
         <p:nvSpPr>
           <p:cNvPr id="2" name="Slide Image Placeholder 1"/>
           <p:cNvSpPr>
-            <a:spLocks noGrp="1"/>
+            <a:spLocks noGrp="1" noRot="1" noChangeAspect="1"/>
           </p:cNvSpPr>
           <p:nvPr>
             <p:ph type="sldImg" idx="2"/>
@@ -3309,7 +3328,7 @@
             <a:spLocks noGrp="1"/>
           </p:cNvSpPr>
           <p:nvPr>
-            <p:ph type="body" idx="3" sz="quarter"/>
+            <p:ph type="body" sz="quarter" idx="3"/>
           </p:nvPr>
         </p:nvSpPr>
         <p:spPr/>
@@ -3330,7 +3349,7 @@
             <a:spLocks noGrp="1"/>
           </p:cNvSpPr>
           <p:nvPr>
-            <p:ph type="sldNum" idx="5" sz="quarter"/>
+            <p:ph type="sldNum" sz="quarter" idx="5"/>
           </p:nvPr>
         </p:nvSpPr>
         <p:spPr/>
@@ -3344,7 +3363,7 @@
 </file>
 
 <file path=ppt/notesSlides/notesSlide46.xml><?xml version="1.0" encoding="utf-8"?>
-<p:notes xmlns:a="http://schemas.openxmlformats.org/drawingml/2006/main" xmlns:p="http://schemas.openxmlformats.org/presentationml/2006/main" xmlns:r="http://schemas.openxmlformats.org/officeDocument/2006/relationships">
+<p:notes xmlns:a="http://schemas.openxmlformats.org/drawingml/2006/main" xmlns:r="http://schemas.openxmlformats.org/officeDocument/2006/relationships" xmlns:p="http://schemas.openxmlformats.org/presentationml/2006/main">
   <p:cSld>
     <p:spTree>
       <p:nvGrpSpPr>
@@ -3364,7 +3383,7 @@
         <p:nvSpPr>
           <p:cNvPr id="2" name="Slide Image Placeholder 1"/>
           <p:cNvSpPr>
-            <a:spLocks noGrp="1"/>
+            <a:spLocks noGrp="1" noRot="1" noChangeAspect="1"/>
           </p:cNvSpPr>
           <p:nvPr>
             <p:ph type="sldImg" idx="2"/>
@@ -3379,7 +3398,7 @@
             <a:spLocks noGrp="1"/>
           </p:cNvSpPr>
           <p:nvPr>
-            <p:ph type="body" idx="3" sz="quarter"/>
+            <p:ph type="body" sz="quarter" idx="3"/>
           </p:nvPr>
         </p:nvSpPr>
         <p:spPr/>
@@ -3400,7 +3419,7 @@
             <a:spLocks noGrp="1"/>
           </p:cNvSpPr>
           <p:nvPr>
-            <p:ph type="sldNum" idx="5" sz="quarter"/>
+            <p:ph type="sldNum" sz="quarter" idx="5"/>
           </p:nvPr>
         </p:nvSpPr>
         <p:spPr/>
@@ -3414,7 +3433,7 @@
 </file>
 
 <file path=ppt/notesSlides/notesSlide47.xml><?xml version="1.0" encoding="utf-8"?>
-<p:notes xmlns:a="http://schemas.openxmlformats.org/drawingml/2006/main" xmlns:p="http://schemas.openxmlformats.org/presentationml/2006/main" xmlns:r="http://schemas.openxmlformats.org/officeDocument/2006/relationships">
+<p:notes xmlns:a="http://schemas.openxmlformats.org/drawingml/2006/main" xmlns:r="http://schemas.openxmlformats.org/officeDocument/2006/relationships" xmlns:p="http://schemas.openxmlformats.org/presentationml/2006/main">
   <p:cSld>
     <p:spTree>
       <p:nvGrpSpPr>
@@ -3434,7 +3453,7 @@
         <p:nvSpPr>
           <p:cNvPr id="2" name="Slide Image Placeholder 1"/>
           <p:cNvSpPr>
-            <a:spLocks noGrp="1"/>
+            <a:spLocks noGrp="1" noRot="1" noChangeAspect="1"/>
           </p:cNvSpPr>
           <p:nvPr>
             <p:ph type="sldImg" idx="2"/>
@@ -3449,7 +3468,7 @@
             <a:spLocks noGrp="1"/>
           </p:cNvSpPr>
           <p:nvPr>
-            <p:ph type="body" idx="3" sz="quarter"/>
+            <p:ph type="body" sz="quarter" idx="3"/>
           </p:nvPr>
         </p:nvSpPr>
         <p:spPr/>
@@ -3470,7 +3489,7 @@
             <a:spLocks noGrp="1"/>
           </p:cNvSpPr>
           <p:nvPr>
-            <p:ph type="sldNum" idx="5" sz="quarter"/>
+            <p:ph type="sldNum" sz="quarter" idx="5"/>
           </p:nvPr>
         </p:nvSpPr>
         <p:spPr/>
@@ -3484,7 +3503,7 @@
 </file>
 
 <file path=ppt/notesSlides/notesSlide48.xml><?xml version="1.0" encoding="utf-8"?>
-<p:notes xmlns:a="http://schemas.openxmlformats.org/drawingml/2006/main" xmlns:p="http://schemas.openxmlformats.org/presentationml/2006/main" xmlns:r="http://schemas.openxmlformats.org/officeDocument/2006/relationships">
+<p:notes xmlns:a="http://schemas.openxmlformats.org/drawingml/2006/main" xmlns:r="http://schemas.openxmlformats.org/officeDocument/2006/relationships" xmlns:p="http://schemas.openxmlformats.org/presentationml/2006/main">
   <p:cSld>
     <p:spTree>
       <p:nvGrpSpPr>
@@ -3504,7 +3523,7 @@
         <p:nvSpPr>
           <p:cNvPr id="2" name="Slide Image Placeholder 1"/>
           <p:cNvSpPr>
-            <a:spLocks noGrp="1"/>
+            <a:spLocks noGrp="1" noRot="1" noChangeAspect="1"/>
           </p:cNvSpPr>
           <p:nvPr>
             <p:ph type="sldImg" idx="2"/>
@@ -3519,7 +3538,7 @@
             <a:spLocks noGrp="1"/>
           </p:cNvSpPr>
           <p:nvPr>
-            <p:ph type="body" idx="3" sz="quarter"/>
+            <p:ph type="body" sz="quarter" idx="3"/>
           </p:nvPr>
         </p:nvSpPr>
         <p:spPr/>
@@ -3540,7 +3559,7 @@
             <a:spLocks noGrp="1"/>
           </p:cNvSpPr>
           <p:nvPr>
-            <p:ph type="sldNum" idx="5" sz="quarter"/>
+            <p:ph type="sldNum" sz="quarter" idx="5"/>
           </p:nvPr>
         </p:nvSpPr>
         <p:spPr/>
@@ -3554,7 +3573,7 @@
 </file>
 
 <file path=ppt/notesSlides/notesSlide49.xml><?xml version="1.0" encoding="utf-8"?>
-<p:notes xmlns:a="http://schemas.openxmlformats.org/drawingml/2006/main" xmlns:p="http://schemas.openxmlformats.org/presentationml/2006/main" xmlns:r="http://schemas.openxmlformats.org/officeDocument/2006/relationships">
+<p:notes xmlns:a="http://schemas.openxmlformats.org/drawingml/2006/main" xmlns:r="http://schemas.openxmlformats.org/officeDocument/2006/relationships" xmlns:p="http://schemas.openxmlformats.org/presentationml/2006/main">
   <p:cSld>
     <p:spTree>
       <p:nvGrpSpPr>
@@ -3574,7 +3593,7 @@
         <p:nvSpPr>
           <p:cNvPr id="2" name="Slide Image Placeholder 1"/>
           <p:cNvSpPr>
-            <a:spLocks noGrp="1"/>
+            <a:spLocks noGrp="1" noRot="1" noChangeAspect="1"/>
           </p:cNvSpPr>
           <p:nvPr>
             <p:ph type="sldImg" idx="2"/>
@@ -3589,7 +3608,7 @@
             <a:spLocks noGrp="1"/>
           </p:cNvSpPr>
           <p:nvPr>
-            <p:ph type="body" idx="3" sz="quarter"/>
+            <p:ph type="body" sz="quarter" idx="3"/>
           </p:nvPr>
         </p:nvSpPr>
         <p:spPr/>
@@ -3610,7 +3629,7 @@
             <a:spLocks noGrp="1"/>
           </p:cNvSpPr>
           <p:nvPr>
-            <p:ph type="sldNum" idx="5" sz="quarter"/>
+            <p:ph type="sldNum" sz="quarter" idx="5"/>
           </p:nvPr>
         </p:nvSpPr>
         <p:spPr/>
@@ -3624,7 +3643,7 @@
 </file>
 
 <file path=ppt/notesSlides/notesSlide5.xml><?xml version="1.0" encoding="utf-8"?>
-<p:notes xmlns:a="http://schemas.openxmlformats.org/drawingml/2006/main" xmlns:p="http://schemas.openxmlformats.org/presentationml/2006/main" xmlns:r="http://schemas.openxmlformats.org/officeDocument/2006/relationships">
+<p:notes xmlns:a="http://schemas.openxmlformats.org/drawingml/2006/main" xmlns:r="http://schemas.openxmlformats.org/officeDocument/2006/relationships" xmlns:p="http://schemas.openxmlformats.org/presentationml/2006/main">
   <p:cSld>
     <p:spTree>
       <p:nvGrpSpPr>
@@ -3644,7 +3663,7 @@
         <p:nvSpPr>
           <p:cNvPr id="2" name="Slide Image Placeholder 1"/>
           <p:cNvSpPr>
-            <a:spLocks noGrp="1"/>
+            <a:spLocks noGrp="1" noRot="1" noChangeAspect="1"/>
           </p:cNvSpPr>
           <p:nvPr>
             <p:ph type="sldImg" idx="2"/>
@@ -3659,7 +3678,7 @@
             <a:spLocks noGrp="1"/>
           </p:cNvSpPr>
           <p:nvPr>
-            <p:ph type="body" idx="3" sz="quarter"/>
+            <p:ph type="body" sz="quarter" idx="3"/>
           </p:nvPr>
         </p:nvSpPr>
         <p:spPr/>
@@ -3680,7 +3699,7 @@
             <a:spLocks noGrp="1"/>
           </p:cNvSpPr>
           <p:nvPr>
-            <p:ph type="sldNum" idx="5" sz="quarter"/>
+            <p:ph type="sldNum" sz="quarter" idx="5"/>
           </p:nvPr>
         </p:nvSpPr>
         <p:spPr/>
@@ -3694,7 +3713,7 @@
 </file>
 
 <file path=ppt/notesSlides/notesSlide50.xml><?xml version="1.0" encoding="utf-8"?>
-<p:notes xmlns:a="http://schemas.openxmlformats.org/drawingml/2006/main" xmlns:p="http://schemas.openxmlformats.org/presentationml/2006/main" xmlns:r="http://schemas.openxmlformats.org/officeDocument/2006/relationships">
+<p:notes xmlns:a="http://schemas.openxmlformats.org/drawingml/2006/main" xmlns:r="http://schemas.openxmlformats.org/officeDocument/2006/relationships" xmlns:p="http://schemas.openxmlformats.org/presentationml/2006/main">
   <p:cSld>
     <p:spTree>
       <p:nvGrpSpPr>
@@ -3714,7 +3733,7 @@
         <p:nvSpPr>
           <p:cNvPr id="2" name="Slide Image Placeholder 1"/>
           <p:cNvSpPr>
-            <a:spLocks noGrp="1"/>
+            <a:spLocks noGrp="1" noRot="1" noChangeAspect="1"/>
           </p:cNvSpPr>
           <p:nvPr>
             <p:ph type="sldImg" idx="2"/>
@@ -3729,7 +3748,7 @@
             <a:spLocks noGrp="1"/>
           </p:cNvSpPr>
           <p:nvPr>
-            <p:ph type="body" idx="3" sz="quarter"/>
+            <p:ph type="body" sz="quarter" idx="3"/>
           </p:nvPr>
         </p:nvSpPr>
         <p:spPr/>
@@ -3750,7 +3769,7 @@
             <a:spLocks noGrp="1"/>
           </p:cNvSpPr>
           <p:nvPr>
-            <p:ph type="sldNum" idx="5" sz="quarter"/>
+            <p:ph type="sldNum" sz="quarter" idx="5"/>
           </p:nvPr>
         </p:nvSpPr>
         <p:spPr/>
@@ -3764,7 +3783,7 @@
 </file>
 
 <file path=ppt/notesSlides/notesSlide51.xml><?xml version="1.0" encoding="utf-8"?>
-<p:notes xmlns:a="http://schemas.openxmlformats.org/drawingml/2006/main" xmlns:p="http://schemas.openxmlformats.org/presentationml/2006/main" xmlns:r="http://schemas.openxmlformats.org/officeDocument/2006/relationships">
+<p:notes xmlns:a="http://schemas.openxmlformats.org/drawingml/2006/main" xmlns:r="http://schemas.openxmlformats.org/officeDocument/2006/relationships" xmlns:p="http://schemas.openxmlformats.org/presentationml/2006/main">
   <p:cSld>
     <p:spTree>
       <p:nvGrpSpPr>
@@ -3784,7 +3803,7 @@
         <p:nvSpPr>
           <p:cNvPr id="2" name="Slide Image Placeholder 1"/>
           <p:cNvSpPr>
-            <a:spLocks noGrp="1"/>
+            <a:spLocks noGrp="1" noRot="1" noChangeAspect="1"/>
           </p:cNvSpPr>
           <p:nvPr>
             <p:ph type="sldImg" idx="2"/>
@@ -3799,7 +3818,7 @@
             <a:spLocks noGrp="1"/>
           </p:cNvSpPr>
           <p:nvPr>
-            <p:ph type="body" idx="3" sz="quarter"/>
+            <p:ph type="body" sz="quarter" idx="3"/>
           </p:nvPr>
         </p:nvSpPr>
         <p:spPr/>
@@ -3820,7 +3839,7 @@
             <a:spLocks noGrp="1"/>
           </p:cNvSpPr>
           <p:nvPr>
-            <p:ph type="sldNum" idx="5" sz="quarter"/>
+            <p:ph type="sldNum" sz="quarter" idx="5"/>
           </p:nvPr>
         </p:nvSpPr>
         <p:spPr/>
@@ -3834,7 +3853,7 @@
 </file>
 
 <file path=ppt/notesSlides/notesSlide52.xml><?xml version="1.0" encoding="utf-8"?>
-<p:notes xmlns:a="http://schemas.openxmlformats.org/drawingml/2006/main" xmlns:p="http://schemas.openxmlformats.org/presentationml/2006/main" xmlns:r="http://schemas.openxmlformats.org/officeDocument/2006/relationships">
+<p:notes xmlns:a="http://schemas.openxmlformats.org/drawingml/2006/main" xmlns:r="http://schemas.openxmlformats.org/officeDocument/2006/relationships" xmlns:p="http://schemas.openxmlformats.org/presentationml/2006/main">
   <p:cSld>
     <p:spTree>
       <p:nvGrpSpPr>
@@ -3854,7 +3873,7 @@
         <p:nvSpPr>
           <p:cNvPr id="2" name="Slide Image Placeholder 1"/>
           <p:cNvSpPr>
-            <a:spLocks noGrp="1"/>
+            <a:spLocks noGrp="1" noRot="1" noChangeAspect="1"/>
           </p:cNvSpPr>
           <p:nvPr>
             <p:ph type="sldImg" idx="2"/>
@@ -3869,7 +3888,7 @@
             <a:spLocks noGrp="1"/>
           </p:cNvSpPr>
           <p:nvPr>
-            <p:ph type="body" idx="3" sz="quarter"/>
+            <p:ph type="body" sz="quarter" idx="3"/>
           </p:nvPr>
         </p:nvSpPr>
         <p:spPr/>
@@ -3890,7 +3909,7 @@
             <a:spLocks noGrp="1"/>
           </p:cNvSpPr>
           <p:nvPr>
-            <p:ph type="sldNum" idx="5" sz="quarter"/>
+            <p:ph type="sldNum" sz="quarter" idx="5"/>
           </p:nvPr>
         </p:nvSpPr>
         <p:spPr/>
@@ -3904,7 +3923,7 @@
 </file>
 
 <file path=ppt/notesSlides/notesSlide53.xml><?xml version="1.0" encoding="utf-8"?>
-<p:notes xmlns:a="http://schemas.openxmlformats.org/drawingml/2006/main" xmlns:p="http://schemas.openxmlformats.org/presentationml/2006/main" xmlns:r="http://schemas.openxmlformats.org/officeDocument/2006/relationships">
+<p:notes xmlns:a="http://schemas.openxmlformats.org/drawingml/2006/main" xmlns:r="http://schemas.openxmlformats.org/officeDocument/2006/relationships" xmlns:p="http://schemas.openxmlformats.org/presentationml/2006/main">
   <p:cSld>
     <p:spTree>
       <p:nvGrpSpPr>
@@ -3924,7 +3943,7 @@
         <p:nvSpPr>
           <p:cNvPr id="2" name="Slide Image Placeholder 1"/>
           <p:cNvSpPr>
-            <a:spLocks noGrp="1"/>
+            <a:spLocks noGrp="1" noRot="1" noChangeAspect="1"/>
           </p:cNvSpPr>
           <p:nvPr>
             <p:ph type="sldImg" idx="2"/>
@@ -3939,7 +3958,7 @@
             <a:spLocks noGrp="1"/>
           </p:cNvSpPr>
           <p:nvPr>
-            <p:ph type="body" idx="3" sz="quarter"/>
+            <p:ph type="body" sz="quarter" idx="3"/>
           </p:nvPr>
         </p:nvSpPr>
         <p:spPr/>
@@ -3960,7 +3979,7 @@
             <a:spLocks noGrp="1"/>
           </p:cNvSpPr>
           <p:nvPr>
-            <p:ph type="sldNum" idx="5" sz="quarter"/>
+            <p:ph type="sldNum" sz="quarter" idx="5"/>
           </p:nvPr>
         </p:nvSpPr>
         <p:spPr/>
@@ -3974,7 +3993,7 @@
 </file>
 
 <file path=ppt/notesSlides/notesSlide54.xml><?xml version="1.0" encoding="utf-8"?>
-<p:notes xmlns:a="http://schemas.openxmlformats.org/drawingml/2006/main" xmlns:p="http://schemas.openxmlformats.org/presentationml/2006/main" xmlns:r="http://schemas.openxmlformats.org/officeDocument/2006/relationships">
+<p:notes xmlns:a="http://schemas.openxmlformats.org/drawingml/2006/main" xmlns:r="http://schemas.openxmlformats.org/officeDocument/2006/relationships" xmlns:p="http://schemas.openxmlformats.org/presentationml/2006/main">
   <p:cSld>
     <p:spTree>
       <p:nvGrpSpPr>
@@ -3994,7 +4013,7 @@
         <p:nvSpPr>
           <p:cNvPr id="2" name="Slide Image Placeholder 1"/>
           <p:cNvSpPr>
-            <a:spLocks noGrp="1"/>
+            <a:spLocks noGrp="1" noRot="1" noChangeAspect="1"/>
           </p:cNvSpPr>
           <p:nvPr>
             <p:ph type="sldImg" idx="2"/>
@@ -4009,7 +4028,7 @@
             <a:spLocks noGrp="1"/>
           </p:cNvSpPr>
           <p:nvPr>
-            <p:ph type="body" idx="3" sz="quarter"/>
+            <p:ph type="body" sz="quarter" idx="3"/>
           </p:nvPr>
         </p:nvSpPr>
         <p:spPr/>
@@ -4030,7 +4049,7 @@
             <a:spLocks noGrp="1"/>
           </p:cNvSpPr>
           <p:nvPr>
-            <p:ph type="sldNum" idx="5" sz="quarter"/>
+            <p:ph type="sldNum" sz="quarter" idx="5"/>
           </p:nvPr>
         </p:nvSpPr>
         <p:spPr/>
@@ -4044,7 +4063,7 @@
 </file>
 
 <file path=ppt/notesSlides/notesSlide55.xml><?xml version="1.0" encoding="utf-8"?>
-<p:notes xmlns:a="http://schemas.openxmlformats.org/drawingml/2006/main" xmlns:p="http://schemas.openxmlformats.org/presentationml/2006/main" xmlns:r="http://schemas.openxmlformats.org/officeDocument/2006/relationships">
+<p:notes xmlns:a="http://schemas.openxmlformats.org/drawingml/2006/main" xmlns:r="http://schemas.openxmlformats.org/officeDocument/2006/relationships" xmlns:p="http://schemas.openxmlformats.org/presentationml/2006/main">
   <p:cSld>
     <p:spTree>
       <p:nvGrpSpPr>
@@ -4064,7 +4083,7 @@
         <p:nvSpPr>
           <p:cNvPr id="2" name="Slide Image Placeholder 1"/>
           <p:cNvSpPr>
-            <a:spLocks noGrp="1"/>
+            <a:spLocks noGrp="1" noRot="1" noChangeAspect="1"/>
           </p:cNvSpPr>
           <p:nvPr>
             <p:ph type="sldImg" idx="2"/>
@@ -4079,7 +4098,7 @@
             <a:spLocks noGrp="1"/>
           </p:cNvSpPr>
           <p:nvPr>
-            <p:ph type="body" idx="3" sz="quarter"/>
+            <p:ph type="body" sz="quarter" idx="3"/>
           </p:nvPr>
         </p:nvSpPr>
         <p:spPr/>
@@ -4100,7 +4119,7 @@
             <a:spLocks noGrp="1"/>
           </p:cNvSpPr>
           <p:nvPr>
-            <p:ph type="sldNum" idx="5" sz="quarter"/>
+            <p:ph type="sldNum" sz="quarter" idx="5"/>
           </p:nvPr>
         </p:nvSpPr>
         <p:spPr/>
@@ -4114,7 +4133,7 @@
 </file>
 
 <file path=ppt/notesSlides/notesSlide56.xml><?xml version="1.0" encoding="utf-8"?>
-<p:notes xmlns:a="http://schemas.openxmlformats.org/drawingml/2006/main" xmlns:p="http://schemas.openxmlformats.org/presentationml/2006/main" xmlns:r="http://schemas.openxmlformats.org/officeDocument/2006/relationships">
+<p:notes xmlns:a="http://schemas.openxmlformats.org/drawingml/2006/main" xmlns:r="http://schemas.openxmlformats.org/officeDocument/2006/relationships" xmlns:p="http://schemas.openxmlformats.org/presentationml/2006/main">
   <p:cSld>
     <p:spTree>
       <p:nvGrpSpPr>
@@ -4134,7 +4153,7 @@
         <p:nvSpPr>
           <p:cNvPr id="2" name="Slide Image Placeholder 1"/>
           <p:cNvSpPr>
-            <a:spLocks noGrp="1"/>
+            <a:spLocks noGrp="1" noRot="1" noChangeAspect="1"/>
           </p:cNvSpPr>
           <p:nvPr>
             <p:ph type="sldImg" idx="2"/>
@@ -4149,7 +4168,7 @@
             <a:spLocks noGrp="1"/>
           </p:cNvSpPr>
           <p:nvPr>
-            <p:ph type="body" idx="3" sz="quarter"/>
+            <p:ph type="body" sz="quarter" idx="3"/>
           </p:nvPr>
         </p:nvSpPr>
         <p:spPr/>
@@ -4170,7 +4189,7 @@
             <a:spLocks noGrp="1"/>
           </p:cNvSpPr>
           <p:nvPr>
-            <p:ph type="sldNum" idx="5" sz="quarter"/>
+            <p:ph type="sldNum" sz="quarter" idx="5"/>
           </p:nvPr>
         </p:nvSpPr>
         <p:spPr/>
@@ -4184,7 +4203,7 @@
 </file>
 
 <file path=ppt/notesSlides/notesSlide57.xml><?xml version="1.0" encoding="utf-8"?>
-<p:notes xmlns:a="http://schemas.openxmlformats.org/drawingml/2006/main" xmlns:p="http://schemas.openxmlformats.org/presentationml/2006/main" xmlns:r="http://schemas.openxmlformats.org/officeDocument/2006/relationships">
+<p:notes xmlns:a="http://schemas.openxmlformats.org/drawingml/2006/main" xmlns:r="http://schemas.openxmlformats.org/officeDocument/2006/relationships" xmlns:p="http://schemas.openxmlformats.org/presentationml/2006/main">
   <p:cSld>
     <p:spTree>
       <p:nvGrpSpPr>
@@ -4204,7 +4223,7 @@
         <p:nvSpPr>
           <p:cNvPr id="2" name="Slide Image Placeholder 1"/>
           <p:cNvSpPr>
-            <a:spLocks noGrp="1"/>
+            <a:spLocks noGrp="1" noRot="1" noChangeAspect="1"/>
           </p:cNvSpPr>
           <p:nvPr>
             <p:ph type="sldImg" idx="2"/>
@@ -4219,7 +4238,7 @@
             <a:spLocks noGrp="1"/>
           </p:cNvSpPr>
           <p:nvPr>
-            <p:ph type="body" idx="3" sz="quarter"/>
+            <p:ph type="body" sz="quarter" idx="3"/>
           </p:nvPr>
         </p:nvSpPr>
         <p:spPr/>
@@ -4240,7 +4259,7 @@
             <a:spLocks noGrp="1"/>
           </p:cNvSpPr>
           <p:nvPr>
-            <p:ph type="sldNum" idx="5" sz="quarter"/>
+            <p:ph type="sldNum" sz="quarter" idx="5"/>
           </p:nvPr>
         </p:nvSpPr>
         <p:spPr/>
@@ -4254,7 +4273,7 @@
 </file>
 
 <file path=ppt/notesSlides/notesSlide58.xml><?xml version="1.0" encoding="utf-8"?>
-<p:notes xmlns:a="http://schemas.openxmlformats.org/drawingml/2006/main" xmlns:p="http://schemas.openxmlformats.org/presentationml/2006/main" xmlns:r="http://schemas.openxmlformats.org/officeDocument/2006/relationships">
+<p:notes xmlns:a="http://schemas.openxmlformats.org/drawingml/2006/main" xmlns:r="http://schemas.openxmlformats.org/officeDocument/2006/relationships" xmlns:p="http://schemas.openxmlformats.org/presentationml/2006/main">
   <p:cSld>
     <p:spTree>
       <p:nvGrpSpPr>
@@ -4274,7 +4293,7 @@
         <p:nvSpPr>
           <p:cNvPr id="2" name="Slide Image Placeholder 1"/>
           <p:cNvSpPr>
-            <a:spLocks noGrp="1"/>
+            <a:spLocks noGrp="1" noRot="1" noChangeAspect="1"/>
           </p:cNvSpPr>
           <p:nvPr>
             <p:ph type="sldImg" idx="2"/>
@@ -4289,7 +4308,7 @@
             <a:spLocks noGrp="1"/>
           </p:cNvSpPr>
           <p:nvPr>
-            <p:ph type="body" idx="3" sz="quarter"/>
+            <p:ph type="body" sz="quarter" idx="3"/>
           </p:nvPr>
         </p:nvSpPr>
         <p:spPr/>
@@ -4310,7 +4329,7 @@
             <a:spLocks noGrp="1"/>
           </p:cNvSpPr>
           <p:nvPr>
-            <p:ph type="sldNum" idx="5" sz="quarter"/>
+            <p:ph type="sldNum" sz="quarter" idx="5"/>
           </p:nvPr>
         </p:nvSpPr>
         <p:spPr/>
@@ -4324,7 +4343,7 @@
 </file>
 
 <file path=ppt/notesSlides/notesSlide59.xml><?xml version="1.0" encoding="utf-8"?>
-<p:notes xmlns:a="http://schemas.openxmlformats.org/drawingml/2006/main" xmlns:p="http://schemas.openxmlformats.org/presentationml/2006/main" xmlns:r="http://schemas.openxmlformats.org/officeDocument/2006/relationships">
+<p:notes xmlns:a="http://schemas.openxmlformats.org/drawingml/2006/main" xmlns:r="http://schemas.openxmlformats.org/officeDocument/2006/relationships" xmlns:p="http://schemas.openxmlformats.org/presentationml/2006/main">
   <p:cSld>
     <p:spTree>
       <p:nvGrpSpPr>
@@ -4344,7 +4363,7 @@
         <p:nvSpPr>
           <p:cNvPr id="2" name="Slide Image Placeholder 1"/>
           <p:cNvSpPr>
-            <a:spLocks noGrp="1"/>
+            <a:spLocks noGrp="1" noRot="1" noChangeAspect="1"/>
           </p:cNvSpPr>
           <p:nvPr>
             <p:ph type="sldImg" idx="2"/>
@@ -4359,7 +4378,7 @@
             <a:spLocks noGrp="1"/>
           </p:cNvSpPr>
           <p:nvPr>
-            <p:ph type="body" idx="3" sz="quarter"/>
+            <p:ph type="body" sz="quarter" idx="3"/>
           </p:nvPr>
         </p:nvSpPr>
         <p:spPr/>
@@ -4380,7 +4399,7 @@
             <a:spLocks noGrp="1"/>
           </p:cNvSpPr>
           <p:nvPr>
-            <p:ph type="sldNum" idx="5" sz="quarter"/>
+            <p:ph type="sldNum" sz="quarter" idx="5"/>
           </p:nvPr>
         </p:nvSpPr>
         <p:spPr/>
@@ -4394,7 +4413,7 @@
 </file>
 
 <file path=ppt/notesSlides/notesSlide6.xml><?xml version="1.0" encoding="utf-8"?>
-<p:notes xmlns:a="http://schemas.openxmlformats.org/drawingml/2006/main" xmlns:p="http://schemas.openxmlformats.org/presentationml/2006/main" xmlns:r="http://schemas.openxmlformats.org/officeDocument/2006/relationships">
+<p:notes xmlns:a="http://schemas.openxmlformats.org/drawingml/2006/main" xmlns:r="http://schemas.openxmlformats.org/officeDocument/2006/relationships" xmlns:p="http://schemas.openxmlformats.org/presentationml/2006/main">
   <p:cSld>
     <p:spTree>
       <p:nvGrpSpPr>
@@ -4414,7 +4433,7 @@
         <p:nvSpPr>
           <p:cNvPr id="2" name="Slide Image Placeholder 1"/>
           <p:cNvSpPr>
-            <a:spLocks noGrp="1"/>
+            <a:spLocks noGrp="1" noRot="1" noChangeAspect="1"/>
           </p:cNvSpPr>
           <p:nvPr>
             <p:ph type="sldImg" idx="2"/>
@@ -4429,7 +4448,7 @@
             <a:spLocks noGrp="1"/>
           </p:cNvSpPr>
           <p:nvPr>
-            <p:ph type="body" idx="3" sz="quarter"/>
+            <p:ph type="body" sz="quarter" idx="3"/>
           </p:nvPr>
         </p:nvSpPr>
         <p:spPr/>
@@ -4450,7 +4469,7 @@
             <a:spLocks noGrp="1"/>
           </p:cNvSpPr>
           <p:nvPr>
-            <p:ph type="sldNum" idx="5" sz="quarter"/>
+            <p:ph type="sldNum" sz="quarter" idx="5"/>
           </p:nvPr>
         </p:nvSpPr>
         <p:spPr/>
@@ -4464,7 +4483,7 @@
 </file>
 
 <file path=ppt/notesSlides/notesSlide60.xml><?xml version="1.0" encoding="utf-8"?>
-<p:notes xmlns:a="http://schemas.openxmlformats.org/drawingml/2006/main" xmlns:p="http://schemas.openxmlformats.org/presentationml/2006/main" xmlns:r="http://schemas.openxmlformats.org/officeDocument/2006/relationships">
+<p:notes xmlns:a="http://schemas.openxmlformats.org/drawingml/2006/main" xmlns:r="http://schemas.openxmlformats.org/officeDocument/2006/relationships" xmlns:p="http://schemas.openxmlformats.org/presentationml/2006/main">
   <p:cSld>
     <p:spTree>
       <p:nvGrpSpPr>
@@ -4484,7 +4503,7 @@
         <p:nvSpPr>
           <p:cNvPr id="2" name="Slide Image Placeholder 1"/>
           <p:cNvSpPr>
-            <a:spLocks noGrp="1"/>
+            <a:spLocks noGrp="1" noRot="1" noChangeAspect="1"/>
           </p:cNvSpPr>
           <p:nvPr>
             <p:ph type="sldImg" idx="2"/>
@@ -4499,7 +4518,7 @@
             <a:spLocks noGrp="1"/>
           </p:cNvSpPr>
           <p:nvPr>
-            <p:ph type="body" idx="3" sz="quarter"/>
+            <p:ph type="body" sz="quarter" idx="3"/>
           </p:nvPr>
         </p:nvSpPr>
         <p:spPr/>
@@ -4520,7 +4539,7 @@
             <a:spLocks noGrp="1"/>
           </p:cNvSpPr>
           <p:nvPr>
-            <p:ph type="sldNum" idx="5" sz="quarter"/>
+            <p:ph type="sldNum" sz="quarter" idx="5"/>
           </p:nvPr>
         </p:nvSpPr>
         <p:spPr/>
@@ -4534,7 +4553,7 @@
 </file>
 
 <file path=ppt/notesSlides/notesSlide61.xml><?xml version="1.0" encoding="utf-8"?>
-<p:notes xmlns:a="http://schemas.openxmlformats.org/drawingml/2006/main" xmlns:p="http://schemas.openxmlformats.org/presentationml/2006/main" xmlns:r="http://schemas.openxmlformats.org/officeDocument/2006/relationships">
+<p:notes xmlns:a="http://schemas.openxmlformats.org/drawingml/2006/main" xmlns:r="http://schemas.openxmlformats.org/officeDocument/2006/relationships" xmlns:p="http://schemas.openxmlformats.org/presentationml/2006/main">
   <p:cSld>
     <p:spTree>
       <p:nvGrpSpPr>
@@ -4554,7 +4573,7 @@
         <p:nvSpPr>
           <p:cNvPr id="2" name="Slide Image Placeholder 1"/>
           <p:cNvSpPr>
-            <a:spLocks noGrp="1"/>
+            <a:spLocks noGrp="1" noRot="1" noChangeAspect="1"/>
           </p:cNvSpPr>
           <p:nvPr>
             <p:ph type="sldImg" idx="2"/>
@@ -4569,7 +4588,7 @@
             <a:spLocks noGrp="1"/>
           </p:cNvSpPr>
           <p:nvPr>
-            <p:ph type="body" idx="3" sz="quarter"/>
+            <p:ph type="body" sz="quarter" idx="3"/>
           </p:nvPr>
         </p:nvSpPr>
         <p:spPr/>
@@ -4590,7 +4609,7 @@
             <a:spLocks noGrp="1"/>
           </p:cNvSpPr>
           <p:nvPr>
-            <p:ph type="sldNum" idx="5" sz="quarter"/>
+            <p:ph type="sldNum" sz="quarter" idx="5"/>
           </p:nvPr>
         </p:nvSpPr>
         <p:spPr/>
@@ -4604,7 +4623,7 @@
 </file>
 
 <file path=ppt/notesSlides/notesSlide62.xml><?xml version="1.0" encoding="utf-8"?>
-<p:notes xmlns:a="http://schemas.openxmlformats.org/drawingml/2006/main" xmlns:p="http://schemas.openxmlformats.org/presentationml/2006/main" xmlns:r="http://schemas.openxmlformats.org/officeDocument/2006/relationships">
+<p:notes xmlns:a="http://schemas.openxmlformats.org/drawingml/2006/main" xmlns:r="http://schemas.openxmlformats.org/officeDocument/2006/relationships" xmlns:p="http://schemas.openxmlformats.org/presentationml/2006/main">
   <p:cSld>
     <p:spTree>
       <p:nvGrpSpPr>
@@ -4624,7 +4643,7 @@
         <p:nvSpPr>
           <p:cNvPr id="2" name="Slide Image Placeholder 1"/>
           <p:cNvSpPr>
-            <a:spLocks noGrp="1"/>
+            <a:spLocks noGrp="1" noRot="1" noChangeAspect="1"/>
           </p:cNvSpPr>
           <p:nvPr>
             <p:ph type="sldImg" idx="2"/>
@@ -4639,7 +4658,7 @@
             <a:spLocks noGrp="1"/>
           </p:cNvSpPr>
           <p:nvPr>
-            <p:ph type="body" idx="3" sz="quarter"/>
+            <p:ph type="body" sz="quarter" idx="3"/>
           </p:nvPr>
         </p:nvSpPr>
         <p:spPr/>
@@ -4660,7 +4679,7 @@
             <a:spLocks noGrp="1"/>
           </p:cNvSpPr>
           <p:nvPr>
-            <p:ph type="sldNum" idx="5" sz="quarter"/>
+            <p:ph type="sldNum" sz="quarter" idx="5"/>
           </p:nvPr>
         </p:nvSpPr>
         <p:spPr/>
@@ -4674,7 +4693,7 @@
 </file>
 
 <file path=ppt/notesSlides/notesSlide63.xml><?xml version="1.0" encoding="utf-8"?>
-<p:notes xmlns:a="http://schemas.openxmlformats.org/drawingml/2006/main" xmlns:p="http://schemas.openxmlformats.org/presentationml/2006/main" xmlns:r="http://schemas.openxmlformats.org/officeDocument/2006/relationships">
+<p:notes xmlns:a="http://schemas.openxmlformats.org/drawingml/2006/main" xmlns:r="http://schemas.openxmlformats.org/officeDocument/2006/relationships" xmlns:p="http://schemas.openxmlformats.org/presentationml/2006/main">
   <p:cSld>
     <p:spTree>
       <p:nvGrpSpPr>
@@ -4694,7 +4713,7 @@
         <p:nvSpPr>
           <p:cNvPr id="2" name="Slide Image Placeholder 1"/>
           <p:cNvSpPr>
-            <a:spLocks noGrp="1"/>
+            <a:spLocks noGrp="1" noRot="1" noChangeAspect="1"/>
           </p:cNvSpPr>
           <p:nvPr>
             <p:ph type="sldImg" idx="2"/>
@@ -4709,7 +4728,7 @@
             <a:spLocks noGrp="1"/>
           </p:cNvSpPr>
           <p:nvPr>
-            <p:ph type="body" idx="3" sz="quarter"/>
+            <p:ph type="body" sz="quarter" idx="3"/>
           </p:nvPr>
         </p:nvSpPr>
         <p:spPr/>
@@ -4730,7 +4749,7 @@
             <a:spLocks noGrp="1"/>
           </p:cNvSpPr>
           <p:nvPr>
-            <p:ph type="sldNum" idx="5" sz="quarter"/>
+            <p:ph type="sldNum" sz="quarter" idx="5"/>
           </p:nvPr>
         </p:nvSpPr>
         <p:spPr/>
@@ -4744,7 +4763,7 @@
 </file>
 
 <file path=ppt/notesSlides/notesSlide64.xml><?xml version="1.0" encoding="utf-8"?>
-<p:notes xmlns:a="http://schemas.openxmlformats.org/drawingml/2006/main" xmlns:p="http://schemas.openxmlformats.org/presentationml/2006/main" xmlns:r="http://schemas.openxmlformats.org/officeDocument/2006/relationships">
+<p:notes xmlns:a="http://schemas.openxmlformats.org/drawingml/2006/main" xmlns:r="http://schemas.openxmlformats.org/officeDocument/2006/relationships" xmlns:p="http://schemas.openxmlformats.org/presentationml/2006/main">
   <p:cSld>
     <p:spTree>
       <p:nvGrpSpPr>
@@ -4764,7 +4783,7 @@
         <p:nvSpPr>
           <p:cNvPr id="2" name="Slide Image Placeholder 1"/>
           <p:cNvSpPr>
-            <a:spLocks noGrp="1"/>
+            <a:spLocks noGrp="1" noRot="1" noChangeAspect="1"/>
           </p:cNvSpPr>
           <p:nvPr>
             <p:ph type="sldImg" idx="2"/>
@@ -4779,7 +4798,7 @@
             <a:spLocks noGrp="1"/>
           </p:cNvSpPr>
           <p:nvPr>
-            <p:ph type="body" idx="3" sz="quarter"/>
+            <p:ph type="body" sz="quarter" idx="3"/>
           </p:nvPr>
         </p:nvSpPr>
         <p:spPr/>
@@ -4800,7 +4819,7 @@
             <a:spLocks noGrp="1"/>
           </p:cNvSpPr>
           <p:nvPr>
-            <p:ph type="sldNum" idx="5" sz="quarter"/>
+            <p:ph type="sldNum" sz="quarter" idx="5"/>
           </p:nvPr>
         </p:nvSpPr>
         <p:spPr/>
@@ -4814,7 +4833,7 @@
 </file>
 
 <file path=ppt/notesSlides/notesSlide65.xml><?xml version="1.0" encoding="utf-8"?>
-<p:notes xmlns:a="http://schemas.openxmlformats.org/drawingml/2006/main" xmlns:p="http://schemas.openxmlformats.org/presentationml/2006/main" xmlns:r="http://schemas.openxmlformats.org/officeDocument/2006/relationships">
+<p:notes xmlns:a="http://schemas.openxmlformats.org/drawingml/2006/main" xmlns:r="http://schemas.openxmlformats.org/officeDocument/2006/relationships" xmlns:p="http://schemas.openxmlformats.org/presentationml/2006/main">
   <p:cSld>
     <p:spTree>
       <p:nvGrpSpPr>
@@ -4834,7 +4853,7 @@
         <p:nvSpPr>
           <p:cNvPr id="2" name="Slide Image Placeholder 1"/>
           <p:cNvSpPr>
-            <a:spLocks noGrp="1"/>
+            <a:spLocks noGrp="1" noRot="1" noChangeAspect="1"/>
           </p:cNvSpPr>
           <p:nvPr>
             <p:ph type="sldImg" idx="2"/>
@@ -4849,7 +4868,7 @@
             <a:spLocks noGrp="1"/>
           </p:cNvSpPr>
           <p:nvPr>
-            <p:ph type="body" idx="3" sz="quarter"/>
+            <p:ph type="body" sz="quarter" idx="3"/>
           </p:nvPr>
         </p:nvSpPr>
         <p:spPr/>
@@ -4870,7 +4889,7 @@
             <a:spLocks noGrp="1"/>
           </p:cNvSpPr>
           <p:nvPr>
-            <p:ph type="sldNum" idx="5" sz="quarter"/>
+            <p:ph type="sldNum" sz="quarter" idx="5"/>
           </p:nvPr>
         </p:nvSpPr>
         <p:spPr/>
@@ -4884,7 +4903,7 @@
 </file>
 
 <file path=ppt/notesSlides/notesSlide66.xml><?xml version="1.0" encoding="utf-8"?>
-<p:notes xmlns:a="http://schemas.openxmlformats.org/drawingml/2006/main" xmlns:p="http://schemas.openxmlformats.org/presentationml/2006/main" xmlns:r="http://schemas.openxmlformats.org/officeDocument/2006/relationships">
+<p:notes xmlns:a="http://schemas.openxmlformats.org/drawingml/2006/main" xmlns:r="http://schemas.openxmlformats.org/officeDocument/2006/relationships" xmlns:p="http://schemas.openxmlformats.org/presentationml/2006/main">
   <p:cSld>
     <p:spTree>
       <p:nvGrpSpPr>
@@ -4904,7 +4923,7 @@
         <p:nvSpPr>
           <p:cNvPr id="2" name="Slide Image Placeholder 1"/>
           <p:cNvSpPr>
-            <a:spLocks noGrp="1"/>
+            <a:spLocks noGrp="1" noRot="1" noChangeAspect="1"/>
           </p:cNvSpPr>
           <p:nvPr>
             <p:ph type="sldImg" idx="2"/>
@@ -4919,7 +4938,7 @@
             <a:spLocks noGrp="1"/>
           </p:cNvSpPr>
           <p:nvPr>
-            <p:ph type="body" idx="3" sz="quarter"/>
+            <p:ph type="body" sz="quarter" idx="3"/>
           </p:nvPr>
         </p:nvSpPr>
         <p:spPr/>
@@ -4940,7 +4959,7 @@
             <a:spLocks noGrp="1"/>
           </p:cNvSpPr>
           <p:nvPr>
-            <p:ph type="sldNum" idx="5" sz="quarter"/>
+            <p:ph type="sldNum" sz="quarter" idx="5"/>
           </p:nvPr>
         </p:nvSpPr>
         <p:spPr/>
@@ -4954,7 +4973,7 @@
 </file>
 
 <file path=ppt/notesSlides/notesSlide67.xml><?xml version="1.0" encoding="utf-8"?>
-<p:notes xmlns:a="http://schemas.openxmlformats.org/drawingml/2006/main" xmlns:p="http://schemas.openxmlformats.org/presentationml/2006/main" xmlns:r="http://schemas.openxmlformats.org/officeDocument/2006/relationships">
+<p:notes xmlns:a="http://schemas.openxmlformats.org/drawingml/2006/main" xmlns:r="http://schemas.openxmlformats.org/officeDocument/2006/relationships" xmlns:p="http://schemas.openxmlformats.org/presentationml/2006/main">
   <p:cSld>
     <p:spTree>
       <p:nvGrpSpPr>
@@ -4974,7 +4993,7 @@
         <p:nvSpPr>
           <p:cNvPr id="2" name="Slide Image Placeholder 1"/>
           <p:cNvSpPr>
-            <a:spLocks noGrp="1"/>
+            <a:spLocks noGrp="1" noRot="1" noChangeAspect="1"/>
           </p:cNvSpPr>
           <p:nvPr>
             <p:ph type="sldImg" idx="2"/>
@@ -4989,7 +5008,7 @@
             <a:spLocks noGrp="1"/>
           </p:cNvSpPr>
           <p:nvPr>
-            <p:ph type="body" idx="3" sz="quarter"/>
+            <p:ph type="body" sz="quarter" idx="3"/>
           </p:nvPr>
         </p:nvSpPr>
         <p:spPr/>
@@ -5010,7 +5029,7 @@
             <a:spLocks noGrp="1"/>
           </p:cNvSpPr>
           <p:nvPr>
-            <p:ph type="sldNum" idx="5" sz="quarter"/>
+            <p:ph type="sldNum" sz="quarter" idx="5"/>
           </p:nvPr>
         </p:nvSpPr>
         <p:spPr/>
@@ -5024,7 +5043,7 @@
 </file>
 
 <file path=ppt/notesSlides/notesSlide68.xml><?xml version="1.0" encoding="utf-8"?>
-<p:notes xmlns:a="http://schemas.openxmlformats.org/drawingml/2006/main" xmlns:p="http://schemas.openxmlformats.org/presentationml/2006/main" xmlns:r="http://schemas.openxmlformats.org/officeDocument/2006/relationships">
+<p:notes xmlns:a="http://schemas.openxmlformats.org/drawingml/2006/main" xmlns:r="http://schemas.openxmlformats.org/officeDocument/2006/relationships" xmlns:p="http://schemas.openxmlformats.org/presentationml/2006/main">
   <p:cSld>
     <p:spTree>
       <p:nvGrpSpPr>
@@ -5044,7 +5063,7 @@
         <p:nvSpPr>
           <p:cNvPr id="2" name="Slide Image Placeholder 1"/>
           <p:cNvSpPr>
-            <a:spLocks noGrp="1"/>
+            <a:spLocks noGrp="1" noRot="1" noChangeAspect="1"/>
           </p:cNvSpPr>
           <p:nvPr>
             <p:ph type="sldImg" idx="2"/>
@@ -5059,7 +5078,7 @@
             <a:spLocks noGrp="1"/>
           </p:cNvSpPr>
           <p:nvPr>
-            <p:ph type="body" idx="3" sz="quarter"/>
+            <p:ph type="body" sz="quarter" idx="3"/>
           </p:nvPr>
         </p:nvSpPr>
         <p:spPr/>
@@ -5080,7 +5099,7 @@
             <a:spLocks noGrp="1"/>
           </p:cNvSpPr>
           <p:nvPr>
-            <p:ph type="sldNum" idx="5" sz="quarter"/>
+            <p:ph type="sldNum" sz="quarter" idx="5"/>
           </p:nvPr>
         </p:nvSpPr>
         <p:spPr/>
@@ -5094,7 +5113,7 @@
 </file>
 
 <file path=ppt/notesSlides/notesSlide69.xml><?xml version="1.0" encoding="utf-8"?>
-<p:notes xmlns:a="http://schemas.openxmlformats.org/drawingml/2006/main" xmlns:p="http://schemas.openxmlformats.org/presentationml/2006/main" xmlns:r="http://schemas.openxmlformats.org/officeDocument/2006/relationships">
+<p:notes xmlns:a="http://schemas.openxmlformats.org/drawingml/2006/main" xmlns:r="http://schemas.openxmlformats.org/officeDocument/2006/relationships" xmlns:p="http://schemas.openxmlformats.org/presentationml/2006/main">
   <p:cSld>
     <p:spTree>
       <p:nvGrpSpPr>
@@ -5114,7 +5133,7 @@
         <p:nvSpPr>
           <p:cNvPr id="2" name="Slide Image Placeholder 1"/>
           <p:cNvSpPr>
-            <a:spLocks noGrp="1"/>
+            <a:spLocks noGrp="1" noRot="1" noChangeAspect="1"/>
           </p:cNvSpPr>
           <p:nvPr>
             <p:ph type="sldImg" idx="2"/>
@@ -5129,7 +5148,7 @@
             <a:spLocks noGrp="1"/>
           </p:cNvSpPr>
           <p:nvPr>
-            <p:ph type="body" idx="3" sz="quarter"/>
+            <p:ph type="body" sz="quarter" idx="3"/>
           </p:nvPr>
         </p:nvSpPr>
         <p:spPr/>
@@ -5150,7 +5169,7 @@
             <a:spLocks noGrp="1"/>
           </p:cNvSpPr>
           <p:nvPr>
-            <p:ph type="sldNum" idx="5" sz="quarter"/>
+            <p:ph type="sldNum" sz="quarter" idx="5"/>
           </p:nvPr>
         </p:nvSpPr>
         <p:spPr/>
@@ -5164,7 +5183,7 @@
 </file>
 
 <file path=ppt/notesSlides/notesSlide7.xml><?xml version="1.0" encoding="utf-8"?>
-<p:notes xmlns:a="http://schemas.openxmlformats.org/drawingml/2006/main" xmlns:p="http://schemas.openxmlformats.org/presentationml/2006/main" xmlns:r="http://schemas.openxmlformats.org/officeDocument/2006/relationships">
+<p:notes xmlns:a="http://schemas.openxmlformats.org/drawingml/2006/main" xmlns:r="http://schemas.openxmlformats.org/officeDocument/2006/relationships" xmlns:p="http://schemas.openxmlformats.org/presentationml/2006/main">
   <p:cSld>
     <p:spTree>
       <p:nvGrpSpPr>
@@ -5184,7 +5203,7 @@
         <p:nvSpPr>
           <p:cNvPr id="2" name="Slide Image Placeholder 1"/>
           <p:cNvSpPr>
-            <a:spLocks noGrp="1"/>
+            <a:spLocks noGrp="1" noRot="1" noChangeAspect="1"/>
           </p:cNvSpPr>
           <p:nvPr>
             <p:ph type="sldImg" idx="2"/>
@@ -5199,7 +5218,7 @@
             <a:spLocks noGrp="1"/>
           </p:cNvSpPr>
           <p:nvPr>
-            <p:ph type="body" idx="3" sz="quarter"/>
+            <p:ph type="body" sz="quarter" idx="3"/>
           </p:nvPr>
         </p:nvSpPr>
         <p:spPr/>
@@ -5220,7 +5239,7 @@
             <a:spLocks noGrp="1"/>
           </p:cNvSpPr>
           <p:nvPr>
-            <p:ph type="sldNum" idx="5" sz="quarter"/>
+            <p:ph type="sldNum" sz="quarter" idx="5"/>
           </p:nvPr>
         </p:nvSpPr>
         <p:spPr/>
@@ -5234,7 +5253,7 @@
 </file>
 
 <file path=ppt/notesSlides/notesSlide70.xml><?xml version="1.0" encoding="utf-8"?>
-<p:notes xmlns:a="http://schemas.openxmlformats.org/drawingml/2006/main" xmlns:p="http://schemas.openxmlformats.org/presentationml/2006/main" xmlns:r="http://schemas.openxmlformats.org/officeDocument/2006/relationships">
+<p:notes xmlns:a="http://schemas.openxmlformats.org/drawingml/2006/main" xmlns:r="http://schemas.openxmlformats.org/officeDocument/2006/relationships" xmlns:p="http://schemas.openxmlformats.org/presentationml/2006/main">
   <p:cSld>
     <p:spTree>
       <p:nvGrpSpPr>
@@ -5254,7 +5273,7 @@
         <p:nvSpPr>
           <p:cNvPr id="2" name="Slide Image Placeholder 1"/>
           <p:cNvSpPr>
-            <a:spLocks noGrp="1"/>
+            <a:spLocks noGrp="1" noRot="1" noChangeAspect="1"/>
           </p:cNvSpPr>
           <p:nvPr>
             <p:ph type="sldImg" idx="2"/>
@@ -5269,7 +5288,7 @@
             <a:spLocks noGrp="1"/>
           </p:cNvSpPr>
           <p:nvPr>
-            <p:ph type="body" idx="3" sz="quarter"/>
+            <p:ph type="body" sz="quarter" idx="3"/>
           </p:nvPr>
         </p:nvSpPr>
         <p:spPr/>
@@ -5290,7 +5309,7 @@
             <a:spLocks noGrp="1"/>
           </p:cNvSpPr>
           <p:nvPr>
-            <p:ph type="sldNum" idx="5" sz="quarter"/>
+            <p:ph type="sldNum" sz="quarter" idx="5"/>
           </p:nvPr>
         </p:nvSpPr>
         <p:spPr/>
@@ -5304,7 +5323,7 @@
 </file>
 
 <file path=ppt/notesSlides/notesSlide71.xml><?xml version="1.0" encoding="utf-8"?>
-<p:notes xmlns:a="http://schemas.openxmlformats.org/drawingml/2006/main" xmlns:p="http://schemas.openxmlformats.org/presentationml/2006/main" xmlns:r="http://schemas.openxmlformats.org/officeDocument/2006/relationships">
+<p:notes xmlns:a="http://schemas.openxmlformats.org/drawingml/2006/main" xmlns:r="http://schemas.openxmlformats.org/officeDocument/2006/relationships" xmlns:p="http://schemas.openxmlformats.org/presentationml/2006/main">
   <p:cSld>
     <p:spTree>
       <p:nvGrpSpPr>
@@ -5324,7 +5343,7 @@
         <p:nvSpPr>
           <p:cNvPr id="2" name="Slide Image Placeholder 1"/>
           <p:cNvSpPr>
-            <a:spLocks noGrp="1"/>
+            <a:spLocks noGrp="1" noRot="1" noChangeAspect="1"/>
           </p:cNvSpPr>
           <p:nvPr>
             <p:ph type="sldImg" idx="2"/>
@@ -5339,7 +5358,7 @@
             <a:spLocks noGrp="1"/>
           </p:cNvSpPr>
           <p:nvPr>
-            <p:ph type="body" idx="3" sz="quarter"/>
+            <p:ph type="body" sz="quarter" idx="3"/>
           </p:nvPr>
         </p:nvSpPr>
         <p:spPr/>
@@ -5360,7 +5379,7 @@
             <a:spLocks noGrp="1"/>
           </p:cNvSpPr>
           <p:nvPr>
-            <p:ph type="sldNum" idx="5" sz="quarter"/>
+            <p:ph type="sldNum" sz="quarter" idx="5"/>
           </p:nvPr>
         </p:nvSpPr>
         <p:spPr/>
@@ -5374,7 +5393,7 @@
 </file>
 
 <file path=ppt/notesSlides/notesSlide72.xml><?xml version="1.0" encoding="utf-8"?>
-<p:notes xmlns:a="http://schemas.openxmlformats.org/drawingml/2006/main" xmlns:p="http://schemas.openxmlformats.org/presentationml/2006/main" xmlns:r="http://schemas.openxmlformats.org/officeDocument/2006/relationships">
+<p:notes xmlns:a="http://schemas.openxmlformats.org/drawingml/2006/main" xmlns:r="http://schemas.openxmlformats.org/officeDocument/2006/relationships" xmlns:p="http://schemas.openxmlformats.org/presentationml/2006/main">
   <p:cSld>
     <p:spTree>
       <p:nvGrpSpPr>
@@ -5394,7 +5413,7 @@
         <p:nvSpPr>
           <p:cNvPr id="2" name="Slide Image Placeholder 1"/>
           <p:cNvSpPr>
-            <a:spLocks noGrp="1"/>
+            <a:spLocks noGrp="1" noRot="1" noChangeAspect="1"/>
           </p:cNvSpPr>
           <p:nvPr>
             <p:ph type="sldImg" idx="2"/>
@@ -5409,7 +5428,7 @@
             <a:spLocks noGrp="1"/>
           </p:cNvSpPr>
           <p:nvPr>
-            <p:ph type="body" idx="3" sz="quarter"/>
+            <p:ph type="body" sz="quarter" idx="3"/>
           </p:nvPr>
         </p:nvSpPr>
         <p:spPr/>
@@ -5430,7 +5449,7 @@
             <a:spLocks noGrp="1"/>
           </p:cNvSpPr>
           <p:nvPr>
-            <p:ph type="sldNum" idx="5" sz="quarter"/>
+            <p:ph type="sldNum" sz="quarter" idx="5"/>
           </p:nvPr>
         </p:nvSpPr>
         <p:spPr/>
@@ -5444,7 +5463,7 @@
 </file>
 
 <file path=ppt/notesSlides/notesSlide73.xml><?xml version="1.0" encoding="utf-8"?>
-<p:notes xmlns:a="http://schemas.openxmlformats.org/drawingml/2006/main" xmlns:p="http://schemas.openxmlformats.org/presentationml/2006/main" xmlns:r="http://schemas.openxmlformats.org/officeDocument/2006/relationships">
+<p:notes xmlns:a="http://schemas.openxmlformats.org/drawingml/2006/main" xmlns:r="http://schemas.openxmlformats.org/officeDocument/2006/relationships" xmlns:p="http://schemas.openxmlformats.org/presentationml/2006/main">
   <p:cSld>
     <p:spTree>
       <p:nvGrpSpPr>
@@ -5464,7 +5483,7 @@
         <p:nvSpPr>
           <p:cNvPr id="2" name="Slide Image Placeholder 1"/>
           <p:cNvSpPr>
-            <a:spLocks noGrp="1"/>
+            <a:spLocks noGrp="1" noRot="1" noChangeAspect="1"/>
           </p:cNvSpPr>
           <p:nvPr>
             <p:ph type="sldImg" idx="2"/>
@@ -5479,7 +5498,7 @@
             <a:spLocks noGrp="1"/>
           </p:cNvSpPr>
           <p:nvPr>
-            <p:ph type="body" idx="3" sz="quarter"/>
+            <p:ph type="body" sz="quarter" idx="3"/>
           </p:nvPr>
         </p:nvSpPr>
         <p:spPr/>
@@ -5500,7 +5519,7 @@
             <a:spLocks noGrp="1"/>
           </p:cNvSpPr>
           <p:nvPr>
-            <p:ph type="sldNum" idx="5" sz="quarter"/>
+            <p:ph type="sldNum" sz="quarter" idx="5"/>
           </p:nvPr>
         </p:nvSpPr>
         <p:spPr/>
@@ -5514,7 +5533,7 @@
 </file>
 
 <file path=ppt/notesSlides/notesSlide74.xml><?xml version="1.0" encoding="utf-8"?>
-<p:notes xmlns:a="http://schemas.openxmlformats.org/drawingml/2006/main" xmlns:p="http://schemas.openxmlformats.org/presentationml/2006/main" xmlns:r="http://schemas.openxmlformats.org/officeDocument/2006/relationships">
+<p:notes xmlns:a="http://schemas.openxmlformats.org/drawingml/2006/main" xmlns:r="http://schemas.openxmlformats.org/officeDocument/2006/relationships" xmlns:p="http://schemas.openxmlformats.org/presentationml/2006/main">
   <p:cSld>
     <p:spTree>
       <p:nvGrpSpPr>
@@ -5534,7 +5553,7 @@
         <p:nvSpPr>
           <p:cNvPr id="2" name="Slide Image Placeholder 1"/>
           <p:cNvSpPr>
-            <a:spLocks noGrp="1"/>
+            <a:spLocks noGrp="1" noRot="1" noChangeAspect="1"/>
           </p:cNvSpPr>
           <p:nvPr>
             <p:ph type="sldImg" idx="2"/>
@@ -5549,7 +5568,7 @@
             <a:spLocks noGrp="1"/>
           </p:cNvSpPr>
           <p:nvPr>
-            <p:ph type="body" idx="3" sz="quarter"/>
+            <p:ph type="body" sz="quarter" idx="3"/>
           </p:nvPr>
         </p:nvSpPr>
         <p:spPr/>
@@ -5570,7 +5589,7 @@
             <a:spLocks noGrp="1"/>
           </p:cNvSpPr>
           <p:nvPr>
-            <p:ph type="sldNum" idx="5" sz="quarter"/>
+            <p:ph type="sldNum" sz="quarter" idx="5"/>
           </p:nvPr>
         </p:nvSpPr>
         <p:spPr/>
@@ -5584,7 +5603,7 @@
 </file>
 
 <file path=ppt/notesSlides/notesSlide75.xml><?xml version="1.0" encoding="utf-8"?>
-<p:notes xmlns:a="http://schemas.openxmlformats.org/drawingml/2006/main" xmlns:p="http://schemas.openxmlformats.org/presentationml/2006/main" xmlns:r="http://schemas.openxmlformats.org/officeDocument/2006/relationships">
+<p:notes xmlns:a="http://schemas.openxmlformats.org/drawingml/2006/main" xmlns:r="http://schemas.openxmlformats.org/officeDocument/2006/relationships" xmlns:p="http://schemas.openxmlformats.org/presentationml/2006/main">
   <p:cSld>
     <p:spTree>
       <p:nvGrpSpPr>
@@ -5604,7 +5623,7 @@
         <p:nvSpPr>
           <p:cNvPr id="2" name="Slide Image Placeholder 1"/>
           <p:cNvSpPr>
-            <a:spLocks noGrp="1"/>
+            <a:spLocks noGrp="1" noRot="1" noChangeAspect="1"/>
           </p:cNvSpPr>
           <p:nvPr>
             <p:ph type="sldImg" idx="2"/>
@@ -5619,7 +5638,7 @@
             <a:spLocks noGrp="1"/>
           </p:cNvSpPr>
           <p:nvPr>
-            <p:ph type="body" idx="3" sz="quarter"/>
+            <p:ph type="body" sz="quarter" idx="3"/>
           </p:nvPr>
         </p:nvSpPr>
         <p:spPr/>
@@ -5640,7 +5659,7 @@
             <a:spLocks noGrp="1"/>
           </p:cNvSpPr>
           <p:nvPr>
-            <p:ph type="sldNum" idx="5" sz="quarter"/>
+            <p:ph type="sldNum" sz="quarter" idx="5"/>
           </p:nvPr>
         </p:nvSpPr>
         <p:spPr/>
@@ -5654,7 +5673,7 @@
 </file>
 
 <file path=ppt/notesSlides/notesSlide76.xml><?xml version="1.0" encoding="utf-8"?>
-<p:notes xmlns:a="http://schemas.openxmlformats.org/drawingml/2006/main" xmlns:p="http://schemas.openxmlformats.org/presentationml/2006/main" xmlns:r="http://schemas.openxmlformats.org/officeDocument/2006/relationships">
+<p:notes xmlns:a="http://schemas.openxmlformats.org/drawingml/2006/main" xmlns:r="http://schemas.openxmlformats.org/officeDocument/2006/relationships" xmlns:p="http://schemas.openxmlformats.org/presentationml/2006/main">
   <p:cSld>
     <p:spTree>
       <p:nvGrpSpPr>
@@ -5674,7 +5693,7 @@
         <p:nvSpPr>
           <p:cNvPr id="2" name="Slide Image Placeholder 1"/>
           <p:cNvSpPr>
-            <a:spLocks noGrp="1"/>
+            <a:spLocks noGrp="1" noRot="1" noChangeAspect="1"/>
           </p:cNvSpPr>
           <p:nvPr>
             <p:ph type="sldImg" idx="2"/>
@@ -5689,7 +5708,7 @@
             <a:spLocks noGrp="1"/>
           </p:cNvSpPr>
           <p:nvPr>
-            <p:ph type="body" idx="3" sz="quarter"/>
+            <p:ph type="body" sz="quarter" idx="3"/>
           </p:nvPr>
         </p:nvSpPr>
         <p:spPr/>
@@ -5710,7 +5729,7 @@
             <a:spLocks noGrp="1"/>
           </p:cNvSpPr>
           <p:nvPr>
-            <p:ph type="sldNum" idx="5" sz="quarter"/>
+            <p:ph type="sldNum" sz="quarter" idx="5"/>
           </p:nvPr>
         </p:nvSpPr>
         <p:spPr/>
@@ -5724,7 +5743,7 @@
 </file>
 
 <file path=ppt/notesSlides/notesSlide77.xml><?xml version="1.0" encoding="utf-8"?>
-<p:notes xmlns:a="http://schemas.openxmlformats.org/drawingml/2006/main" xmlns:p="http://schemas.openxmlformats.org/presentationml/2006/main" xmlns:r="http://schemas.openxmlformats.org/officeDocument/2006/relationships">
+<p:notes xmlns:a="http://schemas.openxmlformats.org/drawingml/2006/main" xmlns:r="http://schemas.openxmlformats.org/officeDocument/2006/relationships" xmlns:p="http://schemas.openxmlformats.org/presentationml/2006/main">
   <p:cSld>
     <p:spTree>
       <p:nvGrpSpPr>
@@ -5744,7 +5763,7 @@
         <p:nvSpPr>
           <p:cNvPr id="2" name="Slide Image Placeholder 1"/>
           <p:cNvSpPr>
-            <a:spLocks noGrp="1"/>
+            <a:spLocks noGrp="1" noRot="1" noChangeAspect="1"/>
           </p:cNvSpPr>
           <p:nvPr>
             <p:ph type="sldImg" idx="2"/>
@@ -5759,7 +5778,7 @@
             <a:spLocks noGrp="1"/>
           </p:cNvSpPr>
           <p:nvPr>
-            <p:ph type="body" idx="3" sz="quarter"/>
+            <p:ph type="body" sz="quarter" idx="3"/>
           </p:nvPr>
         </p:nvSpPr>
         <p:spPr/>
@@ -5780,7 +5799,7 @@
             <a:spLocks noGrp="1"/>
           </p:cNvSpPr>
           <p:nvPr>
-            <p:ph type="sldNum" idx="5" sz="quarter"/>
+            <p:ph type="sldNum" sz="quarter" idx="5"/>
           </p:nvPr>
         </p:nvSpPr>
         <p:spPr/>
@@ -5794,7 +5813,7 @@
 </file>
 
 <file path=ppt/notesSlides/notesSlide78.xml><?xml version="1.0" encoding="utf-8"?>
-<p:notes xmlns:a="http://schemas.openxmlformats.org/drawingml/2006/main" xmlns:p="http://schemas.openxmlformats.org/presentationml/2006/main" xmlns:r="http://schemas.openxmlformats.org/officeDocument/2006/relationships">
+<p:notes xmlns:a="http://schemas.openxmlformats.org/drawingml/2006/main" xmlns:r="http://schemas.openxmlformats.org/officeDocument/2006/relationships" xmlns:p="http://schemas.openxmlformats.org/presentationml/2006/main">
   <p:cSld>
     <p:spTree>
       <p:nvGrpSpPr>
@@ -5814,7 +5833,7 @@
         <p:nvSpPr>
           <p:cNvPr id="2" name="Slide Image Placeholder 1"/>
           <p:cNvSpPr>
-            <a:spLocks noGrp="1"/>
+            <a:spLocks noGrp="1" noRot="1" noChangeAspect="1"/>
           </p:cNvSpPr>
           <p:nvPr>
             <p:ph type="sldImg" idx="2"/>
@@ -5829,7 +5848,7 @@
             <a:spLocks noGrp="1"/>
           </p:cNvSpPr>
           <p:nvPr>
-            <p:ph type="body" idx="3" sz="quarter"/>
+            <p:ph type="body" sz="quarter" idx="3"/>
           </p:nvPr>
         </p:nvSpPr>
         <p:spPr/>
@@ -5850,7 +5869,7 @@
             <a:spLocks noGrp="1"/>
           </p:cNvSpPr>
           <p:nvPr>
-            <p:ph type="sldNum" idx="5" sz="quarter"/>
+            <p:ph type="sldNum" sz="quarter" idx="5"/>
           </p:nvPr>
         </p:nvSpPr>
         <p:spPr/>
@@ -5864,7 +5883,7 @@
 </file>
 
 <file path=ppt/notesSlides/notesSlide79.xml><?xml version="1.0" encoding="utf-8"?>
-<p:notes xmlns:a="http://schemas.openxmlformats.org/drawingml/2006/main" xmlns:p="http://schemas.openxmlformats.org/presentationml/2006/main" xmlns:r="http://schemas.openxmlformats.org/officeDocument/2006/relationships">
+<p:notes xmlns:a="http://schemas.openxmlformats.org/drawingml/2006/main" xmlns:r="http://schemas.openxmlformats.org/officeDocument/2006/relationships" xmlns:p="http://schemas.openxmlformats.org/presentationml/2006/main">
   <p:cSld>
     <p:spTree>
       <p:nvGrpSpPr>
@@ -5884,7 +5903,7 @@
         <p:nvSpPr>
           <p:cNvPr id="2" name="Slide Image Placeholder 1"/>
           <p:cNvSpPr>
-            <a:spLocks noGrp="1"/>
+            <a:spLocks noGrp="1" noRot="1" noChangeAspect="1"/>
           </p:cNvSpPr>
           <p:nvPr>
             <p:ph type="sldImg" idx="2"/>
@@ -5899,7 +5918,7 @@
             <a:spLocks noGrp="1"/>
           </p:cNvSpPr>
           <p:nvPr>
-            <p:ph type="body" idx="3" sz="quarter"/>
+            <p:ph type="body" sz="quarter" idx="3"/>
           </p:nvPr>
         </p:nvSpPr>
         <p:spPr/>
@@ -5920,7 +5939,7 @@
             <a:spLocks noGrp="1"/>
           </p:cNvSpPr>
           <p:nvPr>
-            <p:ph type="sldNum" idx="5" sz="quarter"/>
+            <p:ph type="sldNum" sz="quarter" idx="5"/>
           </p:nvPr>
         </p:nvSpPr>
         <p:spPr/>
@@ -5934,7 +5953,7 @@
 </file>
 
 <file path=ppt/notesSlides/notesSlide8.xml><?xml version="1.0" encoding="utf-8"?>
-<p:notes xmlns:a="http://schemas.openxmlformats.org/drawingml/2006/main" xmlns:p="http://schemas.openxmlformats.org/presentationml/2006/main" xmlns:r="http://schemas.openxmlformats.org/officeDocument/2006/relationships">
+<p:notes xmlns:a="http://schemas.openxmlformats.org/drawingml/2006/main" xmlns:r="http://schemas.openxmlformats.org/officeDocument/2006/relationships" xmlns:p="http://schemas.openxmlformats.org/presentationml/2006/main">
   <p:cSld>
     <p:spTree>
       <p:nvGrpSpPr>
@@ -5954,7 +5973,7 @@
         <p:nvSpPr>
           <p:cNvPr id="2" name="Slide Image Placeholder 1"/>
           <p:cNvSpPr>
-            <a:spLocks noGrp="1"/>
+            <a:spLocks noGrp="1" noRot="1" noChangeAspect="1"/>
           </p:cNvSpPr>
           <p:nvPr>
             <p:ph type="sldImg" idx="2"/>
@@ -5969,7 +5988,7 @@
             <a:spLocks noGrp="1"/>
           </p:cNvSpPr>
           <p:nvPr>
-            <p:ph type="body" idx="3" sz="quarter"/>
+            <p:ph type="body" sz="quarter" idx="3"/>
           </p:nvPr>
         </p:nvSpPr>
         <p:spPr/>
@@ -5990,7 +6009,7 @@
             <a:spLocks noGrp="1"/>
           </p:cNvSpPr>
           <p:nvPr>
-            <p:ph type="sldNum" idx="5" sz="quarter"/>
+            <p:ph type="sldNum" sz="quarter" idx="5"/>
           </p:nvPr>
         </p:nvSpPr>
         <p:spPr/>
@@ -6004,7 +6023,7 @@
 </file>
 
 <file path=ppt/notesSlides/notesSlide80.xml><?xml version="1.0" encoding="utf-8"?>
-<p:notes xmlns:a="http://schemas.openxmlformats.org/drawingml/2006/main" xmlns:p="http://schemas.openxmlformats.org/presentationml/2006/main" xmlns:r="http://schemas.openxmlformats.org/officeDocument/2006/relationships">
+<p:notes xmlns:a="http://schemas.openxmlformats.org/drawingml/2006/main" xmlns:r="http://schemas.openxmlformats.org/officeDocument/2006/relationships" xmlns:p="http://schemas.openxmlformats.org/presentationml/2006/main">
   <p:cSld>
     <p:spTree>
       <p:nvGrpSpPr>
@@ -6024,7 +6043,7 @@
         <p:nvSpPr>
           <p:cNvPr id="2" name="Slide Image Placeholder 1"/>
           <p:cNvSpPr>
-            <a:spLocks noGrp="1"/>
+            <a:spLocks noGrp="1" noRot="1" noChangeAspect="1"/>
           </p:cNvSpPr>
           <p:nvPr>
             <p:ph type="sldImg" idx="2"/>
@@ -6039,7 +6058,7 @@
             <a:spLocks noGrp="1"/>
           </p:cNvSpPr>
           <p:nvPr>
-            <p:ph type="body" idx="3" sz="quarter"/>
+            <p:ph type="body" sz="quarter" idx="3"/>
           </p:nvPr>
         </p:nvSpPr>
         <p:spPr/>
@@ -6060,7 +6079,7 @@
             <a:spLocks noGrp="1"/>
           </p:cNvSpPr>
           <p:nvPr>
-            <p:ph type="sldNum" idx="5" sz="quarter"/>
+            <p:ph type="sldNum" sz="quarter" idx="5"/>
           </p:nvPr>
         </p:nvSpPr>
         <p:spPr/>
@@ -6074,7 +6093,7 @@
 </file>
 
 <file path=ppt/notesSlides/notesSlide81.xml><?xml version="1.0" encoding="utf-8"?>
-<p:notes xmlns:a="http://schemas.openxmlformats.org/drawingml/2006/main" xmlns:p="http://schemas.openxmlformats.org/presentationml/2006/main" xmlns:r="http://schemas.openxmlformats.org/officeDocument/2006/relationships">
+<p:notes xmlns:a="http://schemas.openxmlformats.org/drawingml/2006/main" xmlns:r="http://schemas.openxmlformats.org/officeDocument/2006/relationships" xmlns:p="http://schemas.openxmlformats.org/presentationml/2006/main">
   <p:cSld>
     <p:spTree>
       <p:nvGrpSpPr>
@@ -6094,7 +6113,7 @@
         <p:nvSpPr>
           <p:cNvPr id="2" name="Slide Image Placeholder 1"/>
           <p:cNvSpPr>
-            <a:spLocks noGrp="1"/>
+            <a:spLocks noGrp="1" noRot="1" noChangeAspect="1"/>
           </p:cNvSpPr>
           <p:nvPr>
             <p:ph type="sldImg" idx="2"/>
@@ -6109,7 +6128,7 @@
             <a:spLocks noGrp="1"/>
           </p:cNvSpPr>
           <p:nvPr>
-            <p:ph type="body" idx="3" sz="quarter"/>
+            <p:ph type="body" sz="quarter" idx="3"/>
           </p:nvPr>
         </p:nvSpPr>
         <p:spPr/>
@@ -6130,7 +6149,7 @@
             <a:spLocks noGrp="1"/>
           </p:cNvSpPr>
           <p:nvPr>
-            <p:ph type="sldNum" idx="5" sz="quarter"/>
+            <p:ph type="sldNum" sz="quarter" idx="5"/>
           </p:nvPr>
         </p:nvSpPr>
         <p:spPr/>
@@ -6144,7 +6163,7 @@
 </file>
 
 <file path=ppt/notesSlides/notesSlide82.xml><?xml version="1.0" encoding="utf-8"?>
-<p:notes xmlns:a="http://schemas.openxmlformats.org/drawingml/2006/main" xmlns:p="http://schemas.openxmlformats.org/presentationml/2006/main" xmlns:r="http://schemas.openxmlformats.org/officeDocument/2006/relationships">
+<p:notes xmlns:a="http://schemas.openxmlformats.org/drawingml/2006/main" xmlns:r="http://schemas.openxmlformats.org/officeDocument/2006/relationships" xmlns:p="http://schemas.openxmlformats.org/presentationml/2006/main">
   <p:cSld>
     <p:spTree>
       <p:nvGrpSpPr>
@@ -6164,7 +6183,7 @@
         <p:nvSpPr>
           <p:cNvPr id="2" name="Slide Image Placeholder 1"/>
           <p:cNvSpPr>
-            <a:spLocks noGrp="1"/>
+            <a:spLocks noGrp="1" noRot="1" noChangeAspect="1"/>
           </p:cNvSpPr>
           <p:nvPr>
             <p:ph type="sldImg" idx="2"/>
@@ -6179,7 +6198,7 @@
             <a:spLocks noGrp="1"/>
           </p:cNvSpPr>
           <p:nvPr>
-            <p:ph type="body" idx="3" sz="quarter"/>
+            <p:ph type="body" sz="quarter" idx="3"/>
           </p:nvPr>
         </p:nvSpPr>
         <p:spPr/>
@@ -6200,7 +6219,7 @@
             <a:spLocks noGrp="1"/>
           </p:cNvSpPr>
           <p:nvPr>
-            <p:ph type="sldNum" idx="5" sz="quarter"/>
+            <p:ph type="sldNum" sz="quarter" idx="5"/>
           </p:nvPr>
         </p:nvSpPr>
         <p:spPr/>
@@ -6214,7 +6233,7 @@
 </file>
 
 <file path=ppt/notesSlides/notesSlide83.xml><?xml version="1.0" encoding="utf-8"?>
-<p:notes xmlns:a="http://schemas.openxmlformats.org/drawingml/2006/main" xmlns:p="http://schemas.openxmlformats.org/presentationml/2006/main" xmlns:r="http://schemas.openxmlformats.org/officeDocument/2006/relationships">
+<p:notes xmlns:a="http://schemas.openxmlformats.org/drawingml/2006/main" xmlns:r="http://schemas.openxmlformats.org/officeDocument/2006/relationships" xmlns:p="http://schemas.openxmlformats.org/presentationml/2006/main">
   <p:cSld>
     <p:spTree>
       <p:nvGrpSpPr>
@@ -6234,7 +6253,7 @@
         <p:nvSpPr>
           <p:cNvPr id="2" name="Slide Image Placeholder 1"/>
           <p:cNvSpPr>
-            <a:spLocks noGrp="1"/>
+            <a:spLocks noGrp="1" noRot="1" noChangeAspect="1"/>
           </p:cNvSpPr>
           <p:nvPr>
             <p:ph type="sldImg" idx="2"/>
@@ -6249,7 +6268,7 @@
             <a:spLocks noGrp="1"/>
           </p:cNvSpPr>
           <p:nvPr>
-            <p:ph type="body" idx="3" sz="quarter"/>
+            <p:ph type="body" sz="quarter" idx="3"/>
           </p:nvPr>
         </p:nvSpPr>
         <p:spPr/>
@@ -6270,7 +6289,7 @@
             <a:spLocks noGrp="1"/>
           </p:cNvSpPr>
           <p:nvPr>
-            <p:ph type="sldNum" idx="5" sz="quarter"/>
+            <p:ph type="sldNum" sz="quarter" idx="5"/>
           </p:nvPr>
         </p:nvSpPr>
         <p:spPr/>
@@ -6284,7 +6303,7 @@
 </file>
 
 <file path=ppt/notesSlides/notesSlide84.xml><?xml version="1.0" encoding="utf-8"?>
-<p:notes xmlns:a="http://schemas.openxmlformats.org/drawingml/2006/main" xmlns:p="http://schemas.openxmlformats.org/presentationml/2006/main" xmlns:r="http://schemas.openxmlformats.org/officeDocument/2006/relationships">
+<p:notes xmlns:a="http://schemas.openxmlformats.org/drawingml/2006/main" xmlns:r="http://schemas.openxmlformats.org/officeDocument/2006/relationships" xmlns:p="http://schemas.openxmlformats.org/presentationml/2006/main">
   <p:cSld>
     <p:spTree>
       <p:nvGrpSpPr>
@@ -6304,7 +6323,7 @@
         <p:nvSpPr>
           <p:cNvPr id="2" name="Slide Image Placeholder 1"/>
           <p:cNvSpPr>
-            <a:spLocks noGrp="1"/>
+            <a:spLocks noGrp="1" noRot="1" noChangeAspect="1"/>
           </p:cNvSpPr>
           <p:nvPr>
             <p:ph type="sldImg" idx="2"/>
@@ -6319,7 +6338,7 @@
             <a:spLocks noGrp="1"/>
           </p:cNvSpPr>
           <p:nvPr>
-            <p:ph type="body" idx="3" sz="quarter"/>
+            <p:ph type="body" sz="quarter" idx="3"/>
           </p:nvPr>
         </p:nvSpPr>
         <p:spPr/>
@@ -6340,7 +6359,7 @@
             <a:spLocks noGrp="1"/>
           </p:cNvSpPr>
           <p:nvPr>
-            <p:ph type="sldNum" idx="5" sz="quarter"/>
+            <p:ph type="sldNum" sz="quarter" idx="5"/>
           </p:nvPr>
         </p:nvSpPr>
         <p:spPr/>
@@ -6354,7 +6373,7 @@
 </file>
 
 <file path=ppt/notesSlides/notesSlide85.xml><?xml version="1.0" encoding="utf-8"?>
-<p:notes xmlns:a="http://schemas.openxmlformats.org/drawingml/2006/main" xmlns:p="http://schemas.openxmlformats.org/presentationml/2006/main" xmlns:r="http://schemas.openxmlformats.org/officeDocument/2006/relationships">
+<p:notes xmlns:a="http://schemas.openxmlformats.org/drawingml/2006/main" xmlns:r="http://schemas.openxmlformats.org/officeDocument/2006/relationships" xmlns:p="http://schemas.openxmlformats.org/presentationml/2006/main">
   <p:cSld>
     <p:spTree>
       <p:nvGrpSpPr>
@@ -6374,7 +6393,7 @@
         <p:nvSpPr>
           <p:cNvPr id="2" name="Slide Image Placeholder 1"/>
           <p:cNvSpPr>
-            <a:spLocks noGrp="1"/>
+            <a:spLocks noGrp="1" noRot="1" noChangeAspect="1"/>
           </p:cNvSpPr>
           <p:nvPr>
             <p:ph type="sldImg" idx="2"/>
@@ -6389,7 +6408,7 @@
             <a:spLocks noGrp="1"/>
           </p:cNvSpPr>
           <p:nvPr>
-            <p:ph type="body" idx="3" sz="quarter"/>
+            <p:ph type="body" sz="quarter" idx="3"/>
           </p:nvPr>
         </p:nvSpPr>
         <p:spPr/>
@@ -6410,7 +6429,7 @@
             <a:spLocks noGrp="1"/>
           </p:cNvSpPr>
           <p:nvPr>
-            <p:ph type="sldNum" idx="5" sz="quarter"/>
+            <p:ph type="sldNum" sz="quarter" idx="5"/>
           </p:nvPr>
         </p:nvSpPr>
         <p:spPr/>
@@ -6424,7 +6443,7 @@
 </file>
 
 <file path=ppt/notesSlides/notesSlide86.xml><?xml version="1.0" encoding="utf-8"?>
-<p:notes xmlns:a="http://schemas.openxmlformats.org/drawingml/2006/main" xmlns:p="http://schemas.openxmlformats.org/presentationml/2006/main" xmlns:r="http://schemas.openxmlformats.org/officeDocument/2006/relationships">
+<p:notes xmlns:a="http://schemas.openxmlformats.org/drawingml/2006/main" xmlns:r="http://schemas.openxmlformats.org/officeDocument/2006/relationships" xmlns:p="http://schemas.openxmlformats.org/presentationml/2006/main">
   <p:cSld>
     <p:spTree>
       <p:nvGrpSpPr>
@@ -6444,7 +6463,7 @@
         <p:nvSpPr>
           <p:cNvPr id="2" name="Slide Image Placeholder 1"/>
           <p:cNvSpPr>
-            <a:spLocks noGrp="1"/>
+            <a:spLocks noGrp="1" noRot="1" noChangeAspect="1"/>
           </p:cNvSpPr>
           <p:nvPr>
             <p:ph type="sldImg" idx="2"/>
@@ -6459,7 +6478,7 @@
             <a:spLocks noGrp="1"/>
           </p:cNvSpPr>
           <p:nvPr>
-            <p:ph type="body" idx="3" sz="quarter"/>
+            <p:ph type="body" sz="quarter" idx="3"/>
           </p:nvPr>
         </p:nvSpPr>
         <p:spPr/>
@@ -6480,7 +6499,7 @@
             <a:spLocks noGrp="1"/>
           </p:cNvSpPr>
           <p:nvPr>
-            <p:ph type="sldNum" idx="5" sz="quarter"/>
+            <p:ph type="sldNum" sz="quarter" idx="5"/>
           </p:nvPr>
         </p:nvSpPr>
         <p:spPr/>
@@ -6494,7 +6513,7 @@
 </file>
 
 <file path=ppt/notesSlides/notesSlide9.xml><?xml version="1.0" encoding="utf-8"?>
-<p:notes xmlns:a="http://schemas.openxmlformats.org/drawingml/2006/main" xmlns:p="http://schemas.openxmlformats.org/presentationml/2006/main" xmlns:r="http://schemas.openxmlformats.org/officeDocument/2006/relationships">
+<p:notes xmlns:a="http://schemas.openxmlformats.org/drawingml/2006/main" xmlns:r="http://schemas.openxmlformats.org/officeDocument/2006/relationships" xmlns:p="http://schemas.openxmlformats.org/presentationml/2006/main">
   <p:cSld>
     <p:spTree>
       <p:nvGrpSpPr>
@@ -6514,7 +6533,7 @@
         <p:nvSpPr>
           <p:cNvPr id="2" name="Slide Image Placeholder 1"/>
           <p:cNvSpPr>
-            <a:spLocks noGrp="1"/>
+            <a:spLocks noGrp="1" noRot="1" noChangeAspect="1"/>
           </p:cNvSpPr>
           <p:nvPr>
             <p:ph type="sldImg" idx="2"/>
@@ -6529,7 +6548,7 @@
             <a:spLocks noGrp="1"/>
           </p:cNvSpPr>
           <p:nvPr>
-            <p:ph type="body" idx="3" sz="quarter"/>
+            <p:ph type="body" sz="quarter" idx="3"/>
           </p:nvPr>
         </p:nvSpPr>
         <p:spPr/>
@@ -6550,7 +6569,7 @@
             <a:spLocks noGrp="1"/>
           </p:cNvSpPr>
           <p:nvPr>
-            <p:ph type="sldNum" idx="5" sz="quarter"/>
+            <p:ph type="sldNum" sz="quarter" idx="5"/>
           </p:nvPr>
         </p:nvSpPr>
         <p:spPr/>
@@ -6601,10 +6620,9 @@
           <a:lstStyle/>
           <a:p>
             <a:r>
-              <a:rPr lang="en-US" smtClean="0"/>
+              <a:rPr lang="en-US"/>
               <a:t>Click to edit Master title style</a:t>
             </a:r>
-            <a:endParaRPr lang="en-US"/>
           </a:p>
         </p:txBody>
       </p:sp>
@@ -6720,10 +6738,9 @@
           </a:lstStyle>
           <a:p>
             <a:r>
-              <a:rPr lang="en-US" smtClean="0"/>
+              <a:rPr lang="en-US"/>
               <a:t>Click to edit Master subtitle style</a:t>
             </a:r>
-            <a:endParaRPr lang="en-US"/>
           </a:p>
         </p:txBody>
       </p:sp>
@@ -6744,7 +6761,7 @@
           <a:p>
             <a:fld id="{5BCAD085-E8A6-8845-BD4E-CB4CCA059FC4}" type="datetimeFigureOut">
               <a:rPr lang="en-US" smtClean="0"/>
-              <a:t>1/27/13</a:t>
+              <a:t>8/27/2026</a:t>
             </a:fld>
             <a:endParaRPr lang="en-US"/>
           </a:p>
@@ -6838,10 +6855,9 @@
           <a:lstStyle/>
           <a:p>
             <a:r>
-              <a:rPr lang="en-US" smtClean="0"/>
+              <a:rPr lang="en-US"/>
               <a:t>Click to edit Master title style</a:t>
             </a:r>
-            <a:endParaRPr lang="en-US"/>
           </a:p>
         </p:txBody>
       </p:sp>
@@ -6862,38 +6878,37 @@
           <a:p>
             <a:pPr lvl="0"/>
             <a:r>
-              <a:rPr lang="en-US" smtClean="0"/>
+              <a:rPr lang="en-US"/>
               <a:t>Click to edit Master text styles</a:t>
             </a:r>
           </a:p>
           <a:p>
             <a:pPr lvl="1"/>
             <a:r>
-              <a:rPr lang="en-US" smtClean="0"/>
+              <a:rPr lang="en-US"/>
               <a:t>Second level</a:t>
             </a:r>
           </a:p>
           <a:p>
             <a:pPr lvl="2"/>
             <a:r>
-              <a:rPr lang="en-US" smtClean="0"/>
+              <a:rPr lang="en-US"/>
               <a:t>Third level</a:t>
             </a:r>
           </a:p>
           <a:p>
             <a:pPr lvl="3"/>
             <a:r>
-              <a:rPr lang="en-US" smtClean="0"/>
+              <a:rPr lang="en-US"/>
               <a:t>Fourth level</a:t>
             </a:r>
           </a:p>
           <a:p>
             <a:pPr lvl="4"/>
             <a:r>
-              <a:rPr lang="en-US" smtClean="0"/>
+              <a:rPr lang="en-US"/>
               <a:t>Fifth level</a:t>
             </a:r>
-            <a:endParaRPr lang="en-US"/>
           </a:p>
         </p:txBody>
       </p:sp>
@@ -6914,7 +6929,7 @@
           <a:p>
             <a:fld id="{5BCAD085-E8A6-8845-BD4E-CB4CCA059FC4}" type="datetimeFigureOut">
               <a:rPr lang="en-US" smtClean="0"/>
-              <a:t>1/27/13</a:t>
+              <a:t>8/27/2026</a:t>
             </a:fld>
             <a:endParaRPr lang="en-US"/>
           </a:p>
@@ -7013,10 +7028,9 @@
           <a:lstStyle/>
           <a:p>
             <a:r>
-              <a:rPr lang="en-US" smtClean="0"/>
+              <a:rPr lang="en-US"/>
               <a:t>Click to edit Master title style</a:t>
             </a:r>
-            <a:endParaRPr lang="en-US"/>
           </a:p>
         </p:txBody>
       </p:sp>
@@ -7042,38 +7056,37 @@
           <a:p>
             <a:pPr lvl="0"/>
             <a:r>
-              <a:rPr lang="en-US" smtClean="0"/>
+              <a:rPr lang="en-US"/>
               <a:t>Click to edit Master text styles</a:t>
             </a:r>
           </a:p>
           <a:p>
             <a:pPr lvl="1"/>
             <a:r>
-              <a:rPr lang="en-US" smtClean="0"/>
+              <a:rPr lang="en-US"/>
               <a:t>Second level</a:t>
             </a:r>
           </a:p>
           <a:p>
             <a:pPr lvl="2"/>
             <a:r>
-              <a:rPr lang="en-US" smtClean="0"/>
+              <a:rPr lang="en-US"/>
               <a:t>Third level</a:t>
             </a:r>
           </a:p>
           <a:p>
             <a:pPr lvl="3"/>
             <a:r>
-              <a:rPr lang="en-US" smtClean="0"/>
+              <a:rPr lang="en-US"/>
               <a:t>Fourth level</a:t>
             </a:r>
           </a:p>
           <a:p>
             <a:pPr lvl="4"/>
             <a:r>
-              <a:rPr lang="en-US" smtClean="0"/>
+              <a:rPr lang="en-US"/>
               <a:t>Fifth level</a:t>
             </a:r>
-            <a:endParaRPr lang="en-US"/>
           </a:p>
         </p:txBody>
       </p:sp>
@@ -7094,7 +7107,7 @@
           <a:p>
             <a:fld id="{5BCAD085-E8A6-8845-BD4E-CB4CCA059FC4}" type="datetimeFigureOut">
               <a:rPr lang="en-US" smtClean="0"/>
-              <a:t>1/27/13</a:t>
+              <a:t>8/27/2026</a:t>
             </a:fld>
             <a:endParaRPr lang="en-US"/>
           </a:p>
@@ -7188,10 +7201,9 @@
           <a:lstStyle/>
           <a:p>
             <a:r>
-              <a:rPr lang="en-US" smtClean="0"/>
+              <a:rPr lang="en-US"/>
               <a:t>Click to edit Master title style</a:t>
             </a:r>
-            <a:endParaRPr lang="en-US"/>
           </a:p>
         </p:txBody>
       </p:sp>
@@ -7212,38 +7224,37 @@
           <a:p>
             <a:pPr lvl="0"/>
             <a:r>
-              <a:rPr lang="en-US" smtClean="0"/>
+              <a:rPr lang="en-US"/>
               <a:t>Click to edit Master text styles</a:t>
             </a:r>
           </a:p>
           <a:p>
             <a:pPr lvl="1"/>
             <a:r>
-              <a:rPr lang="en-US" smtClean="0"/>
+              <a:rPr lang="en-US"/>
               <a:t>Second level</a:t>
             </a:r>
           </a:p>
           <a:p>
             <a:pPr lvl="2"/>
             <a:r>
-              <a:rPr lang="en-US" smtClean="0"/>
+              <a:rPr lang="en-US"/>
               <a:t>Third level</a:t>
             </a:r>
           </a:p>
           <a:p>
             <a:pPr lvl="3"/>
             <a:r>
-              <a:rPr lang="en-US" smtClean="0"/>
+              <a:rPr lang="en-US"/>
               <a:t>Fourth level</a:t>
             </a:r>
           </a:p>
           <a:p>
             <a:pPr lvl="4"/>
             <a:r>
-              <a:rPr lang="en-US" smtClean="0"/>
+              <a:rPr lang="en-US"/>
               <a:t>Fifth level</a:t>
             </a:r>
-            <a:endParaRPr lang="en-US"/>
           </a:p>
         </p:txBody>
       </p:sp>
@@ -7264,7 +7275,7 @@
           <a:p>
             <a:fld id="{5BCAD085-E8A6-8845-BD4E-CB4CCA059FC4}" type="datetimeFigureOut">
               <a:rPr lang="en-US" smtClean="0"/>
-              <a:t>1/27/13</a:t>
+              <a:t>8/27/2026</a:t>
             </a:fld>
             <a:endParaRPr lang="en-US"/>
           </a:p>
@@ -7367,10 +7378,9 @@
           </a:lstStyle>
           <a:p>
             <a:r>
-              <a:rPr lang="en-US" smtClean="0"/>
+              <a:rPr lang="en-US"/>
               <a:t>Click to edit Master title style</a:t>
             </a:r>
-            <a:endParaRPr lang="en-US"/>
           </a:p>
         </p:txBody>
       </p:sp>
@@ -7487,7 +7497,7 @@
           <a:p>
             <a:pPr lvl="0"/>
             <a:r>
-              <a:rPr lang="en-US" smtClean="0"/>
+              <a:rPr lang="en-US"/>
               <a:t>Click to edit Master text styles</a:t>
             </a:r>
           </a:p>
@@ -7510,7 +7520,7 @@
           <a:p>
             <a:fld id="{5BCAD085-E8A6-8845-BD4E-CB4CCA059FC4}" type="datetimeFigureOut">
               <a:rPr lang="en-US" smtClean="0"/>
-              <a:t>1/27/13</a:t>
+              <a:t>8/27/2026</a:t>
             </a:fld>
             <a:endParaRPr lang="en-US"/>
           </a:p>
@@ -7604,10 +7614,9 @@
           <a:lstStyle/>
           <a:p>
             <a:r>
-              <a:rPr lang="en-US" smtClean="0"/>
+              <a:rPr lang="en-US"/>
               <a:t>Click to edit Master title style</a:t>
             </a:r>
-            <a:endParaRPr lang="en-US"/>
           </a:p>
         </p:txBody>
       </p:sp>
@@ -7661,38 +7670,37 @@
           <a:p>
             <a:pPr lvl="0"/>
             <a:r>
-              <a:rPr lang="en-US" smtClean="0"/>
+              <a:rPr lang="en-US"/>
               <a:t>Click to edit Master text styles</a:t>
             </a:r>
           </a:p>
           <a:p>
             <a:pPr lvl="1"/>
             <a:r>
-              <a:rPr lang="en-US" smtClean="0"/>
+              <a:rPr lang="en-US"/>
               <a:t>Second level</a:t>
             </a:r>
           </a:p>
           <a:p>
             <a:pPr lvl="2"/>
             <a:r>
-              <a:rPr lang="en-US" smtClean="0"/>
+              <a:rPr lang="en-US"/>
               <a:t>Third level</a:t>
             </a:r>
           </a:p>
           <a:p>
             <a:pPr lvl="3"/>
             <a:r>
-              <a:rPr lang="en-US" smtClean="0"/>
+              <a:rPr lang="en-US"/>
               <a:t>Fourth level</a:t>
             </a:r>
           </a:p>
           <a:p>
             <a:pPr lvl="4"/>
             <a:r>
-              <a:rPr lang="en-US" smtClean="0"/>
+              <a:rPr lang="en-US"/>
               <a:t>Fifth level</a:t>
             </a:r>
-            <a:endParaRPr lang="en-US"/>
           </a:p>
         </p:txBody>
       </p:sp>
@@ -7746,38 +7754,37 @@
           <a:p>
             <a:pPr lvl="0"/>
             <a:r>
-              <a:rPr lang="en-US" smtClean="0"/>
+              <a:rPr lang="en-US"/>
               <a:t>Click to edit Master text styles</a:t>
             </a:r>
           </a:p>
           <a:p>
             <a:pPr lvl="1"/>
             <a:r>
-              <a:rPr lang="en-US" smtClean="0"/>
+              <a:rPr lang="en-US"/>
               <a:t>Second level</a:t>
             </a:r>
           </a:p>
           <a:p>
             <a:pPr lvl="2"/>
             <a:r>
-              <a:rPr lang="en-US" smtClean="0"/>
+              <a:rPr lang="en-US"/>
               <a:t>Third level</a:t>
             </a:r>
           </a:p>
           <a:p>
             <a:pPr lvl="3"/>
             <a:r>
-              <a:rPr lang="en-US" smtClean="0"/>
+              <a:rPr lang="en-US"/>
               <a:t>Fourth level</a:t>
             </a:r>
           </a:p>
           <a:p>
             <a:pPr lvl="4"/>
             <a:r>
-              <a:rPr lang="en-US" smtClean="0"/>
+              <a:rPr lang="en-US"/>
               <a:t>Fifth level</a:t>
             </a:r>
-            <a:endParaRPr lang="en-US"/>
           </a:p>
         </p:txBody>
       </p:sp>
@@ -7798,7 +7805,7 @@
           <a:p>
             <a:fld id="{5BCAD085-E8A6-8845-BD4E-CB4CCA059FC4}" type="datetimeFigureOut">
               <a:rPr lang="en-US" smtClean="0"/>
-              <a:t>1/27/13</a:t>
+              <a:t>8/27/2026</a:t>
             </a:fld>
             <a:endParaRPr lang="en-US"/>
           </a:p>
@@ -7896,10 +7903,9 @@
           </a:lstStyle>
           <a:p>
             <a:r>
-              <a:rPr lang="en-US" smtClean="0"/>
+              <a:rPr lang="en-US"/>
               <a:t>Click to edit Master title style</a:t>
             </a:r>
-            <a:endParaRPr lang="en-US"/>
           </a:p>
         </p:txBody>
       </p:sp>
@@ -7962,7 +7968,7 @@
           <a:p>
             <a:pPr lvl="0"/>
             <a:r>
-              <a:rPr lang="en-US" smtClean="0"/>
+              <a:rPr lang="en-US"/>
               <a:t>Click to edit Master text styles</a:t>
             </a:r>
           </a:p>
@@ -8018,38 +8024,37 @@
           <a:p>
             <a:pPr lvl="0"/>
             <a:r>
-              <a:rPr lang="en-US" smtClean="0"/>
+              <a:rPr lang="en-US"/>
               <a:t>Click to edit Master text styles</a:t>
             </a:r>
           </a:p>
           <a:p>
             <a:pPr lvl="1"/>
             <a:r>
-              <a:rPr lang="en-US" smtClean="0"/>
+              <a:rPr lang="en-US"/>
               <a:t>Second level</a:t>
             </a:r>
           </a:p>
           <a:p>
             <a:pPr lvl="2"/>
             <a:r>
-              <a:rPr lang="en-US" smtClean="0"/>
+              <a:rPr lang="en-US"/>
               <a:t>Third level</a:t>
             </a:r>
           </a:p>
           <a:p>
             <a:pPr lvl="3"/>
             <a:r>
-              <a:rPr lang="en-US" smtClean="0"/>
+              <a:rPr lang="en-US"/>
               <a:t>Fourth level</a:t>
             </a:r>
           </a:p>
           <a:p>
             <a:pPr lvl="4"/>
             <a:r>
-              <a:rPr lang="en-US" smtClean="0"/>
+              <a:rPr lang="en-US"/>
               <a:t>Fifth level</a:t>
             </a:r>
-            <a:endParaRPr lang="en-US"/>
           </a:p>
         </p:txBody>
       </p:sp>
@@ -8112,7 +8117,7 @@
           <a:p>
             <a:pPr lvl="0"/>
             <a:r>
-              <a:rPr lang="en-US" smtClean="0"/>
+              <a:rPr lang="en-US"/>
               <a:t>Click to edit Master text styles</a:t>
             </a:r>
           </a:p>
@@ -8168,38 +8173,37 @@
           <a:p>
             <a:pPr lvl="0"/>
             <a:r>
-              <a:rPr lang="en-US" smtClean="0"/>
+              <a:rPr lang="en-US"/>
               <a:t>Click to edit Master text styles</a:t>
             </a:r>
           </a:p>
           <a:p>
             <a:pPr lvl="1"/>
             <a:r>
-              <a:rPr lang="en-US" smtClean="0"/>
+              <a:rPr lang="en-US"/>
               <a:t>Second level</a:t>
             </a:r>
           </a:p>
           <a:p>
             <a:pPr lvl="2"/>
             <a:r>
-              <a:rPr lang="en-US" smtClean="0"/>
+              <a:rPr lang="en-US"/>
               <a:t>Third level</a:t>
             </a:r>
           </a:p>
           <a:p>
             <a:pPr lvl="3"/>
             <a:r>
-              <a:rPr lang="en-US" smtClean="0"/>
+              <a:rPr lang="en-US"/>
               <a:t>Fourth level</a:t>
             </a:r>
           </a:p>
           <a:p>
             <a:pPr lvl="4"/>
             <a:r>
-              <a:rPr lang="en-US" smtClean="0"/>
+              <a:rPr lang="en-US"/>
               <a:t>Fifth level</a:t>
             </a:r>
-            <a:endParaRPr lang="en-US"/>
           </a:p>
         </p:txBody>
       </p:sp>
@@ -8220,7 +8224,7 @@
           <a:p>
             <a:fld id="{5BCAD085-E8A6-8845-BD4E-CB4CCA059FC4}" type="datetimeFigureOut">
               <a:rPr lang="en-US" smtClean="0"/>
-              <a:t>1/27/13</a:t>
+              <a:t>8/27/2026</a:t>
             </a:fld>
             <a:endParaRPr lang="en-US"/>
           </a:p>
@@ -8314,10 +8318,9 @@
           <a:lstStyle/>
           <a:p>
             <a:r>
-              <a:rPr lang="en-US" smtClean="0"/>
+              <a:rPr lang="en-US"/>
               <a:t>Click to edit Master title style</a:t>
             </a:r>
-            <a:endParaRPr lang="en-US"/>
           </a:p>
         </p:txBody>
       </p:sp>
@@ -8338,7 +8341,7 @@
           <a:p>
             <a:fld id="{5BCAD085-E8A6-8845-BD4E-CB4CCA059FC4}" type="datetimeFigureOut">
               <a:rPr lang="en-US" smtClean="0"/>
-              <a:t>1/27/13</a:t>
+              <a:t>8/27/2026</a:t>
             </a:fld>
             <a:endParaRPr lang="en-US"/>
           </a:p>
@@ -8433,7 +8436,7 @@
           <a:p>
             <a:fld id="{5BCAD085-E8A6-8845-BD4E-CB4CCA059FC4}" type="datetimeFigureOut">
               <a:rPr lang="en-US" smtClean="0"/>
-              <a:t>1/27/13</a:t>
+              <a:t>8/27/2026</a:t>
             </a:fld>
             <a:endParaRPr lang="en-US"/>
           </a:p>
@@ -8536,10 +8539,9 @@
           </a:lstStyle>
           <a:p>
             <a:r>
-              <a:rPr lang="en-US" smtClean="0"/>
+              <a:rPr lang="en-US"/>
               <a:t>Click to edit Master title style</a:t>
             </a:r>
-            <a:endParaRPr lang="en-US"/>
           </a:p>
         </p:txBody>
       </p:sp>
@@ -8593,38 +8595,37 @@
           <a:p>
             <a:pPr lvl="0"/>
             <a:r>
-              <a:rPr lang="en-US" smtClean="0"/>
+              <a:rPr lang="en-US"/>
               <a:t>Click to edit Master text styles</a:t>
             </a:r>
           </a:p>
           <a:p>
             <a:pPr lvl="1"/>
             <a:r>
-              <a:rPr lang="en-US" smtClean="0"/>
+              <a:rPr lang="en-US"/>
               <a:t>Second level</a:t>
             </a:r>
           </a:p>
           <a:p>
             <a:pPr lvl="2"/>
             <a:r>
-              <a:rPr lang="en-US" smtClean="0"/>
+              <a:rPr lang="en-US"/>
               <a:t>Third level</a:t>
             </a:r>
           </a:p>
           <a:p>
             <a:pPr lvl="3"/>
             <a:r>
-              <a:rPr lang="en-US" smtClean="0"/>
+              <a:rPr lang="en-US"/>
               <a:t>Fourth level</a:t>
             </a:r>
           </a:p>
           <a:p>
             <a:pPr lvl="4"/>
             <a:r>
-              <a:rPr lang="en-US" smtClean="0"/>
+              <a:rPr lang="en-US"/>
               <a:t>Fifth level</a:t>
             </a:r>
-            <a:endParaRPr lang="en-US"/>
           </a:p>
         </p:txBody>
       </p:sp>
@@ -8687,7 +8688,7 @@
           <a:p>
             <a:pPr lvl="0"/>
             <a:r>
-              <a:rPr lang="en-US" smtClean="0"/>
+              <a:rPr lang="en-US"/>
               <a:t>Click to edit Master text styles</a:t>
             </a:r>
           </a:p>
@@ -8710,7 +8711,7 @@
           <a:p>
             <a:fld id="{5BCAD085-E8A6-8845-BD4E-CB4CCA059FC4}" type="datetimeFigureOut">
               <a:rPr lang="en-US" smtClean="0"/>
-              <a:t>1/27/13</a:t>
+              <a:t>8/27/2026</a:t>
             </a:fld>
             <a:endParaRPr lang="en-US"/>
           </a:p>
@@ -8813,10 +8814,9 @@
           </a:lstStyle>
           <a:p>
             <a:r>
-              <a:rPr lang="en-US" smtClean="0"/>
+              <a:rPr lang="en-US"/>
               <a:t>Click to edit Master title style</a:t>
             </a:r>
-            <a:endParaRPr lang="en-US"/>
           </a:p>
         </p:txBody>
       </p:sp>
@@ -8940,7 +8940,7 @@
           <a:p>
             <a:pPr lvl="0"/>
             <a:r>
-              <a:rPr lang="en-US" smtClean="0"/>
+              <a:rPr lang="en-US"/>
               <a:t>Click to edit Master text styles</a:t>
             </a:r>
           </a:p>
@@ -8963,7 +8963,7 @@
           <a:p>
             <a:fld id="{5BCAD085-E8A6-8845-BD4E-CB4CCA059FC4}" type="datetimeFigureOut">
               <a:rPr lang="en-US" smtClean="0"/>
-              <a:t>1/27/13</a:t>
+              <a:t>8/27/2026</a:t>
             </a:fld>
             <a:endParaRPr lang="en-US"/>
           </a:p>
@@ -9072,10 +9072,9 @@
           <a:lstStyle/>
           <a:p>
             <a:r>
-              <a:rPr lang="en-US" smtClean="0"/>
+              <a:rPr lang="en-US"/>
               <a:t>Click to edit Master title style</a:t>
             </a:r>
-            <a:endParaRPr lang="en-US"/>
           </a:p>
         </p:txBody>
       </p:sp>
@@ -9106,38 +9105,37 @@
           <a:p>
             <a:pPr lvl="0"/>
             <a:r>
-              <a:rPr lang="en-US" smtClean="0"/>
+              <a:rPr lang="en-US"/>
               <a:t>Click to edit Master text styles</a:t>
             </a:r>
           </a:p>
           <a:p>
             <a:pPr lvl="1"/>
             <a:r>
-              <a:rPr lang="en-US" smtClean="0"/>
+              <a:rPr lang="en-US"/>
               <a:t>Second level</a:t>
             </a:r>
           </a:p>
           <a:p>
             <a:pPr lvl="2"/>
             <a:r>
-              <a:rPr lang="en-US" smtClean="0"/>
+              <a:rPr lang="en-US"/>
               <a:t>Third level</a:t>
             </a:r>
           </a:p>
           <a:p>
             <a:pPr lvl="3"/>
             <a:r>
-              <a:rPr lang="en-US" smtClean="0"/>
+              <a:rPr lang="en-US"/>
               <a:t>Fourth level</a:t>
             </a:r>
           </a:p>
           <a:p>
             <a:pPr lvl="4"/>
             <a:r>
-              <a:rPr lang="en-US" smtClean="0"/>
+              <a:rPr lang="en-US"/>
               <a:t>Fifth level</a:t>
             </a:r>
-            <a:endParaRPr lang="en-US"/>
           </a:p>
         </p:txBody>
       </p:sp>
@@ -9176,7 +9174,7 @@
           <a:p>
             <a:fld id="{5BCAD085-E8A6-8845-BD4E-CB4CCA059FC4}" type="datetimeFigureOut">
               <a:rPr lang="en-US" smtClean="0"/>
-              <a:t>1/27/13</a:t>
+              <a:t>8/27/2026</a:t>
             </a:fld>
             <a:endParaRPr lang="en-US"/>
           </a:p>
@@ -9535,7 +9533,7 @@
 </file>
 
 <file path=ppt/slides/slide1.xml><?xml version="1.0" encoding="utf-8"?>
-<p:sld xmlns:a="http://schemas.openxmlformats.org/drawingml/2006/main" xmlns:p="http://schemas.openxmlformats.org/presentationml/2006/main" xmlns:r="http://schemas.openxmlformats.org/officeDocument/2006/relationships">
+<p:sld xmlns:a="http://schemas.openxmlformats.org/drawingml/2006/main" xmlns:r="http://schemas.openxmlformats.org/officeDocument/2006/relationships" xmlns:p="http://schemas.openxmlformats.org/presentationml/2006/main">
   <p:cSld>
     <p:spTree>
       <p:nvGrpSpPr>
@@ -9543,7 +9541,14 @@
         <p:cNvGrpSpPr/>
         <p:nvPr/>
       </p:nvGrpSpPr>
-      <p:grpSpPr/>
+      <p:grpSpPr>
+        <a:xfrm>
+          <a:off x="0" y="0"/>
+          <a:ext cx="0" cy="0"/>
+          <a:chOff x="0" y="0"/>
+          <a:chExt cx="0" cy="0"/>
+        </a:xfrm>
+      </p:grpSpPr>
       <p:sp>
         <p:nvSpPr>
           <p:cNvPr id="2" name="Rectangle 1"/>
@@ -9584,6 +9589,7 @@
           <a:lstStyle/>
           <a:p>
             <a:pPr algn="ctr"/>
+            <a:endParaRPr/>
           </a:p>
         </p:txBody>
       </p:sp>
@@ -9668,7 +9674,7 @@
 </file>
 
 <file path=ppt/slides/slide10.xml><?xml version="1.0" encoding="utf-8"?>
-<p:sld xmlns:a="http://schemas.openxmlformats.org/drawingml/2006/main" xmlns:p="http://schemas.openxmlformats.org/presentationml/2006/main" xmlns:r="http://schemas.openxmlformats.org/officeDocument/2006/relationships">
+<p:sld xmlns:a="http://schemas.openxmlformats.org/drawingml/2006/main" xmlns:r="http://schemas.openxmlformats.org/officeDocument/2006/relationships" xmlns:p="http://schemas.openxmlformats.org/presentationml/2006/main">
   <p:cSld>
     <p:spTree>
       <p:nvGrpSpPr>
@@ -9676,7 +9682,14 @@
         <p:cNvGrpSpPr/>
         <p:nvPr/>
       </p:nvGrpSpPr>
-      <p:grpSpPr/>
+      <p:grpSpPr>
+        <a:xfrm>
+          <a:off x="0" y="0"/>
+          <a:ext cx="0" cy="0"/>
+          <a:chOff x="0" y="0"/>
+          <a:chExt cx="0" cy="0"/>
+        </a:xfrm>
+      </p:grpSpPr>
       <p:sp>
         <p:nvSpPr>
           <p:cNvPr id="2" name="TextBox 1"/>
@@ -9750,7 +9763,7 @@
           </a:fontRef>
         </p:style>
         <p:txBody>
-          <a:bodyPr rtlCol="0" anchor="ctr" wrap="none" lIns="228600" tIns="137160"/>
+          <a:bodyPr wrap="none" lIns="228600" tIns="137160" rtlCol="0" anchor="ctr"/>
           <a:lstStyle/>
           <a:p>
             <a:pPr algn="l"/>
@@ -9911,7 +9924,7 @@
 </file>
 
 <file path=ppt/slides/slide11.xml><?xml version="1.0" encoding="utf-8"?>
-<p:sld xmlns:a="http://schemas.openxmlformats.org/drawingml/2006/main" xmlns:p="http://schemas.openxmlformats.org/presentationml/2006/main" xmlns:r="http://schemas.openxmlformats.org/officeDocument/2006/relationships">
+<p:sld xmlns:a="http://schemas.openxmlformats.org/drawingml/2006/main" xmlns:r="http://schemas.openxmlformats.org/officeDocument/2006/relationships" xmlns:p="http://schemas.openxmlformats.org/presentationml/2006/main">
   <p:cSld>
     <p:spTree>
       <p:nvGrpSpPr>
@@ -9919,7 +9932,14 @@
         <p:cNvGrpSpPr/>
         <p:nvPr/>
       </p:nvGrpSpPr>
-      <p:grpSpPr/>
+      <p:grpSpPr>
+        <a:xfrm>
+          <a:off x="0" y="0"/>
+          <a:ext cx="0" cy="0"/>
+          <a:chOff x="0" y="0"/>
+          <a:chExt cx="0" cy="0"/>
+        </a:xfrm>
+      </p:grpSpPr>
       <p:sp>
         <p:nvSpPr>
           <p:cNvPr id="2" name="TextBox 1"/>
@@ -10187,7 +10207,7 @@
 </file>
 
 <file path=ppt/slides/slide12.xml><?xml version="1.0" encoding="utf-8"?>
-<p:sld xmlns:a="http://schemas.openxmlformats.org/drawingml/2006/main" xmlns:p="http://schemas.openxmlformats.org/presentationml/2006/main" xmlns:r="http://schemas.openxmlformats.org/officeDocument/2006/relationships">
+<p:sld xmlns:a="http://schemas.openxmlformats.org/drawingml/2006/main" xmlns:r="http://schemas.openxmlformats.org/officeDocument/2006/relationships" xmlns:p="http://schemas.openxmlformats.org/presentationml/2006/main">
   <p:cSld>
     <p:spTree>
       <p:nvGrpSpPr>
@@ -10195,7 +10215,14 @@
         <p:cNvGrpSpPr/>
         <p:nvPr/>
       </p:nvGrpSpPr>
-      <p:grpSpPr/>
+      <p:grpSpPr>
+        <a:xfrm>
+          <a:off x="0" y="0"/>
+          <a:ext cx="0" cy="0"/>
+          <a:chOff x="0" y="0"/>
+          <a:chExt cx="0" cy="0"/>
+        </a:xfrm>
+      </p:grpSpPr>
       <p:sp>
         <p:nvSpPr>
           <p:cNvPr id="2" name="TextBox 1"/>
@@ -10274,7 +10301,9 @@
         <p:txBody>
           <a:bodyPr rtlCol="0" anchor="ctr"/>
           <a:lstStyle/>
-          <a:p/>
+          <a:p>
+            <a:endParaRPr/>
+          </a:p>
         </p:txBody>
       </p:sp>
       <p:sp>
@@ -10353,7 +10382,7 @@
           </a:fontRef>
         </p:style>
         <p:txBody>
-          <a:bodyPr rtlCol="0" anchor="ctr" wrap="square" lIns="54864" rIns="54864" tIns="27432" bIns="27432"/>
+          <a:bodyPr wrap="square" lIns="54864" tIns="27432" rIns="54864" bIns="27432" rtlCol="0" anchor="ctr"/>
           <a:lstStyle/>
           <a:p>
             <a:pPr algn="ctr"/>
@@ -10412,6 +10441,7 @@
           <a:lstStyle/>
           <a:p>
             <a:pPr algn="ctr"/>
+            <a:endParaRPr/>
           </a:p>
         </p:txBody>
       </p:sp>
@@ -10454,7 +10484,7 @@
           </a:fontRef>
         </p:style>
         <p:txBody>
-          <a:bodyPr rtlCol="0" anchor="ctr" wrap="square" lIns="54864" rIns="54864" tIns="27432" bIns="27432"/>
+          <a:bodyPr wrap="square" lIns="54864" tIns="27432" rIns="54864" bIns="27432" rtlCol="0" anchor="ctr"/>
           <a:lstStyle/>
           <a:p>
             <a:pPr algn="ctr"/>
@@ -10513,6 +10543,7 @@
           <a:lstStyle/>
           <a:p>
             <a:pPr algn="ctr"/>
+            <a:endParaRPr/>
           </a:p>
         </p:txBody>
       </p:sp>
@@ -10555,7 +10586,7 @@
           </a:fontRef>
         </p:style>
         <p:txBody>
-          <a:bodyPr rtlCol="0" anchor="ctr" wrap="square" lIns="54864" rIns="54864" tIns="27432" bIns="27432"/>
+          <a:bodyPr wrap="square" lIns="54864" tIns="27432" rIns="54864" bIns="27432" rtlCol="0" anchor="ctr"/>
           <a:lstStyle/>
           <a:p>
             <a:pPr algn="ctr"/>
@@ -10614,7 +10645,9 @@
         <p:txBody>
           <a:bodyPr rtlCol="0" anchor="ctr"/>
           <a:lstStyle/>
-          <a:p/>
+          <a:p>
+            <a:endParaRPr/>
+          </a:p>
         </p:txBody>
       </p:sp>
       <p:sp>
@@ -10693,7 +10726,7 @@
           </a:fontRef>
         </p:style>
         <p:txBody>
-          <a:bodyPr rtlCol="0" anchor="ctr" wrap="square" lIns="54864" rIns="54864" tIns="27432" bIns="27432"/>
+          <a:bodyPr wrap="square" lIns="54864" tIns="27432" rIns="54864" bIns="27432" rtlCol="0" anchor="ctr"/>
           <a:lstStyle/>
           <a:p>
             <a:pPr algn="ctr"/>
@@ -10752,6 +10785,7 @@
           <a:lstStyle/>
           <a:p>
             <a:pPr algn="ctr"/>
+            <a:endParaRPr/>
           </a:p>
         </p:txBody>
       </p:sp>
@@ -10794,7 +10828,7 @@
           </a:fontRef>
         </p:style>
         <p:txBody>
-          <a:bodyPr rtlCol="0" anchor="ctr" wrap="square" lIns="54864" rIns="54864" tIns="27432" bIns="27432"/>
+          <a:bodyPr wrap="square" lIns="54864" tIns="27432" rIns="54864" bIns="27432" rtlCol="0" anchor="ctr"/>
           <a:lstStyle/>
           <a:p>
             <a:pPr algn="ctr"/>
@@ -10853,6 +10887,7 @@
           <a:lstStyle/>
           <a:p>
             <a:pPr algn="ctr"/>
+            <a:endParaRPr/>
           </a:p>
         </p:txBody>
       </p:sp>
@@ -10895,7 +10930,7 @@
           </a:fontRef>
         </p:style>
         <p:txBody>
-          <a:bodyPr rtlCol="0" anchor="ctr" wrap="square" lIns="54864" rIns="54864" tIns="27432" bIns="27432"/>
+          <a:bodyPr wrap="square" lIns="54864" tIns="27432" rIns="54864" bIns="27432" rtlCol="0" anchor="ctr"/>
           <a:lstStyle/>
           <a:p>
             <a:pPr algn="ctr"/>
@@ -10958,7 +10993,7 @@
 </file>
 
 <file path=ppt/slides/slide13.xml><?xml version="1.0" encoding="utf-8"?>
-<p:sld xmlns:a="http://schemas.openxmlformats.org/drawingml/2006/main" xmlns:p="http://schemas.openxmlformats.org/presentationml/2006/main" xmlns:r="http://schemas.openxmlformats.org/officeDocument/2006/relationships">
+<p:sld xmlns:a="http://schemas.openxmlformats.org/drawingml/2006/main" xmlns:r="http://schemas.openxmlformats.org/officeDocument/2006/relationships" xmlns:p="http://schemas.openxmlformats.org/presentationml/2006/main">
   <p:cSld>
     <p:spTree>
       <p:nvGrpSpPr>
@@ -10966,7 +11001,14 @@
         <p:cNvGrpSpPr/>
         <p:nvPr/>
       </p:nvGrpSpPr>
-      <p:grpSpPr/>
+      <p:grpSpPr>
+        <a:xfrm>
+          <a:off x="0" y="0"/>
+          <a:ext cx="0" cy="0"/>
+          <a:chOff x="0" y="0"/>
+          <a:chExt cx="0" cy="0"/>
+        </a:xfrm>
+      </p:grpSpPr>
       <p:sp>
         <p:nvSpPr>
           <p:cNvPr id="2" name="TextBox 1"/>
@@ -10975,8 +11017,8 @@
         </p:nvSpPr>
         <p:spPr>
           <a:xfrm>
-            <a:off x="822960" y="2011680"/>
-            <a:ext cx="10545775" cy="2743200"/>
+            <a:off x="822960" y="2339949"/>
+            <a:ext cx="10545775" cy="2086661"/>
           </a:xfrm>
           <a:prstGeom prst="rect">
             <a:avLst/>
@@ -10991,7 +11033,7 @@
           <a:p>
             <a:pPr algn="ctr"/>
             <a:r>
-              <a:rPr sz="5400" b="1">
+              <a:rPr sz="5400" b="1" dirty="0">
                 <a:solidFill>
                   <a:srgbClr val="1F5FA8"/>
                 </a:solidFill>
@@ -10999,8 +11041,59 @@
                 <a:ea typeface="Leelawadee UI"/>
                 <a:cs typeface="Leelawadee UI"/>
               </a:rPr>
-              <a:t>🙋 "วันนี้อากาศ ______" · คำถัดไปคืออะไร</a:t>
-            </a:r>
+              <a:t>🙋 "</a:t>
+            </a:r>
+            <a:r>
+              <a:rPr sz="5400" b="1" dirty="0" err="1">
+                <a:solidFill>
+                  <a:srgbClr val="1F5FA8"/>
+                </a:solidFill>
+                <a:latin typeface="Leelawadee UI"/>
+                <a:ea typeface="Leelawadee UI"/>
+                <a:cs typeface="Leelawadee UI"/>
+              </a:rPr>
+              <a:t>วันนี้อากาศ</a:t>
+            </a:r>
+            <a:r>
+              <a:rPr sz="5400" b="1" dirty="0">
+                <a:solidFill>
+                  <a:srgbClr val="1F5FA8"/>
+                </a:solidFill>
+                <a:latin typeface="Leelawadee UI"/>
+                <a:ea typeface="Leelawadee UI"/>
+                <a:cs typeface="Leelawadee UI"/>
+              </a:rPr>
+              <a:t> ______"  </a:t>
+            </a:r>
+            <a:br>
+              <a:rPr lang="th-TH" sz="5400" b="1" dirty="0">
+                <a:solidFill>
+                  <a:srgbClr val="1F5FA8"/>
+                </a:solidFill>
+                <a:latin typeface="Leelawadee UI"/>
+                <a:ea typeface="Leelawadee UI"/>
+                <a:cs typeface="Leelawadee UI"/>
+              </a:rPr>
+            </a:br>
+            <a:r>
+              <a:rPr sz="5400" b="1" dirty="0" err="1">
+                <a:solidFill>
+                  <a:srgbClr val="1F5FA8"/>
+                </a:solidFill>
+                <a:latin typeface="Leelawadee UI"/>
+                <a:ea typeface="Leelawadee UI"/>
+                <a:cs typeface="Leelawadee UI"/>
+              </a:rPr>
+              <a:t>คำถัดไปคืออะไร</a:t>
+            </a:r>
+            <a:endParaRPr sz="5400" b="1" dirty="0">
+              <a:solidFill>
+                <a:srgbClr val="1F5FA8"/>
+              </a:solidFill>
+              <a:latin typeface="Leelawadee UI"/>
+              <a:ea typeface="Leelawadee UI"/>
+              <a:cs typeface="Leelawadee UI"/>
+            </a:endParaRPr>
           </a:p>
         </p:txBody>
       </p:sp>
@@ -11049,7 +11142,7 @@
 </file>
 
 <file path=ppt/slides/slide14.xml><?xml version="1.0" encoding="utf-8"?>
-<p:sld xmlns:a="http://schemas.openxmlformats.org/drawingml/2006/main" xmlns:p="http://schemas.openxmlformats.org/presentationml/2006/main" xmlns:r="http://schemas.openxmlformats.org/officeDocument/2006/relationships">
+<p:sld xmlns:a="http://schemas.openxmlformats.org/drawingml/2006/main" xmlns:r="http://schemas.openxmlformats.org/officeDocument/2006/relationships" xmlns:p="http://schemas.openxmlformats.org/presentationml/2006/main">
   <p:cSld>
     <p:spTree>
       <p:nvGrpSpPr>
@@ -11057,7 +11150,14 @@
         <p:cNvGrpSpPr/>
         <p:nvPr/>
       </p:nvGrpSpPr>
-      <p:grpSpPr/>
+      <p:grpSpPr>
+        <a:xfrm>
+          <a:off x="0" y="0"/>
+          <a:ext cx="0" cy="0"/>
+          <a:chOff x="0" y="0"/>
+          <a:chExt cx="0" cy="0"/>
+        </a:xfrm>
+      </p:grpSpPr>
       <p:sp>
         <p:nvSpPr>
           <p:cNvPr id="2" name="TextBox 1"/>
@@ -11288,7 +11388,7 @@
 </file>
 
 <file path=ppt/slides/slide15.xml><?xml version="1.0" encoding="utf-8"?>
-<p:sld xmlns:a="http://schemas.openxmlformats.org/drawingml/2006/main" xmlns:p="http://schemas.openxmlformats.org/presentationml/2006/main" xmlns:r="http://schemas.openxmlformats.org/officeDocument/2006/relationships">
+<p:sld xmlns:a="http://schemas.openxmlformats.org/drawingml/2006/main" xmlns:r="http://schemas.openxmlformats.org/officeDocument/2006/relationships" xmlns:p="http://schemas.openxmlformats.org/presentationml/2006/main">
   <p:cSld>
     <p:spTree>
       <p:nvGrpSpPr>
@@ -11296,7 +11396,14 @@
         <p:cNvGrpSpPr/>
         <p:nvPr/>
       </p:nvGrpSpPr>
-      <p:grpSpPr/>
+      <p:grpSpPr>
+        <a:xfrm>
+          <a:off x="0" y="0"/>
+          <a:ext cx="0" cy="0"/>
+          <a:chOff x="0" y="0"/>
+          <a:chExt cx="0" cy="0"/>
+        </a:xfrm>
+      </p:grpSpPr>
       <p:sp>
         <p:nvSpPr>
           <p:cNvPr id="2" name="TextBox 1"/>
@@ -11564,7 +11671,7 @@
 </file>
 
 <file path=ppt/slides/slide16.xml><?xml version="1.0" encoding="utf-8"?>
-<p:sld xmlns:a="http://schemas.openxmlformats.org/drawingml/2006/main" xmlns:p="http://schemas.openxmlformats.org/presentationml/2006/main" xmlns:r="http://schemas.openxmlformats.org/officeDocument/2006/relationships">
+<p:sld xmlns:a="http://schemas.openxmlformats.org/drawingml/2006/main" xmlns:r="http://schemas.openxmlformats.org/officeDocument/2006/relationships" xmlns:p="http://schemas.openxmlformats.org/presentationml/2006/main">
   <p:cSld>
     <p:spTree>
       <p:nvGrpSpPr>
@@ -11572,7 +11679,14 @@
         <p:cNvGrpSpPr/>
         <p:nvPr/>
       </p:nvGrpSpPr>
-      <p:grpSpPr/>
+      <p:grpSpPr>
+        <a:xfrm>
+          <a:off x="0" y="0"/>
+          <a:ext cx="0" cy="0"/>
+          <a:chOff x="0" y="0"/>
+          <a:chExt cx="0" cy="0"/>
+        </a:xfrm>
+      </p:grpSpPr>
       <p:sp>
         <p:nvSpPr>
           <p:cNvPr id="2" name="TextBox 1"/>
@@ -11840,7 +11954,7 @@
 </file>
 
 <file path=ppt/slides/slide17.xml><?xml version="1.0" encoding="utf-8"?>
-<p:sld xmlns:a="http://schemas.openxmlformats.org/drawingml/2006/main" xmlns:p="http://schemas.openxmlformats.org/presentationml/2006/main" xmlns:r="http://schemas.openxmlformats.org/officeDocument/2006/relationships">
+<p:sld xmlns:a="http://schemas.openxmlformats.org/drawingml/2006/main" xmlns:r="http://schemas.openxmlformats.org/officeDocument/2006/relationships" xmlns:p="http://schemas.openxmlformats.org/presentationml/2006/main">
   <p:cSld>
     <p:spTree>
       <p:nvGrpSpPr>
@@ -11848,7 +11962,14 @@
         <p:cNvGrpSpPr/>
         <p:nvPr/>
       </p:nvGrpSpPr>
-      <p:grpSpPr/>
+      <p:grpSpPr>
+        <a:xfrm>
+          <a:off x="0" y="0"/>
+          <a:ext cx="0" cy="0"/>
+          <a:chOff x="0" y="0"/>
+          <a:chExt cx="0" cy="0"/>
+        </a:xfrm>
+      </p:grpSpPr>
       <p:sp>
         <p:nvSpPr>
           <p:cNvPr id="2" name="TextBox 1"/>
@@ -11925,7 +12046,7 @@
           </a:fontRef>
         </p:style>
         <p:txBody>
-          <a:bodyPr rtlCol="0" anchor="ctr" wrap="square" lIns="54864" rIns="54864" tIns="27432" bIns="27432"/>
+          <a:bodyPr wrap="square" lIns="54864" tIns="27432" rIns="54864" bIns="27432" rtlCol="0" anchor="ctr"/>
           <a:lstStyle/>
           <a:p>
             <a:pPr algn="ctr"/>
@@ -11984,6 +12105,7 @@
           <a:lstStyle/>
           <a:p>
             <a:pPr algn="ctr"/>
+            <a:endParaRPr/>
           </a:p>
         </p:txBody>
       </p:sp>
@@ -12026,7 +12148,7 @@
           </a:fontRef>
         </p:style>
         <p:txBody>
-          <a:bodyPr rtlCol="0" anchor="ctr" wrap="square" lIns="54864" rIns="54864" tIns="27432" bIns="27432"/>
+          <a:bodyPr wrap="square" lIns="54864" tIns="27432" rIns="54864" bIns="27432" rtlCol="0" anchor="ctr"/>
           <a:lstStyle/>
           <a:p>
             <a:pPr algn="ctr"/>
@@ -12085,6 +12207,7 @@
           <a:lstStyle/>
           <a:p>
             <a:pPr algn="ctr"/>
+            <a:endParaRPr/>
           </a:p>
         </p:txBody>
       </p:sp>
@@ -12127,7 +12250,7 @@
           </a:fontRef>
         </p:style>
         <p:txBody>
-          <a:bodyPr rtlCol="0" anchor="ctr" wrap="square" lIns="54864" rIns="54864" tIns="27432" bIns="27432"/>
+          <a:bodyPr wrap="square" lIns="54864" tIns="27432" rIns="54864" bIns="27432" rtlCol="0" anchor="ctr"/>
           <a:lstStyle/>
           <a:p>
             <a:pPr algn="ctr"/>
@@ -12186,6 +12309,7 @@
           <a:lstStyle/>
           <a:p>
             <a:pPr algn="ctr"/>
+            <a:endParaRPr/>
           </a:p>
         </p:txBody>
       </p:sp>
@@ -12228,7 +12352,7 @@
           </a:fontRef>
         </p:style>
         <p:txBody>
-          <a:bodyPr rtlCol="0" anchor="ctr" wrap="square" lIns="54864" rIns="54864" tIns="27432" bIns="27432"/>
+          <a:bodyPr wrap="square" lIns="54864" tIns="27432" rIns="54864" bIns="27432" rtlCol="0" anchor="ctr"/>
           <a:lstStyle/>
           <a:p>
             <a:pPr algn="ctr"/>
@@ -12291,7 +12415,7 @@
 </file>
 
 <file path=ppt/slides/slide18.xml><?xml version="1.0" encoding="utf-8"?>
-<p:sld xmlns:a="http://schemas.openxmlformats.org/drawingml/2006/main" xmlns:p="http://schemas.openxmlformats.org/presentationml/2006/main" xmlns:r="http://schemas.openxmlformats.org/officeDocument/2006/relationships">
+<p:sld xmlns:a="http://schemas.openxmlformats.org/drawingml/2006/main" xmlns:r="http://schemas.openxmlformats.org/officeDocument/2006/relationships" xmlns:p="http://schemas.openxmlformats.org/presentationml/2006/main">
   <p:cSld>
     <p:spTree>
       <p:nvGrpSpPr>
@@ -12299,7 +12423,14 @@
         <p:cNvGrpSpPr/>
         <p:nvPr/>
       </p:nvGrpSpPr>
-      <p:grpSpPr/>
+      <p:grpSpPr>
+        <a:xfrm>
+          <a:off x="0" y="0"/>
+          <a:ext cx="0" cy="0"/>
+          <a:chOff x="0" y="0"/>
+          <a:chExt cx="0" cy="0"/>
+        </a:xfrm>
+      </p:grpSpPr>
       <p:sp>
         <p:nvSpPr>
           <p:cNvPr id="2" name="TextBox 1"/>
@@ -12382,7 +12513,7 @@
 </file>
 
 <file path=ppt/slides/slide19.xml><?xml version="1.0" encoding="utf-8"?>
-<p:sld xmlns:a="http://schemas.openxmlformats.org/drawingml/2006/main" xmlns:p="http://schemas.openxmlformats.org/presentationml/2006/main" xmlns:r="http://schemas.openxmlformats.org/officeDocument/2006/relationships">
+<p:sld xmlns:a="http://schemas.openxmlformats.org/drawingml/2006/main" xmlns:r="http://schemas.openxmlformats.org/officeDocument/2006/relationships" xmlns:p="http://schemas.openxmlformats.org/presentationml/2006/main">
   <p:cSld>
     <p:spTree>
       <p:nvGrpSpPr>
@@ -12390,7 +12521,14 @@
         <p:cNvGrpSpPr/>
         <p:nvPr/>
       </p:nvGrpSpPr>
-      <p:grpSpPr/>
+      <p:grpSpPr>
+        <a:xfrm>
+          <a:off x="0" y="0"/>
+          <a:ext cx="0" cy="0"/>
+          <a:chOff x="0" y="0"/>
+          <a:chExt cx="0" cy="0"/>
+        </a:xfrm>
+      </p:grpSpPr>
       <p:sp>
         <p:nvSpPr>
           <p:cNvPr id="2" name="TextBox 1"/>
@@ -12621,7 +12759,7 @@
 </file>
 
 <file path=ppt/slides/slide2.xml><?xml version="1.0" encoding="utf-8"?>
-<p:sld xmlns:a="http://schemas.openxmlformats.org/drawingml/2006/main" xmlns:p="http://schemas.openxmlformats.org/presentationml/2006/main" xmlns:r="http://schemas.openxmlformats.org/officeDocument/2006/relationships">
+<p:sld xmlns:a="http://schemas.openxmlformats.org/drawingml/2006/main" xmlns:r="http://schemas.openxmlformats.org/officeDocument/2006/relationships" xmlns:p="http://schemas.openxmlformats.org/presentationml/2006/main">
   <p:cSld>
     <p:spTree>
       <p:nvGrpSpPr>
@@ -12629,7 +12767,14 @@
         <p:cNvGrpSpPr/>
         <p:nvPr/>
       </p:nvGrpSpPr>
-      <p:grpSpPr/>
+      <p:grpSpPr>
+        <a:xfrm>
+          <a:off x="0" y="0"/>
+          <a:ext cx="0" cy="0"/>
+          <a:chOff x="0" y="0"/>
+          <a:chExt cx="0" cy="0"/>
+        </a:xfrm>
+      </p:grpSpPr>
       <p:sp>
         <p:nvSpPr>
           <p:cNvPr id="2" name="Rectangle 1"/>
@@ -12670,6 +12815,7 @@
           <a:lstStyle/>
           <a:p>
             <a:pPr algn="ctr"/>
+            <a:endParaRPr/>
           </a:p>
         </p:txBody>
       </p:sp>
@@ -12755,7 +12901,7 @@
 </file>
 
 <file path=ppt/slides/slide20.xml><?xml version="1.0" encoding="utf-8"?>
-<p:sld xmlns:a="http://schemas.openxmlformats.org/drawingml/2006/main" xmlns:p="http://schemas.openxmlformats.org/presentationml/2006/main" xmlns:r="http://schemas.openxmlformats.org/officeDocument/2006/relationships">
+<p:sld xmlns:a="http://schemas.openxmlformats.org/drawingml/2006/main" xmlns:r="http://schemas.openxmlformats.org/officeDocument/2006/relationships" xmlns:p="http://schemas.openxmlformats.org/presentationml/2006/main">
   <p:cSld>
     <p:spTree>
       <p:nvGrpSpPr>
@@ -12763,7 +12909,14 @@
         <p:cNvGrpSpPr/>
         <p:nvPr/>
       </p:nvGrpSpPr>
-      <p:grpSpPr/>
+      <p:grpSpPr>
+        <a:xfrm>
+          <a:off x="0" y="0"/>
+          <a:ext cx="0" cy="0"/>
+          <a:chOff x="0" y="0"/>
+          <a:chExt cx="0" cy="0"/>
+        </a:xfrm>
+      </p:grpSpPr>
       <p:sp>
         <p:nvSpPr>
           <p:cNvPr id="2" name="TextBox 1"/>
@@ -12846,7 +12999,7 @@
 </file>
 
 <file path=ppt/slides/slide21.xml><?xml version="1.0" encoding="utf-8"?>
-<p:sld xmlns:a="http://schemas.openxmlformats.org/drawingml/2006/main" xmlns:p="http://schemas.openxmlformats.org/presentationml/2006/main" xmlns:r="http://schemas.openxmlformats.org/officeDocument/2006/relationships">
+<p:sld xmlns:a="http://schemas.openxmlformats.org/drawingml/2006/main" xmlns:r="http://schemas.openxmlformats.org/officeDocument/2006/relationships" xmlns:p="http://schemas.openxmlformats.org/presentationml/2006/main">
   <p:cSld>
     <p:spTree>
       <p:nvGrpSpPr>
@@ -12854,7 +13007,14 @@
         <p:cNvGrpSpPr/>
         <p:nvPr/>
       </p:nvGrpSpPr>
-      <p:grpSpPr/>
+      <p:grpSpPr>
+        <a:xfrm>
+          <a:off x="0" y="0"/>
+          <a:ext cx="0" cy="0"/>
+          <a:chOff x="0" y="0"/>
+          <a:chExt cx="0" cy="0"/>
+        </a:xfrm>
+      </p:grpSpPr>
       <p:sp>
         <p:nvSpPr>
           <p:cNvPr id="2" name="TextBox 1"/>
@@ -12933,7 +13093,9 @@
         <p:txBody>
           <a:bodyPr rtlCol="0" anchor="ctr"/>
           <a:lstStyle/>
-          <a:p/>
+          <a:p>
+            <a:endParaRPr/>
+          </a:p>
         </p:txBody>
       </p:sp>
       <p:sp>
@@ -13012,7 +13174,7 @@
           </a:fontRef>
         </p:style>
         <p:txBody>
-          <a:bodyPr rtlCol="0" anchor="ctr" wrap="square" lIns="54864" rIns="54864" tIns="27432" bIns="27432"/>
+          <a:bodyPr wrap="square" lIns="54864" tIns="27432" rIns="54864" bIns="27432" rtlCol="0" anchor="ctr"/>
           <a:lstStyle/>
           <a:p>
             <a:pPr algn="ctr"/>
@@ -13071,6 +13233,7 @@
           <a:lstStyle/>
           <a:p>
             <a:pPr algn="ctr"/>
+            <a:endParaRPr/>
           </a:p>
         </p:txBody>
       </p:sp>
@@ -13113,7 +13276,7 @@
           </a:fontRef>
         </p:style>
         <p:txBody>
-          <a:bodyPr rtlCol="0" anchor="ctr" wrap="square" lIns="54864" rIns="54864" tIns="27432" bIns="27432"/>
+          <a:bodyPr wrap="square" lIns="54864" tIns="27432" rIns="54864" bIns="27432" rtlCol="0" anchor="ctr"/>
           <a:lstStyle/>
           <a:p>
             <a:pPr algn="ctr"/>
@@ -13172,6 +13335,7 @@
           <a:lstStyle/>
           <a:p>
             <a:pPr algn="ctr"/>
+            <a:endParaRPr/>
           </a:p>
         </p:txBody>
       </p:sp>
@@ -13214,7 +13378,7 @@
           </a:fontRef>
         </p:style>
         <p:txBody>
-          <a:bodyPr rtlCol="0" anchor="ctr" wrap="square" lIns="54864" rIns="54864" tIns="27432" bIns="27432"/>
+          <a:bodyPr wrap="square" lIns="54864" tIns="27432" rIns="54864" bIns="27432" rtlCol="0" anchor="ctr"/>
           <a:lstStyle/>
           <a:p>
             <a:pPr algn="ctr"/>
@@ -13273,7 +13437,9 @@
         <p:txBody>
           <a:bodyPr rtlCol="0" anchor="ctr"/>
           <a:lstStyle/>
-          <a:p/>
+          <a:p>
+            <a:endParaRPr/>
+          </a:p>
         </p:txBody>
       </p:sp>
       <p:sp>
@@ -13352,7 +13518,7 @@
           </a:fontRef>
         </p:style>
         <p:txBody>
-          <a:bodyPr rtlCol="0" anchor="ctr" wrap="square" lIns="54864" rIns="54864" tIns="27432" bIns="27432"/>
+          <a:bodyPr wrap="square" lIns="54864" tIns="27432" rIns="54864" bIns="27432" rtlCol="0" anchor="ctr"/>
           <a:lstStyle/>
           <a:p>
             <a:pPr algn="ctr"/>
@@ -13411,6 +13577,7 @@
           <a:lstStyle/>
           <a:p>
             <a:pPr algn="ctr"/>
+            <a:endParaRPr/>
           </a:p>
         </p:txBody>
       </p:sp>
@@ -13453,7 +13620,7 @@
           </a:fontRef>
         </p:style>
         <p:txBody>
-          <a:bodyPr rtlCol="0" anchor="ctr" wrap="square" lIns="54864" rIns="54864" tIns="27432" bIns="27432"/>
+          <a:bodyPr wrap="square" lIns="54864" tIns="27432" rIns="54864" bIns="27432" rtlCol="0" anchor="ctr"/>
           <a:lstStyle/>
           <a:p>
             <a:pPr algn="ctr"/>
@@ -13512,6 +13679,7 @@
           <a:lstStyle/>
           <a:p>
             <a:pPr algn="ctr"/>
+            <a:endParaRPr/>
           </a:p>
         </p:txBody>
       </p:sp>
@@ -13554,7 +13722,7 @@
           </a:fontRef>
         </p:style>
         <p:txBody>
-          <a:bodyPr rtlCol="0" anchor="ctr" wrap="square" lIns="54864" rIns="54864" tIns="27432" bIns="27432"/>
+          <a:bodyPr wrap="square" lIns="54864" tIns="27432" rIns="54864" bIns="27432" rtlCol="0" anchor="ctr"/>
           <a:lstStyle/>
           <a:p>
             <a:pPr algn="ctr"/>
@@ -13617,7 +13785,7 @@
 </file>
 
 <file path=ppt/slides/slide22.xml><?xml version="1.0" encoding="utf-8"?>
-<p:sld xmlns:a="http://schemas.openxmlformats.org/drawingml/2006/main" xmlns:p="http://schemas.openxmlformats.org/presentationml/2006/main" xmlns:r="http://schemas.openxmlformats.org/officeDocument/2006/relationships">
+<p:sld xmlns:a="http://schemas.openxmlformats.org/drawingml/2006/main" xmlns:r="http://schemas.openxmlformats.org/officeDocument/2006/relationships" xmlns:p="http://schemas.openxmlformats.org/presentationml/2006/main">
   <p:cSld>
     <p:spTree>
       <p:nvGrpSpPr>
@@ -13625,7 +13793,14 @@
         <p:cNvGrpSpPr/>
         <p:nvPr/>
       </p:nvGrpSpPr>
-      <p:grpSpPr/>
+      <p:grpSpPr>
+        <a:xfrm>
+          <a:off x="0" y="0"/>
+          <a:ext cx="0" cy="0"/>
+          <a:chOff x="0" y="0"/>
+          <a:chExt cx="0" cy="0"/>
+        </a:xfrm>
+      </p:grpSpPr>
       <p:sp>
         <p:nvSpPr>
           <p:cNvPr id="2" name="TextBox 1"/>
@@ -13930,7 +14105,7 @@
 </file>
 
 <file path=ppt/slides/slide23.xml><?xml version="1.0" encoding="utf-8"?>
-<p:sld xmlns:a="http://schemas.openxmlformats.org/drawingml/2006/main" xmlns:p="http://schemas.openxmlformats.org/presentationml/2006/main" xmlns:r="http://schemas.openxmlformats.org/officeDocument/2006/relationships">
+<p:sld xmlns:a="http://schemas.openxmlformats.org/drawingml/2006/main" xmlns:r="http://schemas.openxmlformats.org/officeDocument/2006/relationships" xmlns:p="http://schemas.openxmlformats.org/presentationml/2006/main">
   <p:cSld>
     <p:spTree>
       <p:nvGrpSpPr>
@@ -13938,7 +14113,14 @@
         <p:cNvGrpSpPr/>
         <p:nvPr/>
       </p:nvGrpSpPr>
-      <p:grpSpPr/>
+      <p:grpSpPr>
+        <a:xfrm>
+          <a:off x="0" y="0"/>
+          <a:ext cx="0" cy="0"/>
+          <a:chOff x="0" y="0"/>
+          <a:chExt cx="0" cy="0"/>
+        </a:xfrm>
+      </p:grpSpPr>
       <p:sp>
         <p:nvSpPr>
           <p:cNvPr id="2" name="TextBox 1"/>
@@ -13995,9 +14177,27 @@
                 <a:tableStyleId>{5C22544A-7EE6-4342-B048-85BDC9FD1C3A}</a:tableStyleId>
               </a:tblPr>
               <a:tblGrid>
-                <a:gridCol w="3515258"/>
-                <a:gridCol w="3515258"/>
-                <a:gridCol w="3515259"/>
+                <a:gridCol w="3515258">
+                  <a:extLst>
+                    <a:ext uri="{9D8B030D-6E8A-4147-A177-3AD203B41FA5}">
+                      <a16:colId xmlns:a16="http://schemas.microsoft.com/office/drawing/2014/main" val="20000"/>
+                    </a:ext>
+                  </a:extLst>
+                </a:gridCol>
+                <a:gridCol w="3515258">
+                  <a:extLst>
+                    <a:ext uri="{9D8B030D-6E8A-4147-A177-3AD203B41FA5}">
+                      <a16:colId xmlns:a16="http://schemas.microsoft.com/office/drawing/2014/main" val="20001"/>
+                    </a:ext>
+                  </a:extLst>
+                </a:gridCol>
+                <a:gridCol w="3515259">
+                  <a:extLst>
+                    <a:ext uri="{9D8B030D-6E8A-4147-A177-3AD203B41FA5}">
+                      <a16:colId xmlns:a16="http://schemas.microsoft.com/office/drawing/2014/main" val="20002"/>
+                    </a:ext>
+                  </a:extLst>
+                </a:gridCol>
               </a:tblGrid>
               <a:tr h="502920">
                 <a:tc>
@@ -14019,7 +14219,7 @@
                       </a:r>
                     </a:p>
                   </a:txBody>
-                  <a:tcPr marL="91440" marR="91440" marT="27432" marB="27432" anchor="ctr">
+                  <a:tcPr marT="27432" marB="27432" anchor="ctr">
                     <a:solidFill>
                       <a:srgbClr val="1F5FA8"/>
                     </a:solidFill>
@@ -14044,7 +14244,7 @@
                       </a:r>
                     </a:p>
                   </a:txBody>
-                  <a:tcPr marL="91440" marR="91440" marT="27432" marB="27432" anchor="ctr">
+                  <a:tcPr marT="27432" marB="27432" anchor="ctr">
                     <a:solidFill>
                       <a:srgbClr val="1F5FA8"/>
                     </a:solidFill>
@@ -14069,12 +14269,17 @@
                       </a:r>
                     </a:p>
                   </a:txBody>
-                  <a:tcPr marL="91440" marR="91440" marT="27432" marB="27432" anchor="ctr">
+                  <a:tcPr marT="27432" marB="27432" anchor="ctr">
                     <a:solidFill>
                       <a:srgbClr val="1F5FA8"/>
                     </a:solidFill>
                   </a:tcPr>
                 </a:tc>
+                <a:extLst>
+                  <a:ext uri="{0D108BD9-81ED-4DB2-BD59-A6C34878D82A}">
+                    <a16:rowId xmlns:a16="http://schemas.microsoft.com/office/drawing/2014/main" val="10000"/>
+                  </a:ext>
+                </a:extLst>
               </a:tr>
               <a:tr h="502920">
                 <a:tc>
@@ -14096,7 +14301,7 @@
                       </a:r>
                     </a:p>
                   </a:txBody>
-                  <a:tcPr marL="91440" marR="91440" marT="27432" marB="27432" anchor="ctr">
+                  <a:tcPr marT="27432" marB="27432" anchor="ctr">
                     <a:solidFill>
                       <a:srgbClr val="FFFFFF"/>
                     </a:solidFill>
@@ -14121,7 +14326,7 @@
                       </a:r>
                     </a:p>
                   </a:txBody>
-                  <a:tcPr marL="91440" marR="91440" marT="27432" marB="27432" anchor="ctr">
+                  <a:tcPr marT="27432" marB="27432" anchor="ctr">
                     <a:solidFill>
                       <a:srgbClr val="FFFFFF"/>
                     </a:solidFill>
@@ -14146,12 +14351,17 @@
                       </a:r>
                     </a:p>
                   </a:txBody>
-                  <a:tcPr marL="91440" marR="91440" marT="27432" marB="27432" anchor="ctr">
+                  <a:tcPr marT="27432" marB="27432" anchor="ctr">
                     <a:solidFill>
                       <a:srgbClr val="FFFFFF"/>
                     </a:solidFill>
                   </a:tcPr>
                 </a:tc>
+                <a:extLst>
+                  <a:ext uri="{0D108BD9-81ED-4DB2-BD59-A6C34878D82A}">
+                    <a16:rowId xmlns:a16="http://schemas.microsoft.com/office/drawing/2014/main" val="10001"/>
+                  </a:ext>
+                </a:extLst>
               </a:tr>
               <a:tr h="502920">
                 <a:tc>
@@ -14173,7 +14383,7 @@
                       </a:r>
                     </a:p>
                   </a:txBody>
-                  <a:tcPr marL="91440" marR="91440" marT="27432" marB="27432" anchor="ctr">
+                  <a:tcPr marT="27432" marB="27432" anchor="ctr">
                     <a:solidFill>
                       <a:srgbClr val="F2F4F7"/>
                     </a:solidFill>
@@ -14198,7 +14408,7 @@
                       </a:r>
                     </a:p>
                   </a:txBody>
-                  <a:tcPr marL="91440" marR="91440" marT="27432" marB="27432" anchor="ctr">
+                  <a:tcPr marT="27432" marB="27432" anchor="ctr">
                     <a:solidFill>
                       <a:srgbClr val="F2F4F7"/>
                     </a:solidFill>
@@ -14223,12 +14433,17 @@
                       </a:r>
                     </a:p>
                   </a:txBody>
-                  <a:tcPr marL="91440" marR="91440" marT="27432" marB="27432" anchor="ctr">
+                  <a:tcPr marT="27432" marB="27432" anchor="ctr">
                     <a:solidFill>
                       <a:srgbClr val="F2F4F7"/>
                     </a:solidFill>
                   </a:tcPr>
                 </a:tc>
+                <a:extLst>
+                  <a:ext uri="{0D108BD9-81ED-4DB2-BD59-A6C34878D82A}">
+                    <a16:rowId xmlns:a16="http://schemas.microsoft.com/office/drawing/2014/main" val="10002"/>
+                  </a:ext>
+                </a:extLst>
               </a:tr>
               <a:tr h="502920">
                 <a:tc>
@@ -14250,7 +14465,7 @@
                       </a:r>
                     </a:p>
                   </a:txBody>
-                  <a:tcPr marL="91440" marR="91440" marT="27432" marB="27432" anchor="ctr">
+                  <a:tcPr marT="27432" marB="27432" anchor="ctr">
                     <a:solidFill>
                       <a:srgbClr val="FFFFFF"/>
                     </a:solidFill>
@@ -14275,7 +14490,7 @@
                       </a:r>
                     </a:p>
                   </a:txBody>
-                  <a:tcPr marL="91440" marR="91440" marT="27432" marB="27432" anchor="ctr">
+                  <a:tcPr marT="27432" marB="27432" anchor="ctr">
                     <a:solidFill>
                       <a:srgbClr val="FFFFFF"/>
                     </a:solidFill>
@@ -14300,12 +14515,17 @@
                       </a:r>
                     </a:p>
                   </a:txBody>
-                  <a:tcPr marL="91440" marR="91440" marT="27432" marB="27432" anchor="ctr">
+                  <a:tcPr marT="27432" marB="27432" anchor="ctr">
                     <a:solidFill>
                       <a:srgbClr val="FFFFFF"/>
                     </a:solidFill>
                   </a:tcPr>
                 </a:tc>
+                <a:extLst>
+                  <a:ext uri="{0D108BD9-81ED-4DB2-BD59-A6C34878D82A}">
+                    <a16:rowId xmlns:a16="http://schemas.microsoft.com/office/drawing/2014/main" val="10003"/>
+                  </a:ext>
+                </a:extLst>
               </a:tr>
               <a:tr h="502920">
                 <a:tc>
@@ -14327,7 +14547,7 @@
                       </a:r>
                     </a:p>
                   </a:txBody>
-                  <a:tcPr marL="91440" marR="91440" marT="27432" marB="27432" anchor="ctr">
+                  <a:tcPr marT="27432" marB="27432" anchor="ctr">
                     <a:solidFill>
                       <a:srgbClr val="F2F4F7"/>
                     </a:solidFill>
@@ -14352,7 +14572,7 @@
                       </a:r>
                     </a:p>
                   </a:txBody>
-                  <a:tcPr marL="91440" marR="91440" marT="27432" marB="27432" anchor="ctr">
+                  <a:tcPr marT="27432" marB="27432" anchor="ctr">
                     <a:solidFill>
                       <a:srgbClr val="F2F4F7"/>
                     </a:solidFill>
@@ -14377,12 +14597,17 @@
                       </a:r>
                     </a:p>
                   </a:txBody>
-                  <a:tcPr marL="91440" marR="91440" marT="27432" marB="27432" anchor="ctr">
+                  <a:tcPr marT="27432" marB="27432" anchor="ctr">
                     <a:solidFill>
                       <a:srgbClr val="F2F4F7"/>
                     </a:solidFill>
                   </a:tcPr>
                 </a:tc>
+                <a:extLst>
+                  <a:ext uri="{0D108BD9-81ED-4DB2-BD59-A6C34878D82A}">
+                    <a16:rowId xmlns:a16="http://schemas.microsoft.com/office/drawing/2014/main" val="10004"/>
+                  </a:ext>
+                </a:extLst>
               </a:tr>
             </a:tbl>
           </a:graphicData>
@@ -14433,7 +14658,7 @@
 </file>
 
 <file path=ppt/slides/slide24.xml><?xml version="1.0" encoding="utf-8"?>
-<p:sld xmlns:a="http://schemas.openxmlformats.org/drawingml/2006/main" xmlns:p="http://schemas.openxmlformats.org/presentationml/2006/main" xmlns:r="http://schemas.openxmlformats.org/officeDocument/2006/relationships">
+<p:sld xmlns:a="http://schemas.openxmlformats.org/drawingml/2006/main" xmlns:r="http://schemas.openxmlformats.org/officeDocument/2006/relationships" xmlns:p="http://schemas.openxmlformats.org/presentationml/2006/main">
   <p:cSld>
     <p:spTree>
       <p:nvGrpSpPr>
@@ -14441,7 +14666,14 @@
         <p:cNvGrpSpPr/>
         <p:nvPr/>
       </p:nvGrpSpPr>
-      <p:grpSpPr/>
+      <p:grpSpPr>
+        <a:xfrm>
+          <a:off x="0" y="0"/>
+          <a:ext cx="0" cy="0"/>
+          <a:chOff x="0" y="0"/>
+          <a:chExt cx="0" cy="0"/>
+        </a:xfrm>
+      </p:grpSpPr>
       <p:sp>
         <p:nvSpPr>
           <p:cNvPr id="2" name="TextBox 1"/>
@@ -14498,8 +14730,20 @@
                 <a:tableStyleId>{5C22544A-7EE6-4342-B048-85BDC9FD1C3A}</a:tableStyleId>
               </a:tblPr>
               <a:tblGrid>
-                <a:gridCol w="5272887"/>
-                <a:gridCol w="5272888"/>
+                <a:gridCol w="5272887">
+                  <a:extLst>
+                    <a:ext uri="{9D8B030D-6E8A-4147-A177-3AD203B41FA5}">
+                      <a16:colId xmlns:a16="http://schemas.microsoft.com/office/drawing/2014/main" val="20000"/>
+                    </a:ext>
+                  </a:extLst>
+                </a:gridCol>
+                <a:gridCol w="5272888">
+                  <a:extLst>
+                    <a:ext uri="{9D8B030D-6E8A-4147-A177-3AD203B41FA5}">
+                      <a16:colId xmlns:a16="http://schemas.microsoft.com/office/drawing/2014/main" val="20001"/>
+                    </a:ext>
+                  </a:extLst>
+                </a:gridCol>
               </a:tblGrid>
               <a:tr h="502920">
                 <a:tc>
@@ -14521,7 +14765,7 @@
                       </a:r>
                     </a:p>
                   </a:txBody>
-                  <a:tcPr marL="91440" marR="91440" marT="27432" marB="27432" anchor="ctr">
+                  <a:tcPr marT="27432" marB="27432" anchor="ctr">
                     <a:solidFill>
                       <a:srgbClr val="1F5FA8"/>
                     </a:solidFill>
@@ -14546,12 +14790,17 @@
                       </a:r>
                     </a:p>
                   </a:txBody>
-                  <a:tcPr marL="91440" marR="91440" marT="27432" marB="27432" anchor="ctr">
+                  <a:tcPr marT="27432" marB="27432" anchor="ctr">
                     <a:solidFill>
                       <a:srgbClr val="1F5FA8"/>
                     </a:solidFill>
                   </a:tcPr>
                 </a:tc>
+                <a:extLst>
+                  <a:ext uri="{0D108BD9-81ED-4DB2-BD59-A6C34878D82A}">
+                    <a16:rowId xmlns:a16="http://schemas.microsoft.com/office/drawing/2014/main" val="10000"/>
+                  </a:ext>
+                </a:extLst>
               </a:tr>
               <a:tr h="502920">
                 <a:tc>
@@ -14573,7 +14822,7 @@
                       </a:r>
                     </a:p>
                   </a:txBody>
-                  <a:tcPr marL="91440" marR="91440" marT="27432" marB="27432" anchor="ctr">
+                  <a:tcPr marT="27432" marB="27432" anchor="ctr">
                     <a:solidFill>
                       <a:srgbClr val="FFFFFF"/>
                     </a:solidFill>
@@ -14598,12 +14847,17 @@
                       </a:r>
                     </a:p>
                   </a:txBody>
-                  <a:tcPr marL="91440" marR="91440" marT="27432" marB="27432" anchor="ctr">
+                  <a:tcPr marT="27432" marB="27432" anchor="ctr">
                     <a:solidFill>
                       <a:srgbClr val="FFFFFF"/>
                     </a:solidFill>
                   </a:tcPr>
                 </a:tc>
+                <a:extLst>
+                  <a:ext uri="{0D108BD9-81ED-4DB2-BD59-A6C34878D82A}">
+                    <a16:rowId xmlns:a16="http://schemas.microsoft.com/office/drawing/2014/main" val="10001"/>
+                  </a:ext>
+                </a:extLst>
               </a:tr>
               <a:tr h="502920">
                 <a:tc>
@@ -14625,7 +14879,7 @@
                       </a:r>
                     </a:p>
                   </a:txBody>
-                  <a:tcPr marL="91440" marR="91440" marT="27432" marB="27432" anchor="ctr">
+                  <a:tcPr marT="27432" marB="27432" anchor="ctr">
                     <a:solidFill>
                       <a:srgbClr val="F2F4F7"/>
                     </a:solidFill>
@@ -14650,12 +14904,17 @@
                       </a:r>
                     </a:p>
                   </a:txBody>
-                  <a:tcPr marL="91440" marR="91440" marT="27432" marB="27432" anchor="ctr">
+                  <a:tcPr marT="27432" marB="27432" anchor="ctr">
                     <a:solidFill>
                       <a:srgbClr val="F2F4F7"/>
                     </a:solidFill>
                   </a:tcPr>
                 </a:tc>
+                <a:extLst>
+                  <a:ext uri="{0D108BD9-81ED-4DB2-BD59-A6C34878D82A}">
+                    <a16:rowId xmlns:a16="http://schemas.microsoft.com/office/drawing/2014/main" val="10002"/>
+                  </a:ext>
+                </a:extLst>
               </a:tr>
               <a:tr h="502920">
                 <a:tc>
@@ -14677,7 +14936,7 @@
                       </a:r>
                     </a:p>
                   </a:txBody>
-                  <a:tcPr marL="91440" marR="91440" marT="27432" marB="27432" anchor="ctr">
+                  <a:tcPr marT="27432" marB="27432" anchor="ctr">
                     <a:solidFill>
                       <a:srgbClr val="FFFFFF"/>
                     </a:solidFill>
@@ -14702,12 +14961,17 @@
                       </a:r>
                     </a:p>
                   </a:txBody>
-                  <a:tcPr marL="91440" marR="91440" marT="27432" marB="27432" anchor="ctr">
+                  <a:tcPr marT="27432" marB="27432" anchor="ctr">
                     <a:solidFill>
                       <a:srgbClr val="FFFFFF"/>
                     </a:solidFill>
                   </a:tcPr>
                 </a:tc>
+                <a:extLst>
+                  <a:ext uri="{0D108BD9-81ED-4DB2-BD59-A6C34878D82A}">
+                    <a16:rowId xmlns:a16="http://schemas.microsoft.com/office/drawing/2014/main" val="10003"/>
+                  </a:ext>
+                </a:extLst>
               </a:tr>
               <a:tr h="502920">
                 <a:tc>
@@ -14729,7 +14993,7 @@
                       </a:r>
                     </a:p>
                   </a:txBody>
-                  <a:tcPr marL="91440" marR="91440" marT="27432" marB="27432" anchor="ctr">
+                  <a:tcPr marT="27432" marB="27432" anchor="ctr">
                     <a:solidFill>
                       <a:srgbClr val="F2F4F7"/>
                     </a:solidFill>
@@ -14754,12 +15018,17 @@
                       </a:r>
                     </a:p>
                   </a:txBody>
-                  <a:tcPr marL="91440" marR="91440" marT="27432" marB="27432" anchor="ctr">
+                  <a:tcPr marT="27432" marB="27432" anchor="ctr">
                     <a:solidFill>
                       <a:srgbClr val="F2F4F7"/>
                     </a:solidFill>
                   </a:tcPr>
                 </a:tc>
+                <a:extLst>
+                  <a:ext uri="{0D108BD9-81ED-4DB2-BD59-A6C34878D82A}">
+                    <a16:rowId xmlns:a16="http://schemas.microsoft.com/office/drawing/2014/main" val="10004"/>
+                  </a:ext>
+                </a:extLst>
               </a:tr>
             </a:tbl>
           </a:graphicData>
@@ -14847,7 +15116,7 @@
 </file>
 
 <file path=ppt/slides/slide25.xml><?xml version="1.0" encoding="utf-8"?>
-<p:sld xmlns:a="http://schemas.openxmlformats.org/drawingml/2006/main" xmlns:p="http://schemas.openxmlformats.org/presentationml/2006/main" xmlns:r="http://schemas.openxmlformats.org/officeDocument/2006/relationships">
+<p:sld xmlns:a="http://schemas.openxmlformats.org/drawingml/2006/main" xmlns:r="http://schemas.openxmlformats.org/officeDocument/2006/relationships" xmlns:p="http://schemas.openxmlformats.org/presentationml/2006/main">
   <p:cSld>
     <p:spTree>
       <p:nvGrpSpPr>
@@ -14855,7 +15124,14 @@
         <p:cNvGrpSpPr/>
         <p:nvPr/>
       </p:nvGrpSpPr>
-      <p:grpSpPr/>
+      <p:grpSpPr>
+        <a:xfrm>
+          <a:off x="0" y="0"/>
+          <a:ext cx="0" cy="0"/>
+          <a:chOff x="0" y="0"/>
+          <a:chExt cx="0" cy="0"/>
+        </a:xfrm>
+      </p:grpSpPr>
       <p:sp>
         <p:nvSpPr>
           <p:cNvPr id="2" name="Rectangle 1"/>
@@ -14896,6 +15172,7 @@
           <a:lstStyle/>
           <a:p>
             <a:pPr algn="ctr"/>
+            <a:endParaRPr/>
           </a:p>
         </p:txBody>
       </p:sp>
@@ -14981,7 +15258,7 @@
 </file>
 
 <file path=ppt/slides/slide26.xml><?xml version="1.0" encoding="utf-8"?>
-<p:sld xmlns:a="http://schemas.openxmlformats.org/drawingml/2006/main" xmlns:p="http://schemas.openxmlformats.org/presentationml/2006/main" xmlns:r="http://schemas.openxmlformats.org/officeDocument/2006/relationships">
+<p:sld xmlns:a="http://schemas.openxmlformats.org/drawingml/2006/main" xmlns:r="http://schemas.openxmlformats.org/officeDocument/2006/relationships" xmlns:p="http://schemas.openxmlformats.org/presentationml/2006/main">
   <p:cSld>
     <p:spTree>
       <p:nvGrpSpPr>
@@ -14989,7 +15266,14 @@
         <p:cNvGrpSpPr/>
         <p:nvPr/>
       </p:nvGrpSpPr>
-      <p:grpSpPr/>
+      <p:grpSpPr>
+        <a:xfrm>
+          <a:off x="0" y="0"/>
+          <a:ext cx="0" cy="0"/>
+          <a:chOff x="0" y="0"/>
+          <a:chExt cx="0" cy="0"/>
+        </a:xfrm>
+      </p:grpSpPr>
       <p:sp>
         <p:nvSpPr>
           <p:cNvPr id="2" name="TextBox 1"/>
@@ -15257,7 +15541,7 @@
 </file>
 
 <file path=ppt/slides/slide27.xml><?xml version="1.0" encoding="utf-8"?>
-<p:sld xmlns:a="http://schemas.openxmlformats.org/drawingml/2006/main" xmlns:p="http://schemas.openxmlformats.org/presentationml/2006/main" xmlns:r="http://schemas.openxmlformats.org/officeDocument/2006/relationships">
+<p:sld xmlns:a="http://schemas.openxmlformats.org/drawingml/2006/main" xmlns:r="http://schemas.openxmlformats.org/officeDocument/2006/relationships" xmlns:p="http://schemas.openxmlformats.org/presentationml/2006/main">
   <p:cSld>
     <p:spTree>
       <p:nvGrpSpPr>
@@ -15265,7 +15549,14 @@
         <p:cNvGrpSpPr/>
         <p:nvPr/>
       </p:nvGrpSpPr>
-      <p:grpSpPr/>
+      <p:grpSpPr>
+        <a:xfrm>
+          <a:off x="0" y="0"/>
+          <a:ext cx="0" cy="0"/>
+          <a:chOff x="0" y="0"/>
+          <a:chExt cx="0" cy="0"/>
+        </a:xfrm>
+      </p:grpSpPr>
       <p:sp>
         <p:nvSpPr>
           <p:cNvPr id="2" name="TextBox 1"/>
@@ -15348,7 +15639,7 @@
 </file>
 
 <file path=ppt/slides/slide28.xml><?xml version="1.0" encoding="utf-8"?>
-<p:sld xmlns:a="http://schemas.openxmlformats.org/drawingml/2006/main" xmlns:p="http://schemas.openxmlformats.org/presentationml/2006/main" xmlns:r="http://schemas.openxmlformats.org/officeDocument/2006/relationships">
+<p:sld xmlns:a="http://schemas.openxmlformats.org/drawingml/2006/main" xmlns:r="http://schemas.openxmlformats.org/officeDocument/2006/relationships" xmlns:p="http://schemas.openxmlformats.org/presentationml/2006/main">
   <p:cSld>
     <p:spTree>
       <p:nvGrpSpPr>
@@ -15356,7 +15647,14 @@
         <p:cNvGrpSpPr/>
         <p:nvPr/>
       </p:nvGrpSpPr>
-      <p:grpSpPr/>
+      <p:grpSpPr>
+        <a:xfrm>
+          <a:off x="0" y="0"/>
+          <a:ext cx="0" cy="0"/>
+          <a:chOff x="0" y="0"/>
+          <a:chExt cx="0" cy="0"/>
+        </a:xfrm>
+      </p:grpSpPr>
       <p:sp>
         <p:nvSpPr>
           <p:cNvPr id="2" name="TextBox 1"/>
@@ -15587,7 +15885,7 @@
 </file>
 
 <file path=ppt/slides/slide29.xml><?xml version="1.0" encoding="utf-8"?>
-<p:sld xmlns:a="http://schemas.openxmlformats.org/drawingml/2006/main" xmlns:p="http://schemas.openxmlformats.org/presentationml/2006/main" xmlns:r="http://schemas.openxmlformats.org/officeDocument/2006/relationships">
+<p:sld xmlns:a="http://schemas.openxmlformats.org/drawingml/2006/main" xmlns:r="http://schemas.openxmlformats.org/officeDocument/2006/relationships" xmlns:p="http://schemas.openxmlformats.org/presentationml/2006/main">
   <p:cSld>
     <p:spTree>
       <p:nvGrpSpPr>
@@ -15595,7 +15893,14 @@
         <p:cNvGrpSpPr/>
         <p:nvPr/>
       </p:nvGrpSpPr>
-      <p:grpSpPr/>
+      <p:grpSpPr>
+        <a:xfrm>
+          <a:off x="0" y="0"/>
+          <a:ext cx="0" cy="0"/>
+          <a:chOff x="0" y="0"/>
+          <a:chExt cx="0" cy="0"/>
+        </a:xfrm>
+      </p:grpSpPr>
       <p:sp>
         <p:nvSpPr>
           <p:cNvPr id="2" name="TextBox 1"/>
@@ -15669,7 +15974,7 @@
           </a:fontRef>
         </p:style>
         <p:txBody>
-          <a:bodyPr rtlCol="0" anchor="ctr" wrap="none" lIns="228600" tIns="137160"/>
+          <a:bodyPr wrap="none" lIns="228600" tIns="137160" rtlCol="0" anchor="ctr"/>
           <a:lstStyle/>
           <a:p>
             <a:pPr algn="l"/>
@@ -15742,7 +16047,9 @@
         <p:txBody>
           <a:bodyPr rtlCol="0" anchor="ctr"/>
           <a:lstStyle/>
-          <a:p/>
+          <a:p>
+            <a:endParaRPr/>
+          </a:p>
         </p:txBody>
       </p:sp>
       <p:sp>
@@ -15786,6 +16093,7 @@
           <a:lstStyle/>
           <a:p>
             <a:pPr algn="ctr"/>
+            <a:endParaRPr/>
           </a:p>
         </p:txBody>
       </p:sp>
@@ -15986,7 +16294,7 @@
 </file>
 
 <file path=ppt/slides/slide3.xml><?xml version="1.0" encoding="utf-8"?>
-<p:sld xmlns:a="http://schemas.openxmlformats.org/drawingml/2006/main" xmlns:p="http://schemas.openxmlformats.org/presentationml/2006/main" xmlns:r="http://schemas.openxmlformats.org/officeDocument/2006/relationships">
+<p:sld xmlns:a="http://schemas.openxmlformats.org/drawingml/2006/main" xmlns:r="http://schemas.openxmlformats.org/officeDocument/2006/relationships" xmlns:p="http://schemas.openxmlformats.org/presentationml/2006/main">
   <p:cSld>
     <p:spTree>
       <p:nvGrpSpPr>
@@ -15994,7 +16302,14 @@
         <p:cNvGrpSpPr/>
         <p:nvPr/>
       </p:nvGrpSpPr>
-      <p:grpSpPr/>
+      <p:grpSpPr>
+        <a:xfrm>
+          <a:off x="0" y="0"/>
+          <a:ext cx="0" cy="0"/>
+          <a:chOff x="0" y="0"/>
+          <a:chExt cx="0" cy="0"/>
+        </a:xfrm>
+      </p:grpSpPr>
       <p:sp>
         <p:nvSpPr>
           <p:cNvPr id="2" name="TextBox 1"/>
@@ -16262,7 +16577,7 @@
 </file>
 
 <file path=ppt/slides/slide30.xml><?xml version="1.0" encoding="utf-8"?>
-<p:sld xmlns:a="http://schemas.openxmlformats.org/drawingml/2006/main" xmlns:p="http://schemas.openxmlformats.org/presentationml/2006/main" xmlns:r="http://schemas.openxmlformats.org/officeDocument/2006/relationships">
+<p:sld xmlns:a="http://schemas.openxmlformats.org/drawingml/2006/main" xmlns:r="http://schemas.openxmlformats.org/officeDocument/2006/relationships" xmlns:p="http://schemas.openxmlformats.org/presentationml/2006/main">
   <p:cSld>
     <p:spTree>
       <p:nvGrpSpPr>
@@ -16270,7 +16585,14 @@
         <p:cNvGrpSpPr/>
         <p:nvPr/>
       </p:nvGrpSpPr>
-      <p:grpSpPr/>
+      <p:grpSpPr>
+        <a:xfrm>
+          <a:off x="0" y="0"/>
+          <a:ext cx="0" cy="0"/>
+          <a:chOff x="0" y="0"/>
+          <a:chExt cx="0" cy="0"/>
+        </a:xfrm>
+      </p:grpSpPr>
       <p:sp>
         <p:nvSpPr>
           <p:cNvPr id="2" name="TextBox 1"/>
@@ -16344,7 +16666,7 @@
           </a:fontRef>
         </p:style>
         <p:txBody>
-          <a:bodyPr rtlCol="0" anchor="ctr" wrap="none" lIns="228600" tIns="137160"/>
+          <a:bodyPr wrap="none" lIns="228600" tIns="137160" rtlCol="0" anchor="ctr"/>
           <a:lstStyle/>
           <a:p>
             <a:pPr algn="l"/>
@@ -16449,7 +16771,7 @@
 </file>
 
 <file path=ppt/slides/slide31.xml><?xml version="1.0" encoding="utf-8"?>
-<p:sld xmlns:a="http://schemas.openxmlformats.org/drawingml/2006/main" xmlns:p="http://schemas.openxmlformats.org/presentationml/2006/main" xmlns:r="http://schemas.openxmlformats.org/officeDocument/2006/relationships">
+<p:sld xmlns:a="http://schemas.openxmlformats.org/drawingml/2006/main" xmlns:r="http://schemas.openxmlformats.org/officeDocument/2006/relationships" xmlns:p="http://schemas.openxmlformats.org/presentationml/2006/main">
   <p:cSld>
     <p:spTree>
       <p:nvGrpSpPr>
@@ -16457,7 +16779,14 @@
         <p:cNvGrpSpPr/>
         <p:nvPr/>
       </p:nvGrpSpPr>
-      <p:grpSpPr/>
+      <p:grpSpPr>
+        <a:xfrm>
+          <a:off x="0" y="0"/>
+          <a:ext cx="0" cy="0"/>
+          <a:chOff x="0" y="0"/>
+          <a:chExt cx="0" cy="0"/>
+        </a:xfrm>
+      </p:grpSpPr>
       <p:sp>
         <p:nvSpPr>
           <p:cNvPr id="2" name="Rectangle 1"/>
@@ -16498,6 +16827,7 @@
           <a:lstStyle/>
           <a:p>
             <a:pPr algn="ctr"/>
+            <a:endParaRPr/>
           </a:p>
         </p:txBody>
       </p:sp>
@@ -16541,6 +16871,7 @@
           <a:lstStyle/>
           <a:p>
             <a:pPr algn="ctr"/>
+            <a:endParaRPr/>
           </a:p>
         </p:txBody>
       </p:sp>
@@ -16811,7 +17142,7 @@
 </file>
 
 <file path=ppt/slides/slide32.xml><?xml version="1.0" encoding="utf-8"?>
-<p:sld xmlns:a="http://schemas.openxmlformats.org/drawingml/2006/main" xmlns:p="http://schemas.openxmlformats.org/presentationml/2006/main" xmlns:r="http://schemas.openxmlformats.org/officeDocument/2006/relationships">
+<p:sld xmlns:a="http://schemas.openxmlformats.org/drawingml/2006/main" xmlns:r="http://schemas.openxmlformats.org/officeDocument/2006/relationships" xmlns:p="http://schemas.openxmlformats.org/presentationml/2006/main">
   <p:cSld>
     <p:spTree>
       <p:nvGrpSpPr>
@@ -16819,7 +17150,14 @@
         <p:cNvGrpSpPr/>
         <p:nvPr/>
       </p:nvGrpSpPr>
-      <p:grpSpPr/>
+      <p:grpSpPr>
+        <a:xfrm>
+          <a:off x="0" y="0"/>
+          <a:ext cx="0" cy="0"/>
+          <a:chOff x="0" y="0"/>
+          <a:chExt cx="0" cy="0"/>
+        </a:xfrm>
+      </p:grpSpPr>
       <p:sp>
         <p:nvSpPr>
           <p:cNvPr id="2" name="TextBox 1"/>
@@ -17050,7 +17388,7 @@
 </file>
 
 <file path=ppt/slides/slide33.xml><?xml version="1.0" encoding="utf-8"?>
-<p:sld xmlns:a="http://schemas.openxmlformats.org/drawingml/2006/main" xmlns:p="http://schemas.openxmlformats.org/presentationml/2006/main" xmlns:r="http://schemas.openxmlformats.org/officeDocument/2006/relationships">
+<p:sld xmlns:a="http://schemas.openxmlformats.org/drawingml/2006/main" xmlns:r="http://schemas.openxmlformats.org/officeDocument/2006/relationships" xmlns:p="http://schemas.openxmlformats.org/presentationml/2006/main">
   <p:cSld>
     <p:spTree>
       <p:nvGrpSpPr>
@@ -17058,7 +17396,14 @@
         <p:cNvGrpSpPr/>
         <p:nvPr/>
       </p:nvGrpSpPr>
-      <p:grpSpPr/>
+      <p:grpSpPr>
+        <a:xfrm>
+          <a:off x="0" y="0"/>
+          <a:ext cx="0" cy="0"/>
+          <a:chOff x="0" y="0"/>
+          <a:chExt cx="0" cy="0"/>
+        </a:xfrm>
+      </p:grpSpPr>
       <p:sp>
         <p:nvSpPr>
           <p:cNvPr id="2" name="Rectangle 1"/>
@@ -17099,6 +17444,7 @@
           <a:lstStyle/>
           <a:p>
             <a:pPr algn="ctr"/>
+            <a:endParaRPr/>
           </a:p>
         </p:txBody>
       </p:sp>
@@ -17184,7 +17530,7 @@
 </file>
 
 <file path=ppt/slides/slide34.xml><?xml version="1.0" encoding="utf-8"?>
-<p:sld xmlns:a="http://schemas.openxmlformats.org/drawingml/2006/main" xmlns:p="http://schemas.openxmlformats.org/presentationml/2006/main" xmlns:r="http://schemas.openxmlformats.org/officeDocument/2006/relationships">
+<p:sld xmlns:a="http://schemas.openxmlformats.org/drawingml/2006/main" xmlns:r="http://schemas.openxmlformats.org/officeDocument/2006/relationships" xmlns:p="http://schemas.openxmlformats.org/presentationml/2006/main">
   <p:cSld>
     <p:spTree>
       <p:nvGrpSpPr>
@@ -17192,7 +17538,14 @@
         <p:cNvGrpSpPr/>
         <p:nvPr/>
       </p:nvGrpSpPr>
-      <p:grpSpPr/>
+      <p:grpSpPr>
+        <a:xfrm>
+          <a:off x="0" y="0"/>
+          <a:ext cx="0" cy="0"/>
+          <a:chOff x="0" y="0"/>
+          <a:chExt cx="0" cy="0"/>
+        </a:xfrm>
+      </p:grpSpPr>
       <p:sp>
         <p:nvSpPr>
           <p:cNvPr id="2" name="TextBox 1"/>
@@ -17423,7 +17776,7 @@
 </file>
 
 <file path=ppt/slides/slide35.xml><?xml version="1.0" encoding="utf-8"?>
-<p:sld xmlns:a="http://schemas.openxmlformats.org/drawingml/2006/main" xmlns:p="http://schemas.openxmlformats.org/presentationml/2006/main" xmlns:r="http://schemas.openxmlformats.org/officeDocument/2006/relationships">
+<p:sld xmlns:a="http://schemas.openxmlformats.org/drawingml/2006/main" xmlns:r="http://schemas.openxmlformats.org/officeDocument/2006/relationships" xmlns:p="http://schemas.openxmlformats.org/presentationml/2006/main">
   <p:cSld>
     <p:spTree>
       <p:nvGrpSpPr>
@@ -17431,7 +17784,14 @@
         <p:cNvGrpSpPr/>
         <p:nvPr/>
       </p:nvGrpSpPr>
-      <p:grpSpPr/>
+      <p:grpSpPr>
+        <a:xfrm>
+          <a:off x="0" y="0"/>
+          <a:ext cx="0" cy="0"/>
+          <a:chOff x="0" y="0"/>
+          <a:chExt cx="0" cy="0"/>
+        </a:xfrm>
+      </p:grpSpPr>
       <p:sp>
         <p:nvSpPr>
           <p:cNvPr id="2" name="TextBox 1"/>
@@ -17514,7 +17874,7 @@
 </file>
 
 <file path=ppt/slides/slide36.xml><?xml version="1.0" encoding="utf-8"?>
-<p:sld xmlns:a="http://schemas.openxmlformats.org/drawingml/2006/main" xmlns:p="http://schemas.openxmlformats.org/presentationml/2006/main" xmlns:r="http://schemas.openxmlformats.org/officeDocument/2006/relationships">
+<p:sld xmlns:a="http://schemas.openxmlformats.org/drawingml/2006/main" xmlns:r="http://schemas.openxmlformats.org/officeDocument/2006/relationships" xmlns:p="http://schemas.openxmlformats.org/presentationml/2006/main">
   <p:cSld>
     <p:spTree>
       <p:nvGrpSpPr>
@@ -17522,7 +17882,14 @@
         <p:cNvGrpSpPr/>
         <p:nvPr/>
       </p:nvGrpSpPr>
-      <p:grpSpPr/>
+      <p:grpSpPr>
+        <a:xfrm>
+          <a:off x="0" y="0"/>
+          <a:ext cx="0" cy="0"/>
+          <a:chOff x="0" y="0"/>
+          <a:chExt cx="0" cy="0"/>
+        </a:xfrm>
+      </p:grpSpPr>
       <p:sp>
         <p:nvSpPr>
           <p:cNvPr id="2" name="TextBox 1"/>
@@ -17599,7 +17966,7 @@
           </a:fontRef>
         </p:style>
         <p:txBody>
-          <a:bodyPr rtlCol="0" anchor="ctr" wrap="square" lIns="54864" rIns="54864" tIns="27432" bIns="27432"/>
+          <a:bodyPr wrap="square" lIns="54864" tIns="27432" rIns="54864" bIns="27432" rtlCol="0" anchor="ctr"/>
           <a:lstStyle/>
           <a:p>
             <a:pPr algn="ctr"/>
@@ -17658,6 +18025,7 @@
           <a:lstStyle/>
           <a:p>
             <a:pPr algn="ctr"/>
+            <a:endParaRPr/>
           </a:p>
         </p:txBody>
       </p:sp>
@@ -17700,7 +18068,7 @@
           </a:fontRef>
         </p:style>
         <p:txBody>
-          <a:bodyPr rtlCol="0" anchor="ctr" wrap="square" lIns="54864" rIns="54864" tIns="27432" bIns="27432"/>
+          <a:bodyPr wrap="square" lIns="54864" tIns="27432" rIns="54864" bIns="27432" rtlCol="0" anchor="ctr"/>
           <a:lstStyle/>
           <a:p>
             <a:pPr algn="ctr"/>
@@ -17759,6 +18127,7 @@
           <a:lstStyle/>
           <a:p>
             <a:pPr algn="ctr"/>
+            <a:endParaRPr/>
           </a:p>
         </p:txBody>
       </p:sp>
@@ -17801,7 +18170,7 @@
           </a:fontRef>
         </p:style>
         <p:txBody>
-          <a:bodyPr rtlCol="0" anchor="ctr" wrap="square" lIns="54864" rIns="54864" tIns="27432" bIns="27432"/>
+          <a:bodyPr wrap="square" lIns="54864" tIns="27432" rIns="54864" bIns="27432" rtlCol="0" anchor="ctr"/>
           <a:lstStyle/>
           <a:p>
             <a:pPr algn="ctr"/>
@@ -17860,6 +18229,7 @@
           <a:lstStyle/>
           <a:p>
             <a:pPr algn="ctr"/>
+            <a:endParaRPr/>
           </a:p>
         </p:txBody>
       </p:sp>
@@ -17902,7 +18272,7 @@
           </a:fontRef>
         </p:style>
         <p:txBody>
-          <a:bodyPr rtlCol="0" anchor="ctr" wrap="square" lIns="54864" rIns="54864" tIns="27432" bIns="27432"/>
+          <a:bodyPr wrap="square" lIns="54864" tIns="27432" rIns="54864" bIns="27432" rtlCol="0" anchor="ctr"/>
           <a:lstStyle/>
           <a:p>
             <a:pPr algn="ctr"/>
@@ -18020,7 +18390,7 @@
 </file>
 
 <file path=ppt/slides/slide37.xml><?xml version="1.0" encoding="utf-8"?>
-<p:sld xmlns:a="http://schemas.openxmlformats.org/drawingml/2006/main" xmlns:p="http://schemas.openxmlformats.org/presentationml/2006/main" xmlns:r="http://schemas.openxmlformats.org/officeDocument/2006/relationships">
+<p:sld xmlns:a="http://schemas.openxmlformats.org/drawingml/2006/main" xmlns:r="http://schemas.openxmlformats.org/officeDocument/2006/relationships" xmlns:p="http://schemas.openxmlformats.org/presentationml/2006/main">
   <p:cSld>
     <p:spTree>
       <p:nvGrpSpPr>
@@ -18028,7 +18398,14 @@
         <p:cNvGrpSpPr/>
         <p:nvPr/>
       </p:nvGrpSpPr>
-      <p:grpSpPr/>
+      <p:grpSpPr>
+        <a:xfrm>
+          <a:off x="0" y="0"/>
+          <a:ext cx="0" cy="0"/>
+          <a:chOff x="0" y="0"/>
+          <a:chExt cx="0" cy="0"/>
+        </a:xfrm>
+      </p:grpSpPr>
       <p:sp>
         <p:nvSpPr>
           <p:cNvPr id="2" name="TextBox 1"/>
@@ -18259,7 +18636,7 @@
 </file>
 
 <file path=ppt/slides/slide38.xml><?xml version="1.0" encoding="utf-8"?>
-<p:sld xmlns:a="http://schemas.openxmlformats.org/drawingml/2006/main" xmlns:p="http://schemas.openxmlformats.org/presentationml/2006/main" xmlns:r="http://schemas.openxmlformats.org/officeDocument/2006/relationships">
+<p:sld xmlns:a="http://schemas.openxmlformats.org/drawingml/2006/main" xmlns:r="http://schemas.openxmlformats.org/officeDocument/2006/relationships" xmlns:p="http://schemas.openxmlformats.org/presentationml/2006/main">
   <p:cSld>
     <p:spTree>
       <p:nvGrpSpPr>
@@ -18267,7 +18644,14 @@
         <p:cNvGrpSpPr/>
         <p:nvPr/>
       </p:nvGrpSpPr>
-      <p:grpSpPr/>
+      <p:grpSpPr>
+        <a:xfrm>
+          <a:off x="0" y="0"/>
+          <a:ext cx="0" cy="0"/>
+          <a:chOff x="0" y="0"/>
+          <a:chExt cx="0" cy="0"/>
+        </a:xfrm>
+      </p:grpSpPr>
       <p:sp>
         <p:nvSpPr>
           <p:cNvPr id="2" name="TextBox 1"/>
@@ -18346,7 +18730,9 @@
         <p:txBody>
           <a:bodyPr rtlCol="0" anchor="ctr"/>
           <a:lstStyle/>
-          <a:p/>
+          <a:p>
+            <a:endParaRPr/>
+          </a:p>
         </p:txBody>
       </p:sp>
       <p:sp>
@@ -18390,6 +18776,7 @@
           <a:lstStyle/>
           <a:p>
             <a:pPr algn="ctr"/>
+            <a:endParaRPr/>
           </a:p>
         </p:txBody>
       </p:sp>
@@ -18525,7 +18912,7 @@
           </a:fontRef>
         </p:style>
         <p:txBody>
-          <a:bodyPr rtlCol="0" anchor="ctr" wrap="none" lIns="228600" tIns="137160"/>
+          <a:bodyPr wrap="none" lIns="228600" tIns="137160" rtlCol="0" anchor="ctr"/>
           <a:lstStyle/>
           <a:p>
             <a:pPr algn="l"/>
@@ -18630,7 +19017,7 @@
 </file>
 
 <file path=ppt/slides/slide39.xml><?xml version="1.0" encoding="utf-8"?>
-<p:sld xmlns:a="http://schemas.openxmlformats.org/drawingml/2006/main" xmlns:p="http://schemas.openxmlformats.org/presentationml/2006/main" xmlns:r="http://schemas.openxmlformats.org/officeDocument/2006/relationships">
+<p:sld xmlns:a="http://schemas.openxmlformats.org/drawingml/2006/main" xmlns:r="http://schemas.openxmlformats.org/officeDocument/2006/relationships" xmlns:p="http://schemas.openxmlformats.org/presentationml/2006/main">
   <p:cSld>
     <p:spTree>
       <p:nvGrpSpPr>
@@ -18638,7 +19025,14 @@
         <p:cNvGrpSpPr/>
         <p:nvPr/>
       </p:nvGrpSpPr>
-      <p:grpSpPr/>
+      <p:grpSpPr>
+        <a:xfrm>
+          <a:off x="0" y="0"/>
+          <a:ext cx="0" cy="0"/>
+          <a:chOff x="0" y="0"/>
+          <a:chExt cx="0" cy="0"/>
+        </a:xfrm>
+      </p:grpSpPr>
       <p:sp>
         <p:nvSpPr>
           <p:cNvPr id="2" name="TextBox 1"/>
@@ -18717,7 +19111,9 @@
         <p:txBody>
           <a:bodyPr rtlCol="0" anchor="ctr"/>
           <a:lstStyle/>
-          <a:p/>
+          <a:p>
+            <a:endParaRPr/>
+          </a:p>
         </p:txBody>
       </p:sp>
       <p:sp>
@@ -18761,6 +19157,7 @@
           <a:lstStyle/>
           <a:p>
             <a:pPr algn="ctr"/>
+            <a:endParaRPr/>
           </a:p>
         </p:txBody>
       </p:sp>
@@ -18901,7 +19298,9 @@
         <p:txBody>
           <a:bodyPr rtlCol="0" anchor="ctr"/>
           <a:lstStyle/>
-          <a:p/>
+          <a:p>
+            <a:endParaRPr/>
+          </a:p>
         </p:txBody>
       </p:sp>
       <p:sp>
@@ -18945,6 +19344,7 @@
           <a:lstStyle/>
           <a:p>
             <a:pPr algn="ctr"/>
+            <a:endParaRPr/>
           </a:p>
         </p:txBody>
       </p:sp>
@@ -19071,7 +19471,7 @@
 </file>
 
 <file path=ppt/slides/slide4.xml><?xml version="1.0" encoding="utf-8"?>
-<p:sld xmlns:a="http://schemas.openxmlformats.org/drawingml/2006/main" xmlns:p="http://schemas.openxmlformats.org/presentationml/2006/main" xmlns:r="http://schemas.openxmlformats.org/officeDocument/2006/relationships">
+<p:sld xmlns:a="http://schemas.openxmlformats.org/drawingml/2006/main" xmlns:r="http://schemas.openxmlformats.org/officeDocument/2006/relationships" xmlns:p="http://schemas.openxmlformats.org/presentationml/2006/main">
   <p:cSld>
     <p:spTree>
       <p:nvGrpSpPr>
@@ -19079,7 +19479,14 @@
         <p:cNvGrpSpPr/>
         <p:nvPr/>
       </p:nvGrpSpPr>
-      <p:grpSpPr/>
+      <p:grpSpPr>
+        <a:xfrm>
+          <a:off x="0" y="0"/>
+          <a:ext cx="0" cy="0"/>
+          <a:chOff x="0" y="0"/>
+          <a:chExt cx="0" cy="0"/>
+        </a:xfrm>
+      </p:grpSpPr>
       <p:sp>
         <p:nvSpPr>
           <p:cNvPr id="2" name="TextBox 1"/>
@@ -19310,7 +19717,7 @@
 </file>
 
 <file path=ppt/slides/slide40.xml><?xml version="1.0" encoding="utf-8"?>
-<p:sld xmlns:a="http://schemas.openxmlformats.org/drawingml/2006/main" xmlns:p="http://schemas.openxmlformats.org/presentationml/2006/main" xmlns:r="http://schemas.openxmlformats.org/officeDocument/2006/relationships">
+<p:sld xmlns:a="http://schemas.openxmlformats.org/drawingml/2006/main" xmlns:r="http://schemas.openxmlformats.org/officeDocument/2006/relationships" xmlns:p="http://schemas.openxmlformats.org/presentationml/2006/main">
   <p:cSld>
     <p:spTree>
       <p:nvGrpSpPr>
@@ -19318,7 +19725,14 @@
         <p:cNvGrpSpPr/>
         <p:nvPr/>
       </p:nvGrpSpPr>
-      <p:grpSpPr/>
+      <p:grpSpPr>
+        <a:xfrm>
+          <a:off x="0" y="0"/>
+          <a:ext cx="0" cy="0"/>
+          <a:chOff x="0" y="0"/>
+          <a:chExt cx="0" cy="0"/>
+        </a:xfrm>
+      </p:grpSpPr>
       <p:sp>
         <p:nvSpPr>
           <p:cNvPr id="2" name="TextBox 1"/>
@@ -19397,7 +19811,9 @@
         <p:txBody>
           <a:bodyPr rtlCol="0" anchor="ctr"/>
           <a:lstStyle/>
-          <a:p/>
+          <a:p>
+            <a:endParaRPr/>
+          </a:p>
         </p:txBody>
       </p:sp>
       <p:sp>
@@ -19476,7 +19892,7 @@
           </a:fontRef>
         </p:style>
         <p:txBody>
-          <a:bodyPr rtlCol="0" anchor="ctr" wrap="square" lIns="54864" rIns="54864" tIns="27432" bIns="27432"/>
+          <a:bodyPr wrap="square" lIns="54864" tIns="27432" rIns="54864" bIns="27432" rtlCol="0" anchor="ctr"/>
           <a:lstStyle/>
           <a:p>
             <a:pPr algn="ctr"/>
@@ -19535,6 +19951,7 @@
           <a:lstStyle/>
           <a:p>
             <a:pPr algn="ctr"/>
+            <a:endParaRPr/>
           </a:p>
         </p:txBody>
       </p:sp>
@@ -19577,7 +19994,7 @@
           </a:fontRef>
         </p:style>
         <p:txBody>
-          <a:bodyPr rtlCol="0" anchor="ctr" wrap="square" lIns="54864" rIns="54864" tIns="27432" bIns="27432"/>
+          <a:bodyPr wrap="square" lIns="54864" tIns="27432" rIns="54864" bIns="27432" rtlCol="0" anchor="ctr"/>
           <a:lstStyle/>
           <a:p>
             <a:pPr algn="ctr"/>
@@ -19636,6 +20053,7 @@
           <a:lstStyle/>
           <a:p>
             <a:pPr algn="ctr"/>
+            <a:endParaRPr/>
           </a:p>
         </p:txBody>
       </p:sp>
@@ -19678,7 +20096,7 @@
           </a:fontRef>
         </p:style>
         <p:txBody>
-          <a:bodyPr rtlCol="0" anchor="ctr" wrap="square" lIns="54864" rIns="54864" tIns="27432" bIns="27432"/>
+          <a:bodyPr wrap="square" lIns="54864" tIns="27432" rIns="54864" bIns="27432" rtlCol="0" anchor="ctr"/>
           <a:lstStyle/>
           <a:p>
             <a:pPr algn="ctr"/>
@@ -19737,7 +20155,9 @@
         <p:txBody>
           <a:bodyPr rtlCol="0" anchor="ctr"/>
           <a:lstStyle/>
-          <a:p/>
+          <a:p>
+            <a:endParaRPr/>
+          </a:p>
         </p:txBody>
       </p:sp>
       <p:sp>
@@ -19816,7 +20236,7 @@
           </a:fontRef>
         </p:style>
         <p:txBody>
-          <a:bodyPr rtlCol="0" anchor="ctr" wrap="square" lIns="54864" rIns="54864" tIns="27432" bIns="27432"/>
+          <a:bodyPr wrap="square" lIns="54864" tIns="27432" rIns="54864" bIns="27432" rtlCol="0" anchor="ctr"/>
           <a:lstStyle/>
           <a:p>
             <a:pPr algn="ctr"/>
@@ -19875,6 +20295,7 @@
           <a:lstStyle/>
           <a:p>
             <a:pPr algn="ctr"/>
+            <a:endParaRPr/>
           </a:p>
         </p:txBody>
       </p:sp>
@@ -19917,7 +20338,7 @@
           </a:fontRef>
         </p:style>
         <p:txBody>
-          <a:bodyPr rtlCol="0" anchor="ctr" wrap="square" lIns="54864" rIns="54864" tIns="27432" bIns="27432"/>
+          <a:bodyPr wrap="square" lIns="54864" tIns="27432" rIns="54864" bIns="27432" rtlCol="0" anchor="ctr"/>
           <a:lstStyle/>
           <a:p>
             <a:pPr algn="ctr"/>
@@ -19976,6 +20397,7 @@
           <a:lstStyle/>
           <a:p>
             <a:pPr algn="ctr"/>
+            <a:endParaRPr/>
           </a:p>
         </p:txBody>
       </p:sp>
@@ -20018,7 +20440,7 @@
           </a:fontRef>
         </p:style>
         <p:txBody>
-          <a:bodyPr rtlCol="0" anchor="ctr" wrap="square" lIns="54864" rIns="54864" tIns="27432" bIns="27432"/>
+          <a:bodyPr wrap="square" lIns="54864" tIns="27432" rIns="54864" bIns="27432" rtlCol="0" anchor="ctr"/>
           <a:lstStyle/>
           <a:p>
             <a:pPr algn="ctr"/>
@@ -20081,7 +20503,7 @@
 </file>
 
 <file path=ppt/slides/slide41.xml><?xml version="1.0" encoding="utf-8"?>
-<p:sld xmlns:a="http://schemas.openxmlformats.org/drawingml/2006/main" xmlns:p="http://schemas.openxmlformats.org/presentationml/2006/main" xmlns:r="http://schemas.openxmlformats.org/officeDocument/2006/relationships">
+<p:sld xmlns:a="http://schemas.openxmlformats.org/drawingml/2006/main" xmlns:r="http://schemas.openxmlformats.org/officeDocument/2006/relationships" xmlns:p="http://schemas.openxmlformats.org/presentationml/2006/main">
   <p:cSld>
     <p:spTree>
       <p:nvGrpSpPr>
@@ -20089,7 +20511,14 @@
         <p:cNvGrpSpPr/>
         <p:nvPr/>
       </p:nvGrpSpPr>
-      <p:grpSpPr/>
+      <p:grpSpPr>
+        <a:xfrm>
+          <a:off x="0" y="0"/>
+          <a:ext cx="0" cy="0"/>
+          <a:chOff x="0" y="0"/>
+          <a:chExt cx="0" cy="0"/>
+        </a:xfrm>
+      </p:grpSpPr>
       <p:sp>
         <p:nvSpPr>
           <p:cNvPr id="2" name="TextBox 1"/>
@@ -20168,7 +20597,9 @@
         <p:txBody>
           <a:bodyPr rtlCol="0" anchor="ctr"/>
           <a:lstStyle/>
-          <a:p/>
+          <a:p>
+            <a:endParaRPr/>
+          </a:p>
         </p:txBody>
       </p:sp>
       <p:sp>
@@ -20212,6 +20643,7 @@
           <a:lstStyle/>
           <a:p>
             <a:pPr algn="ctr"/>
+            <a:endParaRPr/>
           </a:p>
         </p:txBody>
       </p:sp>
@@ -20352,7 +20784,9 @@
         <p:txBody>
           <a:bodyPr rtlCol="0" anchor="ctr"/>
           <a:lstStyle/>
-          <a:p/>
+          <a:p>
+            <a:endParaRPr/>
+          </a:p>
         </p:txBody>
       </p:sp>
       <p:sp>
@@ -20396,6 +20830,7 @@
           <a:lstStyle/>
           <a:p>
             <a:pPr algn="ctr"/>
+            <a:endParaRPr/>
           </a:p>
         </p:txBody>
       </p:sp>
@@ -20540,7 +20975,7 @@
 </file>
 
 <file path=ppt/slides/slide42.xml><?xml version="1.0" encoding="utf-8"?>
-<p:sld xmlns:a="http://schemas.openxmlformats.org/drawingml/2006/main" xmlns:p="http://schemas.openxmlformats.org/presentationml/2006/main" xmlns:r="http://schemas.openxmlformats.org/officeDocument/2006/relationships">
+<p:sld xmlns:a="http://schemas.openxmlformats.org/drawingml/2006/main" xmlns:r="http://schemas.openxmlformats.org/officeDocument/2006/relationships" xmlns:p="http://schemas.openxmlformats.org/presentationml/2006/main">
   <p:cSld>
     <p:spTree>
       <p:nvGrpSpPr>
@@ -20548,7 +20983,14 @@
         <p:cNvGrpSpPr/>
         <p:nvPr/>
       </p:nvGrpSpPr>
-      <p:grpSpPr/>
+      <p:grpSpPr>
+        <a:xfrm>
+          <a:off x="0" y="0"/>
+          <a:ext cx="0" cy="0"/>
+          <a:chOff x="0" y="0"/>
+          <a:chExt cx="0" cy="0"/>
+        </a:xfrm>
+      </p:grpSpPr>
       <p:sp>
         <p:nvSpPr>
           <p:cNvPr id="2" name="TextBox 1"/>
@@ -20779,7 +21221,7 @@
 </file>
 
 <file path=ppt/slides/slide43.xml><?xml version="1.0" encoding="utf-8"?>
-<p:sld xmlns:a="http://schemas.openxmlformats.org/drawingml/2006/main" xmlns:p="http://schemas.openxmlformats.org/presentationml/2006/main" xmlns:r="http://schemas.openxmlformats.org/officeDocument/2006/relationships">
+<p:sld xmlns:a="http://schemas.openxmlformats.org/drawingml/2006/main" xmlns:r="http://schemas.openxmlformats.org/officeDocument/2006/relationships" xmlns:p="http://schemas.openxmlformats.org/presentationml/2006/main">
   <p:cSld>
     <p:spTree>
       <p:nvGrpSpPr>
@@ -20787,7 +21229,14 @@
         <p:cNvGrpSpPr/>
         <p:nvPr/>
       </p:nvGrpSpPr>
-      <p:grpSpPr/>
+      <p:grpSpPr>
+        <a:xfrm>
+          <a:off x="0" y="0"/>
+          <a:ext cx="0" cy="0"/>
+          <a:chOff x="0" y="0"/>
+          <a:chExt cx="0" cy="0"/>
+        </a:xfrm>
+      </p:grpSpPr>
       <p:sp>
         <p:nvSpPr>
           <p:cNvPr id="2" name="Rectangle 1"/>
@@ -20828,6 +21277,7 @@
           <a:lstStyle/>
           <a:p>
             <a:pPr algn="ctr"/>
+            <a:endParaRPr/>
           </a:p>
         </p:txBody>
       </p:sp>
@@ -20871,6 +21321,7 @@
           <a:lstStyle/>
           <a:p>
             <a:pPr algn="ctr"/>
+            <a:endParaRPr/>
           </a:p>
         </p:txBody>
       </p:sp>
@@ -21104,7 +21555,7 @@
 </file>
 
 <file path=ppt/slides/slide44.xml><?xml version="1.0" encoding="utf-8"?>
-<p:sld xmlns:a="http://schemas.openxmlformats.org/drawingml/2006/main" xmlns:p="http://schemas.openxmlformats.org/presentationml/2006/main" xmlns:r="http://schemas.openxmlformats.org/officeDocument/2006/relationships">
+<p:sld xmlns:a="http://schemas.openxmlformats.org/drawingml/2006/main" xmlns:r="http://schemas.openxmlformats.org/officeDocument/2006/relationships" xmlns:p="http://schemas.openxmlformats.org/presentationml/2006/main">
   <p:cSld>
     <p:spTree>
       <p:nvGrpSpPr>
@@ -21112,7 +21563,14 @@
         <p:cNvGrpSpPr/>
         <p:nvPr/>
       </p:nvGrpSpPr>
-      <p:grpSpPr/>
+      <p:grpSpPr>
+        <a:xfrm>
+          <a:off x="0" y="0"/>
+          <a:ext cx="0" cy="0"/>
+          <a:chOff x="0" y="0"/>
+          <a:chExt cx="0" cy="0"/>
+        </a:xfrm>
+      </p:grpSpPr>
       <p:sp>
         <p:nvSpPr>
           <p:cNvPr id="2" name="TextBox 1"/>
@@ -21343,7 +21801,7 @@
 </file>
 
 <file path=ppt/slides/slide45.xml><?xml version="1.0" encoding="utf-8"?>
-<p:sld xmlns:a="http://schemas.openxmlformats.org/drawingml/2006/main" xmlns:p="http://schemas.openxmlformats.org/presentationml/2006/main" xmlns:r="http://schemas.openxmlformats.org/officeDocument/2006/relationships">
+<p:sld xmlns:a="http://schemas.openxmlformats.org/drawingml/2006/main" xmlns:r="http://schemas.openxmlformats.org/officeDocument/2006/relationships" xmlns:p="http://schemas.openxmlformats.org/presentationml/2006/main">
   <p:cSld>
     <p:spTree>
       <p:nvGrpSpPr>
@@ -21351,7 +21809,14 @@
         <p:cNvGrpSpPr/>
         <p:nvPr/>
       </p:nvGrpSpPr>
-      <p:grpSpPr/>
+      <p:grpSpPr>
+        <a:xfrm>
+          <a:off x="0" y="0"/>
+          <a:ext cx="0" cy="0"/>
+          <a:chOff x="0" y="0"/>
+          <a:chExt cx="0" cy="0"/>
+        </a:xfrm>
+      </p:grpSpPr>
       <p:sp>
         <p:nvSpPr>
           <p:cNvPr id="2" name="Rectangle 1"/>
@@ -21392,6 +21857,7 @@
           <a:lstStyle/>
           <a:p>
             <a:pPr algn="ctr"/>
+            <a:endParaRPr/>
           </a:p>
         </p:txBody>
       </p:sp>
@@ -21477,7 +21943,7 @@
 </file>
 
 <file path=ppt/slides/slide46.xml><?xml version="1.0" encoding="utf-8"?>
-<p:sld xmlns:a="http://schemas.openxmlformats.org/drawingml/2006/main" xmlns:p="http://schemas.openxmlformats.org/presentationml/2006/main" xmlns:r="http://schemas.openxmlformats.org/officeDocument/2006/relationships">
+<p:sld xmlns:a="http://schemas.openxmlformats.org/drawingml/2006/main" xmlns:r="http://schemas.openxmlformats.org/officeDocument/2006/relationships" xmlns:p="http://schemas.openxmlformats.org/presentationml/2006/main">
   <p:cSld>
     <p:spTree>
       <p:nvGrpSpPr>
@@ -21485,7 +21951,14 @@
         <p:cNvGrpSpPr/>
         <p:nvPr/>
       </p:nvGrpSpPr>
-      <p:grpSpPr/>
+      <p:grpSpPr>
+        <a:xfrm>
+          <a:off x="0" y="0"/>
+          <a:ext cx="0" cy="0"/>
+          <a:chOff x="0" y="0"/>
+          <a:chExt cx="0" cy="0"/>
+        </a:xfrm>
+      </p:grpSpPr>
       <p:sp>
         <p:nvSpPr>
           <p:cNvPr id="2" name="Rectangle 1"/>
@@ -21526,6 +21999,7 @@
           <a:lstStyle/>
           <a:p>
             <a:pPr algn="ctr"/>
+            <a:endParaRPr/>
           </a:p>
         </p:txBody>
       </p:sp>
@@ -21611,7 +22085,7 @@
 </file>
 
 <file path=ppt/slides/slide47.xml><?xml version="1.0" encoding="utf-8"?>
-<p:sld xmlns:a="http://schemas.openxmlformats.org/drawingml/2006/main" xmlns:p="http://schemas.openxmlformats.org/presentationml/2006/main" xmlns:r="http://schemas.openxmlformats.org/officeDocument/2006/relationships">
+<p:sld xmlns:a="http://schemas.openxmlformats.org/drawingml/2006/main" xmlns:r="http://schemas.openxmlformats.org/officeDocument/2006/relationships" xmlns:p="http://schemas.openxmlformats.org/presentationml/2006/main">
   <p:cSld>
     <p:spTree>
       <p:nvGrpSpPr>
@@ -21619,7 +22093,14 @@
         <p:cNvGrpSpPr/>
         <p:nvPr/>
       </p:nvGrpSpPr>
-      <p:grpSpPr/>
+      <p:grpSpPr>
+        <a:xfrm>
+          <a:off x="0" y="0"/>
+          <a:ext cx="0" cy="0"/>
+          <a:chOff x="0" y="0"/>
+          <a:chExt cx="0" cy="0"/>
+        </a:xfrm>
+      </p:grpSpPr>
       <p:sp>
         <p:nvSpPr>
           <p:cNvPr id="2" name="TextBox 1"/>
@@ -21813,7 +22294,7 @@
 </file>
 
 <file path=ppt/slides/slide48.xml><?xml version="1.0" encoding="utf-8"?>
-<p:sld xmlns:a="http://schemas.openxmlformats.org/drawingml/2006/main" xmlns:p="http://schemas.openxmlformats.org/presentationml/2006/main" xmlns:r="http://schemas.openxmlformats.org/officeDocument/2006/relationships">
+<p:sld xmlns:a="http://schemas.openxmlformats.org/drawingml/2006/main" xmlns:r="http://schemas.openxmlformats.org/officeDocument/2006/relationships" xmlns:p="http://schemas.openxmlformats.org/presentationml/2006/main">
   <p:cSld>
     <p:spTree>
       <p:nvGrpSpPr>
@@ -21821,7 +22302,14 @@
         <p:cNvGrpSpPr/>
         <p:nvPr/>
       </p:nvGrpSpPr>
-      <p:grpSpPr/>
+      <p:grpSpPr>
+        <a:xfrm>
+          <a:off x="0" y="0"/>
+          <a:ext cx="0" cy="0"/>
+          <a:chOff x="0" y="0"/>
+          <a:chExt cx="0" cy="0"/>
+        </a:xfrm>
+      </p:grpSpPr>
       <p:sp>
         <p:nvSpPr>
           <p:cNvPr id="2" name="TextBox 1"/>
@@ -21904,7 +22392,7 @@
 </file>
 
 <file path=ppt/slides/slide49.xml><?xml version="1.0" encoding="utf-8"?>
-<p:sld xmlns:a="http://schemas.openxmlformats.org/drawingml/2006/main" xmlns:p="http://schemas.openxmlformats.org/presentationml/2006/main" xmlns:r="http://schemas.openxmlformats.org/officeDocument/2006/relationships">
+<p:sld xmlns:a="http://schemas.openxmlformats.org/drawingml/2006/main" xmlns:r="http://schemas.openxmlformats.org/officeDocument/2006/relationships" xmlns:p="http://schemas.openxmlformats.org/presentationml/2006/main">
   <p:cSld>
     <p:spTree>
       <p:nvGrpSpPr>
@@ -21912,7 +22400,14 @@
         <p:cNvGrpSpPr/>
         <p:nvPr/>
       </p:nvGrpSpPr>
-      <p:grpSpPr/>
+      <p:grpSpPr>
+        <a:xfrm>
+          <a:off x="0" y="0"/>
+          <a:ext cx="0" cy="0"/>
+          <a:chOff x="0" y="0"/>
+          <a:chExt cx="0" cy="0"/>
+        </a:xfrm>
+      </p:grpSpPr>
       <p:sp>
         <p:nvSpPr>
           <p:cNvPr id="2" name="TextBox 1"/>
@@ -21989,7 +22484,7 @@
           </a:fontRef>
         </p:style>
         <p:txBody>
-          <a:bodyPr rtlCol="0" anchor="ctr" wrap="square" lIns="54864" rIns="54864" tIns="27432" bIns="27432"/>
+          <a:bodyPr wrap="square" lIns="54864" tIns="27432" rIns="54864" bIns="27432" rtlCol="0" anchor="ctr"/>
           <a:lstStyle/>
           <a:p>
             <a:pPr algn="ctr"/>
@@ -22048,6 +22543,7 @@
           <a:lstStyle/>
           <a:p>
             <a:pPr algn="ctr"/>
+            <a:endParaRPr/>
           </a:p>
         </p:txBody>
       </p:sp>
@@ -22090,7 +22586,7 @@
           </a:fontRef>
         </p:style>
         <p:txBody>
-          <a:bodyPr rtlCol="0" anchor="ctr" wrap="square" lIns="54864" rIns="54864" tIns="27432" bIns="27432"/>
+          <a:bodyPr wrap="square" lIns="54864" tIns="27432" rIns="54864" bIns="27432" rtlCol="0" anchor="ctr"/>
           <a:lstStyle/>
           <a:p>
             <a:pPr algn="ctr"/>
@@ -22149,6 +22645,7 @@
           <a:lstStyle/>
           <a:p>
             <a:pPr algn="ctr"/>
+            <a:endParaRPr/>
           </a:p>
         </p:txBody>
       </p:sp>
@@ -22191,7 +22688,7 @@
           </a:fontRef>
         </p:style>
         <p:txBody>
-          <a:bodyPr rtlCol="0" anchor="ctr" wrap="square" lIns="54864" rIns="54864" tIns="27432" bIns="27432"/>
+          <a:bodyPr wrap="square" lIns="54864" tIns="27432" rIns="54864" bIns="27432" rtlCol="0" anchor="ctr"/>
           <a:lstStyle/>
           <a:p>
             <a:pPr algn="ctr"/>
@@ -22254,7 +22751,7 @@
 </file>
 
 <file path=ppt/slides/slide5.xml><?xml version="1.0" encoding="utf-8"?>
-<p:sld xmlns:a="http://schemas.openxmlformats.org/drawingml/2006/main" xmlns:p="http://schemas.openxmlformats.org/presentationml/2006/main" xmlns:r="http://schemas.openxmlformats.org/officeDocument/2006/relationships">
+<p:sld xmlns:a="http://schemas.openxmlformats.org/drawingml/2006/main" xmlns:r="http://schemas.openxmlformats.org/officeDocument/2006/relationships" xmlns:p="http://schemas.openxmlformats.org/presentationml/2006/main">
   <p:cSld>
     <p:spTree>
       <p:nvGrpSpPr>
@@ -22262,7 +22759,14 @@
         <p:cNvGrpSpPr/>
         <p:nvPr/>
       </p:nvGrpSpPr>
-      <p:grpSpPr/>
+      <p:grpSpPr>
+        <a:xfrm>
+          <a:off x="0" y="0"/>
+          <a:ext cx="0" cy="0"/>
+          <a:chOff x="0" y="0"/>
+          <a:chExt cx="0" cy="0"/>
+        </a:xfrm>
+      </p:grpSpPr>
       <p:sp>
         <p:nvSpPr>
           <p:cNvPr id="2" name="TextBox 1"/>
@@ -22345,7 +22849,7 @@
 </file>
 
 <file path=ppt/slides/slide50.xml><?xml version="1.0" encoding="utf-8"?>
-<p:sld xmlns:a="http://schemas.openxmlformats.org/drawingml/2006/main" xmlns:p="http://schemas.openxmlformats.org/presentationml/2006/main" xmlns:r="http://schemas.openxmlformats.org/officeDocument/2006/relationships">
+<p:sld xmlns:a="http://schemas.openxmlformats.org/drawingml/2006/main" xmlns:r="http://schemas.openxmlformats.org/officeDocument/2006/relationships" xmlns:p="http://schemas.openxmlformats.org/presentationml/2006/main">
   <p:cSld>
     <p:spTree>
       <p:nvGrpSpPr>
@@ -22353,7 +22857,14 @@
         <p:cNvGrpSpPr/>
         <p:nvPr/>
       </p:nvGrpSpPr>
-      <p:grpSpPr/>
+      <p:grpSpPr>
+        <a:xfrm>
+          <a:off x="0" y="0"/>
+          <a:ext cx="0" cy="0"/>
+          <a:chOff x="0" y="0"/>
+          <a:chExt cx="0" cy="0"/>
+        </a:xfrm>
+      </p:grpSpPr>
       <p:sp>
         <p:nvSpPr>
           <p:cNvPr id="2" name="TextBox 1"/>
@@ -22430,7 +22941,7 @@
           </a:fontRef>
         </p:style>
         <p:txBody>
-          <a:bodyPr rtlCol="0" anchor="ctr" wrap="square" lIns="54864" rIns="54864" tIns="27432" bIns="27432"/>
+          <a:bodyPr wrap="square" lIns="54864" tIns="27432" rIns="54864" bIns="27432" rtlCol="0" anchor="ctr"/>
           <a:lstStyle/>
           <a:p>
             <a:pPr algn="ctr"/>
@@ -22489,6 +23000,7 @@
           <a:lstStyle/>
           <a:p>
             <a:pPr algn="ctr"/>
+            <a:endParaRPr/>
           </a:p>
         </p:txBody>
       </p:sp>
@@ -22531,7 +23043,7 @@
           </a:fontRef>
         </p:style>
         <p:txBody>
-          <a:bodyPr rtlCol="0" anchor="ctr" wrap="square" lIns="54864" rIns="54864" tIns="27432" bIns="27432"/>
+          <a:bodyPr wrap="square" lIns="54864" tIns="27432" rIns="54864" bIns="27432" rtlCol="0" anchor="ctr"/>
           <a:lstStyle/>
           <a:p>
             <a:pPr algn="ctr"/>
@@ -22590,6 +23102,7 @@
           <a:lstStyle/>
           <a:p>
             <a:pPr algn="ctr"/>
+            <a:endParaRPr/>
           </a:p>
         </p:txBody>
       </p:sp>
@@ -22632,7 +23145,7 @@
           </a:fontRef>
         </p:style>
         <p:txBody>
-          <a:bodyPr rtlCol="0" anchor="ctr" wrap="square" lIns="54864" rIns="54864" tIns="27432" bIns="27432"/>
+          <a:bodyPr wrap="square" lIns="54864" tIns="27432" rIns="54864" bIns="27432" rtlCol="0" anchor="ctr"/>
           <a:lstStyle/>
           <a:p>
             <a:pPr algn="ctr"/>
@@ -22695,7 +23208,7 @@
 </file>
 
 <file path=ppt/slides/slide51.xml><?xml version="1.0" encoding="utf-8"?>
-<p:sld xmlns:a="http://schemas.openxmlformats.org/drawingml/2006/main" xmlns:p="http://schemas.openxmlformats.org/presentationml/2006/main" xmlns:r="http://schemas.openxmlformats.org/officeDocument/2006/relationships">
+<p:sld xmlns:a="http://schemas.openxmlformats.org/drawingml/2006/main" xmlns:r="http://schemas.openxmlformats.org/officeDocument/2006/relationships" xmlns:p="http://schemas.openxmlformats.org/presentationml/2006/main">
   <p:cSld>
     <p:spTree>
       <p:nvGrpSpPr>
@@ -22703,7 +23216,14 @@
         <p:cNvGrpSpPr/>
         <p:nvPr/>
       </p:nvGrpSpPr>
-      <p:grpSpPr/>
+      <p:grpSpPr>
+        <a:xfrm>
+          <a:off x="0" y="0"/>
+          <a:ext cx="0" cy="0"/>
+          <a:chOff x="0" y="0"/>
+          <a:chExt cx="0" cy="0"/>
+        </a:xfrm>
+      </p:grpSpPr>
       <p:sp>
         <p:nvSpPr>
           <p:cNvPr id="2" name="TextBox 1"/>
@@ -22760,9 +23280,27 @@
                 <a:tableStyleId>{5C22544A-7EE6-4342-B048-85BDC9FD1C3A}</a:tableStyleId>
               </a:tblPr>
               <a:tblGrid>
-                <a:gridCol w="3515258"/>
-                <a:gridCol w="3515258"/>
-                <a:gridCol w="3515259"/>
+                <a:gridCol w="3515258">
+                  <a:extLst>
+                    <a:ext uri="{9D8B030D-6E8A-4147-A177-3AD203B41FA5}">
+                      <a16:colId xmlns:a16="http://schemas.microsoft.com/office/drawing/2014/main" val="20000"/>
+                    </a:ext>
+                  </a:extLst>
+                </a:gridCol>
+                <a:gridCol w="3515258">
+                  <a:extLst>
+                    <a:ext uri="{9D8B030D-6E8A-4147-A177-3AD203B41FA5}">
+                      <a16:colId xmlns:a16="http://schemas.microsoft.com/office/drawing/2014/main" val="20001"/>
+                    </a:ext>
+                  </a:extLst>
+                </a:gridCol>
+                <a:gridCol w="3515259">
+                  <a:extLst>
+                    <a:ext uri="{9D8B030D-6E8A-4147-A177-3AD203B41FA5}">
+                      <a16:colId xmlns:a16="http://schemas.microsoft.com/office/drawing/2014/main" val="20002"/>
+                    </a:ext>
+                  </a:extLst>
+                </a:gridCol>
               </a:tblGrid>
               <a:tr h="502920">
                 <a:tc>
@@ -22784,7 +23322,7 @@
                       </a:r>
                     </a:p>
                   </a:txBody>
-                  <a:tcPr marL="91440" marR="91440" marT="27432" marB="27432" anchor="ctr">
+                  <a:tcPr marT="27432" marB="27432" anchor="ctr">
                     <a:solidFill>
                       <a:srgbClr val="1F5FA8"/>
                     </a:solidFill>
@@ -22809,7 +23347,7 @@
                       </a:r>
                     </a:p>
                   </a:txBody>
-                  <a:tcPr marL="91440" marR="91440" marT="27432" marB="27432" anchor="ctr">
+                  <a:tcPr marT="27432" marB="27432" anchor="ctr">
                     <a:solidFill>
                       <a:srgbClr val="1F5FA8"/>
                     </a:solidFill>
@@ -22834,12 +23372,17 @@
                       </a:r>
                     </a:p>
                   </a:txBody>
-                  <a:tcPr marL="91440" marR="91440" marT="27432" marB="27432" anchor="ctr">
+                  <a:tcPr marT="27432" marB="27432" anchor="ctr">
                     <a:solidFill>
                       <a:srgbClr val="1F5FA8"/>
                     </a:solidFill>
                   </a:tcPr>
                 </a:tc>
+                <a:extLst>
+                  <a:ext uri="{0D108BD9-81ED-4DB2-BD59-A6C34878D82A}">
+                    <a16:rowId xmlns:a16="http://schemas.microsoft.com/office/drawing/2014/main" val="10000"/>
+                  </a:ext>
+                </a:extLst>
               </a:tr>
               <a:tr h="502920">
                 <a:tc>
@@ -22861,7 +23404,7 @@
                       </a:r>
                     </a:p>
                   </a:txBody>
-                  <a:tcPr marL="91440" marR="91440" marT="27432" marB="27432" anchor="ctr">
+                  <a:tcPr marT="27432" marB="27432" anchor="ctr">
                     <a:solidFill>
                       <a:srgbClr val="FFFFFF"/>
                     </a:solidFill>
@@ -22886,7 +23429,7 @@
                       </a:r>
                     </a:p>
                   </a:txBody>
-                  <a:tcPr marL="91440" marR="91440" marT="27432" marB="27432" anchor="ctr">
+                  <a:tcPr marT="27432" marB="27432" anchor="ctr">
                     <a:solidFill>
                       <a:srgbClr val="FFFFFF"/>
                     </a:solidFill>
@@ -22911,12 +23454,17 @@
                       </a:r>
                     </a:p>
                   </a:txBody>
-                  <a:tcPr marL="91440" marR="91440" marT="27432" marB="27432" anchor="ctr">
+                  <a:tcPr marT="27432" marB="27432" anchor="ctr">
                     <a:solidFill>
                       <a:srgbClr val="FFFFFF"/>
                     </a:solidFill>
                   </a:tcPr>
                 </a:tc>
+                <a:extLst>
+                  <a:ext uri="{0D108BD9-81ED-4DB2-BD59-A6C34878D82A}">
+                    <a16:rowId xmlns:a16="http://schemas.microsoft.com/office/drawing/2014/main" val="10001"/>
+                  </a:ext>
+                </a:extLst>
               </a:tr>
               <a:tr h="502920">
                 <a:tc>
@@ -22938,7 +23486,7 @@
                       </a:r>
                     </a:p>
                   </a:txBody>
-                  <a:tcPr marL="91440" marR="91440" marT="27432" marB="27432" anchor="ctr">
+                  <a:tcPr marT="27432" marB="27432" anchor="ctr">
                     <a:solidFill>
                       <a:srgbClr val="F2F4F7"/>
                     </a:solidFill>
@@ -22963,7 +23511,7 @@
                       </a:r>
                     </a:p>
                   </a:txBody>
-                  <a:tcPr marL="91440" marR="91440" marT="27432" marB="27432" anchor="ctr">
+                  <a:tcPr marT="27432" marB="27432" anchor="ctr">
                     <a:solidFill>
                       <a:srgbClr val="F2F4F7"/>
                     </a:solidFill>
@@ -22988,12 +23536,17 @@
                       </a:r>
                     </a:p>
                   </a:txBody>
-                  <a:tcPr marL="91440" marR="91440" marT="27432" marB="27432" anchor="ctr">
+                  <a:tcPr marT="27432" marB="27432" anchor="ctr">
                     <a:solidFill>
                       <a:srgbClr val="F2F4F7"/>
                     </a:solidFill>
                   </a:tcPr>
                 </a:tc>
+                <a:extLst>
+                  <a:ext uri="{0D108BD9-81ED-4DB2-BD59-A6C34878D82A}">
+                    <a16:rowId xmlns:a16="http://schemas.microsoft.com/office/drawing/2014/main" val="10002"/>
+                  </a:ext>
+                </a:extLst>
               </a:tr>
               <a:tr h="502920">
                 <a:tc>
@@ -23015,7 +23568,7 @@
                       </a:r>
                     </a:p>
                   </a:txBody>
-                  <a:tcPr marL="91440" marR="91440" marT="27432" marB="27432" anchor="ctr">
+                  <a:tcPr marT="27432" marB="27432" anchor="ctr">
                     <a:solidFill>
                       <a:srgbClr val="FFFFFF"/>
                     </a:solidFill>
@@ -23040,7 +23593,7 @@
                       </a:r>
                     </a:p>
                   </a:txBody>
-                  <a:tcPr marL="91440" marR="91440" marT="27432" marB="27432" anchor="ctr">
+                  <a:tcPr marT="27432" marB="27432" anchor="ctr">
                     <a:solidFill>
                       <a:srgbClr val="FFFFFF"/>
                     </a:solidFill>
@@ -23065,12 +23618,17 @@
                       </a:r>
                     </a:p>
                   </a:txBody>
-                  <a:tcPr marL="91440" marR="91440" marT="27432" marB="27432" anchor="ctr">
+                  <a:tcPr marT="27432" marB="27432" anchor="ctr">
                     <a:solidFill>
                       <a:srgbClr val="FFFFFF"/>
                     </a:solidFill>
                   </a:tcPr>
                 </a:tc>
+                <a:extLst>
+                  <a:ext uri="{0D108BD9-81ED-4DB2-BD59-A6C34878D82A}">
+                    <a16:rowId xmlns:a16="http://schemas.microsoft.com/office/drawing/2014/main" val="10003"/>
+                  </a:ext>
+                </a:extLst>
               </a:tr>
             </a:tbl>
           </a:graphicData>
@@ -23121,7 +23679,7 @@
 </file>
 
 <file path=ppt/slides/slide52.xml><?xml version="1.0" encoding="utf-8"?>
-<p:sld xmlns:a="http://schemas.openxmlformats.org/drawingml/2006/main" xmlns:p="http://schemas.openxmlformats.org/presentationml/2006/main" xmlns:r="http://schemas.openxmlformats.org/officeDocument/2006/relationships">
+<p:sld xmlns:a="http://schemas.openxmlformats.org/drawingml/2006/main" xmlns:r="http://schemas.openxmlformats.org/officeDocument/2006/relationships" xmlns:p="http://schemas.openxmlformats.org/presentationml/2006/main">
   <p:cSld>
     <p:spTree>
       <p:nvGrpSpPr>
@@ -23129,7 +23687,14 @@
         <p:cNvGrpSpPr/>
         <p:nvPr/>
       </p:nvGrpSpPr>
-      <p:grpSpPr/>
+      <p:grpSpPr>
+        <a:xfrm>
+          <a:off x="0" y="0"/>
+          <a:ext cx="0" cy="0"/>
+          <a:chOff x="0" y="0"/>
+          <a:chExt cx="0" cy="0"/>
+        </a:xfrm>
+      </p:grpSpPr>
       <p:sp>
         <p:nvSpPr>
           <p:cNvPr id="2" name="TextBox 1"/>
@@ -23186,9 +23751,27 @@
                 <a:tableStyleId>{5C22544A-7EE6-4342-B048-85BDC9FD1C3A}</a:tableStyleId>
               </a:tblPr>
               <a:tblGrid>
-                <a:gridCol w="3515258"/>
-                <a:gridCol w="3515258"/>
-                <a:gridCol w="3515259"/>
+                <a:gridCol w="3515258">
+                  <a:extLst>
+                    <a:ext uri="{9D8B030D-6E8A-4147-A177-3AD203B41FA5}">
+                      <a16:colId xmlns:a16="http://schemas.microsoft.com/office/drawing/2014/main" val="20000"/>
+                    </a:ext>
+                  </a:extLst>
+                </a:gridCol>
+                <a:gridCol w="3515258">
+                  <a:extLst>
+                    <a:ext uri="{9D8B030D-6E8A-4147-A177-3AD203B41FA5}">
+                      <a16:colId xmlns:a16="http://schemas.microsoft.com/office/drawing/2014/main" val="20001"/>
+                    </a:ext>
+                  </a:extLst>
+                </a:gridCol>
+                <a:gridCol w="3515259">
+                  <a:extLst>
+                    <a:ext uri="{9D8B030D-6E8A-4147-A177-3AD203B41FA5}">
+                      <a16:colId xmlns:a16="http://schemas.microsoft.com/office/drawing/2014/main" val="20002"/>
+                    </a:ext>
+                  </a:extLst>
+                </a:gridCol>
               </a:tblGrid>
               <a:tr h="502920">
                 <a:tc>
@@ -23210,7 +23793,7 @@
                       </a:r>
                     </a:p>
                   </a:txBody>
-                  <a:tcPr marL="91440" marR="91440" marT="27432" marB="27432" anchor="ctr">
+                  <a:tcPr marT="27432" marB="27432" anchor="ctr">
                     <a:solidFill>
                       <a:srgbClr val="1F5FA8"/>
                     </a:solidFill>
@@ -23235,7 +23818,7 @@
                       </a:r>
                     </a:p>
                   </a:txBody>
-                  <a:tcPr marL="91440" marR="91440" marT="27432" marB="27432" anchor="ctr">
+                  <a:tcPr marT="27432" marB="27432" anchor="ctr">
                     <a:solidFill>
                       <a:srgbClr val="1F5FA8"/>
                     </a:solidFill>
@@ -23260,12 +23843,17 @@
                       </a:r>
                     </a:p>
                   </a:txBody>
-                  <a:tcPr marL="91440" marR="91440" marT="27432" marB="27432" anchor="ctr">
+                  <a:tcPr marT="27432" marB="27432" anchor="ctr">
                     <a:solidFill>
                       <a:srgbClr val="1F5FA8"/>
                     </a:solidFill>
                   </a:tcPr>
                 </a:tc>
+                <a:extLst>
+                  <a:ext uri="{0D108BD9-81ED-4DB2-BD59-A6C34878D82A}">
+                    <a16:rowId xmlns:a16="http://schemas.microsoft.com/office/drawing/2014/main" val="10000"/>
+                  </a:ext>
+                </a:extLst>
               </a:tr>
               <a:tr h="502920">
                 <a:tc>
@@ -23287,7 +23875,7 @@
                       </a:r>
                     </a:p>
                   </a:txBody>
-                  <a:tcPr marL="91440" marR="91440" marT="27432" marB="27432" anchor="ctr">
+                  <a:tcPr marT="27432" marB="27432" anchor="ctr">
                     <a:solidFill>
                       <a:srgbClr val="FFFFFF"/>
                     </a:solidFill>
@@ -23312,7 +23900,7 @@
                       </a:r>
                     </a:p>
                   </a:txBody>
-                  <a:tcPr marL="91440" marR="91440" marT="27432" marB="27432" anchor="ctr">
+                  <a:tcPr marT="27432" marB="27432" anchor="ctr">
                     <a:solidFill>
                       <a:srgbClr val="FFFFFF"/>
                     </a:solidFill>
@@ -23337,12 +23925,17 @@
                       </a:r>
                     </a:p>
                   </a:txBody>
-                  <a:tcPr marL="91440" marR="91440" marT="27432" marB="27432" anchor="ctr">
+                  <a:tcPr marT="27432" marB="27432" anchor="ctr">
                     <a:solidFill>
                       <a:srgbClr val="FFFFFF"/>
                     </a:solidFill>
                   </a:tcPr>
                 </a:tc>
+                <a:extLst>
+                  <a:ext uri="{0D108BD9-81ED-4DB2-BD59-A6C34878D82A}">
+                    <a16:rowId xmlns:a16="http://schemas.microsoft.com/office/drawing/2014/main" val="10001"/>
+                  </a:ext>
+                </a:extLst>
               </a:tr>
               <a:tr h="502920">
                 <a:tc>
@@ -23364,7 +23957,7 @@
                       </a:r>
                     </a:p>
                   </a:txBody>
-                  <a:tcPr marL="91440" marR="91440" marT="27432" marB="27432" anchor="ctr">
+                  <a:tcPr marT="27432" marB="27432" anchor="ctr">
                     <a:solidFill>
                       <a:srgbClr val="F2F4F7"/>
                     </a:solidFill>
@@ -23389,7 +23982,7 @@
                       </a:r>
                     </a:p>
                   </a:txBody>
-                  <a:tcPr marL="91440" marR="91440" marT="27432" marB="27432" anchor="ctr">
+                  <a:tcPr marT="27432" marB="27432" anchor="ctr">
                     <a:solidFill>
                       <a:srgbClr val="F2F4F7"/>
                     </a:solidFill>
@@ -23414,12 +24007,17 @@
                       </a:r>
                     </a:p>
                   </a:txBody>
-                  <a:tcPr marL="91440" marR="91440" marT="27432" marB="27432" anchor="ctr">
+                  <a:tcPr marT="27432" marB="27432" anchor="ctr">
                     <a:solidFill>
                       <a:srgbClr val="F2F4F7"/>
                     </a:solidFill>
                   </a:tcPr>
                 </a:tc>
+                <a:extLst>
+                  <a:ext uri="{0D108BD9-81ED-4DB2-BD59-A6C34878D82A}">
+                    <a16:rowId xmlns:a16="http://schemas.microsoft.com/office/drawing/2014/main" val="10002"/>
+                  </a:ext>
+                </a:extLst>
               </a:tr>
               <a:tr h="502920">
                 <a:tc>
@@ -23441,7 +24039,7 @@
                       </a:r>
                     </a:p>
                   </a:txBody>
-                  <a:tcPr marL="91440" marR="91440" marT="27432" marB="27432" anchor="ctr">
+                  <a:tcPr marT="27432" marB="27432" anchor="ctr">
                     <a:solidFill>
                       <a:srgbClr val="FFFFFF"/>
                     </a:solidFill>
@@ -23466,7 +24064,7 @@
                       </a:r>
                     </a:p>
                   </a:txBody>
-                  <a:tcPr marL="91440" marR="91440" marT="27432" marB="27432" anchor="ctr">
+                  <a:tcPr marT="27432" marB="27432" anchor="ctr">
                     <a:solidFill>
                       <a:srgbClr val="FFFFFF"/>
                     </a:solidFill>
@@ -23491,12 +24089,17 @@
                       </a:r>
                     </a:p>
                   </a:txBody>
-                  <a:tcPr marL="91440" marR="91440" marT="27432" marB="27432" anchor="ctr">
+                  <a:tcPr marT="27432" marB="27432" anchor="ctr">
                     <a:solidFill>
                       <a:srgbClr val="FFFFFF"/>
                     </a:solidFill>
                   </a:tcPr>
                 </a:tc>
+                <a:extLst>
+                  <a:ext uri="{0D108BD9-81ED-4DB2-BD59-A6C34878D82A}">
+                    <a16:rowId xmlns:a16="http://schemas.microsoft.com/office/drawing/2014/main" val="10003"/>
+                  </a:ext>
+                </a:extLst>
               </a:tr>
             </a:tbl>
           </a:graphicData>
@@ -23547,7 +24150,7 @@
 </file>
 
 <file path=ppt/slides/slide53.xml><?xml version="1.0" encoding="utf-8"?>
-<p:sld xmlns:a="http://schemas.openxmlformats.org/drawingml/2006/main" xmlns:p="http://schemas.openxmlformats.org/presentationml/2006/main" xmlns:r="http://schemas.openxmlformats.org/officeDocument/2006/relationships">
+<p:sld xmlns:a="http://schemas.openxmlformats.org/drawingml/2006/main" xmlns:r="http://schemas.openxmlformats.org/officeDocument/2006/relationships" xmlns:p="http://schemas.openxmlformats.org/presentationml/2006/main">
   <p:cSld>
     <p:spTree>
       <p:nvGrpSpPr>
@@ -23555,7 +24158,14 @@
         <p:cNvGrpSpPr/>
         <p:nvPr/>
       </p:nvGrpSpPr>
-      <p:grpSpPr/>
+      <p:grpSpPr>
+        <a:xfrm>
+          <a:off x="0" y="0"/>
+          <a:ext cx="0" cy="0"/>
+          <a:chOff x="0" y="0"/>
+          <a:chExt cx="0" cy="0"/>
+        </a:xfrm>
+      </p:grpSpPr>
       <p:sp>
         <p:nvSpPr>
           <p:cNvPr id="2" name="TextBox 1"/>
@@ -23629,7 +24239,7 @@
           </a:fontRef>
         </p:style>
         <p:txBody>
-          <a:bodyPr rtlCol="0" anchor="ctr" wrap="none" lIns="228600" tIns="137160"/>
+          <a:bodyPr wrap="none" lIns="228600" tIns="137160" rtlCol="0" anchor="ctr"/>
           <a:lstStyle/>
           <a:p>
             <a:pPr algn="l"/>
@@ -23790,7 +24400,7 @@
 </file>
 
 <file path=ppt/slides/slide54.xml><?xml version="1.0" encoding="utf-8"?>
-<p:sld xmlns:a="http://schemas.openxmlformats.org/drawingml/2006/main" xmlns:p="http://schemas.openxmlformats.org/presentationml/2006/main" xmlns:r="http://schemas.openxmlformats.org/officeDocument/2006/relationships">
+<p:sld xmlns:a="http://schemas.openxmlformats.org/drawingml/2006/main" xmlns:r="http://schemas.openxmlformats.org/officeDocument/2006/relationships" xmlns:p="http://schemas.openxmlformats.org/presentationml/2006/main">
   <p:cSld>
     <p:spTree>
       <p:nvGrpSpPr>
@@ -23798,7 +24408,14 @@
         <p:cNvGrpSpPr/>
         <p:nvPr/>
       </p:nvGrpSpPr>
-      <p:grpSpPr/>
+      <p:grpSpPr>
+        <a:xfrm>
+          <a:off x="0" y="0"/>
+          <a:ext cx="0" cy="0"/>
+          <a:chOff x="0" y="0"/>
+          <a:chExt cx="0" cy="0"/>
+        </a:xfrm>
+      </p:grpSpPr>
       <p:sp>
         <p:nvSpPr>
           <p:cNvPr id="2" name="TextBox 1"/>
@@ -23881,7 +24498,7 @@
 </file>
 
 <file path=ppt/slides/slide55.xml><?xml version="1.0" encoding="utf-8"?>
-<p:sld xmlns:a="http://schemas.openxmlformats.org/drawingml/2006/main" xmlns:p="http://schemas.openxmlformats.org/presentationml/2006/main" xmlns:r="http://schemas.openxmlformats.org/officeDocument/2006/relationships">
+<p:sld xmlns:a="http://schemas.openxmlformats.org/drawingml/2006/main" xmlns:r="http://schemas.openxmlformats.org/officeDocument/2006/relationships" xmlns:p="http://schemas.openxmlformats.org/presentationml/2006/main">
   <p:cSld>
     <p:spTree>
       <p:nvGrpSpPr>
@@ -23889,7 +24506,14 @@
         <p:cNvGrpSpPr/>
         <p:nvPr/>
       </p:nvGrpSpPr>
-      <p:grpSpPr/>
+      <p:grpSpPr>
+        <a:xfrm>
+          <a:off x="0" y="0"/>
+          <a:ext cx="0" cy="0"/>
+          <a:chOff x="0" y="0"/>
+          <a:chExt cx="0" cy="0"/>
+        </a:xfrm>
+      </p:grpSpPr>
       <p:sp>
         <p:nvSpPr>
           <p:cNvPr id="2" name="TextBox 1"/>
@@ -24120,7 +24744,7 @@
 </file>
 
 <file path=ppt/slides/slide56.xml><?xml version="1.0" encoding="utf-8"?>
-<p:sld xmlns:a="http://schemas.openxmlformats.org/drawingml/2006/main" xmlns:p="http://schemas.openxmlformats.org/presentationml/2006/main" xmlns:r="http://schemas.openxmlformats.org/officeDocument/2006/relationships">
+<p:sld xmlns:a="http://schemas.openxmlformats.org/drawingml/2006/main" xmlns:r="http://schemas.openxmlformats.org/officeDocument/2006/relationships" xmlns:p="http://schemas.openxmlformats.org/presentationml/2006/main">
   <p:cSld>
     <p:spTree>
       <p:nvGrpSpPr>
@@ -24128,7 +24752,14 @@
         <p:cNvGrpSpPr/>
         <p:nvPr/>
       </p:nvGrpSpPr>
-      <p:grpSpPr/>
+      <p:grpSpPr>
+        <a:xfrm>
+          <a:off x="0" y="0"/>
+          <a:ext cx="0" cy="0"/>
+          <a:chOff x="0" y="0"/>
+          <a:chExt cx="0" cy="0"/>
+        </a:xfrm>
+      </p:grpSpPr>
       <p:sp>
         <p:nvSpPr>
           <p:cNvPr id="2" name="TextBox 1"/>
@@ -24207,7 +24838,9 @@
         <p:txBody>
           <a:bodyPr rtlCol="0" anchor="ctr"/>
           <a:lstStyle/>
-          <a:p/>
+          <a:p>
+            <a:endParaRPr/>
+          </a:p>
         </p:txBody>
       </p:sp>
       <p:sp>
@@ -24286,7 +24919,7 @@
           </a:fontRef>
         </p:style>
         <p:txBody>
-          <a:bodyPr rtlCol="0" anchor="ctr" wrap="square" lIns="54864" rIns="54864" tIns="27432" bIns="27432"/>
+          <a:bodyPr wrap="square" lIns="54864" tIns="27432" rIns="54864" bIns="27432" rtlCol="0" anchor="ctr"/>
           <a:lstStyle/>
           <a:p>
             <a:pPr algn="ctr"/>
@@ -24345,6 +24978,7 @@
           <a:lstStyle/>
           <a:p>
             <a:pPr algn="ctr"/>
+            <a:endParaRPr/>
           </a:p>
         </p:txBody>
       </p:sp>
@@ -24387,7 +25021,7 @@
           </a:fontRef>
         </p:style>
         <p:txBody>
-          <a:bodyPr rtlCol="0" anchor="ctr" wrap="square" lIns="54864" rIns="54864" tIns="27432" bIns="27432"/>
+          <a:bodyPr wrap="square" lIns="54864" tIns="27432" rIns="54864" bIns="27432" rtlCol="0" anchor="ctr"/>
           <a:lstStyle/>
           <a:p>
             <a:pPr algn="ctr"/>
@@ -24446,6 +25080,7 @@
           <a:lstStyle/>
           <a:p>
             <a:pPr algn="ctr"/>
+            <a:endParaRPr/>
           </a:p>
         </p:txBody>
       </p:sp>
@@ -24488,7 +25123,7 @@
           </a:fontRef>
         </p:style>
         <p:txBody>
-          <a:bodyPr rtlCol="0" anchor="ctr" wrap="square" lIns="54864" rIns="54864" tIns="27432" bIns="27432"/>
+          <a:bodyPr wrap="square" lIns="54864" tIns="27432" rIns="54864" bIns="27432" rtlCol="0" anchor="ctr"/>
           <a:lstStyle/>
           <a:p>
             <a:pPr algn="ctr"/>
@@ -24547,7 +25182,9 @@
         <p:txBody>
           <a:bodyPr rtlCol="0" anchor="ctr"/>
           <a:lstStyle/>
-          <a:p/>
+          <a:p>
+            <a:endParaRPr/>
+          </a:p>
         </p:txBody>
       </p:sp>
       <p:sp>
@@ -24626,7 +25263,7 @@
           </a:fontRef>
         </p:style>
         <p:txBody>
-          <a:bodyPr rtlCol="0" anchor="ctr" wrap="square" lIns="54864" rIns="54864" tIns="27432" bIns="27432"/>
+          <a:bodyPr wrap="square" lIns="54864" tIns="27432" rIns="54864" bIns="27432" rtlCol="0" anchor="ctr"/>
           <a:lstStyle/>
           <a:p>
             <a:pPr algn="ctr"/>
@@ -24685,6 +25322,7 @@
           <a:lstStyle/>
           <a:p>
             <a:pPr algn="ctr"/>
+            <a:endParaRPr/>
           </a:p>
         </p:txBody>
       </p:sp>
@@ -24727,7 +25365,7 @@
           </a:fontRef>
         </p:style>
         <p:txBody>
-          <a:bodyPr rtlCol="0" anchor="ctr" wrap="square" lIns="54864" rIns="54864" tIns="27432" bIns="27432"/>
+          <a:bodyPr wrap="square" lIns="54864" tIns="27432" rIns="54864" bIns="27432" rtlCol="0" anchor="ctr"/>
           <a:lstStyle/>
           <a:p>
             <a:pPr algn="ctr"/>
@@ -24786,6 +25424,7 @@
           <a:lstStyle/>
           <a:p>
             <a:pPr algn="ctr"/>
+            <a:endParaRPr/>
           </a:p>
         </p:txBody>
       </p:sp>
@@ -24828,7 +25467,7 @@
           </a:fontRef>
         </p:style>
         <p:txBody>
-          <a:bodyPr rtlCol="0" anchor="ctr" wrap="square" lIns="54864" rIns="54864" tIns="27432" bIns="27432"/>
+          <a:bodyPr wrap="square" lIns="54864" tIns="27432" rIns="54864" bIns="27432" rtlCol="0" anchor="ctr"/>
           <a:lstStyle/>
           <a:p>
             <a:pPr algn="ctr"/>
@@ -24891,7 +25530,7 @@
 </file>
 
 <file path=ppt/slides/slide57.xml><?xml version="1.0" encoding="utf-8"?>
-<p:sld xmlns:a="http://schemas.openxmlformats.org/drawingml/2006/main" xmlns:p="http://schemas.openxmlformats.org/presentationml/2006/main" xmlns:r="http://schemas.openxmlformats.org/officeDocument/2006/relationships">
+<p:sld xmlns:a="http://schemas.openxmlformats.org/drawingml/2006/main" xmlns:r="http://schemas.openxmlformats.org/officeDocument/2006/relationships" xmlns:p="http://schemas.openxmlformats.org/presentationml/2006/main">
   <p:cSld>
     <p:spTree>
       <p:nvGrpSpPr>
@@ -24899,7 +25538,14 @@
         <p:cNvGrpSpPr/>
         <p:nvPr/>
       </p:nvGrpSpPr>
-      <p:grpSpPr/>
+      <p:grpSpPr>
+        <a:xfrm>
+          <a:off x="0" y="0"/>
+          <a:ext cx="0" cy="0"/>
+          <a:chOff x="0" y="0"/>
+          <a:chExt cx="0" cy="0"/>
+        </a:xfrm>
+      </p:grpSpPr>
       <p:sp>
         <p:nvSpPr>
           <p:cNvPr id="2" name="TextBox 1"/>
@@ -25130,7 +25776,7 @@
 </file>
 
 <file path=ppt/slides/slide58.xml><?xml version="1.0" encoding="utf-8"?>
-<p:sld xmlns:a="http://schemas.openxmlformats.org/drawingml/2006/main" xmlns:p="http://schemas.openxmlformats.org/presentationml/2006/main" xmlns:r="http://schemas.openxmlformats.org/officeDocument/2006/relationships">
+<p:sld xmlns:a="http://schemas.openxmlformats.org/drawingml/2006/main" xmlns:r="http://schemas.openxmlformats.org/officeDocument/2006/relationships" xmlns:p="http://schemas.openxmlformats.org/presentationml/2006/main">
   <p:cSld>
     <p:spTree>
       <p:nvGrpSpPr>
@@ -25138,7 +25784,14 @@
         <p:cNvGrpSpPr/>
         <p:nvPr/>
       </p:nvGrpSpPr>
-      <p:grpSpPr/>
+      <p:grpSpPr>
+        <a:xfrm>
+          <a:off x="0" y="0"/>
+          <a:ext cx="0" cy="0"/>
+          <a:chOff x="0" y="0"/>
+          <a:chExt cx="0" cy="0"/>
+        </a:xfrm>
+      </p:grpSpPr>
       <p:sp>
         <p:nvSpPr>
           <p:cNvPr id="2" name="TextBox 1"/>
@@ -25369,7 +26022,7 @@
 </file>
 
 <file path=ppt/slides/slide59.xml><?xml version="1.0" encoding="utf-8"?>
-<p:sld xmlns:a="http://schemas.openxmlformats.org/drawingml/2006/main" xmlns:p="http://schemas.openxmlformats.org/presentationml/2006/main" xmlns:r="http://schemas.openxmlformats.org/officeDocument/2006/relationships">
+<p:sld xmlns:a="http://schemas.openxmlformats.org/drawingml/2006/main" xmlns:r="http://schemas.openxmlformats.org/officeDocument/2006/relationships" xmlns:p="http://schemas.openxmlformats.org/presentationml/2006/main">
   <p:cSld>
     <p:spTree>
       <p:nvGrpSpPr>
@@ -25377,7 +26030,14 @@
         <p:cNvGrpSpPr/>
         <p:nvPr/>
       </p:nvGrpSpPr>
-      <p:grpSpPr/>
+      <p:grpSpPr>
+        <a:xfrm>
+          <a:off x="0" y="0"/>
+          <a:ext cx="0" cy="0"/>
+          <a:chOff x="0" y="0"/>
+          <a:chExt cx="0" cy="0"/>
+        </a:xfrm>
+      </p:grpSpPr>
       <p:sp>
         <p:nvSpPr>
           <p:cNvPr id="2" name="Rectangle 1"/>
@@ -25418,6 +26078,7 @@
           <a:lstStyle/>
           <a:p>
             <a:pPr algn="ctr"/>
+            <a:endParaRPr/>
           </a:p>
         </p:txBody>
       </p:sp>
@@ -25461,6 +26122,7 @@
           <a:lstStyle/>
           <a:p>
             <a:pPr algn="ctr"/>
+            <a:endParaRPr/>
           </a:p>
         </p:txBody>
       </p:sp>
@@ -25694,7 +26356,7 @@
 </file>
 
 <file path=ppt/slides/slide6.xml><?xml version="1.0" encoding="utf-8"?>
-<p:sld xmlns:a="http://schemas.openxmlformats.org/drawingml/2006/main" xmlns:p="http://schemas.openxmlformats.org/presentationml/2006/main" xmlns:r="http://schemas.openxmlformats.org/officeDocument/2006/relationships">
+<p:sld xmlns:a="http://schemas.openxmlformats.org/drawingml/2006/main" xmlns:r="http://schemas.openxmlformats.org/officeDocument/2006/relationships" xmlns:p="http://schemas.openxmlformats.org/presentationml/2006/main">
   <p:cSld>
     <p:spTree>
       <p:nvGrpSpPr>
@@ -25702,7 +26364,14 @@
         <p:cNvGrpSpPr/>
         <p:nvPr/>
       </p:nvGrpSpPr>
-      <p:grpSpPr/>
+      <p:grpSpPr>
+        <a:xfrm>
+          <a:off x="0" y="0"/>
+          <a:ext cx="0" cy="0"/>
+          <a:chOff x="0" y="0"/>
+          <a:chExt cx="0" cy="0"/>
+        </a:xfrm>
+      </p:grpSpPr>
       <p:sp>
         <p:nvSpPr>
           <p:cNvPr id="2" name="TextBox 1"/>
@@ -25933,7 +26602,7 @@
 </file>
 
 <file path=ppt/slides/slide60.xml><?xml version="1.0" encoding="utf-8"?>
-<p:sld xmlns:a="http://schemas.openxmlformats.org/drawingml/2006/main" xmlns:p="http://schemas.openxmlformats.org/presentationml/2006/main" xmlns:r="http://schemas.openxmlformats.org/officeDocument/2006/relationships">
+<p:sld xmlns:a="http://schemas.openxmlformats.org/drawingml/2006/main" xmlns:r="http://schemas.openxmlformats.org/officeDocument/2006/relationships" xmlns:p="http://schemas.openxmlformats.org/presentationml/2006/main">
   <p:cSld>
     <p:spTree>
       <p:nvGrpSpPr>
@@ -25941,7 +26610,14 @@
         <p:cNvGrpSpPr/>
         <p:nvPr/>
       </p:nvGrpSpPr>
-      <p:grpSpPr/>
+      <p:grpSpPr>
+        <a:xfrm>
+          <a:off x="0" y="0"/>
+          <a:ext cx="0" cy="0"/>
+          <a:chOff x="0" y="0"/>
+          <a:chExt cx="0" cy="0"/>
+        </a:xfrm>
+      </p:grpSpPr>
       <p:sp>
         <p:nvSpPr>
           <p:cNvPr id="2" name="TextBox 1"/>
@@ -26015,7 +26691,7 @@
           </a:fontRef>
         </p:style>
         <p:txBody>
-          <a:bodyPr rtlCol="0" anchor="ctr" wrap="none" lIns="228600" tIns="137160"/>
+          <a:bodyPr wrap="none" lIns="228600" tIns="137160" rtlCol="0" anchor="ctr"/>
           <a:lstStyle/>
           <a:p>
             <a:pPr algn="l"/>
@@ -26162,7 +26838,7 @@
 </file>
 
 <file path=ppt/slides/slide61.xml><?xml version="1.0" encoding="utf-8"?>
-<p:sld xmlns:a="http://schemas.openxmlformats.org/drawingml/2006/main" xmlns:p="http://schemas.openxmlformats.org/presentationml/2006/main" xmlns:r="http://schemas.openxmlformats.org/officeDocument/2006/relationships">
+<p:sld xmlns:a="http://schemas.openxmlformats.org/drawingml/2006/main" xmlns:r="http://schemas.openxmlformats.org/officeDocument/2006/relationships" xmlns:p="http://schemas.openxmlformats.org/presentationml/2006/main">
   <p:cSld>
     <p:spTree>
       <p:nvGrpSpPr>
@@ -26170,7 +26846,14 @@
         <p:cNvGrpSpPr/>
         <p:nvPr/>
       </p:nvGrpSpPr>
-      <p:grpSpPr/>
+      <p:grpSpPr>
+        <a:xfrm>
+          <a:off x="0" y="0"/>
+          <a:ext cx="0" cy="0"/>
+          <a:chOff x="0" y="0"/>
+          <a:chExt cx="0" cy="0"/>
+        </a:xfrm>
+      </p:grpSpPr>
       <p:sp>
         <p:nvSpPr>
           <p:cNvPr id="2" name="TextBox 1"/>
@@ -26401,7 +27084,7 @@
 </file>
 
 <file path=ppt/slides/slide62.xml><?xml version="1.0" encoding="utf-8"?>
-<p:sld xmlns:a="http://schemas.openxmlformats.org/drawingml/2006/main" xmlns:p="http://schemas.openxmlformats.org/presentationml/2006/main" xmlns:r="http://schemas.openxmlformats.org/officeDocument/2006/relationships">
+<p:sld xmlns:a="http://schemas.openxmlformats.org/drawingml/2006/main" xmlns:r="http://schemas.openxmlformats.org/officeDocument/2006/relationships" xmlns:p="http://schemas.openxmlformats.org/presentationml/2006/main">
   <p:cSld>
     <p:spTree>
       <p:nvGrpSpPr>
@@ -26409,7 +27092,14 @@
         <p:cNvGrpSpPr/>
         <p:nvPr/>
       </p:nvGrpSpPr>
-      <p:grpSpPr/>
+      <p:grpSpPr>
+        <a:xfrm>
+          <a:off x="0" y="0"/>
+          <a:ext cx="0" cy="0"/>
+          <a:chOff x="0" y="0"/>
+          <a:chExt cx="0" cy="0"/>
+        </a:xfrm>
+      </p:grpSpPr>
       <p:sp>
         <p:nvSpPr>
           <p:cNvPr id="2" name="Rectangle 1"/>
@@ -26450,6 +27140,7 @@
           <a:lstStyle/>
           <a:p>
             <a:pPr algn="ctr"/>
+            <a:endParaRPr/>
           </a:p>
         </p:txBody>
       </p:sp>
@@ -26535,7 +27226,7 @@
 </file>
 
 <file path=ppt/slides/slide63.xml><?xml version="1.0" encoding="utf-8"?>
-<p:sld xmlns:a="http://schemas.openxmlformats.org/drawingml/2006/main" xmlns:p="http://schemas.openxmlformats.org/presentationml/2006/main" xmlns:r="http://schemas.openxmlformats.org/officeDocument/2006/relationships">
+<p:sld xmlns:a="http://schemas.openxmlformats.org/drawingml/2006/main" xmlns:r="http://schemas.openxmlformats.org/officeDocument/2006/relationships" xmlns:p="http://schemas.openxmlformats.org/presentationml/2006/main">
   <p:cSld>
     <p:spTree>
       <p:nvGrpSpPr>
@@ -26543,7 +27234,14 @@
         <p:cNvGrpSpPr/>
         <p:nvPr/>
       </p:nvGrpSpPr>
-      <p:grpSpPr/>
+      <p:grpSpPr>
+        <a:xfrm>
+          <a:off x="0" y="0"/>
+          <a:ext cx="0" cy="0"/>
+          <a:chOff x="0" y="0"/>
+          <a:chExt cx="0" cy="0"/>
+        </a:xfrm>
+      </p:grpSpPr>
       <p:sp>
         <p:nvSpPr>
           <p:cNvPr id="2" name="TextBox 1"/>
@@ -26774,7 +27472,7 @@
 </file>
 
 <file path=ppt/slides/slide64.xml><?xml version="1.0" encoding="utf-8"?>
-<p:sld xmlns:a="http://schemas.openxmlformats.org/drawingml/2006/main" xmlns:p="http://schemas.openxmlformats.org/presentationml/2006/main" xmlns:r="http://schemas.openxmlformats.org/officeDocument/2006/relationships">
+<p:sld xmlns:a="http://schemas.openxmlformats.org/drawingml/2006/main" xmlns:r="http://schemas.openxmlformats.org/officeDocument/2006/relationships" xmlns:p="http://schemas.openxmlformats.org/presentationml/2006/main">
   <p:cSld>
     <p:spTree>
       <p:nvGrpSpPr>
@@ -26782,7 +27480,14 @@
         <p:cNvGrpSpPr/>
         <p:nvPr/>
       </p:nvGrpSpPr>
-      <p:grpSpPr/>
+      <p:grpSpPr>
+        <a:xfrm>
+          <a:off x="0" y="0"/>
+          <a:ext cx="0" cy="0"/>
+          <a:chOff x="0" y="0"/>
+          <a:chExt cx="0" cy="0"/>
+        </a:xfrm>
+      </p:grpSpPr>
       <p:sp>
         <p:nvSpPr>
           <p:cNvPr id="2" name="TextBox 1"/>
@@ -26859,7 +27564,7 @@
           </a:fontRef>
         </p:style>
         <p:txBody>
-          <a:bodyPr rtlCol="0" anchor="ctr" wrap="square" lIns="54864" rIns="54864" tIns="27432" bIns="27432"/>
+          <a:bodyPr wrap="square" lIns="54864" tIns="27432" rIns="54864" bIns="27432" rtlCol="0" anchor="ctr"/>
           <a:lstStyle/>
           <a:p>
             <a:pPr algn="ctr"/>
@@ -26918,6 +27623,7 @@
           <a:lstStyle/>
           <a:p>
             <a:pPr algn="ctr"/>
+            <a:endParaRPr/>
           </a:p>
         </p:txBody>
       </p:sp>
@@ -26960,7 +27666,7 @@
           </a:fontRef>
         </p:style>
         <p:txBody>
-          <a:bodyPr rtlCol="0" anchor="ctr" wrap="square" lIns="54864" rIns="54864" tIns="27432" bIns="27432"/>
+          <a:bodyPr wrap="square" lIns="54864" tIns="27432" rIns="54864" bIns="27432" rtlCol="0" anchor="ctr"/>
           <a:lstStyle/>
           <a:p>
             <a:pPr algn="ctr"/>
@@ -27019,6 +27725,7 @@
           <a:lstStyle/>
           <a:p>
             <a:pPr algn="ctr"/>
+            <a:endParaRPr/>
           </a:p>
         </p:txBody>
       </p:sp>
@@ -27061,7 +27768,7 @@
           </a:fontRef>
         </p:style>
         <p:txBody>
-          <a:bodyPr rtlCol="0" anchor="ctr" wrap="square" lIns="54864" rIns="54864" tIns="27432" bIns="27432"/>
+          <a:bodyPr wrap="square" lIns="54864" tIns="27432" rIns="54864" bIns="27432" rtlCol="0" anchor="ctr"/>
           <a:lstStyle/>
           <a:p>
             <a:pPr algn="ctr"/>
@@ -27120,6 +27827,7 @@
           <a:lstStyle/>
           <a:p>
             <a:pPr algn="ctr"/>
+            <a:endParaRPr/>
           </a:p>
         </p:txBody>
       </p:sp>
@@ -27162,7 +27870,7 @@
           </a:fontRef>
         </p:style>
         <p:txBody>
-          <a:bodyPr rtlCol="0" anchor="ctr" wrap="square" lIns="54864" rIns="54864" tIns="27432" bIns="27432"/>
+          <a:bodyPr wrap="square" lIns="54864" tIns="27432" rIns="54864" bIns="27432" rtlCol="0" anchor="ctr"/>
           <a:lstStyle/>
           <a:p>
             <a:pPr algn="ctr"/>
@@ -27225,7 +27933,7 @@
 </file>
 
 <file path=ppt/slides/slide65.xml><?xml version="1.0" encoding="utf-8"?>
-<p:sld xmlns:a="http://schemas.openxmlformats.org/drawingml/2006/main" xmlns:p="http://schemas.openxmlformats.org/presentationml/2006/main" xmlns:r="http://schemas.openxmlformats.org/officeDocument/2006/relationships">
+<p:sld xmlns:a="http://schemas.openxmlformats.org/drawingml/2006/main" xmlns:r="http://schemas.openxmlformats.org/officeDocument/2006/relationships" xmlns:p="http://schemas.openxmlformats.org/presentationml/2006/main">
   <p:cSld>
     <p:spTree>
       <p:nvGrpSpPr>
@@ -27233,7 +27941,14 @@
         <p:cNvGrpSpPr/>
         <p:nvPr/>
       </p:nvGrpSpPr>
-      <p:grpSpPr/>
+      <p:grpSpPr>
+        <a:xfrm>
+          <a:off x="0" y="0"/>
+          <a:ext cx="0" cy="0"/>
+          <a:chOff x="0" y="0"/>
+          <a:chExt cx="0" cy="0"/>
+        </a:xfrm>
+      </p:grpSpPr>
       <p:sp>
         <p:nvSpPr>
           <p:cNvPr id="2" name="TextBox 1"/>
@@ -27290,9 +28005,27 @@
                 <a:tableStyleId>{5C22544A-7EE6-4342-B048-85BDC9FD1C3A}</a:tableStyleId>
               </a:tblPr>
               <a:tblGrid>
-                <a:gridCol w="3515258"/>
-                <a:gridCol w="3515258"/>
-                <a:gridCol w="3515259"/>
+                <a:gridCol w="3515258">
+                  <a:extLst>
+                    <a:ext uri="{9D8B030D-6E8A-4147-A177-3AD203B41FA5}">
+                      <a16:colId xmlns:a16="http://schemas.microsoft.com/office/drawing/2014/main" val="20000"/>
+                    </a:ext>
+                  </a:extLst>
+                </a:gridCol>
+                <a:gridCol w="3515258">
+                  <a:extLst>
+                    <a:ext uri="{9D8B030D-6E8A-4147-A177-3AD203B41FA5}">
+                      <a16:colId xmlns:a16="http://schemas.microsoft.com/office/drawing/2014/main" val="20001"/>
+                    </a:ext>
+                  </a:extLst>
+                </a:gridCol>
+                <a:gridCol w="3515259">
+                  <a:extLst>
+                    <a:ext uri="{9D8B030D-6E8A-4147-A177-3AD203B41FA5}">
+                      <a16:colId xmlns:a16="http://schemas.microsoft.com/office/drawing/2014/main" val="20002"/>
+                    </a:ext>
+                  </a:extLst>
+                </a:gridCol>
               </a:tblGrid>
               <a:tr h="502920">
                 <a:tc>
@@ -27314,7 +28047,7 @@
                       </a:r>
                     </a:p>
                   </a:txBody>
-                  <a:tcPr marL="91440" marR="91440" marT="27432" marB="27432" anchor="ctr">
+                  <a:tcPr marT="27432" marB="27432" anchor="ctr">
                     <a:solidFill>
                       <a:srgbClr val="1F5FA8"/>
                     </a:solidFill>
@@ -27339,7 +28072,7 @@
                       </a:r>
                     </a:p>
                   </a:txBody>
-                  <a:tcPr marL="91440" marR="91440" marT="27432" marB="27432" anchor="ctr">
+                  <a:tcPr marT="27432" marB="27432" anchor="ctr">
                     <a:solidFill>
                       <a:srgbClr val="1F5FA8"/>
                     </a:solidFill>
@@ -27364,12 +28097,17 @@
                       </a:r>
                     </a:p>
                   </a:txBody>
-                  <a:tcPr marL="91440" marR="91440" marT="27432" marB="27432" anchor="ctr">
+                  <a:tcPr marT="27432" marB="27432" anchor="ctr">
                     <a:solidFill>
                       <a:srgbClr val="1F5FA8"/>
                     </a:solidFill>
                   </a:tcPr>
                 </a:tc>
+                <a:extLst>
+                  <a:ext uri="{0D108BD9-81ED-4DB2-BD59-A6C34878D82A}">
+                    <a16:rowId xmlns:a16="http://schemas.microsoft.com/office/drawing/2014/main" val="10000"/>
+                  </a:ext>
+                </a:extLst>
               </a:tr>
               <a:tr h="502920">
                 <a:tc>
@@ -27391,7 +28129,7 @@
                       </a:r>
                     </a:p>
                   </a:txBody>
-                  <a:tcPr marL="91440" marR="91440" marT="27432" marB="27432" anchor="ctr">
+                  <a:tcPr marT="27432" marB="27432" anchor="ctr">
                     <a:solidFill>
                       <a:srgbClr val="FFFFFF"/>
                     </a:solidFill>
@@ -27416,7 +28154,7 @@
                       </a:r>
                     </a:p>
                   </a:txBody>
-                  <a:tcPr marL="91440" marR="91440" marT="27432" marB="27432" anchor="ctr">
+                  <a:tcPr marT="27432" marB="27432" anchor="ctr">
                     <a:solidFill>
                       <a:srgbClr val="FFFFFF"/>
                     </a:solidFill>
@@ -27441,12 +28179,17 @@
                       </a:r>
                     </a:p>
                   </a:txBody>
-                  <a:tcPr marL="91440" marR="91440" marT="27432" marB="27432" anchor="ctr">
+                  <a:tcPr marT="27432" marB="27432" anchor="ctr">
                     <a:solidFill>
                       <a:srgbClr val="FFFFFF"/>
                     </a:solidFill>
                   </a:tcPr>
                 </a:tc>
+                <a:extLst>
+                  <a:ext uri="{0D108BD9-81ED-4DB2-BD59-A6C34878D82A}">
+                    <a16:rowId xmlns:a16="http://schemas.microsoft.com/office/drawing/2014/main" val="10001"/>
+                  </a:ext>
+                </a:extLst>
               </a:tr>
               <a:tr h="502920">
                 <a:tc>
@@ -27468,7 +28211,7 @@
                       </a:r>
                     </a:p>
                   </a:txBody>
-                  <a:tcPr marL="91440" marR="91440" marT="27432" marB="27432" anchor="ctr">
+                  <a:tcPr marT="27432" marB="27432" anchor="ctr">
                     <a:solidFill>
                       <a:srgbClr val="F2F4F7"/>
                     </a:solidFill>
@@ -27493,7 +28236,7 @@
                       </a:r>
                     </a:p>
                   </a:txBody>
-                  <a:tcPr marL="91440" marR="91440" marT="27432" marB="27432" anchor="ctr">
+                  <a:tcPr marT="27432" marB="27432" anchor="ctr">
                     <a:solidFill>
                       <a:srgbClr val="F2F4F7"/>
                     </a:solidFill>
@@ -27518,12 +28261,17 @@
                       </a:r>
                     </a:p>
                   </a:txBody>
-                  <a:tcPr marL="91440" marR="91440" marT="27432" marB="27432" anchor="ctr">
+                  <a:tcPr marT="27432" marB="27432" anchor="ctr">
                     <a:solidFill>
                       <a:srgbClr val="F2F4F7"/>
                     </a:solidFill>
                   </a:tcPr>
                 </a:tc>
+                <a:extLst>
+                  <a:ext uri="{0D108BD9-81ED-4DB2-BD59-A6C34878D82A}">
+                    <a16:rowId xmlns:a16="http://schemas.microsoft.com/office/drawing/2014/main" val="10002"/>
+                  </a:ext>
+                </a:extLst>
               </a:tr>
               <a:tr h="502920">
                 <a:tc>
@@ -27545,7 +28293,7 @@
                       </a:r>
                     </a:p>
                   </a:txBody>
-                  <a:tcPr marL="91440" marR="91440" marT="27432" marB="27432" anchor="ctr">
+                  <a:tcPr marT="27432" marB="27432" anchor="ctr">
                     <a:solidFill>
                       <a:srgbClr val="FFFFFF"/>
                     </a:solidFill>
@@ -27570,7 +28318,7 @@
                       </a:r>
                     </a:p>
                   </a:txBody>
-                  <a:tcPr marL="91440" marR="91440" marT="27432" marB="27432" anchor="ctr">
+                  <a:tcPr marT="27432" marB="27432" anchor="ctr">
                     <a:solidFill>
                       <a:srgbClr val="FFFFFF"/>
                     </a:solidFill>
@@ -27595,12 +28343,17 @@
                       </a:r>
                     </a:p>
                   </a:txBody>
-                  <a:tcPr marL="91440" marR="91440" marT="27432" marB="27432" anchor="ctr">
+                  <a:tcPr marT="27432" marB="27432" anchor="ctr">
                     <a:solidFill>
                       <a:srgbClr val="FFFFFF"/>
                     </a:solidFill>
                   </a:tcPr>
                 </a:tc>
+                <a:extLst>
+                  <a:ext uri="{0D108BD9-81ED-4DB2-BD59-A6C34878D82A}">
+                    <a16:rowId xmlns:a16="http://schemas.microsoft.com/office/drawing/2014/main" val="10003"/>
+                  </a:ext>
+                </a:extLst>
               </a:tr>
             </a:tbl>
           </a:graphicData>
@@ -27651,7 +28404,7 @@
 </file>
 
 <file path=ppt/slides/slide66.xml><?xml version="1.0" encoding="utf-8"?>
-<p:sld xmlns:a="http://schemas.openxmlformats.org/drawingml/2006/main" xmlns:p="http://schemas.openxmlformats.org/presentationml/2006/main" xmlns:r="http://schemas.openxmlformats.org/officeDocument/2006/relationships">
+<p:sld xmlns:a="http://schemas.openxmlformats.org/drawingml/2006/main" xmlns:r="http://schemas.openxmlformats.org/officeDocument/2006/relationships" xmlns:p="http://schemas.openxmlformats.org/presentationml/2006/main">
   <p:cSld>
     <p:spTree>
       <p:nvGrpSpPr>
@@ -27659,7 +28412,14 @@
         <p:cNvGrpSpPr/>
         <p:nvPr/>
       </p:nvGrpSpPr>
-      <p:grpSpPr/>
+      <p:grpSpPr>
+        <a:xfrm>
+          <a:off x="0" y="0"/>
+          <a:ext cx="0" cy="0"/>
+          <a:chOff x="0" y="0"/>
+          <a:chExt cx="0" cy="0"/>
+        </a:xfrm>
+      </p:grpSpPr>
       <p:sp>
         <p:nvSpPr>
           <p:cNvPr id="2" name="TextBox 1"/>
@@ -27736,7 +28496,7 @@
           </a:fontRef>
         </p:style>
         <p:txBody>
-          <a:bodyPr rtlCol="0" anchor="ctr" wrap="square" lIns="54864" rIns="54864" tIns="27432" bIns="27432"/>
+          <a:bodyPr wrap="square" lIns="54864" tIns="27432" rIns="54864" bIns="27432" rtlCol="0" anchor="ctr"/>
           <a:lstStyle/>
           <a:p>
             <a:pPr algn="ctr"/>
@@ -27795,6 +28555,7 @@
           <a:lstStyle/>
           <a:p>
             <a:pPr algn="ctr"/>
+            <a:endParaRPr/>
           </a:p>
         </p:txBody>
       </p:sp>
@@ -27837,7 +28598,7 @@
           </a:fontRef>
         </p:style>
         <p:txBody>
-          <a:bodyPr rtlCol="0" anchor="ctr" wrap="square" lIns="54864" rIns="54864" tIns="27432" bIns="27432"/>
+          <a:bodyPr wrap="square" lIns="54864" tIns="27432" rIns="54864" bIns="27432" rtlCol="0" anchor="ctr"/>
           <a:lstStyle/>
           <a:p>
             <a:pPr algn="ctr"/>
@@ -27896,6 +28657,7 @@
           <a:lstStyle/>
           <a:p>
             <a:pPr algn="ctr"/>
+            <a:endParaRPr/>
           </a:p>
         </p:txBody>
       </p:sp>
@@ -27938,7 +28700,7 @@
           </a:fontRef>
         </p:style>
         <p:txBody>
-          <a:bodyPr rtlCol="0" anchor="ctr" wrap="square" lIns="54864" rIns="54864" tIns="27432" bIns="27432"/>
+          <a:bodyPr wrap="square" lIns="54864" tIns="27432" rIns="54864" bIns="27432" rtlCol="0" anchor="ctr"/>
           <a:lstStyle/>
           <a:p>
             <a:pPr algn="ctr"/>
@@ -27997,6 +28759,7 @@
           <a:lstStyle/>
           <a:p>
             <a:pPr algn="ctr"/>
+            <a:endParaRPr/>
           </a:p>
         </p:txBody>
       </p:sp>
@@ -28039,7 +28802,7 @@
           </a:fontRef>
         </p:style>
         <p:txBody>
-          <a:bodyPr rtlCol="0" anchor="ctr" wrap="square" lIns="54864" rIns="54864" tIns="27432" bIns="27432"/>
+          <a:bodyPr wrap="square" lIns="54864" tIns="27432" rIns="54864" bIns="27432" rtlCol="0" anchor="ctr"/>
           <a:lstStyle/>
           <a:p>
             <a:pPr algn="ctr"/>
@@ -28102,7 +28865,7 @@
 </file>
 
 <file path=ppt/slides/slide67.xml><?xml version="1.0" encoding="utf-8"?>
-<p:sld xmlns:a="http://schemas.openxmlformats.org/drawingml/2006/main" xmlns:p="http://schemas.openxmlformats.org/presentationml/2006/main" xmlns:r="http://schemas.openxmlformats.org/officeDocument/2006/relationships">
+<p:sld xmlns:a="http://schemas.openxmlformats.org/drawingml/2006/main" xmlns:r="http://schemas.openxmlformats.org/officeDocument/2006/relationships" xmlns:p="http://schemas.openxmlformats.org/presentationml/2006/main">
   <p:cSld>
     <p:spTree>
       <p:nvGrpSpPr>
@@ -28110,7 +28873,14 @@
         <p:cNvGrpSpPr/>
         <p:nvPr/>
       </p:nvGrpSpPr>
-      <p:grpSpPr/>
+      <p:grpSpPr>
+        <a:xfrm>
+          <a:off x="0" y="0"/>
+          <a:ext cx="0" cy="0"/>
+          <a:chOff x="0" y="0"/>
+          <a:chExt cx="0" cy="0"/>
+        </a:xfrm>
+      </p:grpSpPr>
       <p:sp>
         <p:nvSpPr>
           <p:cNvPr id="2" name="TextBox 1"/>
@@ -28341,7 +29111,7 @@
 </file>
 
 <file path=ppt/slides/slide68.xml><?xml version="1.0" encoding="utf-8"?>
-<p:sld xmlns:a="http://schemas.openxmlformats.org/drawingml/2006/main" xmlns:p="http://schemas.openxmlformats.org/presentationml/2006/main" xmlns:r="http://schemas.openxmlformats.org/officeDocument/2006/relationships">
+<p:sld xmlns:a="http://schemas.openxmlformats.org/drawingml/2006/main" xmlns:r="http://schemas.openxmlformats.org/officeDocument/2006/relationships" xmlns:p="http://schemas.openxmlformats.org/presentationml/2006/main">
   <p:cSld>
     <p:spTree>
       <p:nvGrpSpPr>
@@ -28349,7 +29119,14 @@
         <p:cNvGrpSpPr/>
         <p:nvPr/>
       </p:nvGrpSpPr>
-      <p:grpSpPr/>
+      <p:grpSpPr>
+        <a:xfrm>
+          <a:off x="0" y="0"/>
+          <a:ext cx="0" cy="0"/>
+          <a:chOff x="0" y="0"/>
+          <a:chExt cx="0" cy="0"/>
+        </a:xfrm>
+      </p:grpSpPr>
       <p:sp>
         <p:nvSpPr>
           <p:cNvPr id="2" name="TextBox 1"/>
@@ -28580,7 +29357,7 @@
 </file>
 
 <file path=ppt/slides/slide69.xml><?xml version="1.0" encoding="utf-8"?>
-<p:sld xmlns:a="http://schemas.openxmlformats.org/drawingml/2006/main" xmlns:p="http://schemas.openxmlformats.org/presentationml/2006/main" xmlns:r="http://schemas.openxmlformats.org/officeDocument/2006/relationships">
+<p:sld xmlns:a="http://schemas.openxmlformats.org/drawingml/2006/main" xmlns:r="http://schemas.openxmlformats.org/officeDocument/2006/relationships" xmlns:p="http://schemas.openxmlformats.org/presentationml/2006/main">
   <p:cSld>
     <p:spTree>
       <p:nvGrpSpPr>
@@ -28588,7 +29365,14 @@
         <p:cNvGrpSpPr/>
         <p:nvPr/>
       </p:nvGrpSpPr>
-      <p:grpSpPr/>
+      <p:grpSpPr>
+        <a:xfrm>
+          <a:off x="0" y="0"/>
+          <a:ext cx="0" cy="0"/>
+          <a:chOff x="0" y="0"/>
+          <a:chExt cx="0" cy="0"/>
+        </a:xfrm>
+      </p:grpSpPr>
       <p:sp>
         <p:nvSpPr>
           <p:cNvPr id="2" name="TextBox 1"/>
@@ -28671,7 +29455,7 @@
 </file>
 
 <file path=ppt/slides/slide7.xml><?xml version="1.0" encoding="utf-8"?>
-<p:sld xmlns:a="http://schemas.openxmlformats.org/drawingml/2006/main" xmlns:p="http://schemas.openxmlformats.org/presentationml/2006/main" xmlns:r="http://schemas.openxmlformats.org/officeDocument/2006/relationships">
+<p:sld xmlns:a="http://schemas.openxmlformats.org/drawingml/2006/main" xmlns:r="http://schemas.openxmlformats.org/officeDocument/2006/relationships" xmlns:p="http://schemas.openxmlformats.org/presentationml/2006/main">
   <p:cSld>
     <p:spTree>
       <p:nvGrpSpPr>
@@ -28679,7 +29463,14 @@
         <p:cNvGrpSpPr/>
         <p:nvPr/>
       </p:nvGrpSpPr>
-      <p:grpSpPr/>
+      <p:grpSpPr>
+        <a:xfrm>
+          <a:off x="0" y="0"/>
+          <a:ext cx="0" cy="0"/>
+          <a:chOff x="0" y="0"/>
+          <a:chExt cx="0" cy="0"/>
+        </a:xfrm>
+      </p:grpSpPr>
       <p:sp>
         <p:nvSpPr>
           <p:cNvPr id="2" name="TextBox 1"/>
@@ -28762,7 +29553,7 @@
 </file>
 
 <file path=ppt/slides/slide70.xml><?xml version="1.0" encoding="utf-8"?>
-<p:sld xmlns:a="http://schemas.openxmlformats.org/drawingml/2006/main" xmlns:p="http://schemas.openxmlformats.org/presentationml/2006/main" xmlns:r="http://schemas.openxmlformats.org/officeDocument/2006/relationships">
+<p:sld xmlns:a="http://schemas.openxmlformats.org/drawingml/2006/main" xmlns:r="http://schemas.openxmlformats.org/officeDocument/2006/relationships" xmlns:p="http://schemas.openxmlformats.org/presentationml/2006/main">
   <p:cSld>
     <p:spTree>
       <p:nvGrpSpPr>
@@ -28770,7 +29561,14 @@
         <p:cNvGrpSpPr/>
         <p:nvPr/>
       </p:nvGrpSpPr>
-      <p:grpSpPr/>
+      <p:grpSpPr>
+        <a:xfrm>
+          <a:off x="0" y="0"/>
+          <a:ext cx="0" cy="0"/>
+          <a:chOff x="0" y="0"/>
+          <a:chExt cx="0" cy="0"/>
+        </a:xfrm>
+      </p:grpSpPr>
       <p:sp>
         <p:nvSpPr>
           <p:cNvPr id="2" name="Rectangle 1"/>
@@ -28811,6 +29609,7 @@
           <a:lstStyle/>
           <a:p>
             <a:pPr algn="ctr"/>
+            <a:endParaRPr/>
           </a:p>
         </p:txBody>
       </p:sp>
@@ -28854,6 +29653,7 @@
           <a:lstStyle/>
           <a:p>
             <a:pPr algn="ctr"/>
+            <a:endParaRPr/>
           </a:p>
         </p:txBody>
       </p:sp>
@@ -29124,7 +29924,7 @@
 </file>
 
 <file path=ppt/slides/slide71.xml><?xml version="1.0" encoding="utf-8"?>
-<p:sld xmlns:a="http://schemas.openxmlformats.org/drawingml/2006/main" xmlns:p="http://schemas.openxmlformats.org/presentationml/2006/main" xmlns:r="http://schemas.openxmlformats.org/officeDocument/2006/relationships">
+<p:sld xmlns:a="http://schemas.openxmlformats.org/drawingml/2006/main" xmlns:r="http://schemas.openxmlformats.org/officeDocument/2006/relationships" xmlns:p="http://schemas.openxmlformats.org/presentationml/2006/main">
   <p:cSld>
     <p:spTree>
       <p:nvGrpSpPr>
@@ -29132,7 +29932,14 @@
         <p:cNvGrpSpPr/>
         <p:nvPr/>
       </p:nvGrpSpPr>
-      <p:grpSpPr/>
+      <p:grpSpPr>
+        <a:xfrm>
+          <a:off x="0" y="0"/>
+          <a:ext cx="0" cy="0"/>
+          <a:chOff x="0" y="0"/>
+          <a:chExt cx="0" cy="0"/>
+        </a:xfrm>
+      </p:grpSpPr>
       <p:sp>
         <p:nvSpPr>
           <p:cNvPr id="2" name="TextBox 1"/>
@@ -29215,7 +30022,7 @@
 </file>
 
 <file path=ppt/slides/slide72.xml><?xml version="1.0" encoding="utf-8"?>
-<p:sld xmlns:a="http://schemas.openxmlformats.org/drawingml/2006/main" xmlns:p="http://schemas.openxmlformats.org/presentationml/2006/main" xmlns:r="http://schemas.openxmlformats.org/officeDocument/2006/relationships">
+<p:sld xmlns:a="http://schemas.openxmlformats.org/drawingml/2006/main" xmlns:r="http://schemas.openxmlformats.org/officeDocument/2006/relationships" xmlns:p="http://schemas.openxmlformats.org/presentationml/2006/main">
   <p:cSld>
     <p:spTree>
       <p:nvGrpSpPr>
@@ -29223,7 +30030,14 @@
         <p:cNvGrpSpPr/>
         <p:nvPr/>
       </p:nvGrpSpPr>
-      <p:grpSpPr/>
+      <p:grpSpPr>
+        <a:xfrm>
+          <a:off x="0" y="0"/>
+          <a:ext cx="0" cy="0"/>
+          <a:chOff x="0" y="0"/>
+          <a:chExt cx="0" cy="0"/>
+        </a:xfrm>
+      </p:grpSpPr>
       <p:sp>
         <p:nvSpPr>
           <p:cNvPr id="2" name="TextBox 1"/>
@@ -29454,7 +30268,7 @@
 </file>
 
 <file path=ppt/slides/slide73.xml><?xml version="1.0" encoding="utf-8"?>
-<p:sld xmlns:a="http://schemas.openxmlformats.org/drawingml/2006/main" xmlns:p="http://schemas.openxmlformats.org/presentationml/2006/main" xmlns:r="http://schemas.openxmlformats.org/officeDocument/2006/relationships">
+<p:sld xmlns:a="http://schemas.openxmlformats.org/drawingml/2006/main" xmlns:r="http://schemas.openxmlformats.org/officeDocument/2006/relationships" xmlns:p="http://schemas.openxmlformats.org/presentationml/2006/main">
   <p:cSld>
     <p:spTree>
       <p:nvGrpSpPr>
@@ -29462,7 +30276,14 @@
         <p:cNvGrpSpPr/>
         <p:nvPr/>
       </p:nvGrpSpPr>
-      <p:grpSpPr/>
+      <p:grpSpPr>
+        <a:xfrm>
+          <a:off x="0" y="0"/>
+          <a:ext cx="0" cy="0"/>
+          <a:chOff x="0" y="0"/>
+          <a:chExt cx="0" cy="0"/>
+        </a:xfrm>
+      </p:grpSpPr>
       <p:sp>
         <p:nvSpPr>
           <p:cNvPr id="2" name="Rectangle 1"/>
@@ -29503,6 +30324,7 @@
           <a:lstStyle/>
           <a:p>
             <a:pPr algn="ctr"/>
+            <a:endParaRPr/>
           </a:p>
         </p:txBody>
       </p:sp>
@@ -29588,7 +30410,7 @@
 </file>
 
 <file path=ppt/slides/slide74.xml><?xml version="1.0" encoding="utf-8"?>
-<p:sld xmlns:a="http://schemas.openxmlformats.org/drawingml/2006/main" xmlns:p="http://schemas.openxmlformats.org/presentationml/2006/main" xmlns:r="http://schemas.openxmlformats.org/officeDocument/2006/relationships">
+<p:sld xmlns:a="http://schemas.openxmlformats.org/drawingml/2006/main" xmlns:r="http://schemas.openxmlformats.org/officeDocument/2006/relationships" xmlns:p="http://schemas.openxmlformats.org/presentationml/2006/main">
   <p:cSld>
     <p:spTree>
       <p:nvGrpSpPr>
@@ -29596,7 +30418,14 @@
         <p:cNvGrpSpPr/>
         <p:nvPr/>
       </p:nvGrpSpPr>
-      <p:grpSpPr/>
+      <p:grpSpPr>
+        <a:xfrm>
+          <a:off x="0" y="0"/>
+          <a:ext cx="0" cy="0"/>
+          <a:chOff x="0" y="0"/>
+          <a:chExt cx="0" cy="0"/>
+        </a:xfrm>
+      </p:grpSpPr>
       <p:sp>
         <p:nvSpPr>
           <p:cNvPr id="2" name="TextBox 1"/>
@@ -29827,7 +30656,7 @@
 </file>
 
 <file path=ppt/slides/slide75.xml><?xml version="1.0" encoding="utf-8"?>
-<p:sld xmlns:a="http://schemas.openxmlformats.org/drawingml/2006/main" xmlns:p="http://schemas.openxmlformats.org/presentationml/2006/main" xmlns:r="http://schemas.openxmlformats.org/officeDocument/2006/relationships">
+<p:sld xmlns:a="http://schemas.openxmlformats.org/drawingml/2006/main" xmlns:r="http://schemas.openxmlformats.org/officeDocument/2006/relationships" xmlns:p="http://schemas.openxmlformats.org/presentationml/2006/main">
   <p:cSld>
     <p:spTree>
       <p:nvGrpSpPr>
@@ -29835,7 +30664,14 @@
         <p:cNvGrpSpPr/>
         <p:nvPr/>
       </p:nvGrpSpPr>
-      <p:grpSpPr/>
+      <p:grpSpPr>
+        <a:xfrm>
+          <a:off x="0" y="0"/>
+          <a:ext cx="0" cy="0"/>
+          <a:chOff x="0" y="0"/>
+          <a:chExt cx="0" cy="0"/>
+        </a:xfrm>
+      </p:grpSpPr>
       <p:sp>
         <p:nvSpPr>
           <p:cNvPr id="2" name="TextBox 1"/>
@@ -29892,9 +30728,27 @@
                 <a:tableStyleId>{5C22544A-7EE6-4342-B048-85BDC9FD1C3A}</a:tableStyleId>
               </a:tblPr>
               <a:tblGrid>
-                <a:gridCol w="3515258"/>
-                <a:gridCol w="3515258"/>
-                <a:gridCol w="3515259"/>
+                <a:gridCol w="3515258">
+                  <a:extLst>
+                    <a:ext uri="{9D8B030D-6E8A-4147-A177-3AD203B41FA5}">
+                      <a16:colId xmlns:a16="http://schemas.microsoft.com/office/drawing/2014/main" val="20000"/>
+                    </a:ext>
+                  </a:extLst>
+                </a:gridCol>
+                <a:gridCol w="3515258">
+                  <a:extLst>
+                    <a:ext uri="{9D8B030D-6E8A-4147-A177-3AD203B41FA5}">
+                      <a16:colId xmlns:a16="http://schemas.microsoft.com/office/drawing/2014/main" val="20001"/>
+                    </a:ext>
+                  </a:extLst>
+                </a:gridCol>
+                <a:gridCol w="3515259">
+                  <a:extLst>
+                    <a:ext uri="{9D8B030D-6E8A-4147-A177-3AD203B41FA5}">
+                      <a16:colId xmlns:a16="http://schemas.microsoft.com/office/drawing/2014/main" val="20002"/>
+                    </a:ext>
+                  </a:extLst>
+                </a:gridCol>
               </a:tblGrid>
               <a:tr h="502920">
                 <a:tc>
@@ -29916,7 +30770,7 @@
                       </a:r>
                     </a:p>
                   </a:txBody>
-                  <a:tcPr marL="91440" marR="91440" marT="27432" marB="27432" anchor="ctr">
+                  <a:tcPr marT="27432" marB="27432" anchor="ctr">
                     <a:solidFill>
                       <a:srgbClr val="1F5FA8"/>
                     </a:solidFill>
@@ -29941,7 +30795,7 @@
                       </a:r>
                     </a:p>
                   </a:txBody>
-                  <a:tcPr marL="91440" marR="91440" marT="27432" marB="27432" anchor="ctr">
+                  <a:tcPr marT="27432" marB="27432" anchor="ctr">
                     <a:solidFill>
                       <a:srgbClr val="1F5FA8"/>
                     </a:solidFill>
@@ -29966,12 +30820,17 @@
                       </a:r>
                     </a:p>
                   </a:txBody>
-                  <a:tcPr marL="91440" marR="91440" marT="27432" marB="27432" anchor="ctr">
+                  <a:tcPr marT="27432" marB="27432" anchor="ctr">
                     <a:solidFill>
                       <a:srgbClr val="1F5FA8"/>
                     </a:solidFill>
                   </a:tcPr>
                 </a:tc>
+                <a:extLst>
+                  <a:ext uri="{0D108BD9-81ED-4DB2-BD59-A6C34878D82A}">
+                    <a16:rowId xmlns:a16="http://schemas.microsoft.com/office/drawing/2014/main" val="10000"/>
+                  </a:ext>
+                </a:extLst>
               </a:tr>
               <a:tr h="502920">
                 <a:tc>
@@ -29993,7 +30852,7 @@
                       </a:r>
                     </a:p>
                   </a:txBody>
-                  <a:tcPr marL="91440" marR="91440" marT="27432" marB="27432" anchor="ctr">
+                  <a:tcPr marT="27432" marB="27432" anchor="ctr">
                     <a:solidFill>
                       <a:srgbClr val="FFFFFF"/>
                     </a:solidFill>
@@ -30018,7 +30877,7 @@
                       </a:r>
                     </a:p>
                   </a:txBody>
-                  <a:tcPr marL="91440" marR="91440" marT="27432" marB="27432" anchor="ctr">
+                  <a:tcPr marT="27432" marB="27432" anchor="ctr">
                     <a:solidFill>
                       <a:srgbClr val="FFFFFF"/>
                     </a:solidFill>
@@ -30043,12 +30902,17 @@
                       </a:r>
                     </a:p>
                   </a:txBody>
-                  <a:tcPr marL="91440" marR="91440" marT="27432" marB="27432" anchor="ctr">
+                  <a:tcPr marT="27432" marB="27432" anchor="ctr">
                     <a:solidFill>
                       <a:srgbClr val="FFFFFF"/>
                     </a:solidFill>
                   </a:tcPr>
                 </a:tc>
+                <a:extLst>
+                  <a:ext uri="{0D108BD9-81ED-4DB2-BD59-A6C34878D82A}">
+                    <a16:rowId xmlns:a16="http://schemas.microsoft.com/office/drawing/2014/main" val="10001"/>
+                  </a:ext>
+                </a:extLst>
               </a:tr>
               <a:tr h="502920">
                 <a:tc>
@@ -30070,7 +30934,7 @@
                       </a:r>
                     </a:p>
                   </a:txBody>
-                  <a:tcPr marL="91440" marR="91440" marT="27432" marB="27432" anchor="ctr">
+                  <a:tcPr marT="27432" marB="27432" anchor="ctr">
                     <a:solidFill>
                       <a:srgbClr val="F2F4F7"/>
                     </a:solidFill>
@@ -30095,7 +30959,7 @@
                       </a:r>
                     </a:p>
                   </a:txBody>
-                  <a:tcPr marL="91440" marR="91440" marT="27432" marB="27432" anchor="ctr">
+                  <a:tcPr marT="27432" marB="27432" anchor="ctr">
                     <a:solidFill>
                       <a:srgbClr val="F2F4F7"/>
                     </a:solidFill>
@@ -30120,12 +30984,17 @@
                       </a:r>
                     </a:p>
                   </a:txBody>
-                  <a:tcPr marL="91440" marR="91440" marT="27432" marB="27432" anchor="ctr">
+                  <a:tcPr marT="27432" marB="27432" anchor="ctr">
                     <a:solidFill>
                       <a:srgbClr val="F2F4F7"/>
                     </a:solidFill>
                   </a:tcPr>
                 </a:tc>
+                <a:extLst>
+                  <a:ext uri="{0D108BD9-81ED-4DB2-BD59-A6C34878D82A}">
+                    <a16:rowId xmlns:a16="http://schemas.microsoft.com/office/drawing/2014/main" val="10002"/>
+                  </a:ext>
+                </a:extLst>
               </a:tr>
             </a:tbl>
           </a:graphicData>
@@ -30213,7 +31082,7 @@
 </file>
 
 <file path=ppt/slides/slide76.xml><?xml version="1.0" encoding="utf-8"?>
-<p:sld xmlns:a="http://schemas.openxmlformats.org/drawingml/2006/main" xmlns:p="http://schemas.openxmlformats.org/presentationml/2006/main" xmlns:r="http://schemas.openxmlformats.org/officeDocument/2006/relationships">
+<p:sld xmlns:a="http://schemas.openxmlformats.org/drawingml/2006/main" xmlns:r="http://schemas.openxmlformats.org/officeDocument/2006/relationships" xmlns:p="http://schemas.openxmlformats.org/presentationml/2006/main">
   <p:cSld>
     <p:spTree>
       <p:nvGrpSpPr>
@@ -30221,7 +31090,14 @@
         <p:cNvGrpSpPr/>
         <p:nvPr/>
       </p:nvGrpSpPr>
-      <p:grpSpPr/>
+      <p:grpSpPr>
+        <a:xfrm>
+          <a:off x="0" y="0"/>
+          <a:ext cx="0" cy="0"/>
+          <a:chOff x="0" y="0"/>
+          <a:chExt cx="0" cy="0"/>
+        </a:xfrm>
+      </p:grpSpPr>
       <p:sp>
         <p:nvSpPr>
           <p:cNvPr id="2" name="TextBox 1"/>
@@ -30300,7 +31176,9 @@
         <p:txBody>
           <a:bodyPr rtlCol="0" anchor="ctr"/>
           <a:lstStyle/>
-          <a:p/>
+          <a:p>
+            <a:endParaRPr/>
+          </a:p>
         </p:txBody>
       </p:sp>
       <p:sp>
@@ -30344,6 +31222,7 @@
           <a:lstStyle/>
           <a:p>
             <a:pPr algn="ctr"/>
+            <a:endParaRPr/>
           </a:p>
         </p:txBody>
       </p:sp>
@@ -30562,7 +31441,7 @@
 </file>
 
 <file path=ppt/slides/slide77.xml><?xml version="1.0" encoding="utf-8"?>
-<p:sld xmlns:a="http://schemas.openxmlformats.org/drawingml/2006/main" xmlns:p="http://schemas.openxmlformats.org/presentationml/2006/main" xmlns:r="http://schemas.openxmlformats.org/officeDocument/2006/relationships">
+<p:sld xmlns:a="http://schemas.openxmlformats.org/drawingml/2006/main" xmlns:r="http://schemas.openxmlformats.org/officeDocument/2006/relationships" xmlns:p="http://schemas.openxmlformats.org/presentationml/2006/main">
   <p:cSld>
     <p:spTree>
       <p:nvGrpSpPr>
@@ -30570,7 +31449,14 @@
         <p:cNvGrpSpPr/>
         <p:nvPr/>
       </p:nvGrpSpPr>
-      <p:grpSpPr/>
+      <p:grpSpPr>
+        <a:xfrm>
+          <a:off x="0" y="0"/>
+          <a:ext cx="0" cy="0"/>
+          <a:chOff x="0" y="0"/>
+          <a:chExt cx="0" cy="0"/>
+        </a:xfrm>
+      </p:grpSpPr>
       <p:sp>
         <p:nvSpPr>
           <p:cNvPr id="2" name="TextBox 1"/>
@@ -30644,7 +31530,7 @@
           </a:fontRef>
         </p:style>
         <p:txBody>
-          <a:bodyPr rtlCol="0" anchor="ctr" wrap="none" lIns="228600" tIns="137160"/>
+          <a:bodyPr wrap="none" lIns="228600" tIns="137160" rtlCol="0" anchor="ctr"/>
           <a:lstStyle/>
           <a:p>
             <a:pPr algn="l"/>
@@ -30818,7 +31704,7 @@
 </file>
 
 <file path=ppt/slides/slide78.xml><?xml version="1.0" encoding="utf-8"?>
-<p:sld xmlns:a="http://schemas.openxmlformats.org/drawingml/2006/main" xmlns:p="http://schemas.openxmlformats.org/presentationml/2006/main" xmlns:r="http://schemas.openxmlformats.org/officeDocument/2006/relationships">
+<p:sld xmlns:a="http://schemas.openxmlformats.org/drawingml/2006/main" xmlns:r="http://schemas.openxmlformats.org/officeDocument/2006/relationships" xmlns:p="http://schemas.openxmlformats.org/presentationml/2006/main">
   <p:cSld>
     <p:spTree>
       <p:nvGrpSpPr>
@@ -30826,7 +31712,14 @@
         <p:cNvGrpSpPr/>
         <p:nvPr/>
       </p:nvGrpSpPr>
-      <p:grpSpPr/>
+      <p:grpSpPr>
+        <a:xfrm>
+          <a:off x="0" y="0"/>
+          <a:ext cx="0" cy="0"/>
+          <a:chOff x="0" y="0"/>
+          <a:chExt cx="0" cy="0"/>
+        </a:xfrm>
+      </p:grpSpPr>
       <p:sp>
         <p:nvSpPr>
           <p:cNvPr id="2" name="TextBox 1"/>
@@ -30900,7 +31793,7 @@
           </a:fontRef>
         </p:style>
         <p:txBody>
-          <a:bodyPr rtlCol="0" anchor="ctr" wrap="none" lIns="228600" tIns="137160"/>
+          <a:bodyPr wrap="none" lIns="228600" tIns="137160" rtlCol="0" anchor="ctr"/>
           <a:lstStyle/>
           <a:p>
             <a:pPr algn="l"/>
@@ -31051,7 +31944,7 @@
 </file>
 
 <file path=ppt/slides/slide79.xml><?xml version="1.0" encoding="utf-8"?>
-<p:sld xmlns:a="http://schemas.openxmlformats.org/drawingml/2006/main" xmlns:p="http://schemas.openxmlformats.org/presentationml/2006/main" xmlns:r="http://schemas.openxmlformats.org/officeDocument/2006/relationships">
+<p:sld xmlns:a="http://schemas.openxmlformats.org/drawingml/2006/main" xmlns:r="http://schemas.openxmlformats.org/officeDocument/2006/relationships" xmlns:p="http://schemas.openxmlformats.org/presentationml/2006/main">
   <p:cSld>
     <p:spTree>
       <p:nvGrpSpPr>
@@ -31059,7 +31952,14 @@
         <p:cNvGrpSpPr/>
         <p:nvPr/>
       </p:nvGrpSpPr>
-      <p:grpSpPr/>
+      <p:grpSpPr>
+        <a:xfrm>
+          <a:off x="0" y="0"/>
+          <a:ext cx="0" cy="0"/>
+          <a:chOff x="0" y="0"/>
+          <a:chExt cx="0" cy="0"/>
+        </a:xfrm>
+      </p:grpSpPr>
       <p:sp>
         <p:nvSpPr>
           <p:cNvPr id="2" name="TextBox 1"/>
@@ -31116,9 +32016,27 @@
                 <a:tableStyleId>{5C22544A-7EE6-4342-B048-85BDC9FD1C3A}</a:tableStyleId>
               </a:tblPr>
               <a:tblGrid>
-                <a:gridCol w="3515258"/>
-                <a:gridCol w="3515258"/>
-                <a:gridCol w="3515259"/>
+                <a:gridCol w="3515258">
+                  <a:extLst>
+                    <a:ext uri="{9D8B030D-6E8A-4147-A177-3AD203B41FA5}">
+                      <a16:colId xmlns:a16="http://schemas.microsoft.com/office/drawing/2014/main" val="20000"/>
+                    </a:ext>
+                  </a:extLst>
+                </a:gridCol>
+                <a:gridCol w="3515258">
+                  <a:extLst>
+                    <a:ext uri="{9D8B030D-6E8A-4147-A177-3AD203B41FA5}">
+                      <a16:colId xmlns:a16="http://schemas.microsoft.com/office/drawing/2014/main" val="20001"/>
+                    </a:ext>
+                  </a:extLst>
+                </a:gridCol>
+                <a:gridCol w="3515259">
+                  <a:extLst>
+                    <a:ext uri="{9D8B030D-6E8A-4147-A177-3AD203B41FA5}">
+                      <a16:colId xmlns:a16="http://schemas.microsoft.com/office/drawing/2014/main" val="20002"/>
+                    </a:ext>
+                  </a:extLst>
+                </a:gridCol>
               </a:tblGrid>
               <a:tr h="502920">
                 <a:tc>
@@ -31140,7 +32058,7 @@
                       </a:r>
                     </a:p>
                   </a:txBody>
-                  <a:tcPr marL="91440" marR="91440" marT="27432" marB="27432" anchor="ctr">
+                  <a:tcPr marT="27432" marB="27432" anchor="ctr">
                     <a:solidFill>
                       <a:srgbClr val="1F5FA8"/>
                     </a:solidFill>
@@ -31165,7 +32083,7 @@
                       </a:r>
                     </a:p>
                   </a:txBody>
-                  <a:tcPr marL="91440" marR="91440" marT="27432" marB="27432" anchor="ctr">
+                  <a:tcPr marT="27432" marB="27432" anchor="ctr">
                     <a:solidFill>
                       <a:srgbClr val="1F5FA8"/>
                     </a:solidFill>
@@ -31190,12 +32108,17 @@
                       </a:r>
                     </a:p>
                   </a:txBody>
-                  <a:tcPr marL="91440" marR="91440" marT="27432" marB="27432" anchor="ctr">
+                  <a:tcPr marT="27432" marB="27432" anchor="ctr">
                     <a:solidFill>
                       <a:srgbClr val="1F5FA8"/>
                     </a:solidFill>
                   </a:tcPr>
                 </a:tc>
+                <a:extLst>
+                  <a:ext uri="{0D108BD9-81ED-4DB2-BD59-A6C34878D82A}">
+                    <a16:rowId xmlns:a16="http://schemas.microsoft.com/office/drawing/2014/main" val="10000"/>
+                  </a:ext>
+                </a:extLst>
               </a:tr>
               <a:tr h="502920">
                 <a:tc>
@@ -31217,7 +32140,7 @@
                       </a:r>
                     </a:p>
                   </a:txBody>
-                  <a:tcPr marL="91440" marR="91440" marT="27432" marB="27432" anchor="ctr">
+                  <a:tcPr marT="27432" marB="27432" anchor="ctr">
                     <a:solidFill>
                       <a:srgbClr val="FFFFFF"/>
                     </a:solidFill>
@@ -31242,7 +32165,7 @@
                       </a:r>
                     </a:p>
                   </a:txBody>
-                  <a:tcPr marL="91440" marR="91440" marT="27432" marB="27432" anchor="ctr">
+                  <a:tcPr marT="27432" marB="27432" anchor="ctr">
                     <a:solidFill>
                       <a:srgbClr val="FFFFFF"/>
                     </a:solidFill>
@@ -31267,12 +32190,17 @@
                       </a:r>
                     </a:p>
                   </a:txBody>
-                  <a:tcPr marL="91440" marR="91440" marT="27432" marB="27432" anchor="ctr">
+                  <a:tcPr marT="27432" marB="27432" anchor="ctr">
                     <a:solidFill>
                       <a:srgbClr val="FFFFFF"/>
                     </a:solidFill>
                   </a:tcPr>
                 </a:tc>
+                <a:extLst>
+                  <a:ext uri="{0D108BD9-81ED-4DB2-BD59-A6C34878D82A}">
+                    <a16:rowId xmlns:a16="http://schemas.microsoft.com/office/drawing/2014/main" val="10001"/>
+                  </a:ext>
+                </a:extLst>
               </a:tr>
               <a:tr h="502920">
                 <a:tc>
@@ -31294,7 +32222,7 @@
                       </a:r>
                     </a:p>
                   </a:txBody>
-                  <a:tcPr marL="91440" marR="91440" marT="27432" marB="27432" anchor="ctr">
+                  <a:tcPr marT="27432" marB="27432" anchor="ctr">
                     <a:solidFill>
                       <a:srgbClr val="F2F4F7"/>
                     </a:solidFill>
@@ -31319,7 +32247,7 @@
                       </a:r>
                     </a:p>
                   </a:txBody>
-                  <a:tcPr marL="91440" marR="91440" marT="27432" marB="27432" anchor="ctr">
+                  <a:tcPr marT="27432" marB="27432" anchor="ctr">
                     <a:solidFill>
                       <a:srgbClr val="F2F4F7"/>
                     </a:solidFill>
@@ -31344,12 +32272,17 @@
                       </a:r>
                     </a:p>
                   </a:txBody>
-                  <a:tcPr marL="91440" marR="91440" marT="27432" marB="27432" anchor="ctr">
+                  <a:tcPr marT="27432" marB="27432" anchor="ctr">
                     <a:solidFill>
                       <a:srgbClr val="F2F4F7"/>
                     </a:solidFill>
                   </a:tcPr>
                 </a:tc>
+                <a:extLst>
+                  <a:ext uri="{0D108BD9-81ED-4DB2-BD59-A6C34878D82A}">
+                    <a16:rowId xmlns:a16="http://schemas.microsoft.com/office/drawing/2014/main" val="10002"/>
+                  </a:ext>
+                </a:extLst>
               </a:tr>
               <a:tr h="502920">
                 <a:tc>
@@ -31371,7 +32304,7 @@
                       </a:r>
                     </a:p>
                   </a:txBody>
-                  <a:tcPr marL="91440" marR="91440" marT="27432" marB="27432" anchor="ctr">
+                  <a:tcPr marT="27432" marB="27432" anchor="ctr">
                     <a:solidFill>
                       <a:srgbClr val="FFFFFF"/>
                     </a:solidFill>
@@ -31396,7 +32329,7 @@
                       </a:r>
                     </a:p>
                   </a:txBody>
-                  <a:tcPr marL="91440" marR="91440" marT="27432" marB="27432" anchor="ctr">
+                  <a:tcPr marT="27432" marB="27432" anchor="ctr">
                     <a:solidFill>
                       <a:srgbClr val="FFFFFF"/>
                     </a:solidFill>
@@ -31421,12 +32354,17 @@
                       </a:r>
                     </a:p>
                   </a:txBody>
-                  <a:tcPr marL="91440" marR="91440" marT="27432" marB="27432" anchor="ctr">
+                  <a:tcPr marT="27432" marB="27432" anchor="ctr">
                     <a:solidFill>
                       <a:srgbClr val="FFFFFF"/>
                     </a:solidFill>
                   </a:tcPr>
                 </a:tc>
+                <a:extLst>
+                  <a:ext uri="{0D108BD9-81ED-4DB2-BD59-A6C34878D82A}">
+                    <a16:rowId xmlns:a16="http://schemas.microsoft.com/office/drawing/2014/main" val="10003"/>
+                  </a:ext>
+                </a:extLst>
               </a:tr>
             </a:tbl>
           </a:graphicData>
@@ -31477,7 +32415,7 @@
 </file>
 
 <file path=ppt/slides/slide8.xml><?xml version="1.0" encoding="utf-8"?>
-<p:sld xmlns:a="http://schemas.openxmlformats.org/drawingml/2006/main" xmlns:p="http://schemas.openxmlformats.org/presentationml/2006/main" xmlns:r="http://schemas.openxmlformats.org/officeDocument/2006/relationships">
+<p:sld xmlns:a="http://schemas.openxmlformats.org/drawingml/2006/main" xmlns:r="http://schemas.openxmlformats.org/officeDocument/2006/relationships" xmlns:p="http://schemas.openxmlformats.org/presentationml/2006/main">
   <p:cSld>
     <p:spTree>
       <p:nvGrpSpPr>
@@ -31485,7 +32423,14 @@
         <p:cNvGrpSpPr/>
         <p:nvPr/>
       </p:nvGrpSpPr>
-      <p:grpSpPr/>
+      <p:grpSpPr>
+        <a:xfrm>
+          <a:off x="0" y="0"/>
+          <a:ext cx="0" cy="0"/>
+          <a:chOff x="0" y="0"/>
+          <a:chExt cx="0" cy="0"/>
+        </a:xfrm>
+      </p:grpSpPr>
       <p:sp>
         <p:nvSpPr>
           <p:cNvPr id="2" name="TextBox 1"/>
@@ -31753,7 +32698,7 @@
 </file>
 
 <file path=ppt/slides/slide80.xml><?xml version="1.0" encoding="utf-8"?>
-<p:sld xmlns:a="http://schemas.openxmlformats.org/drawingml/2006/main" xmlns:p="http://schemas.openxmlformats.org/presentationml/2006/main" xmlns:r="http://schemas.openxmlformats.org/officeDocument/2006/relationships">
+<p:sld xmlns:a="http://schemas.openxmlformats.org/drawingml/2006/main" xmlns:r="http://schemas.openxmlformats.org/officeDocument/2006/relationships" xmlns:p="http://schemas.openxmlformats.org/presentationml/2006/main">
   <p:cSld>
     <p:spTree>
       <p:nvGrpSpPr>
@@ -31761,7 +32706,14 @@
         <p:cNvGrpSpPr/>
         <p:nvPr/>
       </p:nvGrpSpPr>
-      <p:grpSpPr/>
+      <p:grpSpPr>
+        <a:xfrm>
+          <a:off x="0" y="0"/>
+          <a:ext cx="0" cy="0"/>
+          <a:chOff x="0" y="0"/>
+          <a:chExt cx="0" cy="0"/>
+        </a:xfrm>
+      </p:grpSpPr>
       <p:sp>
         <p:nvSpPr>
           <p:cNvPr id="2" name="TextBox 1"/>
@@ -31835,7 +32787,7 @@
           </a:fontRef>
         </p:style>
         <p:txBody>
-          <a:bodyPr rtlCol="0" anchor="ctr" wrap="none" lIns="228600" tIns="137160"/>
+          <a:bodyPr wrap="none" lIns="228600" tIns="137160" rtlCol="0" anchor="ctr"/>
           <a:lstStyle/>
           <a:p>
             <a:pPr algn="l"/>
@@ -32009,7 +32961,7 @@
 </file>
 
 <file path=ppt/slides/slide81.xml><?xml version="1.0" encoding="utf-8"?>
-<p:sld xmlns:a="http://schemas.openxmlformats.org/drawingml/2006/main" xmlns:p="http://schemas.openxmlformats.org/presentationml/2006/main" xmlns:r="http://schemas.openxmlformats.org/officeDocument/2006/relationships">
+<p:sld xmlns:a="http://schemas.openxmlformats.org/drawingml/2006/main" xmlns:r="http://schemas.openxmlformats.org/officeDocument/2006/relationships" xmlns:p="http://schemas.openxmlformats.org/presentationml/2006/main">
   <p:cSld>
     <p:spTree>
       <p:nvGrpSpPr>
@@ -32017,7 +32969,14 @@
         <p:cNvGrpSpPr/>
         <p:nvPr/>
       </p:nvGrpSpPr>
-      <p:grpSpPr/>
+      <p:grpSpPr>
+        <a:xfrm>
+          <a:off x="0" y="0"/>
+          <a:ext cx="0" cy="0"/>
+          <a:chOff x="0" y="0"/>
+          <a:chExt cx="0" cy="0"/>
+        </a:xfrm>
+      </p:grpSpPr>
       <p:sp>
         <p:nvSpPr>
           <p:cNvPr id="2" name="TextBox 1"/>
@@ -32248,7 +33207,7 @@
 </file>
 
 <file path=ppt/slides/slide82.xml><?xml version="1.0" encoding="utf-8"?>
-<p:sld xmlns:a="http://schemas.openxmlformats.org/drawingml/2006/main" xmlns:p="http://schemas.openxmlformats.org/presentationml/2006/main" xmlns:r="http://schemas.openxmlformats.org/officeDocument/2006/relationships">
+<p:sld xmlns:a="http://schemas.openxmlformats.org/drawingml/2006/main" xmlns:r="http://schemas.openxmlformats.org/officeDocument/2006/relationships" xmlns:p="http://schemas.openxmlformats.org/presentationml/2006/main">
   <p:cSld>
     <p:spTree>
       <p:nvGrpSpPr>
@@ -32256,7 +33215,14 @@
         <p:cNvGrpSpPr/>
         <p:nvPr/>
       </p:nvGrpSpPr>
-      <p:grpSpPr/>
+      <p:grpSpPr>
+        <a:xfrm>
+          <a:off x="0" y="0"/>
+          <a:ext cx="0" cy="0"/>
+          <a:chOff x="0" y="0"/>
+          <a:chExt cx="0" cy="0"/>
+        </a:xfrm>
+      </p:grpSpPr>
       <p:sp>
         <p:nvSpPr>
           <p:cNvPr id="2" name="Rectangle 1"/>
@@ -32297,6 +33263,7 @@
           <a:lstStyle/>
           <a:p>
             <a:pPr algn="ctr"/>
+            <a:endParaRPr/>
           </a:p>
         </p:txBody>
       </p:sp>
@@ -32382,7 +33349,7 @@
 </file>
 
 <file path=ppt/slides/slide83.xml><?xml version="1.0" encoding="utf-8"?>
-<p:sld xmlns:a="http://schemas.openxmlformats.org/drawingml/2006/main" xmlns:p="http://schemas.openxmlformats.org/presentationml/2006/main" xmlns:r="http://schemas.openxmlformats.org/officeDocument/2006/relationships">
+<p:sld xmlns:a="http://schemas.openxmlformats.org/drawingml/2006/main" xmlns:r="http://schemas.openxmlformats.org/officeDocument/2006/relationships" xmlns:p="http://schemas.openxmlformats.org/presentationml/2006/main">
   <p:cSld>
     <p:spTree>
       <p:nvGrpSpPr>
@@ -32390,7 +33357,14 @@
         <p:cNvGrpSpPr/>
         <p:nvPr/>
       </p:nvGrpSpPr>
-      <p:grpSpPr/>
+      <p:grpSpPr>
+        <a:xfrm>
+          <a:off x="0" y="0"/>
+          <a:ext cx="0" cy="0"/>
+          <a:chOff x="0" y="0"/>
+          <a:chExt cx="0" cy="0"/>
+        </a:xfrm>
+      </p:grpSpPr>
       <p:sp>
         <p:nvSpPr>
           <p:cNvPr id="2" name="TextBox 1"/>
@@ -32447,10 +33421,34 @@
                 <a:tableStyleId>{5C22544A-7EE6-4342-B048-85BDC9FD1C3A}</a:tableStyleId>
               </a:tblPr>
               <a:tblGrid>
-                <a:gridCol w="2636443"/>
-                <a:gridCol w="2636443"/>
-                <a:gridCol w="2636443"/>
-                <a:gridCol w="2636446"/>
+                <a:gridCol w="2636443">
+                  <a:extLst>
+                    <a:ext uri="{9D8B030D-6E8A-4147-A177-3AD203B41FA5}">
+                      <a16:colId xmlns:a16="http://schemas.microsoft.com/office/drawing/2014/main" val="20000"/>
+                    </a:ext>
+                  </a:extLst>
+                </a:gridCol>
+                <a:gridCol w="2636443">
+                  <a:extLst>
+                    <a:ext uri="{9D8B030D-6E8A-4147-A177-3AD203B41FA5}">
+                      <a16:colId xmlns:a16="http://schemas.microsoft.com/office/drawing/2014/main" val="20001"/>
+                    </a:ext>
+                  </a:extLst>
+                </a:gridCol>
+                <a:gridCol w="2636443">
+                  <a:extLst>
+                    <a:ext uri="{9D8B030D-6E8A-4147-A177-3AD203B41FA5}">
+                      <a16:colId xmlns:a16="http://schemas.microsoft.com/office/drawing/2014/main" val="20002"/>
+                    </a:ext>
+                  </a:extLst>
+                </a:gridCol>
+                <a:gridCol w="2636446">
+                  <a:extLst>
+                    <a:ext uri="{9D8B030D-6E8A-4147-A177-3AD203B41FA5}">
+                      <a16:colId xmlns:a16="http://schemas.microsoft.com/office/drawing/2014/main" val="20003"/>
+                    </a:ext>
+                  </a:extLst>
+                </a:gridCol>
               </a:tblGrid>
               <a:tr h="502920">
                 <a:tc>
@@ -32459,20 +33457,10 @@
                     <a:lstStyle/>
                     <a:p>
                       <a:pPr algn="l"/>
-                      <a:r>
-                        <a:rPr sz="1800" b="1">
-                          <a:solidFill>
-                            <a:srgbClr val="FFFFFF"/>
-                          </a:solidFill>
-                          <a:latin typeface="Leelawadee UI"/>
-                          <a:ea typeface="Leelawadee UI"/>
-                          <a:cs typeface="Leelawadee UI"/>
-                        </a:rPr>
-                        <a:t/>
-                      </a:r>
+                      <a:endParaRPr/>
                     </a:p>
                   </a:txBody>
-                  <a:tcPr marL="91440" marR="91440" marT="27432" marB="27432" anchor="ctr">
+                  <a:tcPr marT="27432" marB="27432" anchor="ctr">
                     <a:solidFill>
                       <a:srgbClr val="1F5FA8"/>
                     </a:solidFill>
@@ -32497,7 +33485,7 @@
                       </a:r>
                     </a:p>
                   </a:txBody>
-                  <a:tcPr marL="91440" marR="91440" marT="27432" marB="27432" anchor="ctr">
+                  <a:tcPr marT="27432" marB="27432" anchor="ctr">
                     <a:solidFill>
                       <a:srgbClr val="1F5FA8"/>
                     </a:solidFill>
@@ -32522,7 +33510,7 @@
                       </a:r>
                     </a:p>
                   </a:txBody>
-                  <a:tcPr marL="91440" marR="91440" marT="27432" marB="27432" anchor="ctr">
+                  <a:tcPr marT="27432" marB="27432" anchor="ctr">
                     <a:solidFill>
                       <a:srgbClr val="1F5FA8"/>
                     </a:solidFill>
@@ -32547,12 +33535,17 @@
                       </a:r>
                     </a:p>
                   </a:txBody>
-                  <a:tcPr marL="91440" marR="91440" marT="27432" marB="27432" anchor="ctr">
+                  <a:tcPr marT="27432" marB="27432" anchor="ctr">
                     <a:solidFill>
                       <a:srgbClr val="1F5FA8"/>
                     </a:solidFill>
                   </a:tcPr>
                 </a:tc>
+                <a:extLst>
+                  <a:ext uri="{0D108BD9-81ED-4DB2-BD59-A6C34878D82A}">
+                    <a16:rowId xmlns:a16="http://schemas.microsoft.com/office/drawing/2014/main" val="10000"/>
+                  </a:ext>
+                </a:extLst>
               </a:tr>
               <a:tr h="502920">
                 <a:tc>
@@ -32574,7 +33567,7 @@
                       </a:r>
                     </a:p>
                   </a:txBody>
-                  <a:tcPr marL="91440" marR="91440" marT="27432" marB="27432" anchor="ctr">
+                  <a:tcPr marT="27432" marB="27432" anchor="ctr">
                     <a:solidFill>
                       <a:srgbClr val="FFFFFF"/>
                     </a:solidFill>
@@ -32599,7 +33592,7 @@
                       </a:r>
                     </a:p>
                   </a:txBody>
-                  <a:tcPr marL="91440" marR="91440" marT="27432" marB="27432" anchor="ctr">
+                  <a:tcPr marT="27432" marB="27432" anchor="ctr">
                     <a:solidFill>
                       <a:srgbClr val="FFFFFF"/>
                     </a:solidFill>
@@ -32624,7 +33617,7 @@
                       </a:r>
                     </a:p>
                   </a:txBody>
-                  <a:tcPr marL="91440" marR="91440" marT="27432" marB="27432" anchor="ctr">
+                  <a:tcPr marT="27432" marB="27432" anchor="ctr">
                     <a:solidFill>
                       <a:srgbClr val="FFFFFF"/>
                     </a:solidFill>
@@ -32649,12 +33642,17 @@
                       </a:r>
                     </a:p>
                   </a:txBody>
-                  <a:tcPr marL="91440" marR="91440" marT="27432" marB="27432" anchor="ctr">
+                  <a:tcPr marT="27432" marB="27432" anchor="ctr">
                     <a:solidFill>
                       <a:srgbClr val="FFFFFF"/>
                     </a:solidFill>
                   </a:tcPr>
                 </a:tc>
+                <a:extLst>
+                  <a:ext uri="{0D108BD9-81ED-4DB2-BD59-A6C34878D82A}">
+                    <a16:rowId xmlns:a16="http://schemas.microsoft.com/office/drawing/2014/main" val="10001"/>
+                  </a:ext>
+                </a:extLst>
               </a:tr>
               <a:tr h="502920">
                 <a:tc>
@@ -32676,7 +33674,7 @@
                       </a:r>
                     </a:p>
                   </a:txBody>
-                  <a:tcPr marL="91440" marR="91440" marT="27432" marB="27432" anchor="ctr">
+                  <a:tcPr marT="27432" marB="27432" anchor="ctr">
                     <a:solidFill>
                       <a:srgbClr val="F2F4F7"/>
                     </a:solidFill>
@@ -32701,7 +33699,7 @@
                       </a:r>
                     </a:p>
                   </a:txBody>
-                  <a:tcPr marL="91440" marR="91440" marT="27432" marB="27432" anchor="ctr">
+                  <a:tcPr marT="27432" marB="27432" anchor="ctr">
                     <a:solidFill>
                       <a:srgbClr val="F2F4F7"/>
                     </a:solidFill>
@@ -32726,7 +33724,7 @@
                       </a:r>
                     </a:p>
                   </a:txBody>
-                  <a:tcPr marL="91440" marR="91440" marT="27432" marB="27432" anchor="ctr">
+                  <a:tcPr marT="27432" marB="27432" anchor="ctr">
                     <a:solidFill>
                       <a:srgbClr val="F2F4F7"/>
                     </a:solidFill>
@@ -32751,12 +33749,17 @@
                       </a:r>
                     </a:p>
                   </a:txBody>
-                  <a:tcPr marL="91440" marR="91440" marT="27432" marB="27432" anchor="ctr">
+                  <a:tcPr marT="27432" marB="27432" anchor="ctr">
                     <a:solidFill>
                       <a:srgbClr val="F2F4F7"/>
                     </a:solidFill>
                   </a:tcPr>
                 </a:tc>
+                <a:extLst>
+                  <a:ext uri="{0D108BD9-81ED-4DB2-BD59-A6C34878D82A}">
+                    <a16:rowId xmlns:a16="http://schemas.microsoft.com/office/drawing/2014/main" val="10002"/>
+                  </a:ext>
+                </a:extLst>
               </a:tr>
             </a:tbl>
           </a:graphicData>
@@ -32807,7 +33810,7 @@
 </file>
 
 <file path=ppt/slides/slide84.xml><?xml version="1.0" encoding="utf-8"?>
-<p:sld xmlns:a="http://schemas.openxmlformats.org/drawingml/2006/main" xmlns:p="http://schemas.openxmlformats.org/presentationml/2006/main" xmlns:r="http://schemas.openxmlformats.org/officeDocument/2006/relationships">
+<p:sld xmlns:a="http://schemas.openxmlformats.org/drawingml/2006/main" xmlns:r="http://schemas.openxmlformats.org/officeDocument/2006/relationships" xmlns:p="http://schemas.openxmlformats.org/presentationml/2006/main">
   <p:cSld>
     <p:spTree>
       <p:nvGrpSpPr>
@@ -32815,7 +33818,14 @@
         <p:cNvGrpSpPr/>
         <p:nvPr/>
       </p:nvGrpSpPr>
-      <p:grpSpPr/>
+      <p:grpSpPr>
+        <a:xfrm>
+          <a:off x="0" y="0"/>
+          <a:ext cx="0" cy="0"/>
+          <a:chOff x="0" y="0"/>
+          <a:chExt cx="0" cy="0"/>
+        </a:xfrm>
+      </p:grpSpPr>
       <p:sp>
         <p:nvSpPr>
           <p:cNvPr id="2" name="TextBox 1"/>
@@ -32872,10 +33882,34 @@
                 <a:tableStyleId>{5C22544A-7EE6-4342-B048-85BDC9FD1C3A}</a:tableStyleId>
               </a:tblPr>
               <a:tblGrid>
-                <a:gridCol w="2636443"/>
-                <a:gridCol w="2636443"/>
-                <a:gridCol w="2636443"/>
-                <a:gridCol w="2636446"/>
+                <a:gridCol w="2636443">
+                  <a:extLst>
+                    <a:ext uri="{9D8B030D-6E8A-4147-A177-3AD203B41FA5}">
+                      <a16:colId xmlns:a16="http://schemas.microsoft.com/office/drawing/2014/main" val="20000"/>
+                    </a:ext>
+                  </a:extLst>
+                </a:gridCol>
+                <a:gridCol w="2636443">
+                  <a:extLst>
+                    <a:ext uri="{9D8B030D-6E8A-4147-A177-3AD203B41FA5}">
+                      <a16:colId xmlns:a16="http://schemas.microsoft.com/office/drawing/2014/main" val="20001"/>
+                    </a:ext>
+                  </a:extLst>
+                </a:gridCol>
+                <a:gridCol w="2636443">
+                  <a:extLst>
+                    <a:ext uri="{9D8B030D-6E8A-4147-A177-3AD203B41FA5}">
+                      <a16:colId xmlns:a16="http://schemas.microsoft.com/office/drawing/2014/main" val="20002"/>
+                    </a:ext>
+                  </a:extLst>
+                </a:gridCol>
+                <a:gridCol w="2636446">
+                  <a:extLst>
+                    <a:ext uri="{9D8B030D-6E8A-4147-A177-3AD203B41FA5}">
+                      <a16:colId xmlns:a16="http://schemas.microsoft.com/office/drawing/2014/main" val="20003"/>
+                    </a:ext>
+                  </a:extLst>
+                </a:gridCol>
               </a:tblGrid>
               <a:tr h="502920">
                 <a:tc>
@@ -32884,20 +33918,10 @@
                     <a:lstStyle/>
                     <a:p>
                       <a:pPr algn="l"/>
-                      <a:r>
-                        <a:rPr sz="1800" b="1">
-                          <a:solidFill>
-                            <a:srgbClr val="FFFFFF"/>
-                          </a:solidFill>
-                          <a:latin typeface="Leelawadee UI"/>
-                          <a:ea typeface="Leelawadee UI"/>
-                          <a:cs typeface="Leelawadee UI"/>
-                        </a:rPr>
-                        <a:t/>
-                      </a:r>
+                      <a:endParaRPr/>
                     </a:p>
                   </a:txBody>
-                  <a:tcPr marL="91440" marR="91440" marT="27432" marB="27432" anchor="ctr">
+                  <a:tcPr marT="27432" marB="27432" anchor="ctr">
                     <a:solidFill>
                       <a:srgbClr val="1F5FA8"/>
                     </a:solidFill>
@@ -32922,7 +33946,7 @@
                       </a:r>
                     </a:p>
                   </a:txBody>
-                  <a:tcPr marL="91440" marR="91440" marT="27432" marB="27432" anchor="ctr">
+                  <a:tcPr marT="27432" marB="27432" anchor="ctr">
                     <a:solidFill>
                       <a:srgbClr val="1F5FA8"/>
                     </a:solidFill>
@@ -32947,7 +33971,7 @@
                       </a:r>
                     </a:p>
                   </a:txBody>
-                  <a:tcPr marL="91440" marR="91440" marT="27432" marB="27432" anchor="ctr">
+                  <a:tcPr marT="27432" marB="27432" anchor="ctr">
                     <a:solidFill>
                       <a:srgbClr val="1F5FA8"/>
                     </a:solidFill>
@@ -32972,12 +33996,17 @@
                       </a:r>
                     </a:p>
                   </a:txBody>
-                  <a:tcPr marL="91440" marR="91440" marT="27432" marB="27432" anchor="ctr">
+                  <a:tcPr marT="27432" marB="27432" anchor="ctr">
                     <a:solidFill>
                       <a:srgbClr val="1F5FA8"/>
                     </a:solidFill>
                   </a:tcPr>
                 </a:tc>
+                <a:extLst>
+                  <a:ext uri="{0D108BD9-81ED-4DB2-BD59-A6C34878D82A}">
+                    <a16:rowId xmlns:a16="http://schemas.microsoft.com/office/drawing/2014/main" val="10000"/>
+                  </a:ext>
+                </a:extLst>
               </a:tr>
               <a:tr h="502920">
                 <a:tc>
@@ -32999,7 +34028,7 @@
                       </a:r>
                     </a:p>
                   </a:txBody>
-                  <a:tcPr marL="91440" marR="91440" marT="27432" marB="27432" anchor="ctr">
+                  <a:tcPr marT="27432" marB="27432" anchor="ctr">
                     <a:solidFill>
                       <a:srgbClr val="FFFFFF"/>
                     </a:solidFill>
@@ -33024,7 +34053,7 @@
                       </a:r>
                     </a:p>
                   </a:txBody>
-                  <a:tcPr marL="91440" marR="91440" marT="27432" marB="27432" anchor="ctr">
+                  <a:tcPr marT="27432" marB="27432" anchor="ctr">
                     <a:solidFill>
                       <a:srgbClr val="FFFFFF"/>
                     </a:solidFill>
@@ -33049,7 +34078,7 @@
                       </a:r>
                     </a:p>
                   </a:txBody>
-                  <a:tcPr marL="91440" marR="91440" marT="27432" marB="27432" anchor="ctr">
+                  <a:tcPr marT="27432" marB="27432" anchor="ctr">
                     <a:solidFill>
                       <a:srgbClr val="FFFFFF"/>
                     </a:solidFill>
@@ -33074,12 +34103,17 @@
                       </a:r>
                     </a:p>
                   </a:txBody>
-                  <a:tcPr marL="91440" marR="91440" marT="27432" marB="27432" anchor="ctr">
+                  <a:tcPr marT="27432" marB="27432" anchor="ctr">
                     <a:solidFill>
                       <a:srgbClr val="FFFFFF"/>
                     </a:solidFill>
                   </a:tcPr>
                 </a:tc>
+                <a:extLst>
+                  <a:ext uri="{0D108BD9-81ED-4DB2-BD59-A6C34878D82A}">
+                    <a16:rowId xmlns:a16="http://schemas.microsoft.com/office/drawing/2014/main" val="10001"/>
+                  </a:ext>
+                </a:extLst>
               </a:tr>
               <a:tr h="502920">
                 <a:tc>
@@ -33101,7 +34135,7 @@
                       </a:r>
                     </a:p>
                   </a:txBody>
-                  <a:tcPr marL="91440" marR="91440" marT="27432" marB="27432" anchor="ctr">
+                  <a:tcPr marT="27432" marB="27432" anchor="ctr">
                     <a:solidFill>
                       <a:srgbClr val="F2F4F7"/>
                     </a:solidFill>
@@ -33126,7 +34160,7 @@
                       </a:r>
                     </a:p>
                   </a:txBody>
-                  <a:tcPr marL="91440" marR="91440" marT="27432" marB="27432" anchor="ctr">
+                  <a:tcPr marT="27432" marB="27432" anchor="ctr">
                     <a:solidFill>
                       <a:srgbClr val="F2F4F7"/>
                     </a:solidFill>
@@ -33151,7 +34185,7 @@
                       </a:r>
                     </a:p>
                   </a:txBody>
-                  <a:tcPr marL="91440" marR="91440" marT="27432" marB="27432" anchor="ctr">
+                  <a:tcPr marT="27432" marB="27432" anchor="ctr">
                     <a:solidFill>
                       <a:srgbClr val="F2F4F7"/>
                     </a:solidFill>
@@ -33176,12 +34210,17 @@
                       </a:r>
                     </a:p>
                   </a:txBody>
-                  <a:tcPr marL="91440" marR="91440" marT="27432" marB="27432" anchor="ctr">
+                  <a:tcPr marT="27432" marB="27432" anchor="ctr">
                     <a:solidFill>
                       <a:srgbClr val="F2F4F7"/>
                     </a:solidFill>
                   </a:tcPr>
                 </a:tc>
+                <a:extLst>
+                  <a:ext uri="{0D108BD9-81ED-4DB2-BD59-A6C34878D82A}">
+                    <a16:rowId xmlns:a16="http://schemas.microsoft.com/office/drawing/2014/main" val="10002"/>
+                  </a:ext>
+                </a:extLst>
               </a:tr>
               <a:tr h="502920">
                 <a:tc>
@@ -33203,7 +34242,7 @@
                       </a:r>
                     </a:p>
                   </a:txBody>
-                  <a:tcPr marL="91440" marR="91440" marT="27432" marB="27432" anchor="ctr">
+                  <a:tcPr marT="27432" marB="27432" anchor="ctr">
                     <a:solidFill>
                       <a:srgbClr val="FFFFFF"/>
                     </a:solidFill>
@@ -33228,7 +34267,7 @@
                       </a:r>
                     </a:p>
                   </a:txBody>
-                  <a:tcPr marL="91440" marR="91440" marT="27432" marB="27432" anchor="ctr">
+                  <a:tcPr marT="27432" marB="27432" anchor="ctr">
                     <a:solidFill>
                       <a:srgbClr val="FFFFFF"/>
                     </a:solidFill>
@@ -33253,7 +34292,7 @@
                       </a:r>
                     </a:p>
                   </a:txBody>
-                  <a:tcPr marL="91440" marR="91440" marT="27432" marB="27432" anchor="ctr">
+                  <a:tcPr marT="27432" marB="27432" anchor="ctr">
                     <a:solidFill>
                       <a:srgbClr val="FFFFFF"/>
                     </a:solidFill>
@@ -33278,12 +34317,17 @@
                       </a:r>
                     </a:p>
                   </a:txBody>
-                  <a:tcPr marL="91440" marR="91440" marT="27432" marB="27432" anchor="ctr">
+                  <a:tcPr marT="27432" marB="27432" anchor="ctr">
                     <a:solidFill>
                       <a:srgbClr val="FFFFFF"/>
                     </a:solidFill>
                   </a:tcPr>
                 </a:tc>
+                <a:extLst>
+                  <a:ext uri="{0D108BD9-81ED-4DB2-BD59-A6C34878D82A}">
+                    <a16:rowId xmlns:a16="http://schemas.microsoft.com/office/drawing/2014/main" val="10003"/>
+                  </a:ext>
+                </a:extLst>
               </a:tr>
               <a:tr h="502920">
                 <a:tc>
@@ -33305,7 +34349,7 @@
                       </a:r>
                     </a:p>
                   </a:txBody>
-                  <a:tcPr marL="91440" marR="91440" marT="27432" marB="27432" anchor="ctr">
+                  <a:tcPr marT="27432" marB="27432" anchor="ctr">
                     <a:solidFill>
                       <a:srgbClr val="F2F4F7"/>
                     </a:solidFill>
@@ -33330,7 +34374,7 @@
                       </a:r>
                     </a:p>
                   </a:txBody>
-                  <a:tcPr marL="91440" marR="91440" marT="27432" marB="27432" anchor="ctr">
+                  <a:tcPr marT="27432" marB="27432" anchor="ctr">
                     <a:solidFill>
                       <a:srgbClr val="F2F4F7"/>
                     </a:solidFill>
@@ -33355,7 +34399,7 @@
                       </a:r>
                     </a:p>
                   </a:txBody>
-                  <a:tcPr marL="91440" marR="91440" marT="27432" marB="27432" anchor="ctr">
+                  <a:tcPr marT="27432" marB="27432" anchor="ctr">
                     <a:solidFill>
                       <a:srgbClr val="F2F4F7"/>
                     </a:solidFill>
@@ -33380,12 +34424,17 @@
                       </a:r>
                     </a:p>
                   </a:txBody>
-                  <a:tcPr marL="91440" marR="91440" marT="27432" marB="27432" anchor="ctr">
+                  <a:tcPr marT="27432" marB="27432" anchor="ctr">
                     <a:solidFill>
                       <a:srgbClr val="F2F4F7"/>
                     </a:solidFill>
                   </a:tcPr>
                 </a:tc>
+                <a:extLst>
+                  <a:ext uri="{0D108BD9-81ED-4DB2-BD59-A6C34878D82A}">
+                    <a16:rowId xmlns:a16="http://schemas.microsoft.com/office/drawing/2014/main" val="10004"/>
+                  </a:ext>
+                </a:extLst>
               </a:tr>
             </a:tbl>
           </a:graphicData>
@@ -33436,7 +34485,7 @@
 </file>
 
 <file path=ppt/slides/slide85.xml><?xml version="1.0" encoding="utf-8"?>
-<p:sld xmlns:a="http://schemas.openxmlformats.org/drawingml/2006/main" xmlns:p="http://schemas.openxmlformats.org/presentationml/2006/main" xmlns:r="http://schemas.openxmlformats.org/officeDocument/2006/relationships">
+<p:sld xmlns:a="http://schemas.openxmlformats.org/drawingml/2006/main" xmlns:r="http://schemas.openxmlformats.org/officeDocument/2006/relationships" xmlns:p="http://schemas.openxmlformats.org/presentationml/2006/main">
   <p:cSld>
     <p:spTree>
       <p:nvGrpSpPr>
@@ -33444,7 +34493,14 @@
         <p:cNvGrpSpPr/>
         <p:nvPr/>
       </p:nvGrpSpPr>
-      <p:grpSpPr/>
+      <p:grpSpPr>
+        <a:xfrm>
+          <a:off x="0" y="0"/>
+          <a:ext cx="0" cy="0"/>
+          <a:chOff x="0" y="0"/>
+          <a:chExt cx="0" cy="0"/>
+        </a:xfrm>
+      </p:grpSpPr>
       <p:sp>
         <p:nvSpPr>
           <p:cNvPr id="2" name="TextBox 1"/>
@@ -33501,9 +34557,27 @@
                 <a:tableStyleId>{5C22544A-7EE6-4342-B048-85BDC9FD1C3A}</a:tableStyleId>
               </a:tblPr>
               <a:tblGrid>
-                <a:gridCol w="3515258"/>
-                <a:gridCol w="3515258"/>
-                <a:gridCol w="3515259"/>
+                <a:gridCol w="3515258">
+                  <a:extLst>
+                    <a:ext uri="{9D8B030D-6E8A-4147-A177-3AD203B41FA5}">
+                      <a16:colId xmlns:a16="http://schemas.microsoft.com/office/drawing/2014/main" val="20000"/>
+                    </a:ext>
+                  </a:extLst>
+                </a:gridCol>
+                <a:gridCol w="3515258">
+                  <a:extLst>
+                    <a:ext uri="{9D8B030D-6E8A-4147-A177-3AD203B41FA5}">
+                      <a16:colId xmlns:a16="http://schemas.microsoft.com/office/drawing/2014/main" val="20001"/>
+                    </a:ext>
+                  </a:extLst>
+                </a:gridCol>
+                <a:gridCol w="3515259">
+                  <a:extLst>
+                    <a:ext uri="{9D8B030D-6E8A-4147-A177-3AD203B41FA5}">
+                      <a16:colId xmlns:a16="http://schemas.microsoft.com/office/drawing/2014/main" val="20002"/>
+                    </a:ext>
+                  </a:extLst>
+                </a:gridCol>
               </a:tblGrid>
               <a:tr h="502920">
                 <a:tc>
@@ -33525,7 +34599,7 @@
                       </a:r>
                     </a:p>
                   </a:txBody>
-                  <a:tcPr marL="91440" marR="91440" marT="27432" marB="27432" anchor="ctr">
+                  <a:tcPr marT="27432" marB="27432" anchor="ctr">
                     <a:solidFill>
                       <a:srgbClr val="1F5FA8"/>
                     </a:solidFill>
@@ -33550,7 +34624,7 @@
                       </a:r>
                     </a:p>
                   </a:txBody>
-                  <a:tcPr marL="91440" marR="91440" marT="27432" marB="27432" anchor="ctr">
+                  <a:tcPr marT="27432" marB="27432" anchor="ctr">
                     <a:solidFill>
                       <a:srgbClr val="1F5FA8"/>
                     </a:solidFill>
@@ -33575,12 +34649,17 @@
                       </a:r>
                     </a:p>
                   </a:txBody>
-                  <a:tcPr marL="91440" marR="91440" marT="27432" marB="27432" anchor="ctr">
+                  <a:tcPr marT="27432" marB="27432" anchor="ctr">
                     <a:solidFill>
                       <a:srgbClr val="1F5FA8"/>
                     </a:solidFill>
                   </a:tcPr>
                 </a:tc>
+                <a:extLst>
+                  <a:ext uri="{0D108BD9-81ED-4DB2-BD59-A6C34878D82A}">
+                    <a16:rowId xmlns:a16="http://schemas.microsoft.com/office/drawing/2014/main" val="10000"/>
+                  </a:ext>
+                </a:extLst>
               </a:tr>
               <a:tr h="502920">
                 <a:tc>
@@ -33602,7 +34681,7 @@
                       </a:r>
                     </a:p>
                   </a:txBody>
-                  <a:tcPr marL="91440" marR="91440" marT="27432" marB="27432" anchor="ctr">
+                  <a:tcPr marT="27432" marB="27432" anchor="ctr">
                     <a:solidFill>
                       <a:srgbClr val="FFFFFF"/>
                     </a:solidFill>
@@ -33627,7 +34706,7 @@
                       </a:r>
                     </a:p>
                   </a:txBody>
-                  <a:tcPr marL="91440" marR="91440" marT="27432" marB="27432" anchor="ctr">
+                  <a:tcPr marT="27432" marB="27432" anchor="ctr">
                     <a:solidFill>
                       <a:srgbClr val="FFFFFF"/>
                     </a:solidFill>
@@ -33652,12 +34731,17 @@
                       </a:r>
                     </a:p>
                   </a:txBody>
-                  <a:tcPr marL="91440" marR="91440" marT="27432" marB="27432" anchor="ctr">
+                  <a:tcPr marT="27432" marB="27432" anchor="ctr">
                     <a:solidFill>
                       <a:srgbClr val="FFFFFF"/>
                     </a:solidFill>
                   </a:tcPr>
                 </a:tc>
+                <a:extLst>
+                  <a:ext uri="{0D108BD9-81ED-4DB2-BD59-A6C34878D82A}">
+                    <a16:rowId xmlns:a16="http://schemas.microsoft.com/office/drawing/2014/main" val="10001"/>
+                  </a:ext>
+                </a:extLst>
               </a:tr>
               <a:tr h="502920">
                 <a:tc>
@@ -33679,7 +34763,7 @@
                       </a:r>
                     </a:p>
                   </a:txBody>
-                  <a:tcPr marL="91440" marR="91440" marT="27432" marB="27432" anchor="ctr">
+                  <a:tcPr marT="27432" marB="27432" anchor="ctr">
                     <a:solidFill>
                       <a:srgbClr val="F2F4F7"/>
                     </a:solidFill>
@@ -33704,7 +34788,7 @@
                       </a:r>
                     </a:p>
                   </a:txBody>
-                  <a:tcPr marL="91440" marR="91440" marT="27432" marB="27432" anchor="ctr">
+                  <a:tcPr marT="27432" marB="27432" anchor="ctr">
                     <a:solidFill>
                       <a:srgbClr val="F2F4F7"/>
                     </a:solidFill>
@@ -33729,12 +34813,17 @@
                       </a:r>
                     </a:p>
                   </a:txBody>
-                  <a:tcPr marL="91440" marR="91440" marT="27432" marB="27432" anchor="ctr">
+                  <a:tcPr marT="27432" marB="27432" anchor="ctr">
                     <a:solidFill>
                       <a:srgbClr val="F2F4F7"/>
                     </a:solidFill>
                   </a:tcPr>
                 </a:tc>
+                <a:extLst>
+                  <a:ext uri="{0D108BD9-81ED-4DB2-BD59-A6C34878D82A}">
+                    <a16:rowId xmlns:a16="http://schemas.microsoft.com/office/drawing/2014/main" val="10002"/>
+                  </a:ext>
+                </a:extLst>
               </a:tr>
               <a:tr h="502920">
                 <a:tc>
@@ -33756,7 +34845,7 @@
                       </a:r>
                     </a:p>
                   </a:txBody>
-                  <a:tcPr marL="91440" marR="91440" marT="27432" marB="27432" anchor="ctr">
+                  <a:tcPr marT="27432" marB="27432" anchor="ctr">
                     <a:solidFill>
                       <a:srgbClr val="FFFFFF"/>
                     </a:solidFill>
@@ -33781,7 +34870,7 @@
                       </a:r>
                     </a:p>
                   </a:txBody>
-                  <a:tcPr marL="91440" marR="91440" marT="27432" marB="27432" anchor="ctr">
+                  <a:tcPr marT="27432" marB="27432" anchor="ctr">
                     <a:solidFill>
                       <a:srgbClr val="FFFFFF"/>
                     </a:solidFill>
@@ -33806,12 +34895,17 @@
                       </a:r>
                     </a:p>
                   </a:txBody>
-                  <a:tcPr marL="91440" marR="91440" marT="27432" marB="27432" anchor="ctr">
+                  <a:tcPr marT="27432" marB="27432" anchor="ctr">
                     <a:solidFill>
                       <a:srgbClr val="FFFFFF"/>
                     </a:solidFill>
                   </a:tcPr>
                 </a:tc>
+                <a:extLst>
+                  <a:ext uri="{0D108BD9-81ED-4DB2-BD59-A6C34878D82A}">
+                    <a16:rowId xmlns:a16="http://schemas.microsoft.com/office/drawing/2014/main" val="10003"/>
+                  </a:ext>
+                </a:extLst>
               </a:tr>
               <a:tr h="502920">
                 <a:tc>
@@ -33833,7 +34927,7 @@
                       </a:r>
                     </a:p>
                   </a:txBody>
-                  <a:tcPr marL="91440" marR="91440" marT="27432" marB="27432" anchor="ctr">
+                  <a:tcPr marT="27432" marB="27432" anchor="ctr">
                     <a:solidFill>
                       <a:srgbClr val="F2F4F7"/>
                     </a:solidFill>
@@ -33858,7 +34952,7 @@
                       </a:r>
                     </a:p>
                   </a:txBody>
-                  <a:tcPr marL="91440" marR="91440" marT="27432" marB="27432" anchor="ctr">
+                  <a:tcPr marT="27432" marB="27432" anchor="ctr">
                     <a:solidFill>
                       <a:srgbClr val="F2F4F7"/>
                     </a:solidFill>
@@ -33883,12 +34977,17 @@
                       </a:r>
                     </a:p>
                   </a:txBody>
-                  <a:tcPr marL="91440" marR="91440" marT="27432" marB="27432" anchor="ctr">
+                  <a:tcPr marT="27432" marB="27432" anchor="ctr">
                     <a:solidFill>
                       <a:srgbClr val="F2F4F7"/>
                     </a:solidFill>
                   </a:tcPr>
                 </a:tc>
+                <a:extLst>
+                  <a:ext uri="{0D108BD9-81ED-4DB2-BD59-A6C34878D82A}">
+                    <a16:rowId xmlns:a16="http://schemas.microsoft.com/office/drawing/2014/main" val="10004"/>
+                  </a:ext>
+                </a:extLst>
               </a:tr>
             </a:tbl>
           </a:graphicData>
@@ -33939,7 +35038,7 @@
 </file>
 
 <file path=ppt/slides/slide86.xml><?xml version="1.0" encoding="utf-8"?>
-<p:sld xmlns:a="http://schemas.openxmlformats.org/drawingml/2006/main" xmlns:p="http://schemas.openxmlformats.org/presentationml/2006/main" xmlns:r="http://schemas.openxmlformats.org/officeDocument/2006/relationships">
+<p:sld xmlns:a="http://schemas.openxmlformats.org/drawingml/2006/main" xmlns:r="http://schemas.openxmlformats.org/officeDocument/2006/relationships" xmlns:p="http://schemas.openxmlformats.org/presentationml/2006/main">
   <p:cSld>
     <p:spTree>
       <p:nvGrpSpPr>
@@ -33947,7 +35046,14 @@
         <p:cNvGrpSpPr/>
         <p:nvPr/>
       </p:nvGrpSpPr>
-      <p:grpSpPr/>
+      <p:grpSpPr>
+        <a:xfrm>
+          <a:off x="0" y="0"/>
+          <a:ext cx="0" cy="0"/>
+          <a:chOff x="0" y="0"/>
+          <a:chExt cx="0" cy="0"/>
+        </a:xfrm>
+      </p:grpSpPr>
       <p:sp>
         <p:nvSpPr>
           <p:cNvPr id="2" name="TextBox 1"/>
@@ -34178,7 +35284,7 @@
 </file>
 
 <file path=ppt/slides/slide87.xml><?xml version="1.0" encoding="utf-8"?>
-<p:sld xmlns:a="http://schemas.openxmlformats.org/drawingml/2006/main" xmlns:p="http://schemas.openxmlformats.org/presentationml/2006/main" xmlns:r="http://schemas.openxmlformats.org/officeDocument/2006/relationships">
+<p:sld xmlns:a="http://schemas.openxmlformats.org/drawingml/2006/main" xmlns:r="http://schemas.openxmlformats.org/officeDocument/2006/relationships" xmlns:p="http://schemas.openxmlformats.org/presentationml/2006/main">
   <p:cSld>
     <p:spTree>
       <p:nvGrpSpPr>
@@ -34186,7 +35292,14 @@
         <p:cNvGrpSpPr/>
         <p:nvPr/>
       </p:nvGrpSpPr>
-      <p:grpSpPr/>
+      <p:grpSpPr>
+        <a:xfrm>
+          <a:off x="0" y="0"/>
+          <a:ext cx="0" cy="0"/>
+          <a:chOff x="0" y="0"/>
+          <a:chExt cx="0" cy="0"/>
+        </a:xfrm>
+      </p:grpSpPr>
       <p:sp>
         <p:nvSpPr>
           <p:cNvPr id="2" name="TextBox 1"/>
@@ -34269,7 +35382,7 @@
 </file>
 
 <file path=ppt/slides/slide9.xml><?xml version="1.0" encoding="utf-8"?>
-<p:sld xmlns:a="http://schemas.openxmlformats.org/drawingml/2006/main" xmlns:p="http://schemas.openxmlformats.org/presentationml/2006/main" xmlns:r="http://schemas.openxmlformats.org/officeDocument/2006/relationships">
+<p:sld xmlns:a="http://schemas.openxmlformats.org/drawingml/2006/main" xmlns:r="http://schemas.openxmlformats.org/officeDocument/2006/relationships" xmlns:p="http://schemas.openxmlformats.org/presentationml/2006/main">
   <p:cSld>
     <p:spTree>
       <p:nvGrpSpPr>
@@ -34277,7 +35390,14 @@
         <p:cNvGrpSpPr/>
         <p:nvPr/>
       </p:nvGrpSpPr>
-      <p:grpSpPr/>
+      <p:grpSpPr>
+        <a:xfrm>
+          <a:off x="0" y="0"/>
+          <a:ext cx="0" cy="0"/>
+          <a:chOff x="0" y="0"/>
+          <a:chExt cx="0" cy="0"/>
+        </a:xfrm>
+      </p:grpSpPr>
       <p:sp>
         <p:nvSpPr>
           <p:cNvPr id="2" name="TextBox 1"/>
@@ -34351,7 +35471,7 @@
           </a:fontRef>
         </p:style>
         <p:txBody>
-          <a:bodyPr rtlCol="0" anchor="ctr" wrap="none" lIns="228600" tIns="137160"/>
+          <a:bodyPr wrap="none" lIns="228600" tIns="137160" rtlCol="0" anchor="ctr"/>
           <a:lstStyle/>
           <a:p>
             <a:pPr algn="l"/>
@@ -34786,44 +35906,44 @@
         <a:sysClr val="window" lastClr="FFFFFF"/>
       </a:lt1>
       <a:dk2>
-        <a:srgbClr val="1F497D"/>
+        <a:srgbClr val="0E2841"/>
       </a:dk2>
       <a:lt2>
-        <a:srgbClr val="EEECE1"/>
+        <a:srgbClr val="E8E8E8"/>
       </a:lt2>
       <a:accent1>
-        <a:srgbClr val="4F81BD"/>
+        <a:srgbClr val="156082"/>
       </a:accent1>
       <a:accent2>
-        <a:srgbClr val="C0504D"/>
+        <a:srgbClr val="E97132"/>
       </a:accent2>
       <a:accent3>
-        <a:srgbClr val="9BBB59"/>
+        <a:srgbClr val="196B24"/>
       </a:accent3>
       <a:accent4>
-        <a:srgbClr val="8064A2"/>
+        <a:srgbClr val="0F9ED5"/>
       </a:accent4>
       <a:accent5>
-        <a:srgbClr val="4BACC6"/>
+        <a:srgbClr val="A02B93"/>
       </a:accent5>
       <a:accent6>
-        <a:srgbClr val="F79646"/>
+        <a:srgbClr val="4EA72E"/>
       </a:accent6>
       <a:hlink>
-        <a:srgbClr val="0000FF"/>
+        <a:srgbClr val="467886"/>
       </a:hlink>
       <a:folHlink>
-        <a:srgbClr val="800080"/>
+        <a:srgbClr val="96607D"/>
       </a:folHlink>
     </a:clrScheme>
     <a:fontScheme name="Office">
       <a:majorFont>
-        <a:latin typeface="Calibri"/>
+        <a:latin typeface="Aptos Display" panose="02110004020202020204"/>
         <a:ea typeface=""/>
         <a:cs typeface=""/>
-        <a:font script="Jpan" typeface="ＭＳ Ｐゴシック"/>
+        <a:font script="Jpan" typeface="游ゴシック Light"/>
         <a:font script="Hang" typeface="맑은 고딕"/>
-        <a:font script="Hans" typeface="宋体"/>
+        <a:font script="Hans" typeface="等线 Light"/>
         <a:font script="Hant" typeface="新細明體"/>
         <a:font script="Arab" typeface="Times New Roman"/>
         <a:font script="Hebr" typeface="Times New Roman"/>
@@ -34851,14 +35971,31 @@
         <a:font script="Viet" typeface="Times New Roman"/>
         <a:font script="Uigh" typeface="Microsoft Uighur"/>
         <a:font script="Geor" typeface="Sylfaen"/>
+        <a:font script="Armn" typeface="Arial"/>
+        <a:font script="Bugi" typeface="Leelawadee UI"/>
+        <a:font script="Bopo" typeface="Microsoft JhengHei"/>
+        <a:font script="Java" typeface="Javanese Text"/>
+        <a:font script="Lisu" typeface="Segoe UI"/>
+        <a:font script="Mymr" typeface="Myanmar Text"/>
+        <a:font script="Nkoo" typeface="Ebrima"/>
+        <a:font script="Olck" typeface="Nirmala UI"/>
+        <a:font script="Osma" typeface="Ebrima"/>
+        <a:font script="Phag" typeface="Phagspa"/>
+        <a:font script="Syrn" typeface="Estrangelo Edessa"/>
+        <a:font script="Syrj" typeface="Estrangelo Edessa"/>
+        <a:font script="Syre" typeface="Estrangelo Edessa"/>
+        <a:font script="Sora" typeface="Nirmala UI"/>
+        <a:font script="Tale" typeface="Microsoft Tai Le"/>
+        <a:font script="Talu" typeface="Microsoft New Tai Lue"/>
+        <a:font script="Tfng" typeface="Ebrima"/>
       </a:majorFont>
       <a:minorFont>
-        <a:latin typeface="Calibri"/>
+        <a:latin typeface="Aptos" panose="02110004020202020204"/>
         <a:ea typeface=""/>
         <a:cs typeface=""/>
-        <a:font script="Jpan" typeface="ＭＳ Ｐゴシック"/>
+        <a:font script="Jpan" typeface="游ゴシック"/>
         <a:font script="Hang" typeface="맑은 고딕"/>
-        <a:font script="Hans" typeface="宋体"/>
+        <a:font script="Hans" typeface="等线"/>
         <a:font script="Hant" typeface="新細明體"/>
         <a:font script="Arab" typeface="Arial"/>
         <a:font script="Hebr" typeface="Arial"/>
@@ -34886,6 +36023,23 @@
         <a:font script="Viet" typeface="Arial"/>
         <a:font script="Uigh" typeface="Microsoft Uighur"/>
         <a:font script="Geor" typeface="Sylfaen"/>
+        <a:font script="Armn" typeface="Arial"/>
+        <a:font script="Bugi" typeface="Leelawadee UI"/>
+        <a:font script="Bopo" typeface="Microsoft JhengHei"/>
+        <a:font script="Java" typeface="Javanese Text"/>
+        <a:font script="Lisu" typeface="Segoe UI"/>
+        <a:font script="Mymr" typeface="Myanmar Text"/>
+        <a:font script="Nkoo" typeface="Ebrima"/>
+        <a:font script="Olck" typeface="Nirmala UI"/>
+        <a:font script="Osma" typeface="Ebrima"/>
+        <a:font script="Phag" typeface="Phagspa"/>
+        <a:font script="Syrn" typeface="Estrangelo Edessa"/>
+        <a:font script="Syrj" typeface="Estrangelo Edessa"/>
+        <a:font script="Syre" typeface="Estrangelo Edessa"/>
+        <a:font script="Sora" typeface="Nirmala UI"/>
+        <a:font script="Tale" typeface="Microsoft Tai Le"/>
+        <a:font script="Talu" typeface="Microsoft New Tai Lue"/>
+        <a:font script="Tfng" typeface="Ebrima"/>
       </a:minorFont>
     </a:fontScheme>
     <a:fmtScheme name="Office">
@@ -34897,180 +36051,136 @@
           <a:gsLst>
             <a:gs pos="0">
               <a:schemeClr val="phClr">
-                <a:tint val="50000"/>
-                <a:satMod val="300000"/>
+                <a:lumMod val="110000"/>
+                <a:satMod val="105000"/>
+                <a:tint val="67000"/>
               </a:schemeClr>
             </a:gs>
-            <a:gs pos="35000">
+            <a:gs pos="50000">
               <a:schemeClr val="phClr">
-                <a:tint val="37000"/>
-                <a:satMod val="300000"/>
+                <a:lumMod val="105000"/>
+                <a:satMod val="103000"/>
+                <a:tint val="73000"/>
               </a:schemeClr>
             </a:gs>
             <a:gs pos="100000">
               <a:schemeClr val="phClr">
-                <a:tint val="15000"/>
-                <a:satMod val="350000"/>
+                <a:lumMod val="105000"/>
+                <a:satMod val="109000"/>
+                <a:tint val="81000"/>
               </a:schemeClr>
             </a:gs>
           </a:gsLst>
-          <a:lin ang="16200000" scaled="1"/>
+          <a:lin ang="5400000" scaled="0"/>
         </a:gradFill>
         <a:gradFill rotWithShape="1">
           <a:gsLst>
             <a:gs pos="0">
               <a:schemeClr val="phClr">
-                <a:tint val="100000"/>
+                <a:satMod val="103000"/>
+                <a:lumMod val="102000"/>
+                <a:tint val="94000"/>
+              </a:schemeClr>
+            </a:gs>
+            <a:gs pos="50000">
+              <a:schemeClr val="phClr">
+                <a:satMod val="110000"/>
+                <a:lumMod val="100000"/>
                 <a:shade val="100000"/>
-                <a:satMod val="130000"/>
               </a:schemeClr>
             </a:gs>
             <a:gs pos="100000">
               <a:schemeClr val="phClr">
-                <a:tint val="50000"/>
-                <a:shade val="100000"/>
-                <a:satMod val="350000"/>
+                <a:lumMod val="99000"/>
+                <a:satMod val="120000"/>
+                <a:shade val="78000"/>
               </a:schemeClr>
             </a:gs>
           </a:gsLst>
-          <a:lin ang="16200000" scaled="0"/>
+          <a:lin ang="5400000" scaled="0"/>
         </a:gradFill>
       </a:fillStyleLst>
       <a:lnStyleLst>
-        <a:ln w="9525" cap="flat" cmpd="sng" algn="ctr">
+        <a:ln w="12700" cap="flat" cmpd="sng" algn="ctr">
           <a:solidFill>
-            <a:schemeClr val="phClr">
-              <a:shade val="95000"/>
-              <a:satMod val="105000"/>
-            </a:schemeClr>
+            <a:schemeClr val="phClr"/>
           </a:solidFill>
           <a:prstDash val="solid"/>
+          <a:miter lim="800000"/>
+        </a:ln>
+        <a:ln w="19050" cap="flat" cmpd="sng" algn="ctr">
+          <a:solidFill>
+            <a:schemeClr val="phClr"/>
+          </a:solidFill>
+          <a:prstDash val="solid"/>
+          <a:miter lim="800000"/>
         </a:ln>
         <a:ln w="25400" cap="flat" cmpd="sng" algn="ctr">
           <a:solidFill>
             <a:schemeClr val="phClr"/>
           </a:solidFill>
           <a:prstDash val="solid"/>
-        </a:ln>
-        <a:ln w="38100" cap="flat" cmpd="sng" algn="ctr">
-          <a:solidFill>
-            <a:schemeClr val="phClr"/>
-          </a:solidFill>
-          <a:prstDash val="solid"/>
+          <a:miter lim="800000"/>
         </a:ln>
       </a:lnStyleLst>
       <a:effectStyleLst>
         <a:effectStyle>
+          <a:effectLst/>
+        </a:effectStyle>
+        <a:effectStyle>
+          <a:effectLst/>
+        </a:effectStyle>
+        <a:effectStyle>
           <a:effectLst>
-            <a:outerShdw blurRad="40000" dist="20000" dir="5400000" rotWithShape="0">
+            <a:outerShdw blurRad="57150" dist="19050" dir="5400000" algn="ctr" rotWithShape="0">
               <a:srgbClr val="000000">
-                <a:alpha val="38000"/>
+                <a:alpha val="63000"/>
               </a:srgbClr>
             </a:outerShdw>
           </a:effectLst>
-        </a:effectStyle>
-        <a:effectStyle>
-          <a:effectLst>
-            <a:outerShdw blurRad="40000" dist="23000" dir="5400000" rotWithShape="0">
-              <a:srgbClr val="000000">
-                <a:alpha val="35000"/>
-              </a:srgbClr>
-            </a:outerShdw>
-          </a:effectLst>
-        </a:effectStyle>
-        <a:effectStyle>
-          <a:effectLst>
-            <a:outerShdw blurRad="40000" dist="23000" dir="5400000" rotWithShape="0">
-              <a:srgbClr val="000000">
-                <a:alpha val="35000"/>
-              </a:srgbClr>
-            </a:outerShdw>
-          </a:effectLst>
-          <a:scene3d>
-            <a:camera prst="orthographicFront">
-              <a:rot lat="0" lon="0" rev="0"/>
-            </a:camera>
-            <a:lightRig rig="threePt" dir="t">
-              <a:rot lat="0" lon="0" rev="1200000"/>
-            </a:lightRig>
-          </a:scene3d>
-          <a:sp3d>
-            <a:bevelT w="63500" h="25400"/>
-          </a:sp3d>
         </a:effectStyle>
       </a:effectStyleLst>
       <a:bgFillStyleLst>
         <a:solidFill>
           <a:schemeClr val="phClr"/>
         </a:solidFill>
+        <a:solidFill>
+          <a:schemeClr val="phClr">
+            <a:tint val="95000"/>
+            <a:satMod val="170000"/>
+          </a:schemeClr>
+        </a:solidFill>
         <a:gradFill rotWithShape="1">
           <a:gsLst>
             <a:gs pos="0">
               <a:schemeClr val="phClr">
-                <a:tint val="40000"/>
-                <a:satMod val="350000"/>
+                <a:tint val="93000"/>
+                <a:satMod val="150000"/>
+                <a:shade val="98000"/>
+                <a:lumMod val="102000"/>
               </a:schemeClr>
             </a:gs>
-            <a:gs pos="40000">
+            <a:gs pos="50000">
               <a:schemeClr val="phClr">
-                <a:tint val="45000"/>
-                <a:shade val="99000"/>
-                <a:satMod val="350000"/>
+                <a:tint val="98000"/>
+                <a:satMod val="130000"/>
+                <a:shade val="90000"/>
+                <a:lumMod val="103000"/>
               </a:schemeClr>
             </a:gs>
             <a:gs pos="100000">
               <a:schemeClr val="phClr">
-                <a:shade val="20000"/>
-                <a:satMod val="255000"/>
+                <a:shade val="63000"/>
+                <a:satMod val="120000"/>
               </a:schemeClr>
             </a:gs>
           </a:gsLst>
-          <a:path path="circle">
-            <a:fillToRect l="50000" t="-80000" r="50000" b="180000"/>
-          </a:path>
-        </a:gradFill>
-        <a:gradFill rotWithShape="1">
-          <a:gsLst>
-            <a:gs pos="0">
-              <a:schemeClr val="phClr">
-                <a:tint val="80000"/>
-                <a:satMod val="300000"/>
-              </a:schemeClr>
-            </a:gs>
-            <a:gs pos="100000">
-              <a:schemeClr val="phClr">
-                <a:shade val="30000"/>
-                <a:satMod val="200000"/>
-              </a:schemeClr>
-            </a:gs>
-          </a:gsLst>
-          <a:path path="circle">
-            <a:fillToRect l="50000" t="50000" r="50000" b="50000"/>
-          </a:path>
+          <a:lin ang="5400000" scaled="0"/>
         </a:gradFill>
       </a:bgFillStyleLst>
     </a:fmtScheme>
   </a:themeElements>
   <a:objectDefaults>
-    <a:spDef>
-      <a:spPr/>
-      <a:bodyPr/>
-      <a:lstStyle/>
-      <a:style>
-        <a:lnRef idx="1">
-          <a:schemeClr val="accent1"/>
-        </a:lnRef>
-        <a:fillRef idx="3">
-          <a:schemeClr val="accent1"/>
-        </a:fillRef>
-        <a:effectRef idx="2">
-          <a:schemeClr val="accent1"/>
-        </a:effectRef>
-        <a:fontRef idx="minor">
-          <a:schemeClr val="lt1"/>
-        </a:fontRef>
-      </a:style>
-    </a:spDef>
     <a:lnDef>
       <a:spPr/>
       <a:bodyPr/>
@@ -35092,5 +36202,10 @@
     </a:lnDef>
   </a:objectDefaults>
   <a:extraClrSchemeLst/>
+  <a:extLst>
+    <a:ext uri="{05A4C25C-085E-4340-85A3-A5531E510DB2}">
+      <thm15:themeFamily xmlns:thm15="http://schemas.microsoft.com/office/thememl/2012/main" name="Office Theme" id="{2E142A2C-CD16-42D6-873A-C26D2A0506FA}" vid="{1BDDFF52-6CD6-40A5-AB3C-68EB2F1E4D0A}"/>
+    </a:ext>
+  </a:extLst>
 </a:theme>
 </file>